--- a/第3章-星载雷达测高应用-12学时/第2节-星载雷达测高数据处理-4学时.pptx
+++ b/第3章-星载雷达测高应用-12学时/第2节-星载雷达测高数据处理-4学时.pptx
@@ -444,2673 +444,6 @@
 <file path=ppt/changesInfos/changesInfo1.xml><?xml version="1.0" encoding="utf-8"?>
 <pc:chgInfo xmlns:a="http://schemas.openxmlformats.org/drawingml/2006/main" xmlns:r="http://schemas.openxmlformats.org/officeDocument/2006/relationships" xmlns:ac="http://schemas.microsoft.com/office/drawing/2013/main/command" xmlns:pc="http://schemas.microsoft.com/office/powerpoint/2013/main/command">
   <pc:docChgLst>
-    <pc:chgData name="Xin Luo" userId="82312ee5779919a4" providerId="LiveId" clId="{4DB6C473-8E57-A543-81F7-48BE109E8C13}"/>
-    <pc:docChg chg="undo custSel addSld delSld modSld sldOrd delMainMaster">
-      <pc:chgData name="Xin Luo" userId="82312ee5779919a4" providerId="LiveId" clId="{4DB6C473-8E57-A543-81F7-48BE109E8C13}" dt="2023-02-21T15:10:04.498" v="5724" actId="108"/>
-      <pc:docMkLst>
-        <pc:docMk/>
-      </pc:docMkLst>
-      <pc:sldChg chg="addSp delSp modSp mod">
-        <pc:chgData name="Xin Luo" userId="82312ee5779919a4" providerId="LiveId" clId="{4DB6C473-8E57-A543-81F7-48BE109E8C13}" dt="2023-02-21T08:54:32.554" v="3595" actId="1076"/>
-        <pc:sldMkLst>
-          <pc:docMk/>
-          <pc:sldMk cId="1576120367" sldId="2387"/>
-        </pc:sldMkLst>
-        <pc:spChg chg="add del mod">
-          <ac:chgData name="Xin Luo" userId="82312ee5779919a4" providerId="LiveId" clId="{4DB6C473-8E57-A543-81F7-48BE109E8C13}" dt="2023-02-21T05:44:22.831" v="2010"/>
-          <ac:spMkLst>
-            <pc:docMk/>
-            <pc:sldMk cId="1576120367" sldId="2387"/>
-            <ac:spMk id="4" creationId="{14071939-13A8-68AD-CF24-E66618C9CB95}"/>
-          </ac:spMkLst>
-        </pc:spChg>
-        <pc:spChg chg="add del">
-          <ac:chgData name="Xin Luo" userId="82312ee5779919a4" providerId="LiveId" clId="{4DB6C473-8E57-A543-81F7-48BE109E8C13}" dt="2023-02-21T05:42:59.400" v="1996" actId="478"/>
-          <ac:spMkLst>
-            <pc:docMk/>
-            <pc:sldMk cId="1576120367" sldId="2387"/>
-            <ac:spMk id="6" creationId="{00000000-0000-0000-0000-000000000000}"/>
-          </ac:spMkLst>
-        </pc:spChg>
-        <pc:spChg chg="del">
-          <ac:chgData name="Xin Luo" userId="82312ee5779919a4" providerId="LiveId" clId="{4DB6C473-8E57-A543-81F7-48BE109E8C13}" dt="2023-02-21T05:42:53.918" v="1994" actId="478"/>
-          <ac:spMkLst>
-            <pc:docMk/>
-            <pc:sldMk cId="1576120367" sldId="2387"/>
-            <ac:spMk id="7" creationId="{00000000-0000-0000-0000-000000000000}"/>
-          </ac:spMkLst>
-        </pc:spChg>
-        <pc:spChg chg="add del mod">
-          <ac:chgData name="Xin Luo" userId="82312ee5779919a4" providerId="LiveId" clId="{4DB6C473-8E57-A543-81F7-48BE109E8C13}" dt="2023-02-21T05:46:39.935" v="2038" actId="478"/>
-          <ac:spMkLst>
-            <pc:docMk/>
-            <pc:sldMk cId="1576120367" sldId="2387"/>
-            <ac:spMk id="8" creationId="{5795B555-5780-95D6-6939-E2A2F840CEDB}"/>
-          </ac:spMkLst>
-        </pc:spChg>
-        <pc:spChg chg="add del mod topLvl">
-          <ac:chgData name="Xin Luo" userId="82312ee5779919a4" providerId="LiveId" clId="{4DB6C473-8E57-A543-81F7-48BE109E8C13}" dt="2023-02-21T05:47:15.440" v="2044" actId="164"/>
-          <ac:spMkLst>
-            <pc:docMk/>
-            <pc:sldMk cId="1576120367" sldId="2387"/>
-            <ac:spMk id="10" creationId="{00000000-0000-0000-0000-000000000000}"/>
-          </ac:spMkLst>
-        </pc:spChg>
-        <pc:spChg chg="mod topLvl">
-          <ac:chgData name="Xin Luo" userId="82312ee5779919a4" providerId="LiveId" clId="{4DB6C473-8E57-A543-81F7-48BE109E8C13}" dt="2023-02-21T05:47:15.440" v="2044" actId="164"/>
-          <ac:spMkLst>
-            <pc:docMk/>
-            <pc:sldMk cId="1576120367" sldId="2387"/>
-            <ac:spMk id="12" creationId="{00000000-0000-0000-0000-000000000000}"/>
-          </ac:spMkLst>
-        </pc:spChg>
-        <pc:spChg chg="mod">
-          <ac:chgData name="Xin Luo" userId="82312ee5779919a4" providerId="LiveId" clId="{4DB6C473-8E57-A543-81F7-48BE109E8C13}" dt="2023-02-21T05:45:26.754" v="2016" actId="207"/>
-          <ac:spMkLst>
-            <pc:docMk/>
-            <pc:sldMk cId="1576120367" sldId="2387"/>
-            <ac:spMk id="13" creationId="{00000000-0000-0000-0000-000000000000}"/>
-          </ac:spMkLst>
-        </pc:spChg>
-        <pc:spChg chg="mod">
-          <ac:chgData name="Xin Luo" userId="82312ee5779919a4" providerId="LiveId" clId="{4DB6C473-8E57-A543-81F7-48BE109E8C13}" dt="2023-02-21T05:45:26.754" v="2016" actId="207"/>
-          <ac:spMkLst>
-            <pc:docMk/>
-            <pc:sldMk cId="1576120367" sldId="2387"/>
-            <ac:spMk id="14" creationId="{00000000-0000-0000-0000-000000000000}"/>
-          </ac:spMkLst>
-        </pc:spChg>
-        <pc:spChg chg="mod">
-          <ac:chgData name="Xin Luo" userId="82312ee5779919a4" providerId="LiveId" clId="{4DB6C473-8E57-A543-81F7-48BE109E8C13}" dt="2023-02-21T05:45:26.754" v="2016" actId="207"/>
-          <ac:spMkLst>
-            <pc:docMk/>
-            <pc:sldMk cId="1576120367" sldId="2387"/>
-            <ac:spMk id="15" creationId="{00000000-0000-0000-0000-000000000000}"/>
-          </ac:spMkLst>
-        </pc:spChg>
-        <pc:spChg chg="mod">
-          <ac:chgData name="Xin Luo" userId="82312ee5779919a4" providerId="LiveId" clId="{4DB6C473-8E57-A543-81F7-48BE109E8C13}" dt="2023-02-21T05:45:26.754" v="2016" actId="207"/>
-          <ac:spMkLst>
-            <pc:docMk/>
-            <pc:sldMk cId="1576120367" sldId="2387"/>
-            <ac:spMk id="16" creationId="{00000000-0000-0000-0000-000000000000}"/>
-          </ac:spMkLst>
-        </pc:spChg>
-        <pc:grpChg chg="add del mod">
-          <ac:chgData name="Xin Luo" userId="82312ee5779919a4" providerId="LiveId" clId="{4DB6C473-8E57-A543-81F7-48BE109E8C13}" dt="2023-02-21T08:54:26.670" v="3594" actId="478"/>
-          <ac:grpSpMkLst>
-            <pc:docMk/>
-            <pc:sldMk cId="1576120367" sldId="2387"/>
-            <ac:grpSpMk id="2" creationId="{390AEDC4-AC8C-713C-F926-259F989CB162}"/>
-          </ac:grpSpMkLst>
-        </pc:grpChg>
-        <pc:grpChg chg="add mod">
-          <ac:chgData name="Xin Luo" userId="82312ee5779919a4" providerId="LiveId" clId="{4DB6C473-8E57-A543-81F7-48BE109E8C13}" dt="2023-02-21T08:54:32.554" v="3595" actId="1076"/>
-          <ac:grpSpMkLst>
-            <pc:docMk/>
-            <pc:sldMk cId="1576120367" sldId="2387"/>
-            <ac:grpSpMk id="3" creationId="{12ED16A1-79B8-7DB1-1CC1-250B051BAD58}"/>
-          </ac:grpSpMkLst>
-        </pc:grpChg>
-        <pc:grpChg chg="add del mod">
-          <ac:chgData name="Xin Luo" userId="82312ee5779919a4" providerId="LiveId" clId="{4DB6C473-8E57-A543-81F7-48BE109E8C13}" dt="2023-02-21T05:45:51.755" v="2019" actId="165"/>
-          <ac:grpSpMkLst>
-            <pc:docMk/>
-            <pc:sldMk cId="1576120367" sldId="2387"/>
-            <ac:grpSpMk id="5" creationId="{8F30E2E3-F8BB-EDF1-8726-1256D1547BF7}"/>
-          </ac:grpSpMkLst>
-        </pc:grpChg>
-        <pc:grpChg chg="add mod">
-          <ac:chgData name="Xin Luo" userId="82312ee5779919a4" providerId="LiveId" clId="{4DB6C473-8E57-A543-81F7-48BE109E8C13}" dt="2023-02-21T08:54:32.554" v="3595" actId="1076"/>
-          <ac:grpSpMkLst>
-            <pc:docMk/>
-            <pc:sldMk cId="1576120367" sldId="2387"/>
-            <ac:grpSpMk id="9" creationId="{84B9B8D5-4BCC-CDFF-1E13-B005060A8BDF}"/>
-          </ac:grpSpMkLst>
-        </pc:grpChg>
-      </pc:sldChg>
-      <pc:sldChg chg="del">
-        <pc:chgData name="Xin Luo" userId="82312ee5779919a4" providerId="LiveId" clId="{4DB6C473-8E57-A543-81F7-48BE109E8C13}" dt="2023-02-21T08:54:15.767" v="3575" actId="2696"/>
-        <pc:sldMkLst>
-          <pc:docMk/>
-          <pc:sldMk cId="0" sldId="2446"/>
-        </pc:sldMkLst>
-      </pc:sldChg>
-      <pc:sldChg chg="modSp mod ord">
-        <pc:chgData name="Xin Luo" userId="82312ee5779919a4" providerId="LiveId" clId="{4DB6C473-8E57-A543-81F7-48BE109E8C13}" dt="2023-02-21T06:59:18.091" v="3225" actId="20578"/>
-        <pc:sldMkLst>
-          <pc:docMk/>
-          <pc:sldMk cId="2415901206" sldId="2447"/>
-        </pc:sldMkLst>
-        <pc:spChg chg="mod">
-          <ac:chgData name="Xin Luo" userId="82312ee5779919a4" providerId="LiveId" clId="{4DB6C473-8E57-A543-81F7-48BE109E8C13}" dt="2023-02-21T03:26:36.249" v="1977" actId="20577"/>
-          <ac:spMkLst>
-            <pc:docMk/>
-            <pc:sldMk cId="2415901206" sldId="2447"/>
-            <ac:spMk id="7" creationId="{00000000-0000-0000-0000-000000000000}"/>
-          </ac:spMkLst>
-        </pc:spChg>
-      </pc:sldChg>
-      <pc:sldChg chg="addSp delSp modSp mod ord">
-        <pc:chgData name="Xin Luo" userId="82312ee5779919a4" providerId="LiveId" clId="{4DB6C473-8E57-A543-81F7-48BE109E8C13}" dt="2023-02-21T07:23:56.843" v="3356" actId="20577"/>
-        <pc:sldMkLst>
-          <pc:docMk/>
-          <pc:sldMk cId="4067577602" sldId="2605"/>
-        </pc:sldMkLst>
-        <pc:spChg chg="mod">
-          <ac:chgData name="Xin Luo" userId="82312ee5779919a4" providerId="LiveId" clId="{4DB6C473-8E57-A543-81F7-48BE109E8C13}" dt="2023-02-21T07:23:56.843" v="3356" actId="20577"/>
-          <ac:spMkLst>
-            <pc:docMk/>
-            <pc:sldMk cId="4067577602" sldId="2605"/>
-            <ac:spMk id="2" creationId="{631AADB6-C88A-D817-4683-FC087E4E240F}"/>
-          </ac:spMkLst>
-        </pc:spChg>
-        <pc:spChg chg="mod">
-          <ac:chgData name="Xin Luo" userId="82312ee5779919a4" providerId="LiveId" clId="{4DB6C473-8E57-A543-81F7-48BE109E8C13}" dt="2023-02-21T03:26:50.232" v="1984" actId="20577"/>
-          <ac:spMkLst>
-            <pc:docMk/>
-            <pc:sldMk cId="4067577602" sldId="2605"/>
-            <ac:spMk id="3" creationId="{00000000-0000-0000-0000-000000000000}"/>
-          </ac:spMkLst>
-        </pc:spChg>
-        <pc:spChg chg="add del mod">
-          <ac:chgData name="Xin Luo" userId="82312ee5779919a4" providerId="LiveId" clId="{4DB6C473-8E57-A543-81F7-48BE109E8C13}" dt="2023-02-21T07:21:29.220" v="3297"/>
-          <ac:spMkLst>
-            <pc:docMk/>
-            <pc:sldMk cId="4067577602" sldId="2605"/>
-            <ac:spMk id="4" creationId="{6043EA4A-1AB3-028D-434C-C16CE58B3A2A}"/>
-          </ac:spMkLst>
-        </pc:spChg>
-        <pc:spChg chg="add mod">
-          <ac:chgData name="Xin Luo" userId="82312ee5779919a4" providerId="LiveId" clId="{4DB6C473-8E57-A543-81F7-48BE109E8C13}" dt="2023-02-21T07:23:29.335" v="3346" actId="1076"/>
-          <ac:spMkLst>
-            <pc:docMk/>
-            <pc:sldMk cId="4067577602" sldId="2605"/>
-            <ac:spMk id="5" creationId="{8CB3051E-1455-F2D6-027A-C359D1264B18}"/>
-          </ac:spMkLst>
-        </pc:spChg>
-        <pc:spChg chg="del">
-          <ac:chgData name="Xin Luo" userId="82312ee5779919a4" providerId="LiveId" clId="{4DB6C473-8E57-A543-81F7-48BE109E8C13}" dt="2023-02-21T05:48:10.681" v="2114" actId="478"/>
-          <ac:spMkLst>
-            <pc:docMk/>
-            <pc:sldMk cId="4067577602" sldId="2605"/>
-            <ac:spMk id="15" creationId="{32C45697-89D7-5F4B-C2BC-3A7FBC2C544B}"/>
-          </ac:spMkLst>
-        </pc:spChg>
-        <pc:spChg chg="mod">
-          <ac:chgData name="Xin Luo" userId="82312ee5779919a4" providerId="LiveId" clId="{4DB6C473-8E57-A543-81F7-48BE109E8C13}" dt="2023-02-21T07:11:29.463" v="3277" actId="2710"/>
-          <ac:spMkLst>
-            <pc:docMk/>
-            <pc:sldMk cId="4067577602" sldId="2605"/>
-            <ac:spMk id="17" creationId="{9E05FFCA-3371-AF5C-381D-71D984055F5A}"/>
-          </ac:spMkLst>
-        </pc:spChg>
-        <pc:picChg chg="del">
-          <ac:chgData name="Xin Luo" userId="82312ee5779919a4" providerId="LiveId" clId="{4DB6C473-8E57-A543-81F7-48BE109E8C13}" dt="2023-02-21T05:48:06.479" v="2112" actId="478"/>
-          <ac:picMkLst>
-            <pc:docMk/>
-            <pc:sldMk cId="4067577602" sldId="2605"/>
-            <ac:picMk id="10" creationId="{492CAE81-3897-13BB-6E5A-74F2AC5F581A}"/>
-          </ac:picMkLst>
-        </pc:picChg>
-        <pc:picChg chg="del">
-          <ac:chgData name="Xin Luo" userId="82312ee5779919a4" providerId="LiveId" clId="{4DB6C473-8E57-A543-81F7-48BE109E8C13}" dt="2023-02-21T05:48:08.245" v="2113" actId="478"/>
-          <ac:picMkLst>
-            <pc:docMk/>
-            <pc:sldMk cId="4067577602" sldId="2605"/>
-            <ac:picMk id="14" creationId="{0637D38F-D0BE-5E7D-7891-2D7FAA4B4ED9}"/>
-          </ac:picMkLst>
-        </pc:picChg>
-        <pc:picChg chg="add mod">
-          <ac:chgData name="Xin Luo" userId="82312ee5779919a4" providerId="LiveId" clId="{4DB6C473-8E57-A543-81F7-48BE109E8C13}" dt="2023-02-21T07:23:29.335" v="3346" actId="1076"/>
-          <ac:picMkLst>
-            <pc:docMk/>
-            <pc:sldMk cId="4067577602" sldId="2605"/>
-            <ac:picMk id="1026" creationId="{9270A6EE-B03E-77C5-630F-E811251395A0}"/>
-          </ac:picMkLst>
-        </pc:picChg>
-      </pc:sldChg>
-      <pc:sldChg chg="del">
-        <pc:chgData name="Xin Luo" userId="82312ee5779919a4" providerId="LiveId" clId="{4DB6C473-8E57-A543-81F7-48BE109E8C13}" dt="2023-02-21T14:49:50.253" v="5372" actId="2696"/>
-        <pc:sldMkLst>
-          <pc:docMk/>
-          <pc:sldMk cId="963926578" sldId="2613"/>
-        </pc:sldMkLst>
-      </pc:sldChg>
-      <pc:sldChg chg="del">
-        <pc:chgData name="Xin Luo" userId="82312ee5779919a4" providerId="LiveId" clId="{4DB6C473-8E57-A543-81F7-48BE109E8C13}" dt="2023-02-21T14:49:50.286" v="5373" actId="2696"/>
-        <pc:sldMkLst>
-          <pc:docMk/>
-          <pc:sldMk cId="1377829391" sldId="2689"/>
-        </pc:sldMkLst>
-      </pc:sldChg>
-      <pc:sldChg chg="del">
-        <pc:chgData name="Xin Luo" userId="82312ee5779919a4" providerId="LiveId" clId="{4DB6C473-8E57-A543-81F7-48BE109E8C13}" dt="2023-02-21T14:49:50.299" v="5374" actId="2696"/>
-        <pc:sldMkLst>
-          <pc:docMk/>
-          <pc:sldMk cId="2843640805" sldId="2704"/>
-        </pc:sldMkLst>
-      </pc:sldChg>
-      <pc:sldChg chg="delSp modSp add mod ord">
-        <pc:chgData name="Xin Luo" userId="82312ee5779919a4" providerId="LiveId" clId="{4DB6C473-8E57-A543-81F7-48BE109E8C13}" dt="2023-02-21T05:54:53.172" v="2328" actId="113"/>
-        <pc:sldMkLst>
-          <pc:docMk/>
-          <pc:sldMk cId="2688334957" sldId="2705"/>
-        </pc:sldMkLst>
-        <pc:spChg chg="mod">
-          <ac:chgData name="Xin Luo" userId="82312ee5779919a4" providerId="LiveId" clId="{4DB6C473-8E57-A543-81F7-48BE109E8C13}" dt="2023-02-21T03:04:15.029" v="17" actId="20577"/>
-          <ac:spMkLst>
-            <pc:docMk/>
-            <pc:sldMk cId="2688334957" sldId="2705"/>
-            <ac:spMk id="2" creationId="{631AADB6-C88A-D817-4683-FC087E4E240F}"/>
-          </ac:spMkLst>
-        </pc:spChg>
-        <pc:spChg chg="del">
-          <ac:chgData name="Xin Luo" userId="82312ee5779919a4" providerId="LiveId" clId="{4DB6C473-8E57-A543-81F7-48BE109E8C13}" dt="2023-02-21T03:04:17.351" v="18" actId="478"/>
-          <ac:spMkLst>
-            <pc:docMk/>
-            <pc:sldMk cId="2688334957" sldId="2705"/>
-            <ac:spMk id="15" creationId="{32C45697-89D7-5F4B-C2BC-3A7FBC2C544B}"/>
-          </ac:spMkLst>
-        </pc:spChg>
-        <pc:spChg chg="mod">
-          <ac:chgData name="Xin Luo" userId="82312ee5779919a4" providerId="LiveId" clId="{4DB6C473-8E57-A543-81F7-48BE109E8C13}" dt="2023-02-21T05:54:53.172" v="2328" actId="113"/>
-          <ac:spMkLst>
-            <pc:docMk/>
-            <pc:sldMk cId="2688334957" sldId="2705"/>
-            <ac:spMk id="17" creationId="{9E05FFCA-3371-AF5C-381D-71D984055F5A}"/>
-          </ac:spMkLst>
-        </pc:spChg>
-        <pc:picChg chg="del">
-          <ac:chgData name="Xin Luo" userId="82312ee5779919a4" providerId="LiveId" clId="{4DB6C473-8E57-A543-81F7-48BE109E8C13}" dt="2023-02-21T03:04:18.544" v="20" actId="478"/>
-          <ac:picMkLst>
-            <pc:docMk/>
-            <pc:sldMk cId="2688334957" sldId="2705"/>
-            <ac:picMk id="10" creationId="{492CAE81-3897-13BB-6E5A-74F2AC5F581A}"/>
-          </ac:picMkLst>
-        </pc:picChg>
-        <pc:picChg chg="del">
-          <ac:chgData name="Xin Luo" userId="82312ee5779919a4" providerId="LiveId" clId="{4DB6C473-8E57-A543-81F7-48BE109E8C13}" dt="2023-02-21T03:04:17.947" v="19" actId="478"/>
-          <ac:picMkLst>
-            <pc:docMk/>
-            <pc:sldMk cId="2688334957" sldId="2705"/>
-            <ac:picMk id="14" creationId="{0637D38F-D0BE-5E7D-7891-2D7FAA4B4ED9}"/>
-          </ac:picMkLst>
-        </pc:picChg>
-      </pc:sldChg>
-      <pc:sldChg chg="modSp add mod">
-        <pc:chgData name="Xin Luo" userId="82312ee5779919a4" providerId="LiveId" clId="{4DB6C473-8E57-A543-81F7-48BE109E8C13}" dt="2023-02-21T05:59:45.306" v="2357" actId="2711"/>
-        <pc:sldMkLst>
-          <pc:docMk/>
-          <pc:sldMk cId="2464444856" sldId="2706"/>
-        </pc:sldMkLst>
-        <pc:spChg chg="mod">
-          <ac:chgData name="Xin Luo" userId="82312ee5779919a4" providerId="LiveId" clId="{4DB6C473-8E57-A543-81F7-48BE109E8C13}" dt="2023-02-21T05:59:45.306" v="2357" actId="2711"/>
-          <ac:spMkLst>
-            <pc:docMk/>
-            <pc:sldMk cId="2464444856" sldId="2706"/>
-            <ac:spMk id="2" creationId="{631AADB6-C88A-D817-4683-FC087E4E240F}"/>
-          </ac:spMkLst>
-        </pc:spChg>
-        <pc:spChg chg="mod">
-          <ac:chgData name="Xin Luo" userId="82312ee5779919a4" providerId="LiveId" clId="{4DB6C473-8E57-A543-81F7-48BE109E8C13}" dt="2023-02-21T05:59:45.306" v="2357" actId="2711"/>
-          <ac:spMkLst>
-            <pc:docMk/>
-            <pc:sldMk cId="2464444856" sldId="2706"/>
-            <ac:spMk id="3" creationId="{00000000-0000-0000-0000-000000000000}"/>
-          </ac:spMkLst>
-        </pc:spChg>
-        <pc:spChg chg="mod">
-          <ac:chgData name="Xin Luo" userId="82312ee5779919a4" providerId="LiveId" clId="{4DB6C473-8E57-A543-81F7-48BE109E8C13}" dt="2023-02-21T05:59:45.306" v="2357" actId="2711"/>
-          <ac:spMkLst>
-            <pc:docMk/>
-            <pc:sldMk cId="2464444856" sldId="2706"/>
-            <ac:spMk id="17" creationId="{9E05FFCA-3371-AF5C-381D-71D984055F5A}"/>
-          </ac:spMkLst>
-        </pc:spChg>
-      </pc:sldChg>
-      <pc:sldChg chg="modSp add mod">
-        <pc:chgData name="Xin Luo" userId="82312ee5779919a4" providerId="LiveId" clId="{4DB6C473-8E57-A543-81F7-48BE109E8C13}" dt="2023-02-21T06:00:27.005" v="2362" actId="113"/>
-        <pc:sldMkLst>
-          <pc:docMk/>
-          <pc:sldMk cId="1602808061" sldId="2707"/>
-        </pc:sldMkLst>
-        <pc:spChg chg="mod">
-          <ac:chgData name="Xin Luo" userId="82312ee5779919a4" providerId="LiveId" clId="{4DB6C473-8E57-A543-81F7-48BE109E8C13}" dt="2023-02-21T03:16:48.798" v="1289" actId="20577"/>
-          <ac:spMkLst>
-            <pc:docMk/>
-            <pc:sldMk cId="1602808061" sldId="2707"/>
-            <ac:spMk id="2" creationId="{631AADB6-C88A-D817-4683-FC087E4E240F}"/>
-          </ac:spMkLst>
-        </pc:spChg>
-        <pc:spChg chg="mod">
-          <ac:chgData name="Xin Luo" userId="82312ee5779919a4" providerId="LiveId" clId="{4DB6C473-8E57-A543-81F7-48BE109E8C13}" dt="2023-02-21T06:00:27.005" v="2362" actId="113"/>
-          <ac:spMkLst>
-            <pc:docMk/>
-            <pc:sldMk cId="1602808061" sldId="2707"/>
-            <ac:spMk id="17" creationId="{9E05FFCA-3371-AF5C-381D-71D984055F5A}"/>
-          </ac:spMkLst>
-        </pc:spChg>
-      </pc:sldChg>
-      <pc:sldChg chg="addSp modSp add mod">
-        <pc:chgData name="Xin Luo" userId="82312ee5779919a4" providerId="LiveId" clId="{4DB6C473-8E57-A543-81F7-48BE109E8C13}" dt="2023-02-21T03:24:12.660" v="1798" actId="207"/>
-        <pc:sldMkLst>
-          <pc:docMk/>
-          <pc:sldMk cId="1658607177" sldId="2708"/>
-        </pc:sldMkLst>
-        <pc:spChg chg="add mod">
-          <ac:chgData name="Xin Luo" userId="82312ee5779919a4" providerId="LiveId" clId="{4DB6C473-8E57-A543-81F7-48BE109E8C13}" dt="2023-02-21T03:24:12.660" v="1798" actId="207"/>
-          <ac:spMkLst>
-            <pc:docMk/>
-            <pc:sldMk cId="1658607177" sldId="2708"/>
-            <ac:spMk id="3" creationId="{E375549C-74EF-2C8F-6432-2C52B803FB1B}"/>
-          </ac:spMkLst>
-        </pc:spChg>
-        <pc:spChg chg="mod">
-          <ac:chgData name="Xin Luo" userId="82312ee5779919a4" providerId="LiveId" clId="{4DB6C473-8E57-A543-81F7-48BE109E8C13}" dt="2023-02-21T03:22:03.139" v="1731" actId="20577"/>
-          <ac:spMkLst>
-            <pc:docMk/>
-            <pc:sldMk cId="1658607177" sldId="2708"/>
-            <ac:spMk id="24" creationId="{00000000-0000-0000-0000-000000000000}"/>
-          </ac:spMkLst>
-        </pc:spChg>
-        <pc:picChg chg="mod">
-          <ac:chgData name="Xin Luo" userId="82312ee5779919a4" providerId="LiveId" clId="{4DB6C473-8E57-A543-81F7-48BE109E8C13}" dt="2023-02-21T03:23:29.344" v="1786" actId="1076"/>
-          <ac:picMkLst>
-            <pc:docMk/>
-            <pc:sldMk cId="1658607177" sldId="2708"/>
-            <ac:picMk id="4" creationId="{C5A20417-E7CA-C285-EB98-9BD26873E83E}"/>
-          </ac:picMkLst>
-        </pc:picChg>
-      </pc:sldChg>
-      <pc:sldChg chg="add del setBg">
-        <pc:chgData name="Xin Luo" userId="82312ee5779919a4" providerId="LiveId" clId="{4DB6C473-8E57-A543-81F7-48BE109E8C13}" dt="2023-02-21T03:21:36.224" v="1707"/>
-        <pc:sldMkLst>
-          <pc:docMk/>
-          <pc:sldMk cId="3430641667" sldId="2708"/>
-        </pc:sldMkLst>
-      </pc:sldChg>
-      <pc:sldChg chg="modSp add mod ord">
-        <pc:chgData name="Xin Luo" userId="82312ee5779919a4" providerId="LiveId" clId="{4DB6C473-8E57-A543-81F7-48BE109E8C13}" dt="2023-02-21T07:27:15.123" v="3399" actId="20578"/>
-        <pc:sldMkLst>
-          <pc:docMk/>
-          <pc:sldMk cId="1257969106" sldId="2709"/>
-        </pc:sldMkLst>
-        <pc:spChg chg="mod">
-          <ac:chgData name="Xin Luo" userId="82312ee5779919a4" providerId="LiveId" clId="{4DB6C473-8E57-A543-81F7-48BE109E8C13}" dt="2023-02-21T05:47:38.868" v="2080" actId="20577"/>
-          <ac:spMkLst>
-            <pc:docMk/>
-            <pc:sldMk cId="1257969106" sldId="2709"/>
-            <ac:spMk id="7" creationId="{00000000-0000-0000-0000-000000000000}"/>
-          </ac:spMkLst>
-        </pc:spChg>
-      </pc:sldChg>
-      <pc:sldChg chg="add del setBg">
-        <pc:chgData name="Xin Luo" userId="82312ee5779919a4" providerId="LiveId" clId="{4DB6C473-8E57-A543-81F7-48BE109E8C13}" dt="2023-02-21T03:22:38.148" v="1735"/>
-        <pc:sldMkLst>
-          <pc:docMk/>
-          <pc:sldMk cId="2068292362" sldId="2709"/>
-        </pc:sldMkLst>
-      </pc:sldChg>
-      <pc:sldChg chg="add del setBg">
-        <pc:chgData name="Xin Luo" userId="82312ee5779919a4" providerId="LiveId" clId="{4DB6C473-8E57-A543-81F7-48BE109E8C13}" dt="2023-02-21T03:22:29.206" v="1733"/>
-        <pc:sldMkLst>
-          <pc:docMk/>
-          <pc:sldMk cId="4244071672" sldId="2709"/>
-        </pc:sldMkLst>
-      </pc:sldChg>
-      <pc:sldChg chg="modSp add del mod">
-        <pc:chgData name="Xin Luo" userId="82312ee5779919a4" providerId="LiveId" clId="{4DB6C473-8E57-A543-81F7-48BE109E8C13}" dt="2023-02-21T12:49:10.754" v="4207" actId="2696"/>
-        <pc:sldMkLst>
-          <pc:docMk/>
-          <pc:sldMk cId="4096743637" sldId="2710"/>
-        </pc:sldMkLst>
-        <pc:spChg chg="mod">
-          <ac:chgData name="Xin Luo" userId="82312ee5779919a4" providerId="LiveId" clId="{4DB6C473-8E57-A543-81F7-48BE109E8C13}" dt="2023-02-21T05:47:46.587" v="2093" actId="20577"/>
-          <ac:spMkLst>
-            <pc:docMk/>
-            <pc:sldMk cId="4096743637" sldId="2710"/>
-            <ac:spMk id="7" creationId="{00000000-0000-0000-0000-000000000000}"/>
-          </ac:spMkLst>
-        </pc:spChg>
-      </pc:sldChg>
-      <pc:sldChg chg="addSp delSp modSp add mod">
-        <pc:chgData name="Xin Luo" userId="82312ee5779919a4" providerId="LiveId" clId="{4DB6C473-8E57-A543-81F7-48BE109E8C13}" dt="2023-02-21T15:08:47.651" v="5619" actId="113"/>
-        <pc:sldMkLst>
-          <pc:docMk/>
-          <pc:sldMk cId="2744383376" sldId="2711"/>
-        </pc:sldMkLst>
-        <pc:spChg chg="mod">
-          <ac:chgData name="Xin Luo" userId="82312ee5779919a4" providerId="LiveId" clId="{4DB6C473-8E57-A543-81F7-48BE109E8C13}" dt="2023-02-21T07:01:42.969" v="3272" actId="20577"/>
-          <ac:spMkLst>
-            <pc:docMk/>
-            <pc:sldMk cId="2744383376" sldId="2711"/>
-            <ac:spMk id="2" creationId="{631AADB6-C88A-D817-4683-FC087E4E240F}"/>
-          </ac:spMkLst>
-        </pc:spChg>
-        <pc:spChg chg="add del">
-          <ac:chgData name="Xin Luo" userId="82312ee5779919a4" providerId="LiveId" clId="{4DB6C473-8E57-A543-81F7-48BE109E8C13}" dt="2023-02-21T06:08:19.635" v="2522" actId="22"/>
-          <ac:spMkLst>
-            <pc:docMk/>
-            <pc:sldMk cId="2744383376" sldId="2711"/>
-            <ac:spMk id="5" creationId="{9005BDE5-6349-121C-B95F-5D695486765F}"/>
-          </ac:spMkLst>
-        </pc:spChg>
-        <pc:spChg chg="add del mod">
-          <ac:chgData name="Xin Luo" userId="82312ee5779919a4" providerId="LiveId" clId="{4DB6C473-8E57-A543-81F7-48BE109E8C13}" dt="2023-02-21T06:36:09.199" v="3158" actId="478"/>
-          <ac:spMkLst>
-            <pc:docMk/>
-            <pc:sldMk cId="2744383376" sldId="2711"/>
-            <ac:spMk id="7" creationId="{508CFB8D-1428-2D03-7C0B-F181DD0AC3B0}"/>
-          </ac:spMkLst>
-        </pc:spChg>
-        <pc:spChg chg="add del mod">
-          <ac:chgData name="Xin Luo" userId="82312ee5779919a4" providerId="LiveId" clId="{4DB6C473-8E57-A543-81F7-48BE109E8C13}" dt="2023-02-21T06:35:09.270" v="3110" actId="478"/>
-          <ac:spMkLst>
-            <pc:docMk/>
-            <pc:sldMk cId="2744383376" sldId="2711"/>
-            <ac:spMk id="8" creationId="{FE049113-DA9A-B499-A9F7-CE696334739C}"/>
-          </ac:spMkLst>
-        </pc:spChg>
-        <pc:spChg chg="add del">
-          <ac:chgData name="Xin Luo" userId="82312ee5779919a4" providerId="LiveId" clId="{4DB6C473-8E57-A543-81F7-48BE109E8C13}" dt="2023-02-21T06:24:41.792" v="2925" actId="22"/>
-          <ac:spMkLst>
-            <pc:docMk/>
-            <pc:sldMk cId="2744383376" sldId="2711"/>
-            <ac:spMk id="10" creationId="{2A70B923-8B0E-BFB6-100F-07B5471C1335}"/>
-          </ac:spMkLst>
-        </pc:spChg>
-        <pc:spChg chg="add del mod">
-          <ac:chgData name="Xin Luo" userId="82312ee5779919a4" providerId="LiveId" clId="{4DB6C473-8E57-A543-81F7-48BE109E8C13}" dt="2023-02-21T06:36:24.547" v="3163" actId="478"/>
-          <ac:spMkLst>
-            <pc:docMk/>
-            <pc:sldMk cId="2744383376" sldId="2711"/>
-            <ac:spMk id="12" creationId="{7AC7943F-2EEF-E2BC-7188-7457E9CCE47B}"/>
-          </ac:spMkLst>
-        </pc:spChg>
-        <pc:spChg chg="add del mod">
-          <ac:chgData name="Xin Luo" userId="82312ee5779919a4" providerId="LiveId" clId="{4DB6C473-8E57-A543-81F7-48BE109E8C13}" dt="2023-02-21T06:36:21.741" v="3162" actId="478"/>
-          <ac:spMkLst>
-            <pc:docMk/>
-            <pc:sldMk cId="2744383376" sldId="2711"/>
-            <ac:spMk id="13" creationId="{4D3246D5-B603-994F-3AE4-6B8ADC01AFBD}"/>
-          </ac:spMkLst>
-        </pc:spChg>
-        <pc:spChg chg="add del mod">
-          <ac:chgData name="Xin Luo" userId="82312ee5779919a4" providerId="LiveId" clId="{4DB6C473-8E57-A543-81F7-48BE109E8C13}" dt="2023-02-21T06:34:25.015" v="3081" actId="478"/>
-          <ac:spMkLst>
-            <pc:docMk/>
-            <pc:sldMk cId="2744383376" sldId="2711"/>
-            <ac:spMk id="15" creationId="{E4EF7755-FC04-518B-64D9-6CC2D64CFD40}"/>
-          </ac:spMkLst>
-        </pc:spChg>
-        <pc:spChg chg="mod">
-          <ac:chgData name="Xin Luo" userId="82312ee5779919a4" providerId="LiveId" clId="{4DB6C473-8E57-A543-81F7-48BE109E8C13}" dt="2023-02-21T15:07:43.844" v="5615" actId="1038"/>
-          <ac:spMkLst>
-            <pc:docMk/>
-            <pc:sldMk cId="2744383376" sldId="2711"/>
-            <ac:spMk id="17" creationId="{9E05FFCA-3371-AF5C-381D-71D984055F5A}"/>
-          </ac:spMkLst>
-        </pc:spChg>
-        <pc:spChg chg="add mod">
-          <ac:chgData name="Xin Luo" userId="82312ee5779919a4" providerId="LiveId" clId="{4DB6C473-8E57-A543-81F7-48BE109E8C13}" dt="2023-02-21T15:08:47.651" v="5619" actId="113"/>
-          <ac:spMkLst>
-            <pc:docMk/>
-            <pc:sldMk cId="2744383376" sldId="2711"/>
-            <ac:spMk id="18" creationId="{9D310AF3-A081-4032-01C0-C288D4F7AC53}"/>
-          </ac:spMkLst>
-        </pc:spChg>
-      </pc:sldChg>
-      <pc:sldChg chg="delSp modSp add del mod">
-        <pc:chgData name="Xin Luo" userId="82312ee5779919a4" providerId="LiveId" clId="{4DB6C473-8E57-A543-81F7-48BE109E8C13}" dt="2023-02-21T07:27:24.620" v="3402" actId="2696"/>
-        <pc:sldMkLst>
-          <pc:docMk/>
-          <pc:sldMk cId="1581220802" sldId="2712"/>
-        </pc:sldMkLst>
-        <pc:spChg chg="mod">
-          <ac:chgData name="Xin Luo" userId="82312ee5779919a4" providerId="LiveId" clId="{4DB6C473-8E57-A543-81F7-48BE109E8C13}" dt="2023-02-21T07:01:48.402" v="3274" actId="20577"/>
-          <ac:spMkLst>
-            <pc:docMk/>
-            <pc:sldMk cId="1581220802" sldId="2712"/>
-            <ac:spMk id="2" creationId="{631AADB6-C88A-D817-4683-FC087E4E240F}"/>
-          </ac:spMkLst>
-        </pc:spChg>
-        <pc:spChg chg="mod">
-          <ac:chgData name="Xin Luo" userId="82312ee5779919a4" providerId="LiveId" clId="{4DB6C473-8E57-A543-81F7-48BE109E8C13}" dt="2023-02-21T06:58:28.109" v="3222" actId="20577"/>
-          <ac:spMkLst>
-            <pc:docMk/>
-            <pc:sldMk cId="1581220802" sldId="2712"/>
-            <ac:spMk id="3" creationId="{00000000-0000-0000-0000-000000000000}"/>
-          </ac:spMkLst>
-        </pc:spChg>
-        <pc:spChg chg="del mod">
-          <ac:chgData name="Xin Luo" userId="82312ee5779919a4" providerId="LiveId" clId="{4DB6C473-8E57-A543-81F7-48BE109E8C13}" dt="2023-02-21T07:24:25.709" v="3365"/>
-          <ac:spMkLst>
-            <pc:docMk/>
-            <pc:sldMk cId="1581220802" sldId="2712"/>
-            <ac:spMk id="17" creationId="{9E05FFCA-3371-AF5C-381D-71D984055F5A}"/>
-          </ac:spMkLst>
-        </pc:spChg>
-      </pc:sldChg>
-      <pc:sldChg chg="modSp add del mod">
-        <pc:chgData name="Xin Luo" userId="82312ee5779919a4" providerId="LiveId" clId="{4DB6C473-8E57-A543-81F7-48BE109E8C13}" dt="2023-02-21T07:24:13.066" v="3357" actId="2696"/>
-        <pc:sldMkLst>
-          <pc:docMk/>
-          <pc:sldMk cId="2395170792" sldId="2713"/>
-        </pc:sldMkLst>
-        <pc:spChg chg="mod">
-          <ac:chgData name="Xin Luo" userId="82312ee5779919a4" providerId="LiveId" clId="{4DB6C473-8E57-A543-81F7-48BE109E8C13}" dt="2023-02-21T06:15:05.106" v="2898" actId="20577"/>
-          <ac:spMkLst>
-            <pc:docMk/>
-            <pc:sldMk cId="2395170792" sldId="2713"/>
-            <ac:spMk id="17" creationId="{9E05FFCA-3371-AF5C-381D-71D984055F5A}"/>
-          </ac:spMkLst>
-        </pc:spChg>
-      </pc:sldChg>
-      <pc:sldChg chg="addSp modSp add mod">
-        <pc:chgData name="Xin Luo" userId="82312ee5779919a4" providerId="LiveId" clId="{4DB6C473-8E57-A543-81F7-48BE109E8C13}" dt="2023-02-21T07:23:52.393" v="3353" actId="20577"/>
-        <pc:sldMkLst>
-          <pc:docMk/>
-          <pc:sldMk cId="280619949" sldId="2714"/>
-        </pc:sldMkLst>
-        <pc:spChg chg="mod">
-          <ac:chgData name="Xin Luo" userId="82312ee5779919a4" providerId="LiveId" clId="{4DB6C473-8E57-A543-81F7-48BE109E8C13}" dt="2023-02-21T07:23:52.393" v="3353" actId="20577"/>
-          <ac:spMkLst>
-            <pc:docMk/>
-            <pc:sldMk cId="280619949" sldId="2714"/>
-            <ac:spMk id="2" creationId="{631AADB6-C88A-D817-4683-FC087E4E240F}"/>
-          </ac:spMkLst>
-        </pc:spChg>
-        <pc:spChg chg="mod">
-          <ac:chgData name="Xin Luo" userId="82312ee5779919a4" providerId="LiveId" clId="{4DB6C473-8E57-A543-81F7-48BE109E8C13}" dt="2023-02-21T07:13:49.998" v="3283" actId="404"/>
-          <ac:spMkLst>
-            <pc:docMk/>
-            <pc:sldMk cId="280619949" sldId="2714"/>
-            <ac:spMk id="17" creationId="{9E05FFCA-3371-AF5C-381D-71D984055F5A}"/>
-          </ac:spMkLst>
-        </pc:spChg>
-        <pc:picChg chg="add mod">
-          <ac:chgData name="Xin Luo" userId="82312ee5779919a4" providerId="LiveId" clId="{4DB6C473-8E57-A543-81F7-48BE109E8C13}" dt="2023-02-21T07:23:39.455" v="3348" actId="14100"/>
-          <ac:picMkLst>
-            <pc:docMk/>
-            <pc:sldMk cId="280619949" sldId="2714"/>
-            <ac:picMk id="5" creationId="{0604E948-208D-161C-F579-7EA72A1F42DC}"/>
-          </ac:picMkLst>
-        </pc:picChg>
-      </pc:sldChg>
-      <pc:sldChg chg="addSp modSp add mod">
-        <pc:chgData name="Xin Luo" userId="82312ee5779919a4" providerId="LiveId" clId="{4DB6C473-8E57-A543-81F7-48BE109E8C13}" dt="2023-02-21T13:47:35.461" v="4912" actId="1076"/>
-        <pc:sldMkLst>
-          <pc:docMk/>
-          <pc:sldMk cId="3852391939" sldId="2715"/>
-        </pc:sldMkLst>
-        <pc:spChg chg="mod">
-          <ac:chgData name="Xin Luo" userId="82312ee5779919a4" providerId="LiveId" clId="{4DB6C473-8E57-A543-81F7-48BE109E8C13}" dt="2023-02-21T13:06:48.362" v="4245" actId="20577"/>
-          <ac:spMkLst>
-            <pc:docMk/>
-            <pc:sldMk cId="3852391939" sldId="2715"/>
-            <ac:spMk id="2" creationId="{631AADB6-C88A-D817-4683-FC087E4E240F}"/>
-          </ac:spMkLst>
-        </pc:spChg>
-        <pc:spChg chg="mod">
-          <ac:chgData name="Xin Luo" userId="82312ee5779919a4" providerId="LiveId" clId="{4DB6C473-8E57-A543-81F7-48BE109E8C13}" dt="2023-02-21T07:43:23.802" v="3522" actId="20577"/>
-          <ac:spMkLst>
-            <pc:docMk/>
-            <pc:sldMk cId="3852391939" sldId="2715"/>
-            <ac:spMk id="3" creationId="{00000000-0000-0000-0000-000000000000}"/>
-          </ac:spMkLst>
-        </pc:spChg>
-        <pc:spChg chg="add mod">
-          <ac:chgData name="Xin Luo" userId="82312ee5779919a4" providerId="LiveId" clId="{4DB6C473-8E57-A543-81F7-48BE109E8C13}" dt="2023-02-21T13:41:38.670" v="4903" actId="20577"/>
-          <ac:spMkLst>
-            <pc:docMk/>
-            <pc:sldMk cId="3852391939" sldId="2715"/>
-            <ac:spMk id="5" creationId="{FCD10A89-5E0E-5D73-1D4F-9E11D943B29C}"/>
-          </ac:spMkLst>
-        </pc:spChg>
-        <pc:picChg chg="add mod">
-          <ac:chgData name="Xin Luo" userId="82312ee5779919a4" providerId="LiveId" clId="{4DB6C473-8E57-A543-81F7-48BE109E8C13}" dt="2023-02-21T13:47:35.461" v="4912" actId="1076"/>
-          <ac:picMkLst>
-            <pc:docMk/>
-            <pc:sldMk cId="3852391939" sldId="2715"/>
-            <ac:picMk id="2050" creationId="{8F8FBDFD-CF37-F4FE-58FA-9350A0CDABC7}"/>
-          </ac:picMkLst>
-        </pc:picChg>
-      </pc:sldChg>
-      <pc:sldChg chg="addSp modSp add mod ord">
-        <pc:chgData name="Xin Luo" userId="82312ee5779919a4" providerId="LiveId" clId="{4DB6C473-8E57-A543-81F7-48BE109E8C13}" dt="2023-02-21T13:15:30.678" v="4562" actId="1035"/>
-        <pc:sldMkLst>
-          <pc:docMk/>
-          <pc:sldMk cId="3026715585" sldId="2716"/>
-        </pc:sldMkLst>
-        <pc:spChg chg="mod">
-          <ac:chgData name="Xin Luo" userId="82312ee5779919a4" providerId="LiveId" clId="{4DB6C473-8E57-A543-81F7-48BE109E8C13}" dt="2023-02-21T07:27:17.840" v="3401" actId="20577"/>
-          <ac:spMkLst>
-            <pc:docMk/>
-            <pc:sldMk cId="3026715585" sldId="2716"/>
-            <ac:spMk id="2" creationId="{631AADB6-C88A-D817-4683-FC087E4E240F}"/>
-          </ac:spMkLst>
-        </pc:spChg>
-        <pc:spChg chg="add mod">
-          <ac:chgData name="Xin Luo" userId="82312ee5779919a4" providerId="LiveId" clId="{4DB6C473-8E57-A543-81F7-48BE109E8C13}" dt="2023-02-21T13:15:30.678" v="4562" actId="1035"/>
-          <ac:spMkLst>
-            <pc:docMk/>
-            <pc:sldMk cId="3026715585" sldId="2716"/>
-            <ac:spMk id="4" creationId="{B31A8325-31D8-6F06-6D89-E39763C56875}"/>
-          </ac:spMkLst>
-        </pc:spChg>
-        <pc:spChg chg="mod">
-          <ac:chgData name="Xin Luo" userId="82312ee5779919a4" providerId="LiveId" clId="{4DB6C473-8E57-A543-81F7-48BE109E8C13}" dt="2023-02-21T12:48:49.893" v="4206" actId="1076"/>
-          <ac:spMkLst>
-            <pc:docMk/>
-            <pc:sldMk cId="3026715585" sldId="2716"/>
-            <ac:spMk id="17" creationId="{9E05FFCA-3371-AF5C-381D-71D984055F5A}"/>
-          </ac:spMkLst>
-        </pc:spChg>
-      </pc:sldChg>
-      <pc:sldChg chg="addSp modSp add mod">
-        <pc:chgData name="Xin Luo" userId="82312ee5779919a4" providerId="LiveId" clId="{4DB6C473-8E57-A543-81F7-48BE109E8C13}" dt="2023-02-21T13:48:38.001" v="4936" actId="1076"/>
-        <pc:sldMkLst>
-          <pc:docMk/>
-          <pc:sldMk cId="4136986794" sldId="2717"/>
-        </pc:sldMkLst>
-        <pc:spChg chg="mod">
-          <ac:chgData name="Xin Luo" userId="82312ee5779919a4" providerId="LiveId" clId="{4DB6C473-8E57-A543-81F7-48BE109E8C13}" dt="2023-02-21T13:48:32.535" v="4933" actId="1035"/>
-          <ac:spMkLst>
-            <pc:docMk/>
-            <pc:sldMk cId="4136986794" sldId="2717"/>
-            <ac:spMk id="5" creationId="{FCD10A89-5E0E-5D73-1D4F-9E11D943B29C}"/>
-          </ac:spMkLst>
-        </pc:spChg>
-        <pc:picChg chg="add mod">
-          <ac:chgData name="Xin Luo" userId="82312ee5779919a4" providerId="LiveId" clId="{4DB6C473-8E57-A543-81F7-48BE109E8C13}" dt="2023-02-21T13:48:38.001" v="4936" actId="1076"/>
-          <ac:picMkLst>
-            <pc:docMk/>
-            <pc:sldMk cId="4136986794" sldId="2717"/>
-            <ac:picMk id="6" creationId="{2260B411-AFF0-1E09-142B-45C9F88562F7}"/>
-          </ac:picMkLst>
-        </pc:picChg>
-      </pc:sldChg>
-      <pc:sldChg chg="addSp delSp modSp add mod">
-        <pc:chgData name="Xin Luo" userId="82312ee5779919a4" providerId="LiveId" clId="{4DB6C473-8E57-A543-81F7-48BE109E8C13}" dt="2023-02-21T14:08:09.514" v="5152" actId="1035"/>
-        <pc:sldMkLst>
-          <pc:docMk/>
-          <pc:sldMk cId="1778017482" sldId="2718"/>
-        </pc:sldMkLst>
-        <pc:spChg chg="mod">
-          <ac:chgData name="Xin Luo" userId="82312ee5779919a4" providerId="LiveId" clId="{4DB6C473-8E57-A543-81F7-48BE109E8C13}" dt="2023-02-21T14:08:07.366" v="5145" actId="1035"/>
-          <ac:spMkLst>
-            <pc:docMk/>
-            <pc:sldMk cId="1778017482" sldId="2718"/>
-            <ac:spMk id="5" creationId="{FCD10A89-5E0E-5D73-1D4F-9E11D943B29C}"/>
-          </ac:spMkLst>
-        </pc:spChg>
-        <pc:picChg chg="del">
-          <ac:chgData name="Xin Luo" userId="82312ee5779919a4" providerId="LiveId" clId="{4DB6C473-8E57-A543-81F7-48BE109E8C13}" dt="2023-02-21T13:48:49.937" v="4938" actId="478"/>
-          <ac:picMkLst>
-            <pc:docMk/>
-            <pc:sldMk cId="1778017482" sldId="2718"/>
-            <ac:picMk id="6" creationId="{2260B411-AFF0-1E09-142B-45C9F88562F7}"/>
-          </ac:picMkLst>
-        </pc:picChg>
-        <pc:picChg chg="add mod">
-          <ac:chgData name="Xin Luo" userId="82312ee5779919a4" providerId="LiveId" clId="{4DB6C473-8E57-A543-81F7-48BE109E8C13}" dt="2023-02-21T14:08:09.514" v="5152" actId="1035"/>
-          <ac:picMkLst>
-            <pc:docMk/>
-            <pc:sldMk cId="1778017482" sldId="2718"/>
-            <ac:picMk id="3074" creationId="{3E8CF22C-6E5D-0AAE-1F79-795E8B77EEF7}"/>
-          </ac:picMkLst>
-        </pc:picChg>
-      </pc:sldChg>
-      <pc:sldChg chg="delSp modSp add mod">
-        <pc:chgData name="Xin Luo" userId="82312ee5779919a4" providerId="LiveId" clId="{4DB6C473-8E57-A543-81F7-48BE109E8C13}" dt="2023-02-21T15:10:04.498" v="5724" actId="108"/>
-        <pc:sldMkLst>
-          <pc:docMk/>
-          <pc:sldMk cId="1858913004" sldId="2719"/>
-        </pc:sldMkLst>
-        <pc:spChg chg="mod">
-          <ac:chgData name="Xin Luo" userId="82312ee5779919a4" providerId="LiveId" clId="{4DB6C473-8E57-A543-81F7-48BE109E8C13}" dt="2023-02-21T14:49:05.255" v="5311" actId="1076"/>
-          <ac:spMkLst>
-            <pc:docMk/>
-            <pc:sldMk cId="1858913004" sldId="2719"/>
-            <ac:spMk id="2" creationId="{631AADB6-C88A-D817-4683-FC087E4E240F}"/>
-          </ac:spMkLst>
-        </pc:spChg>
-        <pc:spChg chg="mod">
-          <ac:chgData name="Xin Luo" userId="82312ee5779919a4" providerId="LiveId" clId="{4DB6C473-8E57-A543-81F7-48BE109E8C13}" dt="2023-02-21T15:10:04.498" v="5724" actId="108"/>
-          <ac:spMkLst>
-            <pc:docMk/>
-            <pc:sldMk cId="1858913004" sldId="2719"/>
-            <ac:spMk id="5" creationId="{FCD10A89-5E0E-5D73-1D4F-9E11D943B29C}"/>
-          </ac:spMkLst>
-        </pc:spChg>
-        <pc:spChg chg="del">
-          <ac:chgData name="Xin Luo" userId="82312ee5779919a4" providerId="LiveId" clId="{4DB6C473-8E57-A543-81F7-48BE109E8C13}" dt="2023-02-21T14:48:56.090" v="5307" actId="478"/>
-          <ac:spMkLst>
-            <pc:docMk/>
-            <pc:sldMk cId="1858913004" sldId="2719"/>
-            <ac:spMk id="17" creationId="{9E05FFCA-3371-AF5C-381D-71D984055F5A}"/>
-          </ac:spMkLst>
-        </pc:spChg>
-        <pc:picChg chg="del">
-          <ac:chgData name="Xin Luo" userId="82312ee5779919a4" providerId="LiveId" clId="{4DB6C473-8E57-A543-81F7-48BE109E8C13}" dt="2023-02-21T14:47:16.549" v="5154" actId="478"/>
-          <ac:picMkLst>
-            <pc:docMk/>
-            <pc:sldMk cId="1858913004" sldId="2719"/>
-            <ac:picMk id="3074" creationId="{3E8CF22C-6E5D-0AAE-1F79-795E8B77EEF7}"/>
-          </ac:picMkLst>
-        </pc:picChg>
-      </pc:sldChg>
-      <pc:sldChg chg="addSp delSp modSp add mod ord">
-        <pc:chgData name="Xin Luo" userId="82312ee5779919a4" providerId="LiveId" clId="{4DB6C473-8E57-A543-81F7-48BE109E8C13}" dt="2023-02-21T15:06:45.211" v="5600" actId="20578"/>
-        <pc:sldMkLst>
-          <pc:docMk/>
-          <pc:sldMk cId="3480831675" sldId="2720"/>
-        </pc:sldMkLst>
-        <pc:spChg chg="mod">
-          <ac:chgData name="Xin Luo" userId="82312ee5779919a4" providerId="LiveId" clId="{4DB6C473-8E57-A543-81F7-48BE109E8C13}" dt="2023-02-21T14:58:21.259" v="5529" actId="1035"/>
-          <ac:spMkLst>
-            <pc:docMk/>
-            <pc:sldMk cId="3480831675" sldId="2720"/>
-            <ac:spMk id="2" creationId="{631AADB6-C88A-D817-4683-FC087E4E240F}"/>
-          </ac:spMkLst>
-        </pc:spChg>
-        <pc:spChg chg="add mod">
-          <ac:chgData name="Xin Luo" userId="82312ee5779919a4" providerId="LiveId" clId="{4DB6C473-8E57-A543-81F7-48BE109E8C13}" dt="2023-02-21T14:58:48.813" v="5569" actId="404"/>
-          <ac:spMkLst>
-            <pc:docMk/>
-            <pc:sldMk cId="3480831675" sldId="2720"/>
-            <ac:spMk id="4" creationId="{58EE51E5-8ACA-984C-6E8D-F8AA658223AD}"/>
-          </ac:spMkLst>
-        </pc:spChg>
-        <pc:spChg chg="add mod">
-          <ac:chgData name="Xin Luo" userId="82312ee5779919a4" providerId="LiveId" clId="{4DB6C473-8E57-A543-81F7-48BE109E8C13}" dt="2023-02-21T14:58:48.813" v="5569" actId="404"/>
-          <ac:spMkLst>
-            <pc:docMk/>
-            <pc:sldMk cId="3480831675" sldId="2720"/>
-            <ac:spMk id="5" creationId="{7F4897FB-F086-F339-A15F-A899143C7919}"/>
-          </ac:spMkLst>
-        </pc:spChg>
-        <pc:spChg chg="add mod">
-          <ac:chgData name="Xin Luo" userId="82312ee5779919a4" providerId="LiveId" clId="{4DB6C473-8E57-A543-81F7-48BE109E8C13}" dt="2023-02-21T15:06:20.559" v="5576" actId="962"/>
-          <ac:spMkLst>
-            <pc:docMk/>
-            <pc:sldMk cId="3480831675" sldId="2720"/>
-            <ac:spMk id="6" creationId="{7ED1482E-3610-E252-0E80-41B202D30E30}"/>
-          </ac:spMkLst>
-        </pc:spChg>
-        <pc:spChg chg="del">
-          <ac:chgData name="Xin Luo" userId="82312ee5779919a4" providerId="LiveId" clId="{4DB6C473-8E57-A543-81F7-48BE109E8C13}" dt="2023-02-21T14:51:13.253" v="5388" actId="478"/>
-          <ac:spMkLst>
-            <pc:docMk/>
-            <pc:sldMk cId="3480831675" sldId="2720"/>
-            <ac:spMk id="17" creationId="{9E05FFCA-3371-AF5C-381D-71D984055F5A}"/>
-          </ac:spMkLst>
-        </pc:spChg>
-        <pc:spChg chg="del">
-          <ac:chgData name="Xin Luo" userId="82312ee5779919a4" providerId="LiveId" clId="{4DB6C473-8E57-A543-81F7-48BE109E8C13}" dt="2023-02-21T14:51:18.075" v="5389" actId="478"/>
-          <ac:spMkLst>
-            <pc:docMk/>
-            <pc:sldMk cId="3480831675" sldId="2720"/>
-            <ac:spMk id="18" creationId="{9D310AF3-A081-4032-01C0-C288D4F7AC53}"/>
-          </ac:spMkLst>
-        </pc:spChg>
-        <pc:picChg chg="add del mod">
-          <ac:chgData name="Xin Luo" userId="82312ee5779919a4" providerId="LiveId" clId="{4DB6C473-8E57-A543-81F7-48BE109E8C13}" dt="2023-02-21T14:53:26.825" v="5442" actId="478"/>
-          <ac:picMkLst>
-            <pc:docMk/>
-            <pc:sldMk cId="3480831675" sldId="2720"/>
-            <ac:picMk id="5122" creationId="{379580DC-45F0-D6EF-6EA0-1FB906F02465}"/>
-          </ac:picMkLst>
-        </pc:picChg>
-        <pc:picChg chg="add mod">
-          <ac:chgData name="Xin Luo" userId="82312ee5779919a4" providerId="LiveId" clId="{4DB6C473-8E57-A543-81F7-48BE109E8C13}" dt="2023-02-21T14:58:17.635" v="5525" actId="1035"/>
-          <ac:picMkLst>
-            <pc:docMk/>
-            <pc:sldMk cId="3480831675" sldId="2720"/>
-            <ac:picMk id="5124" creationId="{D17BE6F3-1008-2FC6-54D2-736C673B73E8}"/>
-          </ac:picMkLst>
-        </pc:picChg>
-        <pc:picChg chg="add mod">
-          <ac:chgData name="Xin Luo" userId="82312ee5779919a4" providerId="LiveId" clId="{4DB6C473-8E57-A543-81F7-48BE109E8C13}" dt="2023-02-21T14:58:17.635" v="5525" actId="1035"/>
-          <ac:picMkLst>
-            <pc:docMk/>
-            <pc:sldMk cId="3480831675" sldId="2720"/>
-            <ac:picMk id="5126" creationId="{EBB0C876-4E86-C2ED-5EE6-3B2BD26768B9}"/>
-          </ac:picMkLst>
-        </pc:picChg>
-        <pc:picChg chg="add mod">
-          <ac:chgData name="Xin Luo" userId="82312ee5779919a4" providerId="LiveId" clId="{4DB6C473-8E57-A543-81F7-48BE109E8C13}" dt="2023-02-21T14:58:48.813" v="5569" actId="404"/>
-          <ac:picMkLst>
-            <pc:docMk/>
-            <pc:sldMk cId="3480831675" sldId="2720"/>
-            <ac:picMk id="5128" creationId="{59C29F54-F731-6EBD-ECA9-847BE3563121}"/>
-          </ac:picMkLst>
-        </pc:picChg>
-      </pc:sldChg>
-      <pc:sldChg chg="add del">
-        <pc:chgData name="Xin Luo" userId="82312ee5779919a4" providerId="LiveId" clId="{4DB6C473-8E57-A543-81F7-48BE109E8C13}" dt="2023-02-21T14:55:30.326" v="5468" actId="2696"/>
-        <pc:sldMkLst>
-          <pc:docMk/>
-          <pc:sldMk cId="120373349" sldId="2721"/>
-        </pc:sldMkLst>
-      </pc:sldChg>
-      <pc:sldChg chg="addSp delSp modSp add mod ord">
-        <pc:chgData name="Xin Luo" userId="82312ee5779919a4" providerId="LiveId" clId="{4DB6C473-8E57-A543-81F7-48BE109E8C13}" dt="2023-02-21T15:06:40.684" v="5599" actId="20578"/>
-        <pc:sldMkLst>
-          <pc:docMk/>
-          <pc:sldMk cId="1410676903" sldId="2721"/>
-        </pc:sldMkLst>
-        <pc:spChg chg="del">
-          <ac:chgData name="Xin Luo" userId="82312ee5779919a4" providerId="LiveId" clId="{4DB6C473-8E57-A543-81F7-48BE109E8C13}" dt="2023-02-21T14:59:05.282" v="5571" actId="478"/>
-          <ac:spMkLst>
-            <pc:docMk/>
-            <pc:sldMk cId="1410676903" sldId="2721"/>
-            <ac:spMk id="4" creationId="{58EE51E5-8ACA-984C-6E8D-F8AA658223AD}"/>
-          </ac:spMkLst>
-        </pc:spChg>
-        <pc:spChg chg="del">
-          <ac:chgData name="Xin Luo" userId="82312ee5779919a4" providerId="LiveId" clId="{4DB6C473-8E57-A543-81F7-48BE109E8C13}" dt="2023-02-21T14:59:05.282" v="5571" actId="478"/>
-          <ac:spMkLst>
-            <pc:docMk/>
-            <pc:sldMk cId="1410676903" sldId="2721"/>
-            <ac:spMk id="5" creationId="{7F4897FB-F086-F339-A15F-A899143C7919}"/>
-          </ac:spMkLst>
-        </pc:spChg>
-        <pc:spChg chg="del">
-          <ac:chgData name="Xin Luo" userId="82312ee5779919a4" providerId="LiveId" clId="{4DB6C473-8E57-A543-81F7-48BE109E8C13}" dt="2023-02-21T14:59:05.282" v="5571" actId="478"/>
-          <ac:spMkLst>
-            <pc:docMk/>
-            <pc:sldMk cId="1410676903" sldId="2721"/>
-            <ac:spMk id="6" creationId="{7ED1482E-3610-E252-0E80-41B202D30E30}"/>
-          </ac:spMkLst>
-        </pc:spChg>
-        <pc:spChg chg="add mod">
-          <ac:chgData name="Xin Luo" userId="82312ee5779919a4" providerId="LiveId" clId="{4DB6C473-8E57-A543-81F7-48BE109E8C13}" dt="2023-02-21T15:06:36.607" v="5598" actId="1076"/>
-          <ac:spMkLst>
-            <pc:docMk/>
-            <pc:sldMk cId="1410676903" sldId="2721"/>
-            <ac:spMk id="9" creationId="{D5E43916-6543-2664-EE40-07ABFFB01F26}"/>
-          </ac:spMkLst>
-        </pc:spChg>
-        <pc:picChg chg="add mod">
-          <ac:chgData name="Xin Luo" userId="82312ee5779919a4" providerId="LiveId" clId="{4DB6C473-8E57-A543-81F7-48BE109E8C13}" dt="2023-02-21T15:06:20.558" v="5575" actId="27614"/>
-          <ac:picMkLst>
-            <pc:docMk/>
-            <pc:sldMk cId="1410676903" sldId="2721"/>
-            <ac:picMk id="8" creationId="{BA45F6EA-D51F-F9F8-F33E-5E3217612D76}"/>
-          </ac:picMkLst>
-        </pc:picChg>
-        <pc:picChg chg="del">
-          <ac:chgData name="Xin Luo" userId="82312ee5779919a4" providerId="LiveId" clId="{4DB6C473-8E57-A543-81F7-48BE109E8C13}" dt="2023-02-21T14:59:05.282" v="5571" actId="478"/>
-          <ac:picMkLst>
-            <pc:docMk/>
-            <pc:sldMk cId="1410676903" sldId="2721"/>
-            <ac:picMk id="5124" creationId="{D17BE6F3-1008-2FC6-54D2-736C673B73E8}"/>
-          </ac:picMkLst>
-        </pc:picChg>
-        <pc:picChg chg="del">
-          <ac:chgData name="Xin Luo" userId="82312ee5779919a4" providerId="LiveId" clId="{4DB6C473-8E57-A543-81F7-48BE109E8C13}" dt="2023-02-21T14:59:05.282" v="5571" actId="478"/>
-          <ac:picMkLst>
-            <pc:docMk/>
-            <pc:sldMk cId="1410676903" sldId="2721"/>
-            <ac:picMk id="5126" creationId="{EBB0C876-4E86-C2ED-5EE6-3B2BD26768B9}"/>
-          </ac:picMkLst>
-        </pc:picChg>
-        <pc:picChg chg="del">
-          <ac:chgData name="Xin Luo" userId="82312ee5779919a4" providerId="LiveId" clId="{4DB6C473-8E57-A543-81F7-48BE109E8C13}" dt="2023-02-21T14:59:05.282" v="5571" actId="478"/>
-          <ac:picMkLst>
-            <pc:docMk/>
-            <pc:sldMk cId="1410676903" sldId="2721"/>
-            <ac:picMk id="5128" creationId="{59C29F54-F731-6EBD-ECA9-847BE3563121}"/>
-          </ac:picMkLst>
-        </pc:picChg>
-      </pc:sldChg>
-      <pc:sldMasterChg chg="del delSldLayout">
-        <pc:chgData name="Xin Luo" userId="82312ee5779919a4" providerId="LiveId" clId="{4DB6C473-8E57-A543-81F7-48BE109E8C13}" dt="2023-02-21T08:54:15.791" v="3593" actId="2696"/>
-        <pc:sldMasterMkLst>
-          <pc:docMk/>
-          <pc:sldMasterMk cId="1248561168" sldId="2147484998"/>
-        </pc:sldMasterMkLst>
-        <pc:sldLayoutChg chg="del">
-          <pc:chgData name="Xin Luo" userId="82312ee5779919a4" providerId="LiveId" clId="{4DB6C473-8E57-A543-81F7-48BE109E8C13}" dt="2023-02-21T08:54:15.772" v="3576" actId="2696"/>
-          <pc:sldLayoutMkLst>
-            <pc:docMk/>
-            <pc:sldMasterMk cId="1248561168" sldId="2147484998"/>
-            <pc:sldLayoutMk cId="2755518727" sldId="2147484999"/>
-          </pc:sldLayoutMkLst>
-        </pc:sldLayoutChg>
-        <pc:sldLayoutChg chg="del">
-          <pc:chgData name="Xin Luo" userId="82312ee5779919a4" providerId="LiveId" clId="{4DB6C473-8E57-A543-81F7-48BE109E8C13}" dt="2023-02-21T08:54:15.773" v="3577" actId="2696"/>
-          <pc:sldLayoutMkLst>
-            <pc:docMk/>
-            <pc:sldMasterMk cId="1248561168" sldId="2147484998"/>
-            <pc:sldLayoutMk cId="784447712" sldId="2147485000"/>
-          </pc:sldLayoutMkLst>
-        </pc:sldLayoutChg>
-        <pc:sldLayoutChg chg="del">
-          <pc:chgData name="Xin Luo" userId="82312ee5779919a4" providerId="LiveId" clId="{4DB6C473-8E57-A543-81F7-48BE109E8C13}" dt="2023-02-21T08:54:15.774" v="3578" actId="2696"/>
-          <pc:sldLayoutMkLst>
-            <pc:docMk/>
-            <pc:sldMasterMk cId="1248561168" sldId="2147484998"/>
-            <pc:sldLayoutMk cId="36404751" sldId="2147485001"/>
-          </pc:sldLayoutMkLst>
-        </pc:sldLayoutChg>
-        <pc:sldLayoutChg chg="del">
-          <pc:chgData name="Xin Luo" userId="82312ee5779919a4" providerId="LiveId" clId="{4DB6C473-8E57-A543-81F7-48BE109E8C13}" dt="2023-02-21T08:54:15.775" v="3579" actId="2696"/>
-          <pc:sldLayoutMkLst>
-            <pc:docMk/>
-            <pc:sldMasterMk cId="1248561168" sldId="2147484998"/>
-            <pc:sldLayoutMk cId="2142531553" sldId="2147485002"/>
-          </pc:sldLayoutMkLst>
-        </pc:sldLayoutChg>
-        <pc:sldLayoutChg chg="del">
-          <pc:chgData name="Xin Luo" userId="82312ee5779919a4" providerId="LiveId" clId="{4DB6C473-8E57-A543-81F7-48BE109E8C13}" dt="2023-02-21T08:54:15.776" v="3580" actId="2696"/>
-          <pc:sldLayoutMkLst>
-            <pc:docMk/>
-            <pc:sldMasterMk cId="1248561168" sldId="2147484998"/>
-            <pc:sldLayoutMk cId="646270699" sldId="2147485003"/>
-          </pc:sldLayoutMkLst>
-        </pc:sldLayoutChg>
-        <pc:sldLayoutChg chg="del">
-          <pc:chgData name="Xin Luo" userId="82312ee5779919a4" providerId="LiveId" clId="{4DB6C473-8E57-A543-81F7-48BE109E8C13}" dt="2023-02-21T08:54:15.777" v="3581" actId="2696"/>
-          <pc:sldLayoutMkLst>
-            <pc:docMk/>
-            <pc:sldMasterMk cId="1248561168" sldId="2147484998"/>
-            <pc:sldLayoutMk cId="1316154404" sldId="2147485004"/>
-          </pc:sldLayoutMkLst>
-        </pc:sldLayoutChg>
-        <pc:sldLayoutChg chg="del">
-          <pc:chgData name="Xin Luo" userId="82312ee5779919a4" providerId="LiveId" clId="{4DB6C473-8E57-A543-81F7-48BE109E8C13}" dt="2023-02-21T08:54:15.778" v="3582" actId="2696"/>
-          <pc:sldLayoutMkLst>
-            <pc:docMk/>
-            <pc:sldMasterMk cId="1248561168" sldId="2147484998"/>
-            <pc:sldLayoutMk cId="275448905" sldId="2147485005"/>
-          </pc:sldLayoutMkLst>
-        </pc:sldLayoutChg>
-        <pc:sldLayoutChg chg="del">
-          <pc:chgData name="Xin Luo" userId="82312ee5779919a4" providerId="LiveId" clId="{4DB6C473-8E57-A543-81F7-48BE109E8C13}" dt="2023-02-21T08:54:15.779" v="3583" actId="2696"/>
-          <pc:sldLayoutMkLst>
-            <pc:docMk/>
-            <pc:sldMasterMk cId="1248561168" sldId="2147484998"/>
-            <pc:sldLayoutMk cId="3173493555" sldId="2147485006"/>
-          </pc:sldLayoutMkLst>
-        </pc:sldLayoutChg>
-        <pc:sldLayoutChg chg="del">
-          <pc:chgData name="Xin Luo" userId="82312ee5779919a4" providerId="LiveId" clId="{4DB6C473-8E57-A543-81F7-48BE109E8C13}" dt="2023-02-21T08:54:15.780" v="3584" actId="2696"/>
-          <pc:sldLayoutMkLst>
-            <pc:docMk/>
-            <pc:sldMasterMk cId="1248561168" sldId="2147484998"/>
-            <pc:sldLayoutMk cId="2494408642" sldId="2147485007"/>
-          </pc:sldLayoutMkLst>
-        </pc:sldLayoutChg>
-        <pc:sldLayoutChg chg="del">
-          <pc:chgData name="Xin Luo" userId="82312ee5779919a4" providerId="LiveId" clId="{4DB6C473-8E57-A543-81F7-48BE109E8C13}" dt="2023-02-21T08:54:15.781" v="3585" actId="2696"/>
-          <pc:sldLayoutMkLst>
-            <pc:docMk/>
-            <pc:sldMasterMk cId="1248561168" sldId="2147484998"/>
-            <pc:sldLayoutMk cId="2144339703" sldId="2147485008"/>
-          </pc:sldLayoutMkLst>
-        </pc:sldLayoutChg>
-        <pc:sldLayoutChg chg="del">
-          <pc:chgData name="Xin Luo" userId="82312ee5779919a4" providerId="LiveId" clId="{4DB6C473-8E57-A543-81F7-48BE109E8C13}" dt="2023-02-21T08:54:15.781" v="3586" actId="2696"/>
-          <pc:sldLayoutMkLst>
-            <pc:docMk/>
-            <pc:sldMasterMk cId="1248561168" sldId="2147484998"/>
-            <pc:sldLayoutMk cId="3933479768" sldId="2147485009"/>
-          </pc:sldLayoutMkLst>
-        </pc:sldLayoutChg>
-        <pc:sldLayoutChg chg="del">
-          <pc:chgData name="Xin Luo" userId="82312ee5779919a4" providerId="LiveId" clId="{4DB6C473-8E57-A543-81F7-48BE109E8C13}" dt="2023-02-21T08:54:15.782" v="3587" actId="2696"/>
-          <pc:sldLayoutMkLst>
-            <pc:docMk/>
-            <pc:sldMasterMk cId="1248561168" sldId="2147484998"/>
-            <pc:sldLayoutMk cId="2569911404" sldId="2147485010"/>
-          </pc:sldLayoutMkLst>
-        </pc:sldLayoutChg>
-        <pc:sldLayoutChg chg="del">
-          <pc:chgData name="Xin Luo" userId="82312ee5779919a4" providerId="LiveId" clId="{4DB6C473-8E57-A543-81F7-48BE109E8C13}" dt="2023-02-21T08:54:15.783" v="3588" actId="2696"/>
-          <pc:sldLayoutMkLst>
-            <pc:docMk/>
-            <pc:sldMasterMk cId="1248561168" sldId="2147484998"/>
-            <pc:sldLayoutMk cId="487309151" sldId="2147485011"/>
-          </pc:sldLayoutMkLst>
-        </pc:sldLayoutChg>
-        <pc:sldLayoutChg chg="del">
-          <pc:chgData name="Xin Luo" userId="82312ee5779919a4" providerId="LiveId" clId="{4DB6C473-8E57-A543-81F7-48BE109E8C13}" dt="2023-02-21T08:54:15.784" v="3589" actId="2696"/>
-          <pc:sldLayoutMkLst>
-            <pc:docMk/>
-            <pc:sldMasterMk cId="1248561168" sldId="2147484998"/>
-            <pc:sldLayoutMk cId="940838525" sldId="2147485012"/>
-          </pc:sldLayoutMkLst>
-        </pc:sldLayoutChg>
-        <pc:sldLayoutChg chg="del">
-          <pc:chgData name="Xin Luo" userId="82312ee5779919a4" providerId="LiveId" clId="{4DB6C473-8E57-A543-81F7-48BE109E8C13}" dt="2023-02-21T08:54:15.785" v="3590" actId="2696"/>
-          <pc:sldLayoutMkLst>
-            <pc:docMk/>
-            <pc:sldMasterMk cId="1248561168" sldId="2147484998"/>
-            <pc:sldLayoutMk cId="858249230" sldId="2147485013"/>
-          </pc:sldLayoutMkLst>
-        </pc:sldLayoutChg>
-        <pc:sldLayoutChg chg="del">
-          <pc:chgData name="Xin Luo" userId="82312ee5779919a4" providerId="LiveId" clId="{4DB6C473-8E57-A543-81F7-48BE109E8C13}" dt="2023-02-21T08:54:15.786" v="3591" actId="2696"/>
-          <pc:sldLayoutMkLst>
-            <pc:docMk/>
-            <pc:sldMasterMk cId="1248561168" sldId="2147484998"/>
-            <pc:sldLayoutMk cId="1094809115" sldId="2147485014"/>
-          </pc:sldLayoutMkLst>
-        </pc:sldLayoutChg>
-        <pc:sldLayoutChg chg="del">
-          <pc:chgData name="Xin Luo" userId="82312ee5779919a4" providerId="LiveId" clId="{4DB6C473-8E57-A543-81F7-48BE109E8C13}" dt="2023-02-21T08:54:15.787" v="3592" actId="2696"/>
-          <pc:sldLayoutMkLst>
-            <pc:docMk/>
-            <pc:sldMasterMk cId="1248561168" sldId="2147484998"/>
-            <pc:sldLayoutMk cId="2452001345" sldId="2147485015"/>
-          </pc:sldLayoutMkLst>
-        </pc:sldLayoutChg>
-      </pc:sldMasterChg>
-    </pc:docChg>
-  </pc:docChgLst>
-  <pc:docChgLst>
-    <pc:chgData name="Xin Luo" userId="82312ee5779919a4" providerId="LiveId" clId="{B10D17D3-3A51-854C-A635-1C39A202C200}"/>
-    <pc:docChg chg="undo custSel addSld delSld modSld sldOrd">
-      <pc:chgData name="Xin Luo" userId="82312ee5779919a4" providerId="LiveId" clId="{B10D17D3-3A51-854C-A635-1C39A202C200}" dt="2023-03-04T03:51:10.104" v="4946" actId="20577"/>
-      <pc:docMkLst>
-        <pc:docMk/>
-      </pc:docMkLst>
-      <pc:sldChg chg="addSp delSp modSp mod">
-        <pc:chgData name="Xin Luo" userId="82312ee5779919a4" providerId="LiveId" clId="{B10D17D3-3A51-854C-A635-1C39A202C200}" dt="2023-03-01T03:11:45.906" v="247"/>
-        <pc:sldMkLst>
-          <pc:docMk/>
-          <pc:sldMk cId="1153920038" sldId="2206"/>
-        </pc:sldMkLst>
-        <pc:spChg chg="add del mod">
-          <ac:chgData name="Xin Luo" userId="82312ee5779919a4" providerId="LiveId" clId="{B10D17D3-3A51-854C-A635-1C39A202C200}" dt="2023-03-01T03:11:45.906" v="247"/>
-          <ac:spMkLst>
-            <pc:docMk/>
-            <pc:sldMk cId="1153920038" sldId="2206"/>
-            <ac:spMk id="3" creationId="{CDA1AA74-21D7-AC4F-F87E-BA10B85B4942}"/>
-          </ac:spMkLst>
-        </pc:spChg>
-        <pc:spChg chg="mod">
-          <ac:chgData name="Xin Luo" userId="82312ee5779919a4" providerId="LiveId" clId="{B10D17D3-3A51-854C-A635-1C39A202C200}" dt="2023-03-01T03:11:44.178" v="244" actId="20577"/>
-          <ac:spMkLst>
-            <pc:docMk/>
-            <pc:sldMk cId="1153920038" sldId="2206"/>
-            <ac:spMk id="24" creationId="{00000000-0000-0000-0000-000000000000}"/>
-          </ac:spMkLst>
-        </pc:spChg>
-      </pc:sldChg>
-      <pc:sldChg chg="addSp delSp modSp mod">
-        <pc:chgData name="Xin Luo" userId="82312ee5779919a4" providerId="LiveId" clId="{B10D17D3-3A51-854C-A635-1C39A202C200}" dt="2023-03-01T03:11:54.462" v="258"/>
-        <pc:sldMkLst>
-          <pc:docMk/>
-          <pc:sldMk cId="1576120367" sldId="2387"/>
-        </pc:sldMkLst>
-        <pc:spChg chg="mod">
-          <ac:chgData name="Xin Luo" userId="82312ee5779919a4" providerId="LiveId" clId="{B10D17D3-3A51-854C-A635-1C39A202C200}" dt="2023-03-01T03:09:00.203" v="190"/>
-          <ac:spMkLst>
-            <pc:docMk/>
-            <pc:sldMk cId="1576120367" sldId="2387"/>
-            <ac:spMk id="4" creationId="{F68D6DC1-DB3F-EF57-57A3-A2B92CF0615B}"/>
-          </ac:spMkLst>
-        </pc:spChg>
-        <pc:spChg chg="mod">
-          <ac:chgData name="Xin Luo" userId="82312ee5779919a4" providerId="LiveId" clId="{B10D17D3-3A51-854C-A635-1C39A202C200}" dt="2023-03-01T03:11:52.198" v="254" actId="20577"/>
-          <ac:spMkLst>
-            <pc:docMk/>
-            <pc:sldMk cId="1576120367" sldId="2387"/>
-            <ac:spMk id="5" creationId="{5B42861C-BD96-F755-A471-270F194FDB31}"/>
-          </ac:spMkLst>
-        </pc:spChg>
-        <pc:spChg chg="mod">
-          <ac:chgData name="Xin Luo" userId="82312ee5779919a4" providerId="LiveId" clId="{B10D17D3-3A51-854C-A635-1C39A202C200}" dt="2023-03-01T03:08:52.221" v="189" actId="1076"/>
-          <ac:spMkLst>
-            <pc:docMk/>
-            <pc:sldMk cId="1576120367" sldId="2387"/>
-            <ac:spMk id="6" creationId="{00000000-0000-0000-0000-000000000000}"/>
-          </ac:spMkLst>
-        </pc:spChg>
-        <pc:grpChg chg="add del mod">
-          <ac:chgData name="Xin Luo" userId="82312ee5779919a4" providerId="LiveId" clId="{B10D17D3-3A51-854C-A635-1C39A202C200}" dt="2023-03-01T03:11:54.462" v="258"/>
-          <ac:grpSpMkLst>
-            <pc:docMk/>
-            <pc:sldMk cId="1576120367" sldId="2387"/>
-            <ac:grpSpMk id="2" creationId="{D75D16A1-CA22-97BE-7AC3-94ACAAC9786D}"/>
-          </ac:grpSpMkLst>
-        </pc:grpChg>
-        <pc:grpChg chg="mod">
-          <ac:chgData name="Xin Luo" userId="82312ee5779919a4" providerId="LiveId" clId="{B10D17D3-3A51-854C-A635-1C39A202C200}" dt="2023-03-01T03:11:53.530" v="256" actId="1076"/>
-          <ac:grpSpMkLst>
-            <pc:docMk/>
-            <pc:sldMk cId="1576120367" sldId="2387"/>
-            <ac:grpSpMk id="3" creationId="{12ED16A1-79B8-7DB1-1CC1-250B051BAD58}"/>
-          </ac:grpSpMkLst>
-        </pc:grpChg>
-        <pc:grpChg chg="mod">
-          <ac:chgData name="Xin Luo" userId="82312ee5779919a4" providerId="LiveId" clId="{B10D17D3-3A51-854C-A635-1C39A202C200}" dt="2023-03-01T03:11:52.612" v="255" actId="1076"/>
-          <ac:grpSpMkLst>
-            <pc:docMk/>
-            <pc:sldMk cId="1576120367" sldId="2387"/>
-            <ac:grpSpMk id="9" creationId="{84B9B8D5-4BCC-CDFF-1E13-B005060A8BDF}"/>
-          </ac:grpSpMkLst>
-        </pc:grpChg>
-      </pc:sldChg>
-      <pc:sldChg chg="addSp delSp modSp del mod">
-        <pc:chgData name="Xin Luo" userId="82312ee5779919a4" providerId="LiveId" clId="{B10D17D3-3A51-854C-A635-1C39A202C200}" dt="2023-03-01T08:16:09.042" v="2803" actId="2696"/>
-        <pc:sldMkLst>
-          <pc:docMk/>
-          <pc:sldMk cId="2688334957" sldId="2705"/>
-        </pc:sldMkLst>
-        <pc:spChg chg="del">
-          <ac:chgData name="Xin Luo" userId="82312ee5779919a4" providerId="LiveId" clId="{B10D17D3-3A51-854C-A635-1C39A202C200}" dt="2023-03-01T03:12:41.405" v="315" actId="478"/>
-          <ac:spMkLst>
-            <pc:docMk/>
-            <pc:sldMk cId="2688334957" sldId="2705"/>
-            <ac:spMk id="2" creationId="{631AADB6-C88A-D817-4683-FC087E4E240F}"/>
-          </ac:spMkLst>
-        </pc:spChg>
-        <pc:spChg chg="mod">
-          <ac:chgData name="Xin Luo" userId="82312ee5779919a4" providerId="LiveId" clId="{B10D17D3-3A51-854C-A635-1C39A202C200}" dt="2023-03-01T03:12:46.084" v="319" actId="20577"/>
-          <ac:spMkLst>
-            <pc:docMk/>
-            <pc:sldMk cId="2688334957" sldId="2705"/>
-            <ac:spMk id="3" creationId="{00000000-0000-0000-0000-000000000000}"/>
-          </ac:spMkLst>
-        </pc:spChg>
-        <pc:spChg chg="add mod">
-          <ac:chgData name="Xin Luo" userId="82312ee5779919a4" providerId="LiveId" clId="{B10D17D3-3A51-854C-A635-1C39A202C200}" dt="2023-03-01T07:04:04.047" v="1565" actId="1035"/>
-          <ac:spMkLst>
-            <pc:docMk/>
-            <pc:sldMk cId="2688334957" sldId="2705"/>
-            <ac:spMk id="4" creationId="{DFE91C0B-C9F8-3FEC-3419-2DE0C6E6DCB8}"/>
-          </ac:spMkLst>
-        </pc:spChg>
-        <pc:spChg chg="mod">
-          <ac:chgData name="Xin Luo" userId="82312ee5779919a4" providerId="LiveId" clId="{B10D17D3-3A51-854C-A635-1C39A202C200}" dt="2023-03-01T07:38:05.554" v="2285" actId="20577"/>
-          <ac:spMkLst>
-            <pc:docMk/>
-            <pc:sldMk cId="2688334957" sldId="2705"/>
-            <ac:spMk id="17" creationId="{9E05FFCA-3371-AF5C-381D-71D984055F5A}"/>
-          </ac:spMkLst>
-        </pc:spChg>
-      </pc:sldChg>
-      <pc:sldChg chg="modSp del mod">
-        <pc:chgData name="Xin Luo" userId="82312ee5779919a4" providerId="LiveId" clId="{B10D17D3-3A51-854C-A635-1C39A202C200}" dt="2023-03-04T02:27:05.106" v="4323" actId="2696"/>
-        <pc:sldMkLst>
-          <pc:docMk/>
-          <pc:sldMk cId="2464444856" sldId="2706"/>
-        </pc:sldMkLst>
-        <pc:spChg chg="mod">
-          <ac:chgData name="Xin Luo" userId="82312ee5779919a4" providerId="LiveId" clId="{B10D17D3-3A51-854C-A635-1C39A202C200}" dt="2023-03-04T02:23:09.439" v="4164" actId="20577"/>
-          <ac:spMkLst>
-            <pc:docMk/>
-            <pc:sldMk cId="2464444856" sldId="2706"/>
-            <ac:spMk id="2" creationId="{631AADB6-C88A-D817-4683-FC087E4E240F}"/>
-          </ac:spMkLst>
-        </pc:spChg>
-        <pc:spChg chg="mod">
-          <ac:chgData name="Xin Luo" userId="82312ee5779919a4" providerId="LiveId" clId="{B10D17D3-3A51-854C-A635-1C39A202C200}" dt="2023-03-01T03:13:11.029" v="347" actId="20577"/>
-          <ac:spMkLst>
-            <pc:docMk/>
-            <pc:sldMk cId="2464444856" sldId="2706"/>
-            <ac:spMk id="3" creationId="{00000000-0000-0000-0000-000000000000}"/>
-          </ac:spMkLst>
-        </pc:spChg>
-        <pc:spChg chg="mod">
-          <ac:chgData name="Xin Luo" userId="82312ee5779919a4" providerId="LiveId" clId="{B10D17D3-3A51-854C-A635-1C39A202C200}" dt="2023-03-04T02:21:10.399" v="4124" actId="20577"/>
-          <ac:spMkLst>
-            <pc:docMk/>
-            <pc:sldMk cId="2464444856" sldId="2706"/>
-            <ac:spMk id="17" creationId="{9E05FFCA-3371-AF5C-381D-71D984055F5A}"/>
-          </ac:spMkLst>
-        </pc:spChg>
-      </pc:sldChg>
-      <pc:sldChg chg="addSp delSp modSp mod">
-        <pc:chgData name="Xin Luo" userId="82312ee5779919a4" providerId="LiveId" clId="{B10D17D3-3A51-854C-A635-1C39A202C200}" dt="2023-03-04T02:29:49.946" v="4367" actId="20577"/>
-        <pc:sldMkLst>
-          <pc:docMk/>
-          <pc:sldMk cId="1602808061" sldId="2707"/>
-        </pc:sldMkLst>
-        <pc:spChg chg="mod">
-          <ac:chgData name="Xin Luo" userId="82312ee5779919a4" providerId="LiveId" clId="{B10D17D3-3A51-854C-A635-1C39A202C200}" dt="2023-03-04T02:29:49.946" v="4367" actId="20577"/>
-          <ac:spMkLst>
-            <pc:docMk/>
-            <pc:sldMk cId="1602808061" sldId="2707"/>
-            <ac:spMk id="2" creationId="{631AADB6-C88A-D817-4683-FC087E4E240F}"/>
-          </ac:spMkLst>
-        </pc:spChg>
-        <pc:spChg chg="mod">
-          <ac:chgData name="Xin Luo" userId="82312ee5779919a4" providerId="LiveId" clId="{B10D17D3-3A51-854C-A635-1C39A202C200}" dt="2023-03-01T03:19:53.815" v="779" actId="20577"/>
-          <ac:spMkLst>
-            <pc:docMk/>
-            <pc:sldMk cId="1602808061" sldId="2707"/>
-            <ac:spMk id="3" creationId="{00000000-0000-0000-0000-000000000000}"/>
-          </ac:spMkLst>
-        </pc:spChg>
-        <pc:spChg chg="add del mod">
-          <ac:chgData name="Xin Luo" userId="82312ee5779919a4" providerId="LiveId" clId="{B10D17D3-3A51-854C-A635-1C39A202C200}" dt="2023-03-01T03:14:57.021" v="452" actId="478"/>
-          <ac:spMkLst>
-            <pc:docMk/>
-            <pc:sldMk cId="1602808061" sldId="2707"/>
-            <ac:spMk id="4" creationId="{C75F9EA2-70CA-A73B-2653-99D35FD92005}"/>
-          </ac:spMkLst>
-        </pc:spChg>
-        <pc:spChg chg="del mod">
-          <ac:chgData name="Xin Luo" userId="82312ee5779919a4" providerId="LiveId" clId="{B10D17D3-3A51-854C-A635-1C39A202C200}" dt="2023-03-01T03:20:42.446" v="870" actId="478"/>
-          <ac:spMkLst>
-            <pc:docMk/>
-            <pc:sldMk cId="1602808061" sldId="2707"/>
-            <ac:spMk id="17" creationId="{9E05FFCA-3371-AF5C-381D-71D984055F5A}"/>
-          </ac:spMkLst>
-        </pc:spChg>
-      </pc:sldChg>
-      <pc:sldChg chg="modSp mod">
-        <pc:chgData name="Xin Luo" userId="82312ee5779919a4" providerId="LiveId" clId="{B10D17D3-3A51-854C-A635-1C39A202C200}" dt="2023-03-01T07:00:50.646" v="1533" actId="14100"/>
-        <pc:sldMkLst>
-          <pc:docMk/>
-          <pc:sldMk cId="2744383376" sldId="2711"/>
-        </pc:sldMkLst>
-        <pc:spChg chg="mod">
-          <ac:chgData name="Xin Luo" userId="82312ee5779919a4" providerId="LiveId" clId="{B10D17D3-3A51-854C-A635-1C39A202C200}" dt="2023-03-01T07:00:50.646" v="1533" actId="14100"/>
-          <ac:spMkLst>
-            <pc:docMk/>
-            <pc:sldMk cId="2744383376" sldId="2711"/>
-            <ac:spMk id="18" creationId="{9D310AF3-A081-4032-01C0-C288D4F7AC53}"/>
-          </ac:spMkLst>
-        </pc:spChg>
-      </pc:sldChg>
-      <pc:sldChg chg="addSp delSp modSp mod">
-        <pc:chgData name="Xin Luo" userId="82312ee5779919a4" providerId="LiveId" clId="{B10D17D3-3A51-854C-A635-1C39A202C200}" dt="2023-03-01T07:14:41.232" v="1940" actId="1035"/>
-        <pc:sldMkLst>
-          <pc:docMk/>
-          <pc:sldMk cId="280619949" sldId="2714"/>
-        </pc:sldMkLst>
-        <pc:spChg chg="add del mod">
-          <ac:chgData name="Xin Luo" userId="82312ee5779919a4" providerId="LiveId" clId="{B10D17D3-3A51-854C-A635-1C39A202C200}" dt="2023-03-01T07:06:29.970" v="1634" actId="478"/>
-          <ac:spMkLst>
-            <pc:docMk/>
-            <pc:sldMk cId="280619949" sldId="2714"/>
-            <ac:spMk id="4" creationId="{B2054973-49B5-A6EE-DB29-692209383346}"/>
-          </ac:spMkLst>
-        </pc:spChg>
-        <pc:spChg chg="add del mod">
-          <ac:chgData name="Xin Luo" userId="82312ee5779919a4" providerId="LiveId" clId="{B10D17D3-3A51-854C-A635-1C39A202C200}" dt="2023-03-01T07:06:28.039" v="1633" actId="478"/>
-          <ac:spMkLst>
-            <pc:docMk/>
-            <pc:sldMk cId="280619949" sldId="2714"/>
-            <ac:spMk id="6" creationId="{19C6484B-DCCB-D134-1A1F-AAFC33245462}"/>
-          </ac:spMkLst>
-        </pc:spChg>
-        <pc:spChg chg="add mod">
-          <ac:chgData name="Xin Luo" userId="82312ee5779919a4" providerId="LiveId" clId="{B10D17D3-3A51-854C-A635-1C39A202C200}" dt="2023-03-01T07:14:38.928" v="1938" actId="164"/>
-          <ac:spMkLst>
-            <pc:docMk/>
-            <pc:sldMk cId="280619949" sldId="2714"/>
-            <ac:spMk id="7" creationId="{EC866106-2882-0036-D683-EBAC443E2362}"/>
-          </ac:spMkLst>
-        </pc:spChg>
-        <pc:spChg chg="add mod">
-          <ac:chgData name="Xin Luo" userId="82312ee5779919a4" providerId="LiveId" clId="{B10D17D3-3A51-854C-A635-1C39A202C200}" dt="2023-03-01T07:14:38.928" v="1938" actId="164"/>
-          <ac:spMkLst>
-            <pc:docMk/>
-            <pc:sldMk cId="280619949" sldId="2714"/>
-            <ac:spMk id="8" creationId="{0A6B20F1-473E-9B37-69EF-0AD338B6CE5E}"/>
-          </ac:spMkLst>
-        </pc:spChg>
-        <pc:grpChg chg="add mod">
-          <ac:chgData name="Xin Luo" userId="82312ee5779919a4" providerId="LiveId" clId="{B10D17D3-3A51-854C-A635-1C39A202C200}" dt="2023-03-01T07:14:41.232" v="1940" actId="1035"/>
-          <ac:grpSpMkLst>
-            <pc:docMk/>
-            <pc:sldMk cId="280619949" sldId="2714"/>
-            <ac:grpSpMk id="9" creationId="{7C46DFDE-4B13-99B2-6717-B313A96CDC60}"/>
-          </ac:grpSpMkLst>
-        </pc:grpChg>
-        <pc:picChg chg="mod">
-          <ac:chgData name="Xin Luo" userId="82312ee5779919a4" providerId="LiveId" clId="{B10D17D3-3A51-854C-A635-1C39A202C200}" dt="2023-03-01T07:14:38.928" v="1938" actId="164"/>
-          <ac:picMkLst>
-            <pc:docMk/>
-            <pc:sldMk cId="280619949" sldId="2714"/>
-            <ac:picMk id="5" creationId="{0604E948-208D-161C-F579-7EA72A1F42DC}"/>
-          </ac:picMkLst>
-        </pc:picChg>
-      </pc:sldChg>
-      <pc:sldChg chg="modSp mod">
-        <pc:chgData name="Xin Luo" userId="82312ee5779919a4" providerId="LiveId" clId="{B10D17D3-3A51-854C-A635-1C39A202C200}" dt="2023-03-01T06:46:02.276" v="991" actId="1076"/>
-        <pc:sldMkLst>
-          <pc:docMk/>
-          <pc:sldMk cId="3852391939" sldId="2715"/>
-        </pc:sldMkLst>
-        <pc:spChg chg="mod">
-          <ac:chgData name="Xin Luo" userId="82312ee5779919a4" providerId="LiveId" clId="{B10D17D3-3A51-854C-A635-1C39A202C200}" dt="2023-03-01T06:45:33.026" v="990" actId="113"/>
-          <ac:spMkLst>
-            <pc:docMk/>
-            <pc:sldMk cId="3852391939" sldId="2715"/>
-            <ac:spMk id="5" creationId="{FCD10A89-5E0E-5D73-1D4F-9E11D943B29C}"/>
-          </ac:spMkLst>
-        </pc:spChg>
-        <pc:picChg chg="mod">
-          <ac:chgData name="Xin Luo" userId="82312ee5779919a4" providerId="LiveId" clId="{B10D17D3-3A51-854C-A635-1C39A202C200}" dt="2023-03-01T06:46:02.276" v="991" actId="1076"/>
-          <ac:picMkLst>
-            <pc:docMk/>
-            <pc:sldMk cId="3852391939" sldId="2715"/>
-            <ac:picMk id="2050" creationId="{8F8FBDFD-CF37-F4FE-58FA-9350A0CDABC7}"/>
-          </ac:picMkLst>
-        </pc:picChg>
-      </pc:sldChg>
-      <pc:sldChg chg="addSp delSp modSp mod ord">
-        <pc:chgData name="Xin Luo" userId="82312ee5779919a4" providerId="LiveId" clId="{B10D17D3-3A51-854C-A635-1C39A202C200}" dt="2023-03-01T07:52:13.787" v="2795" actId="113"/>
-        <pc:sldMkLst>
-          <pc:docMk/>
-          <pc:sldMk cId="3026715585" sldId="2716"/>
-        </pc:sldMkLst>
-        <pc:spChg chg="mod">
-          <ac:chgData name="Xin Luo" userId="82312ee5779919a4" providerId="LiveId" clId="{B10D17D3-3A51-854C-A635-1C39A202C200}" dt="2023-03-01T07:52:13.787" v="2795" actId="113"/>
-          <ac:spMkLst>
-            <pc:docMk/>
-            <pc:sldMk cId="3026715585" sldId="2716"/>
-            <ac:spMk id="4" creationId="{B31A8325-31D8-6F06-6D89-E39763C56875}"/>
-          </ac:spMkLst>
-        </pc:spChg>
-        <pc:spChg chg="add">
-          <ac:chgData name="Xin Luo" userId="82312ee5779919a4" providerId="LiveId" clId="{B10D17D3-3A51-854C-A635-1C39A202C200}" dt="2023-03-01T06:39:50.043" v="928"/>
-          <ac:spMkLst>
-            <pc:docMk/>
-            <pc:sldMk cId="3026715585" sldId="2716"/>
-            <ac:spMk id="5" creationId="{9FC3EA85-249E-1417-9BEE-658D18412D50}"/>
-          </ac:spMkLst>
-        </pc:spChg>
-        <pc:spChg chg="add mod">
-          <ac:chgData name="Xin Luo" userId="82312ee5779919a4" providerId="LiveId" clId="{B10D17D3-3A51-854C-A635-1C39A202C200}" dt="2023-03-01T06:50:38.874" v="1125" actId="20577"/>
-          <ac:spMkLst>
-            <pc:docMk/>
-            <pc:sldMk cId="3026715585" sldId="2716"/>
-            <ac:spMk id="6" creationId="{A742F445-FD1E-D792-ED2C-06B36B983C52}"/>
-          </ac:spMkLst>
-        </pc:spChg>
-        <pc:spChg chg="del mod">
-          <ac:chgData name="Xin Luo" userId="82312ee5779919a4" providerId="LiveId" clId="{B10D17D3-3A51-854C-A635-1C39A202C200}" dt="2023-03-01T06:34:22.687" v="924" actId="478"/>
-          <ac:spMkLst>
-            <pc:docMk/>
-            <pc:sldMk cId="3026715585" sldId="2716"/>
-            <ac:spMk id="17" creationId="{9E05FFCA-3371-AF5C-381D-71D984055F5A}"/>
-          </ac:spMkLst>
-        </pc:spChg>
-        <pc:picChg chg="add mod">
-          <ac:chgData name="Xin Luo" userId="82312ee5779919a4" providerId="LiveId" clId="{B10D17D3-3A51-854C-A635-1C39A202C200}" dt="2023-03-01T06:47:24.214" v="997" actId="1076"/>
-          <ac:picMkLst>
-            <pc:docMk/>
-            <pc:sldMk cId="3026715585" sldId="2716"/>
-            <ac:picMk id="1028" creationId="{66985166-168F-6888-A257-804014E303E4}"/>
-          </ac:picMkLst>
-        </pc:picChg>
-      </pc:sldChg>
-      <pc:sldChg chg="modSp mod">
-        <pc:chgData name="Xin Luo" userId="82312ee5779919a4" providerId="LiveId" clId="{B10D17D3-3A51-854C-A635-1C39A202C200}" dt="2023-03-01T06:51:03.850" v="1134" actId="113"/>
-        <pc:sldMkLst>
-          <pc:docMk/>
-          <pc:sldMk cId="4136986794" sldId="2717"/>
-        </pc:sldMkLst>
-        <pc:spChg chg="mod">
-          <ac:chgData name="Xin Luo" userId="82312ee5779919a4" providerId="LiveId" clId="{B10D17D3-3A51-854C-A635-1C39A202C200}" dt="2023-03-01T06:51:03.850" v="1134" actId="113"/>
-          <ac:spMkLst>
-            <pc:docMk/>
-            <pc:sldMk cId="4136986794" sldId="2717"/>
-            <ac:spMk id="5" creationId="{FCD10A89-5E0E-5D73-1D4F-9E11D943B29C}"/>
-          </ac:spMkLst>
-        </pc:spChg>
-        <pc:picChg chg="mod">
-          <ac:chgData name="Xin Luo" userId="82312ee5779919a4" providerId="LiveId" clId="{B10D17D3-3A51-854C-A635-1C39A202C200}" dt="2023-03-01T06:50:48.055" v="1127" actId="1076"/>
-          <ac:picMkLst>
-            <pc:docMk/>
-            <pc:sldMk cId="4136986794" sldId="2717"/>
-            <ac:picMk id="6" creationId="{2260B411-AFF0-1E09-142B-45C9F88562F7}"/>
-          </ac:picMkLst>
-        </pc:picChg>
-      </pc:sldChg>
-      <pc:sldChg chg="modSp mod">
-        <pc:chgData name="Xin Luo" userId="82312ee5779919a4" providerId="LiveId" clId="{B10D17D3-3A51-854C-A635-1C39A202C200}" dt="2023-03-01T07:36:29.598" v="2248" actId="14100"/>
-        <pc:sldMkLst>
-          <pc:docMk/>
-          <pc:sldMk cId="1778017482" sldId="2718"/>
-        </pc:sldMkLst>
-        <pc:spChg chg="mod">
-          <ac:chgData name="Xin Luo" userId="82312ee5779919a4" providerId="LiveId" clId="{B10D17D3-3A51-854C-A635-1C39A202C200}" dt="2023-03-01T06:51:18.514" v="1137" actId="255"/>
-          <ac:spMkLst>
-            <pc:docMk/>
-            <pc:sldMk cId="1778017482" sldId="2718"/>
-            <ac:spMk id="5" creationId="{FCD10A89-5E0E-5D73-1D4F-9E11D943B29C}"/>
-          </ac:spMkLst>
-        </pc:spChg>
-        <pc:picChg chg="mod">
-          <ac:chgData name="Xin Luo" userId="82312ee5779919a4" providerId="LiveId" clId="{B10D17D3-3A51-854C-A635-1C39A202C200}" dt="2023-03-01T07:36:29.598" v="2248" actId="14100"/>
-          <ac:picMkLst>
-            <pc:docMk/>
-            <pc:sldMk cId="1778017482" sldId="2718"/>
-            <ac:picMk id="3074" creationId="{3E8CF22C-6E5D-0AAE-1F79-795E8B77EEF7}"/>
-          </ac:picMkLst>
-        </pc:picChg>
-      </pc:sldChg>
-      <pc:sldChg chg="addSp modSp mod">
-        <pc:chgData name="Xin Luo" userId="82312ee5779919a4" providerId="LiveId" clId="{B10D17D3-3A51-854C-A635-1C39A202C200}" dt="2023-03-04T03:02:31.854" v="4924" actId="20577"/>
-        <pc:sldMkLst>
-          <pc:docMk/>
-          <pc:sldMk cId="1858913004" sldId="2719"/>
-        </pc:sldMkLst>
-        <pc:spChg chg="mod">
-          <ac:chgData name="Xin Luo" userId="82312ee5779919a4" providerId="LiveId" clId="{B10D17D3-3A51-854C-A635-1C39A202C200}" dt="2023-03-04T02:35:39.622" v="4451" actId="1035"/>
-          <ac:spMkLst>
-            <pc:docMk/>
-            <pc:sldMk cId="1858913004" sldId="2719"/>
-            <ac:spMk id="2" creationId="{631AADB6-C88A-D817-4683-FC087E4E240F}"/>
-          </ac:spMkLst>
-        </pc:spChg>
-        <pc:spChg chg="add mod">
-          <ac:chgData name="Xin Luo" userId="82312ee5779919a4" providerId="LiveId" clId="{B10D17D3-3A51-854C-A635-1C39A202C200}" dt="2023-03-01T08:54:50.949" v="3823" actId="404"/>
-          <ac:spMkLst>
-            <pc:docMk/>
-            <pc:sldMk cId="1858913004" sldId="2719"/>
-            <ac:spMk id="4" creationId="{814FF4E1-B17F-D4F8-E834-173BA3B0D059}"/>
-          </ac:spMkLst>
-        </pc:spChg>
-        <pc:spChg chg="mod">
-          <ac:chgData name="Xin Luo" userId="82312ee5779919a4" providerId="LiveId" clId="{B10D17D3-3A51-854C-A635-1C39A202C200}" dt="2023-03-04T02:35:30.997" v="4439" actId="1038"/>
-          <ac:spMkLst>
-            <pc:docMk/>
-            <pc:sldMk cId="1858913004" sldId="2719"/>
-            <ac:spMk id="5" creationId="{FCD10A89-5E0E-5D73-1D4F-9E11D943B29C}"/>
-          </ac:spMkLst>
-        </pc:spChg>
-        <pc:spChg chg="add mod">
-          <ac:chgData name="Xin Luo" userId="82312ee5779919a4" providerId="LiveId" clId="{B10D17D3-3A51-854C-A635-1C39A202C200}" dt="2023-03-04T03:02:31.854" v="4924" actId="20577"/>
-          <ac:spMkLst>
-            <pc:docMk/>
-            <pc:sldMk cId="1858913004" sldId="2719"/>
-            <ac:spMk id="6" creationId="{10943A92-9E22-44EA-2939-C64F8E264329}"/>
-          </ac:spMkLst>
-        </pc:spChg>
-      </pc:sldChg>
-      <pc:sldChg chg="modSp del mod">
-        <pc:chgData name="Xin Luo" userId="82312ee5779919a4" providerId="LiveId" clId="{B10D17D3-3A51-854C-A635-1C39A202C200}" dt="2023-03-01T06:31:51.569" v="913" actId="2696"/>
-        <pc:sldMkLst>
-          <pc:docMk/>
-          <pc:sldMk cId="1410676903" sldId="2721"/>
-        </pc:sldMkLst>
-        <pc:spChg chg="mod">
-          <ac:chgData name="Xin Luo" userId="82312ee5779919a4" providerId="LiveId" clId="{B10D17D3-3A51-854C-A635-1C39A202C200}" dt="2023-03-01T06:31:01.523" v="912" actId="1076"/>
-          <ac:spMkLst>
-            <pc:docMk/>
-            <pc:sldMk cId="1410676903" sldId="2721"/>
-            <ac:spMk id="9" creationId="{D5E43916-6543-2664-EE40-07ABFFB01F26}"/>
-          </ac:spMkLst>
-        </pc:spChg>
-        <pc:picChg chg="mod">
-          <ac:chgData name="Xin Luo" userId="82312ee5779919a4" providerId="LiveId" clId="{B10D17D3-3A51-854C-A635-1C39A202C200}" dt="2023-03-01T06:30:57.904" v="911" actId="1076"/>
-          <ac:picMkLst>
-            <pc:docMk/>
-            <pc:sldMk cId="1410676903" sldId="2721"/>
-            <ac:picMk id="8" creationId="{BA45F6EA-D51F-F9F8-F33E-5E3217612D76}"/>
-          </ac:picMkLst>
-        </pc:picChg>
-      </pc:sldChg>
-      <pc:sldChg chg="addSp delSp modSp add mod">
-        <pc:chgData name="Xin Luo" userId="82312ee5779919a4" providerId="LiveId" clId="{B10D17D3-3A51-854C-A635-1C39A202C200}" dt="2023-03-01T07:37:11.730" v="2251" actId="478"/>
-        <pc:sldMkLst>
-          <pc:docMk/>
-          <pc:sldMk cId="295872025" sldId="2722"/>
-        </pc:sldMkLst>
-        <pc:spChg chg="add del mod">
-          <ac:chgData name="Xin Luo" userId="82312ee5779919a4" providerId="LiveId" clId="{B10D17D3-3A51-854C-A635-1C39A202C200}" dt="2023-03-01T07:37:11.730" v="2251" actId="478"/>
-          <ac:spMkLst>
-            <pc:docMk/>
-            <pc:sldMk cId="295872025" sldId="2722"/>
-            <ac:spMk id="2" creationId="{1B26B48C-9811-89AB-3B65-3E6557BF8546}"/>
-          </ac:spMkLst>
-        </pc:spChg>
-        <pc:spChg chg="mod">
-          <ac:chgData name="Xin Luo" userId="82312ee5779919a4" providerId="LiveId" clId="{B10D17D3-3A51-854C-A635-1C39A202C200}" dt="2023-03-01T03:12:16.184" v="288" actId="20577"/>
-          <ac:spMkLst>
-            <pc:docMk/>
-            <pc:sldMk cId="295872025" sldId="2722"/>
-            <ac:spMk id="12" creationId="{00000000-0000-0000-0000-000000000000}"/>
-          </ac:spMkLst>
-        </pc:spChg>
-        <pc:spChg chg="mod">
-          <ac:chgData name="Xin Luo" userId="82312ee5779919a4" providerId="LiveId" clId="{B10D17D3-3A51-854C-A635-1C39A202C200}" dt="2023-03-01T03:21:17.754" v="890" actId="20577"/>
-          <ac:spMkLst>
-            <pc:docMk/>
-            <pc:sldMk cId="295872025" sldId="2722"/>
-            <ac:spMk id="14" creationId="{00000000-0000-0000-0000-000000000000}"/>
-          </ac:spMkLst>
-        </pc:spChg>
-        <pc:spChg chg="mod">
-          <ac:chgData name="Xin Luo" userId="82312ee5779919a4" providerId="LiveId" clId="{B10D17D3-3A51-854C-A635-1C39A202C200}" dt="2023-03-01T07:37:07.662" v="2249" actId="1076"/>
-          <ac:spMkLst>
-            <pc:docMk/>
-            <pc:sldMk cId="295872025" sldId="2722"/>
-            <ac:spMk id="19" creationId="{00000000-0000-0000-0000-000000000000}"/>
-          </ac:spMkLst>
-        </pc:spChg>
-      </pc:sldChg>
-      <pc:sldChg chg="add del">
-        <pc:chgData name="Xin Luo" userId="82312ee5779919a4" providerId="LiveId" clId="{B10D17D3-3A51-854C-A635-1C39A202C200}" dt="2023-03-01T03:11:46.236" v="248"/>
-        <pc:sldMkLst>
-          <pc:docMk/>
-          <pc:sldMk cId="3482772982" sldId="2722"/>
-        </pc:sldMkLst>
-      </pc:sldChg>
-      <pc:sldChg chg="addSp delSp modSp add mod ord">
-        <pc:chgData name="Xin Luo" userId="82312ee5779919a4" providerId="LiveId" clId="{B10D17D3-3A51-854C-A635-1C39A202C200}" dt="2023-03-01T07:02:34.534" v="1561" actId="1035"/>
-        <pc:sldMkLst>
-          <pc:docMk/>
-          <pc:sldMk cId="769179569" sldId="2723"/>
-        </pc:sldMkLst>
-        <pc:spChg chg="del">
-          <ac:chgData name="Xin Luo" userId="82312ee5779919a4" providerId="LiveId" clId="{B10D17D3-3A51-854C-A635-1C39A202C200}" dt="2023-03-01T06:32:32.946" v="917" actId="478"/>
-          <ac:spMkLst>
-            <pc:docMk/>
-            <pc:sldMk cId="769179569" sldId="2723"/>
-            <ac:spMk id="4" creationId="{B31A8325-31D8-6F06-6D89-E39763C56875}"/>
-          </ac:spMkLst>
-        </pc:spChg>
-        <pc:spChg chg="mod">
-          <ac:chgData name="Xin Luo" userId="82312ee5779919a4" providerId="LiveId" clId="{B10D17D3-3A51-854C-A635-1C39A202C200}" dt="2023-03-01T07:02:34.534" v="1561" actId="1035"/>
-          <ac:spMkLst>
-            <pc:docMk/>
-            <pc:sldMk cId="769179569" sldId="2723"/>
-            <ac:spMk id="17" creationId="{9E05FFCA-3371-AF5C-381D-71D984055F5A}"/>
-          </ac:spMkLst>
-        </pc:spChg>
-        <pc:picChg chg="add mod">
-          <ac:chgData name="Xin Luo" userId="82312ee5779919a4" providerId="LiveId" clId="{B10D17D3-3A51-854C-A635-1C39A202C200}" dt="2023-03-01T06:33:34.384" v="922" actId="1076"/>
-          <ac:picMkLst>
-            <pc:docMk/>
-            <pc:sldMk cId="769179569" sldId="2723"/>
-            <ac:picMk id="6" creationId="{E48B3BDE-9687-B26A-07FC-D08825F4C5C7}"/>
-          </ac:picMkLst>
-        </pc:picChg>
-      </pc:sldChg>
-      <pc:sldChg chg="addSp delSp modSp add del mod">
-        <pc:chgData name="Xin Luo" userId="82312ee5779919a4" providerId="LiveId" clId="{B10D17D3-3A51-854C-A635-1C39A202C200}" dt="2023-03-04T02:00:43.985" v="3977" actId="2696"/>
-        <pc:sldMkLst>
-          <pc:docMk/>
-          <pc:sldMk cId="2179406886" sldId="2724"/>
-        </pc:sldMkLst>
-        <pc:spChg chg="del">
-          <ac:chgData name="Xin Luo" userId="82312ee5779919a4" providerId="LiveId" clId="{B10D17D3-3A51-854C-A635-1C39A202C200}" dt="2023-03-01T06:52:19.045" v="1173" actId="478"/>
-          <ac:spMkLst>
-            <pc:docMk/>
-            <pc:sldMk cId="2179406886" sldId="2724"/>
-            <ac:spMk id="4" creationId="{58EE51E5-8ACA-984C-6E8D-F8AA658223AD}"/>
-          </ac:spMkLst>
-        </pc:spChg>
-        <pc:spChg chg="del mod">
-          <ac:chgData name="Xin Luo" userId="82312ee5779919a4" providerId="LiveId" clId="{B10D17D3-3A51-854C-A635-1C39A202C200}" dt="2023-03-01T06:52:23.892" v="1175" actId="478"/>
-          <ac:spMkLst>
-            <pc:docMk/>
-            <pc:sldMk cId="2179406886" sldId="2724"/>
-            <ac:spMk id="5" creationId="{7F4897FB-F086-F339-A15F-A899143C7919}"/>
-          </ac:spMkLst>
-        </pc:spChg>
-        <pc:spChg chg="del">
-          <ac:chgData name="Xin Luo" userId="82312ee5779919a4" providerId="LiveId" clId="{B10D17D3-3A51-854C-A635-1C39A202C200}" dt="2023-03-01T06:52:17.227" v="1172" actId="478"/>
-          <ac:spMkLst>
-            <pc:docMk/>
-            <pc:sldMk cId="2179406886" sldId="2724"/>
-            <ac:spMk id="6" creationId="{7ED1482E-3610-E252-0E80-41B202D30E30}"/>
-          </ac:spMkLst>
-        </pc:spChg>
-        <pc:spChg chg="add mod">
-          <ac:chgData name="Xin Luo" userId="82312ee5779919a4" providerId="LiveId" clId="{B10D17D3-3A51-854C-A635-1C39A202C200}" dt="2023-03-01T06:59:49.895" v="1509" actId="1035"/>
-          <ac:spMkLst>
-            <pc:docMk/>
-            <pc:sldMk cId="2179406886" sldId="2724"/>
-            <ac:spMk id="7" creationId="{CCA3837E-1D09-5134-A225-250CEF7F9C13}"/>
-          </ac:spMkLst>
-        </pc:spChg>
-        <pc:picChg chg="del">
-          <ac:chgData name="Xin Luo" userId="82312ee5779919a4" providerId="LiveId" clId="{B10D17D3-3A51-854C-A635-1C39A202C200}" dt="2023-03-01T06:52:12.055" v="1170" actId="478"/>
-          <ac:picMkLst>
-            <pc:docMk/>
-            <pc:sldMk cId="2179406886" sldId="2724"/>
-            <ac:picMk id="5124" creationId="{D17BE6F3-1008-2FC6-54D2-736C673B73E8}"/>
-          </ac:picMkLst>
-        </pc:picChg>
-        <pc:picChg chg="mod">
-          <ac:chgData name="Xin Luo" userId="82312ee5779919a4" providerId="LiveId" clId="{B10D17D3-3A51-854C-A635-1C39A202C200}" dt="2023-03-01T06:59:51.894" v="1510" actId="1076"/>
-          <ac:picMkLst>
-            <pc:docMk/>
-            <pc:sldMk cId="2179406886" sldId="2724"/>
-            <ac:picMk id="5126" creationId="{EBB0C876-4E86-C2ED-5EE6-3B2BD26768B9}"/>
-          </ac:picMkLst>
-        </pc:picChg>
-        <pc:picChg chg="del">
-          <ac:chgData name="Xin Luo" userId="82312ee5779919a4" providerId="LiveId" clId="{B10D17D3-3A51-854C-A635-1C39A202C200}" dt="2023-03-01T06:52:15.250" v="1171" actId="478"/>
-          <ac:picMkLst>
-            <pc:docMk/>
-            <pc:sldMk cId="2179406886" sldId="2724"/>
-            <ac:picMk id="5128" creationId="{59C29F54-F731-6EBD-ECA9-847BE3563121}"/>
-          </ac:picMkLst>
-        </pc:picChg>
-      </pc:sldChg>
-      <pc:sldChg chg="addSp delSp modSp add mod">
-        <pc:chgData name="Xin Luo" userId="82312ee5779919a4" providerId="LiveId" clId="{B10D17D3-3A51-854C-A635-1C39A202C200}" dt="2023-03-04T02:34:13.611" v="4393" actId="1035"/>
-        <pc:sldMkLst>
-          <pc:docMk/>
-          <pc:sldMk cId="57442970" sldId="2725"/>
-        </pc:sldMkLst>
-        <pc:spChg chg="mod">
-          <ac:chgData name="Xin Luo" userId="82312ee5779919a4" providerId="LiveId" clId="{B10D17D3-3A51-854C-A635-1C39A202C200}" dt="2023-03-04T02:32:01.973" v="4385" actId="403"/>
-          <ac:spMkLst>
-            <pc:docMk/>
-            <pc:sldMk cId="57442970" sldId="2725"/>
-            <ac:spMk id="2" creationId="{631AADB6-C88A-D817-4683-FC087E4E240F}"/>
-          </ac:spMkLst>
-        </pc:spChg>
-        <pc:spChg chg="add del mod">
-          <ac:chgData name="Xin Luo" userId="82312ee5779919a4" providerId="LiveId" clId="{B10D17D3-3A51-854C-A635-1C39A202C200}" dt="2023-03-01T07:09:00.564" v="1684" actId="478"/>
-          <ac:spMkLst>
-            <pc:docMk/>
-            <pc:sldMk cId="57442970" sldId="2725"/>
-            <ac:spMk id="4" creationId="{6E0E7525-DD48-9BE0-AA55-4AB1B5AB0AF8}"/>
-          </ac:spMkLst>
-        </pc:spChg>
-        <pc:spChg chg="add del mod">
-          <ac:chgData name="Xin Luo" userId="82312ee5779919a4" providerId="LiveId" clId="{B10D17D3-3A51-854C-A635-1C39A202C200}" dt="2023-03-01T07:51:00.839" v="2794" actId="478"/>
-          <ac:spMkLst>
-            <pc:docMk/>
-            <pc:sldMk cId="57442970" sldId="2725"/>
-            <ac:spMk id="4" creationId="{7154FD73-ECDF-6A1F-E3C5-6D6473CC5410}"/>
-          </ac:spMkLst>
-        </pc:spChg>
-        <pc:spChg chg="add mod">
-          <ac:chgData name="Xin Luo" userId="82312ee5779919a4" providerId="LiveId" clId="{B10D17D3-3A51-854C-A635-1C39A202C200}" dt="2023-03-01T07:14:15.793" v="1936" actId="1035"/>
-          <ac:spMkLst>
-            <pc:docMk/>
-            <pc:sldMk cId="57442970" sldId="2725"/>
-            <ac:spMk id="7" creationId="{62959DC6-89B8-A589-6622-E3331C39FC3C}"/>
-          </ac:spMkLst>
-        </pc:spChg>
-        <pc:picChg chg="add mod">
-          <ac:chgData name="Xin Luo" userId="82312ee5779919a4" providerId="LiveId" clId="{B10D17D3-3A51-854C-A635-1C39A202C200}" dt="2023-03-04T02:34:13.611" v="4393" actId="1035"/>
-          <ac:picMkLst>
-            <pc:docMk/>
-            <pc:sldMk cId="57442970" sldId="2725"/>
-            <ac:picMk id="6" creationId="{9183A3DA-EFC1-4E1A-414F-651FFAB091D0}"/>
-          </ac:picMkLst>
-        </pc:picChg>
-      </pc:sldChg>
-      <pc:sldChg chg="add del">
-        <pc:chgData name="Xin Luo" userId="82312ee5779919a4" providerId="LiveId" clId="{B10D17D3-3A51-854C-A635-1C39A202C200}" dt="2023-03-01T07:05:06.405" v="1598"/>
-        <pc:sldMkLst>
-          <pc:docMk/>
-          <pc:sldMk cId="4175269822" sldId="2725"/>
-        </pc:sldMkLst>
-      </pc:sldChg>
-      <pc:sldChg chg="add del">
-        <pc:chgData name="Xin Luo" userId="82312ee5779919a4" providerId="LiveId" clId="{B10D17D3-3A51-854C-A635-1C39A202C200}" dt="2023-03-01T07:33:58.417" v="1999" actId="2696"/>
-        <pc:sldMkLst>
-          <pc:docMk/>
-          <pc:sldMk cId="2037340697" sldId="2726"/>
-        </pc:sldMkLst>
-      </pc:sldChg>
-      <pc:sldChg chg="modSp add del mod">
-        <pc:chgData name="Xin Luo" userId="82312ee5779919a4" providerId="LiveId" clId="{B10D17D3-3A51-854C-A635-1C39A202C200}" dt="2023-03-01T07:37:39.242" v="2283" actId="2696"/>
-        <pc:sldMkLst>
-          <pc:docMk/>
-          <pc:sldMk cId="2258735290" sldId="2726"/>
-        </pc:sldMkLst>
-        <pc:spChg chg="mod">
-          <ac:chgData name="Xin Luo" userId="82312ee5779919a4" providerId="LiveId" clId="{B10D17D3-3A51-854C-A635-1C39A202C200}" dt="2023-03-01T07:37:23.915" v="2262" actId="20577"/>
-          <ac:spMkLst>
-            <pc:docMk/>
-            <pc:sldMk cId="2258735290" sldId="2726"/>
-            <ac:spMk id="12" creationId="{00000000-0000-0000-0000-000000000000}"/>
-          </ac:spMkLst>
-        </pc:spChg>
-        <pc:spChg chg="mod">
-          <ac:chgData name="Xin Luo" userId="82312ee5779919a4" providerId="LiveId" clId="{B10D17D3-3A51-854C-A635-1C39A202C200}" dt="2023-03-01T07:37:34.195" v="2282" actId="20577"/>
-          <ac:spMkLst>
-            <pc:docMk/>
-            <pc:sldMk cId="2258735290" sldId="2726"/>
-            <ac:spMk id="14" creationId="{00000000-0000-0000-0000-000000000000}"/>
-          </ac:spMkLst>
-        </pc:spChg>
-      </pc:sldChg>
-      <pc:sldChg chg="modSp add mod">
-        <pc:chgData name="Xin Luo" userId="82312ee5779919a4" providerId="LiveId" clId="{B10D17D3-3A51-854C-A635-1C39A202C200}" dt="2023-03-04T02:20:01.519" v="4120" actId="113"/>
-        <pc:sldMkLst>
-          <pc:docMk/>
-          <pc:sldMk cId="4114066566" sldId="2726"/>
-        </pc:sldMkLst>
-        <pc:spChg chg="mod">
-          <ac:chgData name="Xin Luo" userId="82312ee5779919a4" providerId="LiveId" clId="{B10D17D3-3A51-854C-A635-1C39A202C200}" dt="2023-03-01T07:41:27.034" v="2495" actId="1035"/>
-          <ac:spMkLst>
-            <pc:docMk/>
-            <pc:sldMk cId="4114066566" sldId="2726"/>
-            <ac:spMk id="4" creationId="{DFE91C0B-C9F8-3FEC-3419-2DE0C6E6DCB8}"/>
-          </ac:spMkLst>
-        </pc:spChg>
-        <pc:spChg chg="mod">
-          <ac:chgData name="Xin Luo" userId="82312ee5779919a4" providerId="LiveId" clId="{B10D17D3-3A51-854C-A635-1C39A202C200}" dt="2023-03-04T02:20:01.519" v="4120" actId="113"/>
-          <ac:spMkLst>
-            <pc:docMk/>
-            <pc:sldMk cId="4114066566" sldId="2726"/>
-            <ac:spMk id="17" creationId="{9E05FFCA-3371-AF5C-381D-71D984055F5A}"/>
-          </ac:spMkLst>
-        </pc:spChg>
-      </pc:sldChg>
-      <pc:sldChg chg="addSp delSp modSp add mod ord">
-        <pc:chgData name="Xin Luo" userId="82312ee5779919a4" providerId="LiveId" clId="{B10D17D3-3A51-854C-A635-1C39A202C200}" dt="2023-03-04T02:22:49.634" v="4156" actId="20577"/>
-        <pc:sldMkLst>
-          <pc:docMk/>
-          <pc:sldMk cId="623131075" sldId="2727"/>
-        </pc:sldMkLst>
-        <pc:spChg chg="add del mod">
-          <ac:chgData name="Xin Luo" userId="82312ee5779919a4" providerId="LiveId" clId="{B10D17D3-3A51-854C-A635-1C39A202C200}" dt="2023-03-04T02:21:43.886" v="4131" actId="478"/>
-          <ac:spMkLst>
-            <pc:docMk/>
-            <pc:sldMk cId="623131075" sldId="2727"/>
-            <ac:spMk id="5" creationId="{913214EF-BBA3-95BD-757D-C451E214DD76}"/>
-          </ac:spMkLst>
-        </pc:spChg>
-        <pc:spChg chg="mod">
-          <ac:chgData name="Xin Luo" userId="82312ee5779919a4" providerId="LiveId" clId="{B10D17D3-3A51-854C-A635-1C39A202C200}" dt="2023-03-04T02:22:49.634" v="4156" actId="20577"/>
-          <ac:spMkLst>
-            <pc:docMk/>
-            <pc:sldMk cId="623131075" sldId="2727"/>
-            <ac:spMk id="17" creationId="{9E05FFCA-3371-AF5C-381D-71D984055F5A}"/>
-          </ac:spMkLst>
-        </pc:spChg>
-      </pc:sldChg>
-      <pc:sldChg chg="addSp delSp modSp add mod">
-        <pc:chgData name="Xin Luo" userId="82312ee5779919a4" providerId="LiveId" clId="{B10D17D3-3A51-854C-A635-1C39A202C200}" dt="2023-03-04T02:25:34.886" v="4245" actId="113"/>
-        <pc:sldMkLst>
-          <pc:docMk/>
-          <pc:sldMk cId="1683372320" sldId="2728"/>
-        </pc:sldMkLst>
-        <pc:spChg chg="mod">
-          <ac:chgData name="Xin Luo" userId="82312ee5779919a4" providerId="LiveId" clId="{B10D17D3-3A51-854C-A635-1C39A202C200}" dt="2023-03-01T08:15:30.267" v="2797" actId="2711"/>
-          <ac:spMkLst>
-            <pc:docMk/>
-            <pc:sldMk cId="1683372320" sldId="2728"/>
-            <ac:spMk id="3" creationId="{00000000-0000-0000-0000-000000000000}"/>
-          </ac:spMkLst>
-        </pc:spChg>
-        <pc:spChg chg="mod">
-          <ac:chgData name="Xin Luo" userId="82312ee5779919a4" providerId="LiveId" clId="{B10D17D3-3A51-854C-A635-1C39A202C200}" dt="2023-03-04T02:15:35.388" v="4029" actId="20577"/>
-          <ac:spMkLst>
-            <pc:docMk/>
-            <pc:sldMk cId="1683372320" sldId="2728"/>
-            <ac:spMk id="4" creationId="{DFE91C0B-C9F8-3FEC-3419-2DE0C6E6DCB8}"/>
-          </ac:spMkLst>
-        </pc:spChg>
-        <pc:spChg chg="add del mod">
-          <ac:chgData name="Xin Luo" userId="82312ee5779919a4" providerId="LiveId" clId="{B10D17D3-3A51-854C-A635-1C39A202C200}" dt="2023-03-04T02:23:31.141" v="4167" actId="478"/>
-          <ac:spMkLst>
-            <pc:docMk/>
-            <pc:sldMk cId="1683372320" sldId="2728"/>
-            <ac:spMk id="5" creationId="{1B0BE935-AC9C-D1EE-AD6A-7C386013DA7C}"/>
-          </ac:spMkLst>
-        </pc:spChg>
-        <pc:spChg chg="add mod">
-          <ac:chgData name="Xin Luo" userId="82312ee5779919a4" providerId="LiveId" clId="{B10D17D3-3A51-854C-A635-1C39A202C200}" dt="2023-03-04T02:25:34.886" v="4245" actId="113"/>
-          <ac:spMkLst>
-            <pc:docMk/>
-            <pc:sldMk cId="1683372320" sldId="2728"/>
-            <ac:spMk id="6" creationId="{2CCD6DA1-1437-AB5B-BCA8-405D548B2FB8}"/>
-          </ac:spMkLst>
-        </pc:spChg>
-        <pc:spChg chg="add del mod">
-          <ac:chgData name="Xin Luo" userId="82312ee5779919a4" providerId="LiveId" clId="{B10D17D3-3A51-854C-A635-1C39A202C200}" dt="2023-03-04T02:23:31.141" v="4167" actId="478"/>
-          <ac:spMkLst>
-            <pc:docMk/>
-            <pc:sldMk cId="1683372320" sldId="2728"/>
-            <ac:spMk id="7" creationId="{8A9C6DE8-75E5-EEB7-75DA-B8E0E87A7508}"/>
-          </ac:spMkLst>
-        </pc:spChg>
-        <pc:spChg chg="del mod">
-          <ac:chgData name="Xin Luo" userId="82312ee5779919a4" providerId="LiveId" clId="{B10D17D3-3A51-854C-A635-1C39A202C200}" dt="2023-03-04T02:15:38.307" v="4030" actId="478"/>
-          <ac:spMkLst>
-            <pc:docMk/>
-            <pc:sldMk cId="1683372320" sldId="2728"/>
-            <ac:spMk id="17" creationId="{9E05FFCA-3371-AF5C-381D-71D984055F5A}"/>
-          </ac:spMkLst>
-        </pc:spChg>
-      </pc:sldChg>
-      <pc:sldChg chg="delSp modSp add mod">
-        <pc:chgData name="Xin Luo" userId="82312ee5779919a4" providerId="LiveId" clId="{B10D17D3-3A51-854C-A635-1C39A202C200}" dt="2023-03-04T02:52:21.019" v="4898" actId="20577"/>
-        <pc:sldMkLst>
-          <pc:docMk/>
-          <pc:sldMk cId="240261692" sldId="2729"/>
-        </pc:sldMkLst>
-        <pc:spChg chg="mod">
-          <ac:chgData name="Xin Luo" userId="82312ee5779919a4" providerId="LiveId" clId="{B10D17D3-3A51-854C-A635-1C39A202C200}" dt="2023-03-01T08:35:17.222" v="2819" actId="20577"/>
-          <ac:spMkLst>
-            <pc:docMk/>
-            <pc:sldMk cId="240261692" sldId="2729"/>
-            <ac:spMk id="2" creationId="{631AADB6-C88A-D817-4683-FC087E4E240F}"/>
-          </ac:spMkLst>
-        </pc:spChg>
-        <pc:spChg chg="mod">
-          <ac:chgData name="Xin Luo" userId="82312ee5779919a4" providerId="LiveId" clId="{B10D17D3-3A51-854C-A635-1C39A202C200}" dt="2023-03-04T02:52:21.019" v="4898" actId="20577"/>
-          <ac:spMkLst>
-            <pc:docMk/>
-            <pc:sldMk cId="240261692" sldId="2729"/>
-            <ac:spMk id="5" creationId="{FCD10A89-5E0E-5D73-1D4F-9E11D943B29C}"/>
-          </ac:spMkLst>
-        </pc:spChg>
-        <pc:picChg chg="del">
-          <ac:chgData name="Xin Luo" userId="82312ee5779919a4" providerId="LiveId" clId="{B10D17D3-3A51-854C-A635-1C39A202C200}" dt="2023-03-01T08:35:20.583" v="2820" actId="478"/>
-          <ac:picMkLst>
-            <pc:docMk/>
-            <pc:sldMk cId="240261692" sldId="2729"/>
-            <ac:picMk id="3074" creationId="{3E8CF22C-6E5D-0AAE-1F79-795E8B77EEF7}"/>
-          </ac:picMkLst>
-        </pc:picChg>
-      </pc:sldChg>
-      <pc:sldChg chg="delSp add mod">
-        <pc:chgData name="Xin Luo" userId="82312ee5779919a4" providerId="LiveId" clId="{B10D17D3-3A51-854C-A635-1C39A202C200}" dt="2023-03-04T02:21:28.084" v="4127" actId="478"/>
-        <pc:sldMkLst>
-          <pc:docMk/>
-          <pc:sldMk cId="736914780" sldId="2730"/>
-        </pc:sldMkLst>
-        <pc:spChg chg="del">
-          <ac:chgData name="Xin Luo" userId="82312ee5779919a4" providerId="LiveId" clId="{B10D17D3-3A51-854C-A635-1C39A202C200}" dt="2023-03-04T02:21:28.084" v="4127" actId="478"/>
-          <ac:spMkLst>
-            <pc:docMk/>
-            <pc:sldMk cId="736914780" sldId="2730"/>
-            <ac:spMk id="5" creationId="{913214EF-BBA3-95BD-757D-C451E214DD76}"/>
-          </ac:spMkLst>
-        </pc:spChg>
-      </pc:sldChg>
-      <pc:sldChg chg="addSp delSp modSp add mod">
-        <pc:chgData name="Xin Luo" userId="82312ee5779919a4" providerId="LiveId" clId="{B10D17D3-3A51-854C-A635-1C39A202C200}" dt="2023-03-04T03:51:10.104" v="4946" actId="20577"/>
-        <pc:sldMkLst>
-          <pc:docMk/>
-          <pc:sldMk cId="3309691984" sldId="2731"/>
-        </pc:sldMkLst>
-        <pc:spChg chg="add del mod">
-          <ac:chgData name="Xin Luo" userId="82312ee5779919a4" providerId="LiveId" clId="{B10D17D3-3A51-854C-A635-1C39A202C200}" dt="2023-03-04T02:30:44.123" v="4384"/>
-          <ac:spMkLst>
-            <pc:docMk/>
-            <pc:sldMk cId="3309691984" sldId="2731"/>
-            <ac:spMk id="2" creationId="{089F4E60-62E0-2B9F-D522-F40E6CF74A6E}"/>
-          </ac:spMkLst>
-        </pc:spChg>
-        <pc:spChg chg="mod">
-          <ac:chgData name="Xin Luo" userId="82312ee5779919a4" providerId="LiveId" clId="{B10D17D3-3A51-854C-A635-1C39A202C200}" dt="2023-03-04T02:26:05.734" v="4271" actId="20577"/>
-          <ac:spMkLst>
-            <pc:docMk/>
-            <pc:sldMk cId="3309691984" sldId="2731"/>
-            <ac:spMk id="4" creationId="{DFE91C0B-C9F8-3FEC-3419-2DE0C6E6DCB8}"/>
-          </ac:spMkLst>
-        </pc:spChg>
-        <pc:spChg chg="mod">
-          <ac:chgData name="Xin Luo" userId="82312ee5779919a4" providerId="LiveId" clId="{B10D17D3-3A51-854C-A635-1C39A202C200}" dt="2023-03-04T03:51:10.104" v="4946" actId="20577"/>
-          <ac:spMkLst>
-            <pc:docMk/>
-            <pc:sldMk cId="3309691984" sldId="2731"/>
-            <ac:spMk id="5" creationId="{1B0BE935-AC9C-D1EE-AD6A-7C386013DA7C}"/>
-          </ac:spMkLst>
-        </pc:spChg>
-        <pc:spChg chg="del">
-          <ac:chgData name="Xin Luo" userId="82312ee5779919a4" providerId="LiveId" clId="{B10D17D3-3A51-854C-A635-1C39A202C200}" dt="2023-03-04T02:23:28.089" v="4166" actId="478"/>
-          <ac:spMkLst>
-            <pc:docMk/>
-            <pc:sldMk cId="3309691984" sldId="2731"/>
-            <ac:spMk id="6" creationId="{2CCD6DA1-1437-AB5B-BCA8-405D548B2FB8}"/>
-          </ac:spMkLst>
-        </pc:spChg>
-        <pc:spChg chg="del">
-          <ac:chgData name="Xin Luo" userId="82312ee5779919a4" providerId="LiveId" clId="{B10D17D3-3A51-854C-A635-1C39A202C200}" dt="2023-03-04T02:25:55.810" v="4256" actId="478"/>
-          <ac:spMkLst>
-            <pc:docMk/>
-            <pc:sldMk cId="3309691984" sldId="2731"/>
-            <ac:spMk id="7" creationId="{8A9C6DE8-75E5-EEB7-75DA-B8E0E87A7508}"/>
-          </ac:spMkLst>
-        </pc:spChg>
-      </pc:sldChg>
-      <pc:sldChg chg="add del">
-        <pc:chgData name="Xin Luo" userId="82312ee5779919a4" providerId="LiveId" clId="{B10D17D3-3A51-854C-A635-1C39A202C200}" dt="2023-03-04T02:23:57.461" v="4178"/>
-        <pc:sldMkLst>
-          <pc:docMk/>
-          <pc:sldMk cId="636882973" sldId="2732"/>
-        </pc:sldMkLst>
-      </pc:sldChg>
-      <pc:sldChg chg="addSp modSp add mod">
-        <pc:chgData name="Xin Luo" userId="82312ee5779919a4" providerId="LiveId" clId="{B10D17D3-3A51-854C-A635-1C39A202C200}" dt="2023-03-04T02:45:16.670" v="4844" actId="1035"/>
-        <pc:sldMkLst>
-          <pc:docMk/>
-          <pc:sldMk cId="1199790559" sldId="2732"/>
-        </pc:sldMkLst>
-        <pc:spChg chg="mod">
-          <ac:chgData name="Xin Luo" userId="82312ee5779919a4" providerId="LiveId" clId="{B10D17D3-3A51-854C-A635-1C39A202C200}" dt="2023-03-04T02:36:32.822" v="4507" actId="20577"/>
-          <ac:spMkLst>
-            <pc:docMk/>
-            <pc:sldMk cId="1199790559" sldId="2732"/>
-            <ac:spMk id="5" creationId="{FCD10A89-5E0E-5D73-1D4F-9E11D943B29C}"/>
-          </ac:spMkLst>
-        </pc:spChg>
-        <pc:spChg chg="add mod">
-          <ac:chgData name="Xin Luo" userId="82312ee5779919a4" providerId="LiveId" clId="{B10D17D3-3A51-854C-A635-1C39A202C200}" dt="2023-03-04T02:45:16.670" v="4844" actId="1035"/>
-          <ac:spMkLst>
-            <pc:docMk/>
-            <pc:sldMk cId="1199790559" sldId="2732"/>
-            <ac:spMk id="9" creationId="{D0806663-124A-FC93-799D-3E9155542C92}"/>
-          </ac:spMkLst>
-        </pc:spChg>
-        <pc:picChg chg="add mod">
-          <ac:chgData name="Xin Luo" userId="82312ee5779919a4" providerId="LiveId" clId="{B10D17D3-3A51-854C-A635-1C39A202C200}" dt="2023-03-04T02:45:16.670" v="4844" actId="1035"/>
-          <ac:picMkLst>
-            <pc:docMk/>
-            <pc:sldMk cId="1199790559" sldId="2732"/>
-            <ac:picMk id="6" creationId="{2DBA9CB4-7F2C-2F79-C8F7-B159ED2F97ED}"/>
-          </ac:picMkLst>
-        </pc:picChg>
-        <pc:picChg chg="add mod">
-          <ac:chgData name="Xin Luo" userId="82312ee5779919a4" providerId="LiveId" clId="{B10D17D3-3A51-854C-A635-1C39A202C200}" dt="2023-03-04T02:45:16.670" v="4844" actId="1035"/>
-          <ac:picMkLst>
-            <pc:docMk/>
-            <pc:sldMk cId="1199790559" sldId="2732"/>
-            <ac:picMk id="8" creationId="{03B7A21D-1E22-BD59-B187-8F6FC3C70FAD}"/>
-          </ac:picMkLst>
-        </pc:picChg>
-      </pc:sldChg>
-      <pc:sldChg chg="add del">
-        <pc:chgData name="Xin Luo" userId="82312ee5779919a4" providerId="LiveId" clId="{B10D17D3-3A51-854C-A635-1C39A202C200}" dt="2023-03-04T02:23:46.363" v="4174"/>
-        <pc:sldMkLst>
-          <pc:docMk/>
-          <pc:sldMk cId="1709681614" sldId="2732"/>
-        </pc:sldMkLst>
-      </pc:sldChg>
-      <pc:sldChg chg="add del">
-        <pc:chgData name="Xin Luo" userId="82312ee5779919a4" providerId="LiveId" clId="{B10D17D3-3A51-854C-A635-1C39A202C200}" dt="2023-03-04T02:23:42.217" v="4171"/>
-        <pc:sldMkLst>
-          <pc:docMk/>
-          <pc:sldMk cId="1869539113" sldId="2732"/>
-        </pc:sldMkLst>
-      </pc:sldChg>
-      <pc:sldChg chg="add del">
-        <pc:chgData name="Xin Luo" userId="82312ee5779919a4" providerId="LiveId" clId="{B10D17D3-3A51-854C-A635-1C39A202C200}" dt="2023-03-04T02:24:00.681" v="4180"/>
-        <pc:sldMkLst>
-          <pc:docMk/>
-          <pc:sldMk cId="2562253795" sldId="2732"/>
-        </pc:sldMkLst>
-      </pc:sldChg>
-      <pc:sldChg chg="add del">
-        <pc:chgData name="Xin Luo" userId="82312ee5779919a4" providerId="LiveId" clId="{B10D17D3-3A51-854C-A635-1C39A202C200}" dt="2023-03-04T02:24:05.543" v="4182"/>
-        <pc:sldMkLst>
-          <pc:docMk/>
-          <pc:sldMk cId="4062346908" sldId="2732"/>
-        </pc:sldMkLst>
-      </pc:sldChg>
-      <pc:sldChg chg="addSp delSp modSp add mod">
-        <pc:chgData name="Xin Luo" userId="82312ee5779919a4" providerId="LiveId" clId="{B10D17D3-3A51-854C-A635-1C39A202C200}" dt="2023-03-04T02:54:53.881" v="4905" actId="1076"/>
-        <pc:sldMkLst>
-          <pc:docMk/>
-          <pc:sldMk cId="3625541778" sldId="2733"/>
-        </pc:sldMkLst>
-        <pc:spChg chg="mod">
-          <ac:chgData name="Xin Luo" userId="82312ee5779919a4" providerId="LiveId" clId="{B10D17D3-3A51-854C-A635-1C39A202C200}" dt="2023-03-04T02:53:09.195" v="4899"/>
-          <ac:spMkLst>
-            <pc:docMk/>
-            <pc:sldMk cId="3625541778" sldId="2733"/>
-            <ac:spMk id="5" creationId="{FCD10A89-5E0E-5D73-1D4F-9E11D943B29C}"/>
-          </ac:spMkLst>
-        </pc:spChg>
-        <pc:spChg chg="del">
-          <ac:chgData name="Xin Luo" userId="82312ee5779919a4" providerId="LiveId" clId="{B10D17D3-3A51-854C-A635-1C39A202C200}" dt="2023-03-04T02:46:11.998" v="4878" actId="478"/>
-          <ac:spMkLst>
-            <pc:docMk/>
-            <pc:sldMk cId="3625541778" sldId="2733"/>
-            <ac:spMk id="9" creationId="{D0806663-124A-FC93-799D-3E9155542C92}"/>
-          </ac:spMkLst>
-        </pc:spChg>
-        <pc:picChg chg="del">
-          <ac:chgData name="Xin Luo" userId="82312ee5779919a4" providerId="LiveId" clId="{B10D17D3-3A51-854C-A635-1C39A202C200}" dt="2023-03-04T02:45:31.328" v="4868" actId="478"/>
-          <ac:picMkLst>
-            <pc:docMk/>
-            <pc:sldMk cId="3625541778" sldId="2733"/>
-            <ac:picMk id="6" creationId="{2DBA9CB4-7F2C-2F79-C8F7-B159ED2F97ED}"/>
-          </ac:picMkLst>
-        </pc:picChg>
-        <pc:picChg chg="add mod">
-          <ac:chgData name="Xin Luo" userId="82312ee5779919a4" providerId="LiveId" clId="{B10D17D3-3A51-854C-A635-1C39A202C200}" dt="2023-03-04T02:54:53.881" v="4905" actId="1076"/>
-          <ac:picMkLst>
-            <pc:docMk/>
-            <pc:sldMk cId="3625541778" sldId="2733"/>
-            <ac:picMk id="7" creationId="{D7FD8593-2387-9EBB-B64C-4F79275A1E99}"/>
-          </ac:picMkLst>
-        </pc:picChg>
-        <pc:picChg chg="del">
-          <ac:chgData name="Xin Luo" userId="82312ee5779919a4" providerId="LiveId" clId="{B10D17D3-3A51-854C-A635-1C39A202C200}" dt="2023-03-04T02:45:32.347" v="4869" actId="478"/>
-          <ac:picMkLst>
-            <pc:docMk/>
-            <pc:sldMk cId="3625541778" sldId="2733"/>
-            <ac:picMk id="8" creationId="{03B7A21D-1E22-BD59-B187-8F6FC3C70FAD}"/>
-          </ac:picMkLst>
-        </pc:picChg>
-      </pc:sldChg>
-      <pc:sldChg chg="add del">
-        <pc:chgData name="Xin Luo" userId="82312ee5779919a4" providerId="LiveId" clId="{B10D17D3-3A51-854C-A635-1C39A202C200}" dt="2023-03-04T02:45:51.767" v="4871"/>
-        <pc:sldMkLst>
-          <pc:docMk/>
-          <pc:sldMk cId="3578463388" sldId="2734"/>
-        </pc:sldMkLst>
-      </pc:sldChg>
-    </pc:docChg>
-  </pc:docChgLst>
-  <pc:docChgLst>
-    <pc:chgData name="Xin Luo" userId="82312ee5779919a4" providerId="LiveId" clId="{CF65213B-FDED-4E4E-A9AA-40904858F740}"/>
-    <pc:docChg chg="undo custSel addSld modSld">
-      <pc:chgData name="Xin Luo" userId="82312ee5779919a4" providerId="LiveId" clId="{CF65213B-FDED-4E4E-A9AA-40904858F740}" dt="2023-11-12T15:29:23.089" v="1384" actId="20577"/>
-      <pc:docMkLst>
-        <pc:docMk/>
-      </pc:docMkLst>
-      <pc:sldChg chg="modSp mod">
-        <pc:chgData name="Xin Luo" userId="82312ee5779919a4" providerId="LiveId" clId="{CF65213B-FDED-4E4E-A9AA-40904858F740}" dt="2023-11-12T15:29:10.248" v="1379" actId="108"/>
-        <pc:sldMkLst>
-          <pc:docMk/>
-          <pc:sldMk cId="623131075" sldId="2727"/>
-        </pc:sldMkLst>
-        <pc:spChg chg="mod">
-          <ac:chgData name="Xin Luo" userId="82312ee5779919a4" providerId="LiveId" clId="{CF65213B-FDED-4E4E-A9AA-40904858F740}" dt="2023-11-12T15:28:19.618" v="1355" actId="20577"/>
-          <ac:spMkLst>
-            <pc:docMk/>
-            <pc:sldMk cId="623131075" sldId="2727"/>
-            <ac:spMk id="4" creationId="{DFE91C0B-C9F8-3FEC-3419-2DE0C6E6DCB8}"/>
-          </ac:spMkLst>
-        </pc:spChg>
-        <pc:spChg chg="mod">
-          <ac:chgData name="Xin Luo" userId="82312ee5779919a4" providerId="LiveId" clId="{CF65213B-FDED-4E4E-A9AA-40904858F740}" dt="2023-11-12T15:29:10.248" v="1379" actId="108"/>
-          <ac:spMkLst>
-            <pc:docMk/>
-            <pc:sldMk cId="623131075" sldId="2727"/>
-            <ac:spMk id="17" creationId="{9E05FFCA-3371-AF5C-381D-71D984055F5A}"/>
-          </ac:spMkLst>
-        </pc:spChg>
-      </pc:sldChg>
-      <pc:sldChg chg="modSp mod">
-        <pc:chgData name="Xin Luo" userId="82312ee5779919a4" providerId="LiveId" clId="{CF65213B-FDED-4E4E-A9AA-40904858F740}" dt="2023-11-12T03:09:31.898" v="28" actId="20577"/>
-        <pc:sldMkLst>
-          <pc:docMk/>
-          <pc:sldMk cId="2241021106" sldId="2734"/>
-        </pc:sldMkLst>
-        <pc:spChg chg="mod">
-          <ac:chgData name="Xin Luo" userId="82312ee5779919a4" providerId="LiveId" clId="{CF65213B-FDED-4E4E-A9AA-40904858F740}" dt="2023-11-12T03:09:31.898" v="28" actId="20577"/>
-          <ac:spMkLst>
-            <pc:docMk/>
-            <pc:sldMk cId="2241021106" sldId="2734"/>
-            <ac:spMk id="24" creationId="{00000000-0000-0000-0000-000000000000}"/>
-          </ac:spMkLst>
-        </pc:spChg>
-      </pc:sldChg>
-      <pc:sldChg chg="addSp delSp modSp add mod">
-        <pc:chgData name="Xin Luo" userId="82312ee5779919a4" providerId="LiveId" clId="{CF65213B-FDED-4E4E-A9AA-40904858F740}" dt="2023-11-12T15:29:23.089" v="1384" actId="20577"/>
-        <pc:sldMkLst>
-          <pc:docMk/>
-          <pc:sldMk cId="1382737206" sldId="2735"/>
-        </pc:sldMkLst>
-        <pc:spChg chg="add mod">
-          <ac:chgData name="Xin Luo" userId="82312ee5779919a4" providerId="LiveId" clId="{CF65213B-FDED-4E4E-A9AA-40904858F740}" dt="2023-11-12T09:06:40.208" v="1321" actId="2711"/>
-          <ac:spMkLst>
-            <pc:docMk/>
-            <pc:sldMk cId="1382737206" sldId="2735"/>
-            <ac:spMk id="9" creationId="{23348476-2F76-84CF-7B2D-DA8641D9A0F5}"/>
-          </ac:spMkLst>
-        </pc:spChg>
-        <pc:spChg chg="del">
-          <ac:chgData name="Xin Luo" userId="82312ee5779919a4" providerId="LiveId" clId="{CF65213B-FDED-4E4E-A9AA-40904858F740}" dt="2023-11-12T08:33:38.874" v="1061" actId="478"/>
-          <ac:spMkLst>
-            <pc:docMk/>
-            <pc:sldMk cId="1382737206" sldId="2735"/>
-            <ac:spMk id="17" creationId="{9E05FFCA-3371-AF5C-381D-71D984055F5A}"/>
-          </ac:spMkLst>
-        </pc:spChg>
-        <pc:spChg chg="add mod">
-          <ac:chgData name="Xin Luo" userId="82312ee5779919a4" providerId="LiveId" clId="{CF65213B-FDED-4E4E-A9AA-40904858F740}" dt="2023-11-12T15:29:23.089" v="1384" actId="20577"/>
-          <ac:spMkLst>
-            <pc:docMk/>
-            <pc:sldMk cId="1382737206" sldId="2735"/>
-            <ac:spMk id="19" creationId="{FC6D8AB4-24DC-D592-A4CA-7C755A830AD6}"/>
-          </ac:spMkLst>
-        </pc:spChg>
-        <pc:spChg chg="add mod">
-          <ac:chgData name="Xin Luo" userId="82312ee5779919a4" providerId="LiveId" clId="{CF65213B-FDED-4E4E-A9AA-40904858F740}" dt="2023-11-12T09:06:40.208" v="1321" actId="2711"/>
-          <ac:spMkLst>
-            <pc:docMk/>
-            <pc:sldMk cId="1382737206" sldId="2735"/>
-            <ac:spMk id="26" creationId="{40CC3330-8E6E-1398-8B34-EF8ED568C0CB}"/>
-          </ac:spMkLst>
-        </pc:spChg>
-        <pc:spChg chg="add mod">
-          <ac:chgData name="Xin Luo" userId="82312ee5779919a4" providerId="LiveId" clId="{CF65213B-FDED-4E4E-A9AA-40904858F740}" dt="2023-11-12T09:07:08.259" v="1322" actId="1076"/>
-          <ac:spMkLst>
-            <pc:docMk/>
-            <pc:sldMk cId="1382737206" sldId="2735"/>
-            <ac:spMk id="27" creationId="{2116198B-4E87-5169-92B0-E91DFDBC1D19}"/>
-          </ac:spMkLst>
-        </pc:spChg>
-        <pc:spChg chg="add mod">
-          <ac:chgData name="Xin Luo" userId="82312ee5779919a4" providerId="LiveId" clId="{CF65213B-FDED-4E4E-A9AA-40904858F740}" dt="2023-11-12T09:06:40.208" v="1321" actId="2711"/>
-          <ac:spMkLst>
-            <pc:docMk/>
-            <pc:sldMk cId="1382737206" sldId="2735"/>
-            <ac:spMk id="37" creationId="{3AF78166-75AC-74B5-C0D9-CAC71F413EF4}"/>
-          </ac:spMkLst>
-        </pc:spChg>
-        <pc:spChg chg="add mod">
-          <ac:chgData name="Xin Luo" userId="82312ee5779919a4" providerId="LiveId" clId="{CF65213B-FDED-4E4E-A9AA-40904858F740}" dt="2023-11-12T09:10:20.424" v="1339" actId="164"/>
-          <ac:spMkLst>
-            <pc:docMk/>
-            <pc:sldMk cId="1382737206" sldId="2735"/>
-            <ac:spMk id="41" creationId="{2D07906B-FAF1-117B-E6A7-6D191EC4E883}"/>
-          </ac:spMkLst>
-        </pc:spChg>
-        <pc:grpChg chg="add del mod">
-          <ac:chgData name="Xin Luo" userId="82312ee5779919a4" providerId="LiveId" clId="{CF65213B-FDED-4E4E-A9AA-40904858F740}" dt="2023-11-12T09:10:20.424" v="1339" actId="164"/>
-          <ac:grpSpMkLst>
-            <pc:docMk/>
-            <pc:sldMk cId="1382737206" sldId="2735"/>
-            <ac:grpSpMk id="38" creationId="{1706D5B6-D65B-D942-309B-39F7DCB1E0D8}"/>
-          </ac:grpSpMkLst>
-        </pc:grpChg>
-        <pc:grpChg chg="add mod">
-          <ac:chgData name="Xin Luo" userId="82312ee5779919a4" providerId="LiveId" clId="{CF65213B-FDED-4E4E-A9AA-40904858F740}" dt="2023-11-12T09:10:20.424" v="1339" actId="164"/>
-          <ac:grpSpMkLst>
-            <pc:docMk/>
-            <pc:sldMk cId="1382737206" sldId="2735"/>
-            <ac:grpSpMk id="42" creationId="{3451DAC0-9E36-89C4-18C1-A0826EEC42B1}"/>
-          </ac:grpSpMkLst>
-        </pc:grpChg>
-        <pc:picChg chg="add del mod">
-          <ac:chgData name="Xin Luo" userId="82312ee5779919a4" providerId="LiveId" clId="{CF65213B-FDED-4E4E-A9AA-40904858F740}" dt="2023-11-12T08:56:46.929" v="1130" actId="478"/>
-          <ac:picMkLst>
-            <pc:docMk/>
-            <pc:sldMk cId="1382737206" sldId="2735"/>
-            <ac:picMk id="5" creationId="{82A0A6B2-93CB-9EC3-E175-36A518382239}"/>
-          </ac:picMkLst>
-        </pc:picChg>
-        <pc:picChg chg="add del mod">
-          <ac:chgData name="Xin Luo" userId="82312ee5779919a4" providerId="LiveId" clId="{CF65213B-FDED-4E4E-A9AA-40904858F740}" dt="2023-11-12T09:08:13.465" v="1328" actId="478"/>
-          <ac:picMkLst>
-            <pc:docMk/>
-            <pc:sldMk cId="1382737206" sldId="2735"/>
-            <ac:picMk id="18" creationId="{7ED3E6AB-991C-08F8-D149-0A53F455182F}"/>
-          </ac:picMkLst>
-        </pc:picChg>
-        <pc:picChg chg="add mod">
-          <ac:chgData name="Xin Luo" userId="82312ee5779919a4" providerId="LiveId" clId="{CF65213B-FDED-4E4E-A9AA-40904858F740}" dt="2023-11-12T09:10:20.424" v="1339" actId="164"/>
-          <ac:picMkLst>
-            <pc:docMk/>
-            <pc:sldMk cId="1382737206" sldId="2735"/>
-            <ac:picMk id="40" creationId="{7BAE91F7-A638-70DC-226F-AF9FF51A81EA}"/>
-          </ac:picMkLst>
-        </pc:picChg>
-        <pc:cxnChg chg="add del mod">
-          <ac:chgData name="Xin Luo" userId="82312ee5779919a4" providerId="LiveId" clId="{CF65213B-FDED-4E4E-A9AA-40904858F740}" dt="2023-11-12T08:54:29.957" v="1105" actId="478"/>
-          <ac:cxnSpMkLst>
-            <pc:docMk/>
-            <pc:sldMk cId="1382737206" sldId="2735"/>
-            <ac:cxnSpMk id="7" creationId="{6DD9195A-1F4A-51A7-C529-B19BEDE96059}"/>
-          </ac:cxnSpMkLst>
-        </pc:cxnChg>
-        <pc:cxnChg chg="add mod">
-          <ac:chgData name="Xin Luo" userId="82312ee5779919a4" providerId="LiveId" clId="{CF65213B-FDED-4E4E-A9AA-40904858F740}" dt="2023-11-12T09:03:48.219" v="1309" actId="164"/>
-          <ac:cxnSpMkLst>
-            <pc:docMk/>
-            <pc:sldMk cId="1382737206" sldId="2735"/>
-            <ac:cxnSpMk id="11" creationId="{1815630D-440A-BA7A-DAF5-ED03080637E3}"/>
-          </ac:cxnSpMkLst>
-        </pc:cxnChg>
-        <pc:cxnChg chg="add mod">
-          <ac:chgData name="Xin Luo" userId="82312ee5779919a4" providerId="LiveId" clId="{CF65213B-FDED-4E4E-A9AA-40904858F740}" dt="2023-11-12T15:29:23.089" v="1384" actId="20577"/>
-          <ac:cxnSpMkLst>
-            <pc:docMk/>
-            <pc:sldMk cId="1382737206" sldId="2735"/>
-            <ac:cxnSpMk id="13" creationId="{CA1C9F51-02CC-D5A8-BD93-1AB882784387}"/>
-          </ac:cxnSpMkLst>
-        </pc:cxnChg>
-        <pc:cxnChg chg="add mod">
-          <ac:chgData name="Xin Luo" userId="82312ee5779919a4" providerId="LiveId" clId="{CF65213B-FDED-4E4E-A9AA-40904858F740}" dt="2023-11-12T09:08:08.795" v="1327" actId="478"/>
-          <ac:cxnSpMkLst>
-            <pc:docMk/>
-            <pc:sldMk cId="1382737206" sldId="2735"/>
-            <ac:cxnSpMk id="28" creationId="{2997F4DD-0922-B363-F763-27CB25268159}"/>
-          </ac:cxnSpMkLst>
-        </pc:cxnChg>
-        <pc:cxnChg chg="add mod">
-          <ac:chgData name="Xin Luo" userId="82312ee5779919a4" providerId="LiveId" clId="{CF65213B-FDED-4E4E-A9AA-40904858F740}" dt="2023-11-12T09:08:08.795" v="1327" actId="478"/>
-          <ac:cxnSpMkLst>
-            <pc:docMk/>
-            <pc:sldMk cId="1382737206" sldId="2735"/>
-            <ac:cxnSpMk id="31" creationId="{33B5FB2A-A85B-6A0E-263A-F26DFC374696}"/>
-          </ac:cxnSpMkLst>
-        </pc:cxnChg>
-      </pc:sldChg>
-      <pc:sldChg chg="modSp mod">
-        <pc:chgData name="Xin Luo" userId="82312ee5779919a4" providerId="LiveId" clId="{CF65213B-FDED-4E4E-A9AA-40904858F740}" dt="2023-11-12T13:45:31.697" v="1344" actId="20577"/>
-        <pc:sldMkLst>
-          <pc:docMk/>
-          <pc:sldMk cId="3782770681" sldId="2736"/>
-        </pc:sldMkLst>
-        <pc:spChg chg="mod">
-          <ac:chgData name="Xin Luo" userId="82312ee5779919a4" providerId="LiveId" clId="{CF65213B-FDED-4E4E-A9AA-40904858F740}" dt="2023-11-12T13:45:31.697" v="1344" actId="20577"/>
-          <ac:spMkLst>
-            <pc:docMk/>
-            <pc:sldMk cId="3782770681" sldId="2736"/>
-            <ac:spMk id="17" creationId="{9E05FFCA-3371-AF5C-381D-71D984055F5A}"/>
-          </ac:spMkLst>
-        </pc:spChg>
-      </pc:sldChg>
-    </pc:docChg>
-  </pc:docChgLst>
-  <pc:docChgLst>
-    <pc:chgData name="Xin Luo" userId="82312ee5779919a4" providerId="LiveId" clId="{248C0A6C-0CC4-8B4C-A15B-18A7AE49A707}"/>
-    <pc:docChg chg="undo custSel addSld delSld modSld">
-      <pc:chgData name="Xin Luo" userId="82312ee5779919a4" providerId="LiveId" clId="{248C0A6C-0CC4-8B4C-A15B-18A7AE49A707}" dt="2023-07-02T13:59:45.690" v="74" actId="20577"/>
-      <pc:docMkLst>
-        <pc:docMk/>
-      </pc:docMkLst>
-      <pc:sldChg chg="addSp delSp del mod">
-        <pc:chgData name="Xin Luo" userId="82312ee5779919a4" providerId="LiveId" clId="{248C0A6C-0CC4-8B4C-A15B-18A7AE49A707}" dt="2023-07-02T13:12:20.593" v="29" actId="2696"/>
-        <pc:sldMkLst>
-          <pc:docMk/>
-          <pc:sldMk cId="1153920038" sldId="2206"/>
-        </pc:sldMkLst>
-        <pc:spChg chg="add del">
-          <ac:chgData name="Xin Luo" userId="82312ee5779919a4" providerId="LiveId" clId="{248C0A6C-0CC4-8B4C-A15B-18A7AE49A707}" dt="2023-07-02T13:11:56.127" v="1" actId="22"/>
-          <ac:spMkLst>
-            <pc:docMk/>
-            <pc:sldMk cId="1153920038" sldId="2206"/>
-            <ac:spMk id="5" creationId="{DF97D6A6-2165-26FA-3166-1D01AFA58A7A}"/>
-          </ac:spMkLst>
-        </pc:spChg>
-      </pc:sldChg>
-      <pc:sldChg chg="del">
-        <pc:chgData name="Xin Luo" userId="82312ee5779919a4" providerId="LiveId" clId="{248C0A6C-0CC4-8B4C-A15B-18A7AE49A707}" dt="2023-07-02T13:12:28.335" v="46" actId="2696"/>
-        <pc:sldMkLst>
-          <pc:docMk/>
-          <pc:sldMk cId="1576120367" sldId="2387"/>
-        </pc:sldMkLst>
-      </pc:sldChg>
-      <pc:sldChg chg="del">
-        <pc:chgData name="Xin Luo" userId="82312ee5779919a4" providerId="LiveId" clId="{248C0A6C-0CC4-8B4C-A15B-18A7AE49A707}" dt="2023-07-02T13:12:28.309" v="36" actId="2696"/>
-        <pc:sldMkLst>
-          <pc:docMk/>
-          <pc:sldMk cId="2415901206" sldId="2447"/>
-        </pc:sldMkLst>
-      </pc:sldChg>
-      <pc:sldChg chg="del">
-        <pc:chgData name="Xin Luo" userId="82312ee5779919a4" providerId="LiveId" clId="{248C0A6C-0CC4-8B4C-A15B-18A7AE49A707}" dt="2023-07-02T13:12:28.304" v="34" actId="2696"/>
-        <pc:sldMkLst>
-          <pc:docMk/>
-          <pc:sldMk cId="4067577602" sldId="2605"/>
-        </pc:sldMkLst>
-      </pc:sldChg>
-      <pc:sldChg chg="del">
-        <pc:chgData name="Xin Luo" userId="82312ee5779919a4" providerId="LiveId" clId="{248C0A6C-0CC4-8B4C-A15B-18A7AE49A707}" dt="2023-07-02T13:12:28.311" v="37" actId="2696"/>
-        <pc:sldMkLst>
-          <pc:docMk/>
-          <pc:sldMk cId="1602808061" sldId="2707"/>
-        </pc:sldMkLst>
-      </pc:sldChg>
-      <pc:sldChg chg="del">
-        <pc:chgData name="Xin Luo" userId="82312ee5779919a4" providerId="LiveId" clId="{248C0A6C-0CC4-8B4C-A15B-18A7AE49A707}" dt="2023-07-02T13:12:28.317" v="39" actId="2696"/>
-        <pc:sldMkLst>
-          <pc:docMk/>
-          <pc:sldMk cId="1658607177" sldId="2708"/>
-        </pc:sldMkLst>
-      </pc:sldChg>
-      <pc:sldChg chg="del">
-        <pc:chgData name="Xin Luo" userId="82312ee5779919a4" providerId="LiveId" clId="{248C0A6C-0CC4-8B4C-A15B-18A7AE49A707}" dt="2023-07-02T13:12:28.356" v="49" actId="2696"/>
-        <pc:sldMkLst>
-          <pc:docMk/>
-          <pc:sldMk cId="1257969106" sldId="2709"/>
-        </pc:sldMkLst>
-      </pc:sldChg>
-      <pc:sldChg chg="del">
-        <pc:chgData name="Xin Luo" userId="82312ee5779919a4" providerId="LiveId" clId="{248C0A6C-0CC4-8B4C-A15B-18A7AE49A707}" dt="2023-07-02T13:12:28.299" v="32" actId="2696"/>
-        <pc:sldMkLst>
-          <pc:docMk/>
-          <pc:sldMk cId="2744383376" sldId="2711"/>
-        </pc:sldMkLst>
-      </pc:sldChg>
-      <pc:sldChg chg="del">
-        <pc:chgData name="Xin Luo" userId="82312ee5779919a4" providerId="LiveId" clId="{248C0A6C-0CC4-8B4C-A15B-18A7AE49A707}" dt="2023-07-02T13:12:28.337" v="47" actId="2696"/>
-        <pc:sldMkLst>
-          <pc:docMk/>
-          <pc:sldMk cId="280619949" sldId="2714"/>
-        </pc:sldMkLst>
-      </pc:sldChg>
-      <pc:sldChg chg="del">
-        <pc:chgData name="Xin Luo" userId="82312ee5779919a4" providerId="LiveId" clId="{248C0A6C-0CC4-8B4C-A15B-18A7AE49A707}" dt="2023-07-02T13:12:28.325" v="42" actId="2696"/>
-        <pc:sldMkLst>
-          <pc:docMk/>
-          <pc:sldMk cId="3852391939" sldId="2715"/>
-        </pc:sldMkLst>
-      </pc:sldChg>
-      <pc:sldChg chg="del">
-        <pc:chgData name="Xin Luo" userId="82312ee5779919a4" providerId="LiveId" clId="{248C0A6C-0CC4-8B4C-A15B-18A7AE49A707}" dt="2023-07-02T13:12:28.330" v="44" actId="2696"/>
-        <pc:sldMkLst>
-          <pc:docMk/>
-          <pc:sldMk cId="3026715585" sldId="2716"/>
-        </pc:sldMkLst>
-      </pc:sldChg>
-      <pc:sldChg chg="del">
-        <pc:chgData name="Xin Luo" userId="82312ee5779919a4" providerId="LiveId" clId="{248C0A6C-0CC4-8B4C-A15B-18A7AE49A707}" dt="2023-07-02T13:12:28.333" v="45" actId="2696"/>
-        <pc:sldMkLst>
-          <pc:docMk/>
-          <pc:sldMk cId="4136986794" sldId="2717"/>
-        </pc:sldMkLst>
-      </pc:sldChg>
-      <pc:sldChg chg="del">
-        <pc:chgData name="Xin Luo" userId="82312ee5779919a4" providerId="LiveId" clId="{248C0A6C-0CC4-8B4C-A15B-18A7AE49A707}" dt="2023-07-02T13:12:28.358" v="50" actId="2696"/>
-        <pc:sldMkLst>
-          <pc:docMk/>
-          <pc:sldMk cId="1778017482" sldId="2718"/>
-        </pc:sldMkLst>
-      </pc:sldChg>
-      <pc:sldChg chg="del">
-        <pc:chgData name="Xin Luo" userId="82312ee5779919a4" providerId="LiveId" clId="{248C0A6C-0CC4-8B4C-A15B-18A7AE49A707}" dt="2023-07-02T13:12:28.307" v="35" actId="2696"/>
-        <pc:sldMkLst>
-          <pc:docMk/>
-          <pc:sldMk cId="3480831675" sldId="2720"/>
-        </pc:sldMkLst>
-      </pc:sldChg>
-      <pc:sldChg chg="del">
-        <pc:chgData name="Xin Luo" userId="82312ee5779919a4" providerId="LiveId" clId="{248C0A6C-0CC4-8B4C-A15B-18A7AE49A707}" dt="2023-07-02T13:12:28.385" v="51" actId="2696"/>
-        <pc:sldMkLst>
-          <pc:docMk/>
-          <pc:sldMk cId="769179569" sldId="2723"/>
-        </pc:sldMkLst>
-      </pc:sldChg>
-      <pc:sldChg chg="del">
-        <pc:chgData name="Xin Luo" userId="82312ee5779919a4" providerId="LiveId" clId="{248C0A6C-0CC4-8B4C-A15B-18A7AE49A707}" dt="2023-07-02T13:12:28.314" v="38" actId="2696"/>
-        <pc:sldMkLst>
-          <pc:docMk/>
-          <pc:sldMk cId="57442970" sldId="2725"/>
-        </pc:sldMkLst>
-      </pc:sldChg>
-      <pc:sldChg chg="del">
-        <pc:chgData name="Xin Luo" userId="82312ee5779919a4" providerId="LiveId" clId="{248C0A6C-0CC4-8B4C-A15B-18A7AE49A707}" dt="2023-07-02T13:12:28.344" v="48" actId="2696"/>
-        <pc:sldMkLst>
-          <pc:docMk/>
-          <pc:sldMk cId="4114066566" sldId="2726"/>
-        </pc:sldMkLst>
-      </pc:sldChg>
-      <pc:sldChg chg="del">
-        <pc:chgData name="Xin Luo" userId="82312ee5779919a4" providerId="LiveId" clId="{248C0A6C-0CC4-8B4C-A15B-18A7AE49A707}" dt="2023-07-02T13:12:28.327" v="43" actId="2696"/>
-        <pc:sldMkLst>
-          <pc:docMk/>
-          <pc:sldMk cId="1683372320" sldId="2728"/>
-        </pc:sldMkLst>
-      </pc:sldChg>
-      <pc:sldChg chg="del">
-        <pc:chgData name="Xin Luo" userId="82312ee5779919a4" providerId="LiveId" clId="{248C0A6C-0CC4-8B4C-A15B-18A7AE49A707}" dt="2023-07-02T13:12:28.297" v="31" actId="2696"/>
-        <pc:sldMkLst>
-          <pc:docMk/>
-          <pc:sldMk cId="240261692" sldId="2729"/>
-        </pc:sldMkLst>
-      </pc:sldChg>
-      <pc:sldChg chg="del">
-        <pc:chgData name="Xin Luo" userId="82312ee5779919a4" providerId="LiveId" clId="{248C0A6C-0CC4-8B4C-A15B-18A7AE49A707}" dt="2023-07-02T13:12:28.294" v="30" actId="2696"/>
-        <pc:sldMkLst>
-          <pc:docMk/>
-          <pc:sldMk cId="736914780" sldId="2730"/>
-        </pc:sldMkLst>
-      </pc:sldChg>
-      <pc:sldChg chg="del">
-        <pc:chgData name="Xin Luo" userId="82312ee5779919a4" providerId="LiveId" clId="{248C0A6C-0CC4-8B4C-A15B-18A7AE49A707}" dt="2023-07-02T13:12:28.320" v="40" actId="2696"/>
-        <pc:sldMkLst>
-          <pc:docMk/>
-          <pc:sldMk cId="3309691984" sldId="2731"/>
-        </pc:sldMkLst>
-      </pc:sldChg>
-      <pc:sldChg chg="del">
-        <pc:chgData name="Xin Luo" userId="82312ee5779919a4" providerId="LiveId" clId="{248C0A6C-0CC4-8B4C-A15B-18A7AE49A707}" dt="2023-07-02T13:12:28.322" v="41" actId="2696"/>
-        <pc:sldMkLst>
-          <pc:docMk/>
-          <pc:sldMk cId="1199790559" sldId="2732"/>
-        </pc:sldMkLst>
-      </pc:sldChg>
-      <pc:sldChg chg="del">
-        <pc:chgData name="Xin Luo" userId="82312ee5779919a4" providerId="LiveId" clId="{248C0A6C-0CC4-8B4C-A15B-18A7AE49A707}" dt="2023-07-02T13:12:28.302" v="33" actId="2696"/>
-        <pc:sldMkLst>
-          <pc:docMk/>
-          <pc:sldMk cId="3625541778" sldId="2733"/>
-        </pc:sldMkLst>
-      </pc:sldChg>
-      <pc:sldChg chg="modSp add del mod setBg">
-        <pc:chgData name="Xin Luo" userId="82312ee5779919a4" providerId="LiveId" clId="{248C0A6C-0CC4-8B4C-A15B-18A7AE49A707}" dt="2023-07-02T13:59:45.690" v="74" actId="20577"/>
-        <pc:sldMkLst>
-          <pc:docMk/>
-          <pc:sldMk cId="2241021106" sldId="2734"/>
-        </pc:sldMkLst>
-        <pc:spChg chg="mod">
-          <ac:chgData name="Xin Luo" userId="82312ee5779919a4" providerId="LiveId" clId="{248C0A6C-0CC4-8B4C-A15B-18A7AE49A707}" dt="2023-07-02T13:59:45.690" v="74" actId="20577"/>
-          <ac:spMkLst>
-            <pc:docMk/>
-            <pc:sldMk cId="2241021106" sldId="2734"/>
-            <ac:spMk id="24" creationId="{00000000-0000-0000-0000-000000000000}"/>
-          </ac:spMkLst>
-        </pc:spChg>
-      </pc:sldChg>
-    </pc:docChg>
-  </pc:docChgLst>
-  <pc:docChgLst>
-    <pc:chgData name="Xin Luo" userId="82312ee5779919a4" providerId="LiveId" clId="{79234F48-1BB4-064A-81D5-23BC2373ADDA}"/>
-    <pc:docChg chg="undo custSel addSld delSld modSld sldOrd">
-      <pc:chgData name="Xin Luo" userId="82312ee5779919a4" providerId="LiveId" clId="{79234F48-1BB4-064A-81D5-23BC2373ADDA}" dt="2023-11-12T11:04:38.280" v="1009" actId="1035"/>
-      <pc:docMkLst>
-        <pc:docMk/>
-      </pc:docMkLst>
-      <pc:sldChg chg="delSp modSp mod">
-        <pc:chgData name="Xin Luo" userId="82312ee5779919a4" providerId="LiveId" clId="{79234F48-1BB4-064A-81D5-23BC2373ADDA}" dt="2023-11-12T10:57:52.252" v="773" actId="14100"/>
-        <pc:sldMkLst>
-          <pc:docMk/>
-          <pc:sldMk cId="1858913004" sldId="2719"/>
-        </pc:sldMkLst>
-        <pc:spChg chg="del">
-          <ac:chgData name="Xin Luo" userId="82312ee5779919a4" providerId="LiveId" clId="{79234F48-1BB4-064A-81D5-23BC2373ADDA}" dt="2023-11-12T10:56:15.125" v="602" actId="478"/>
-          <ac:spMkLst>
-            <pc:docMk/>
-            <pc:sldMk cId="1858913004" sldId="2719"/>
-            <ac:spMk id="2" creationId="{631AADB6-C88A-D817-4683-FC087E4E240F}"/>
-          </ac:spMkLst>
-        </pc:spChg>
-        <pc:spChg chg="mod">
-          <ac:chgData name="Xin Luo" userId="82312ee5779919a4" providerId="LiveId" clId="{79234F48-1BB4-064A-81D5-23BC2373ADDA}" dt="2023-11-12T10:56:12.362" v="601" actId="20577"/>
-          <ac:spMkLst>
-            <pc:docMk/>
-            <pc:sldMk cId="1858913004" sldId="2719"/>
-            <ac:spMk id="4" creationId="{814FF4E1-B17F-D4F8-E834-173BA3B0D059}"/>
-          </ac:spMkLst>
-        </pc:spChg>
-        <pc:spChg chg="del">
-          <ac:chgData name="Xin Luo" userId="82312ee5779919a4" providerId="LiveId" clId="{79234F48-1BB4-064A-81D5-23BC2373ADDA}" dt="2023-11-12T10:56:15.125" v="602" actId="478"/>
-          <ac:spMkLst>
-            <pc:docMk/>
-            <pc:sldMk cId="1858913004" sldId="2719"/>
-            <ac:spMk id="5" creationId="{FCD10A89-5E0E-5D73-1D4F-9E11D943B29C}"/>
-          </ac:spMkLst>
-        </pc:spChg>
-        <pc:spChg chg="mod">
-          <ac:chgData name="Xin Luo" userId="82312ee5779919a4" providerId="LiveId" clId="{79234F48-1BB4-064A-81D5-23BC2373ADDA}" dt="2023-11-12T10:57:52.252" v="773" actId="14100"/>
-          <ac:spMkLst>
-            <pc:docMk/>
-            <pc:sldMk cId="1858913004" sldId="2719"/>
-            <ac:spMk id="6" creationId="{10943A92-9E22-44EA-2939-C64F8E264329}"/>
-          </ac:spMkLst>
-        </pc:spChg>
-      </pc:sldChg>
-      <pc:sldChg chg="modSp del mod">
-        <pc:chgData name="Xin Luo" userId="82312ee5779919a4" providerId="LiveId" clId="{79234F48-1BB4-064A-81D5-23BC2373ADDA}" dt="2023-11-12T10:13:36.173" v="18" actId="2696"/>
-        <pc:sldMkLst>
-          <pc:docMk/>
-          <pc:sldMk cId="295872025" sldId="2722"/>
-        </pc:sldMkLst>
-        <pc:spChg chg="mod">
-          <ac:chgData name="Xin Luo" userId="82312ee5779919a4" providerId="LiveId" clId="{79234F48-1BB4-064A-81D5-23BC2373ADDA}" dt="2023-11-12T10:13:32.597" v="17" actId="20577"/>
-          <ac:spMkLst>
-            <pc:docMk/>
-            <pc:sldMk cId="295872025" sldId="2722"/>
-            <ac:spMk id="12" creationId="{00000000-0000-0000-0000-000000000000}"/>
-          </ac:spMkLst>
-        </pc:spChg>
-      </pc:sldChg>
-      <pc:sldChg chg="modSp mod">
-        <pc:chgData name="Xin Luo" userId="82312ee5779919a4" providerId="LiveId" clId="{79234F48-1BB4-064A-81D5-23BC2373ADDA}" dt="2023-11-12T10:47:06.270" v="528" actId="20577"/>
-        <pc:sldMkLst>
-          <pc:docMk/>
-          <pc:sldMk cId="623131075" sldId="2727"/>
-        </pc:sldMkLst>
-        <pc:spChg chg="mod">
-          <ac:chgData name="Xin Luo" userId="82312ee5779919a4" providerId="LiveId" clId="{79234F48-1BB4-064A-81D5-23BC2373ADDA}" dt="2023-11-12T10:47:06.270" v="528" actId="20577"/>
-          <ac:spMkLst>
-            <pc:docMk/>
-            <pc:sldMk cId="623131075" sldId="2727"/>
-            <ac:spMk id="4" creationId="{DFE91C0B-C9F8-3FEC-3419-2DE0C6E6DCB8}"/>
-          </ac:spMkLst>
-        </pc:spChg>
-        <pc:spChg chg="mod">
-          <ac:chgData name="Xin Luo" userId="82312ee5779919a4" providerId="LiveId" clId="{79234F48-1BB4-064A-81D5-23BC2373ADDA}" dt="2023-11-12T10:45:05.908" v="501" actId="20577"/>
-          <ac:spMkLst>
-            <pc:docMk/>
-            <pc:sldMk cId="623131075" sldId="2727"/>
-            <ac:spMk id="17" creationId="{9E05FFCA-3371-AF5C-381D-71D984055F5A}"/>
-          </ac:spMkLst>
-        </pc:spChg>
-      </pc:sldChg>
-      <pc:sldChg chg="addSp delSp modSp mod">
-        <pc:chgData name="Xin Luo" userId="82312ee5779919a4" providerId="LiveId" clId="{79234F48-1BB4-064A-81D5-23BC2373ADDA}" dt="2023-11-12T11:04:38.280" v="1009" actId="1035"/>
-        <pc:sldMkLst>
-          <pc:docMk/>
-          <pc:sldMk cId="1382737206" sldId="2735"/>
-        </pc:sldMkLst>
-        <pc:spChg chg="add mod">
-          <ac:chgData name="Xin Luo" userId="82312ee5779919a4" providerId="LiveId" clId="{79234F48-1BB4-064A-81D5-23BC2373ADDA}" dt="2023-11-12T10:47:42.911" v="537" actId="207"/>
-          <ac:spMkLst>
-            <pc:docMk/>
-            <pc:sldMk cId="1382737206" sldId="2735"/>
-            <ac:spMk id="2" creationId="{36A94F0A-9BCF-0783-70D7-65A53B9C0CC3}"/>
-          </ac:spMkLst>
-        </pc:spChg>
-        <pc:spChg chg="mod">
-          <ac:chgData name="Xin Luo" userId="82312ee5779919a4" providerId="LiveId" clId="{79234F48-1BB4-064A-81D5-23BC2373ADDA}" dt="2023-11-12T10:47:11.148" v="529"/>
-          <ac:spMkLst>
-            <pc:docMk/>
-            <pc:sldMk cId="1382737206" sldId="2735"/>
-            <ac:spMk id="4" creationId="{DFE91C0B-C9F8-3FEC-3419-2DE0C6E6DCB8}"/>
-          </ac:spMkLst>
-        </pc:spChg>
-        <pc:spChg chg="add mod">
-          <ac:chgData name="Xin Luo" userId="82312ee5779919a4" providerId="LiveId" clId="{79234F48-1BB4-064A-81D5-23BC2373ADDA}" dt="2023-11-12T10:49:13.024" v="582" actId="1036"/>
-          <ac:spMkLst>
-            <pc:docMk/>
-            <pc:sldMk cId="1382737206" sldId="2735"/>
-            <ac:spMk id="8" creationId="{B922BC94-544E-9C03-7774-A6A5C31A858E}"/>
-          </ac:spMkLst>
-        </pc:spChg>
-        <pc:spChg chg="add mod">
-          <ac:chgData name="Xin Luo" userId="82312ee5779919a4" providerId="LiveId" clId="{79234F48-1BB4-064A-81D5-23BC2373ADDA}" dt="2023-11-12T11:04:38.280" v="1009" actId="1035"/>
-          <ac:spMkLst>
-            <pc:docMk/>
-            <pc:sldMk cId="1382737206" sldId="2735"/>
-            <ac:spMk id="10" creationId="{A617D2EC-E886-F05D-06BB-4F44EC4E8448}"/>
-          </ac:spMkLst>
-        </pc:spChg>
-        <pc:spChg chg="mod">
-          <ac:chgData name="Xin Luo" userId="82312ee5779919a4" providerId="LiveId" clId="{79234F48-1BB4-064A-81D5-23BC2373ADDA}" dt="2023-11-12T10:13:09.041" v="4" actId="20577"/>
-          <ac:spMkLst>
-            <pc:docMk/>
-            <pc:sldMk cId="1382737206" sldId="2735"/>
-            <ac:spMk id="37" creationId="{3AF78166-75AC-74B5-C0D9-CAC71F413EF4}"/>
-          </ac:spMkLst>
-        </pc:spChg>
-        <pc:spChg chg="topLvl">
-          <ac:chgData name="Xin Luo" userId="82312ee5779919a4" providerId="LiveId" clId="{79234F48-1BB4-064A-81D5-23BC2373ADDA}" dt="2023-11-12T10:47:25.889" v="530" actId="165"/>
-          <ac:spMkLst>
-            <pc:docMk/>
-            <pc:sldMk cId="1382737206" sldId="2735"/>
-            <ac:spMk id="41" creationId="{2D07906B-FAF1-117B-E6A7-6D191EC4E883}"/>
-          </ac:spMkLst>
-        </pc:spChg>
-        <pc:grpChg chg="add mod">
-          <ac:chgData name="Xin Luo" userId="82312ee5779919a4" providerId="LiveId" clId="{79234F48-1BB4-064A-81D5-23BC2373ADDA}" dt="2023-11-12T11:04:22.418" v="997" actId="1035"/>
-          <ac:grpSpMkLst>
-            <pc:docMk/>
-            <pc:sldMk cId="1382737206" sldId="2735"/>
-            <ac:grpSpMk id="12" creationId="{1CD3369D-14E8-EFF9-8B4C-1BB6590169C3}"/>
-          </ac:grpSpMkLst>
-        </pc:grpChg>
-        <pc:grpChg chg="topLvl">
-          <ac:chgData name="Xin Luo" userId="82312ee5779919a4" providerId="LiveId" clId="{79234F48-1BB4-064A-81D5-23BC2373ADDA}" dt="2023-11-12T10:47:25.889" v="530" actId="165"/>
-          <ac:grpSpMkLst>
-            <pc:docMk/>
-            <pc:sldMk cId="1382737206" sldId="2735"/>
-            <ac:grpSpMk id="38" creationId="{1706D5B6-D65B-D942-309B-39F7DCB1E0D8}"/>
-          </ac:grpSpMkLst>
-        </pc:grpChg>
-        <pc:grpChg chg="del">
-          <ac:chgData name="Xin Luo" userId="82312ee5779919a4" providerId="LiveId" clId="{79234F48-1BB4-064A-81D5-23BC2373ADDA}" dt="2023-11-12T10:47:25.889" v="530" actId="165"/>
-          <ac:grpSpMkLst>
-            <pc:docMk/>
-            <pc:sldMk cId="1382737206" sldId="2735"/>
-            <ac:grpSpMk id="42" creationId="{3451DAC0-9E36-89C4-18C1-A0826EEC42B1}"/>
-          </ac:grpSpMkLst>
-        </pc:grpChg>
-        <pc:picChg chg="topLvl">
-          <ac:chgData name="Xin Luo" userId="82312ee5779919a4" providerId="LiveId" clId="{79234F48-1BB4-064A-81D5-23BC2373ADDA}" dt="2023-11-12T10:47:25.889" v="530" actId="165"/>
-          <ac:picMkLst>
-            <pc:docMk/>
-            <pc:sldMk cId="1382737206" sldId="2735"/>
-            <ac:picMk id="40" creationId="{7BAE91F7-A638-70DC-226F-AF9FF51A81EA}"/>
-          </ac:picMkLst>
-        </pc:picChg>
-        <pc:cxnChg chg="add mod">
-          <ac:chgData name="Xin Luo" userId="82312ee5779919a4" providerId="LiveId" clId="{79234F48-1BB4-064A-81D5-23BC2373ADDA}" dt="2023-11-12T10:55:49.883" v="584" actId="208"/>
-          <ac:cxnSpMkLst>
-            <pc:docMk/>
-            <pc:sldMk cId="1382737206" sldId="2735"/>
-            <ac:cxnSpMk id="6" creationId="{C73A7FF0-C417-B2B7-6C67-466B0FB66050}"/>
-          </ac:cxnSpMkLst>
-        </pc:cxnChg>
-      </pc:sldChg>
-      <pc:sldChg chg="modSp add mod ord">
-        <pc:chgData name="Xin Luo" userId="82312ee5779919a4" providerId="LiveId" clId="{79234F48-1BB4-064A-81D5-23BC2373ADDA}" dt="2023-11-12T10:45:23.169" v="503" actId="14100"/>
-        <pc:sldMkLst>
-          <pc:docMk/>
-          <pc:sldMk cId="3782770681" sldId="2736"/>
-        </pc:sldMkLst>
-        <pc:spChg chg="mod">
-          <ac:chgData name="Xin Luo" userId="82312ee5779919a4" providerId="LiveId" clId="{79234F48-1BB4-064A-81D5-23BC2373ADDA}" dt="2023-11-12T10:14:33.890" v="79" actId="20577"/>
-          <ac:spMkLst>
-            <pc:docMk/>
-            <pc:sldMk cId="3782770681" sldId="2736"/>
-            <ac:spMk id="4" creationId="{DFE91C0B-C9F8-3FEC-3419-2DE0C6E6DCB8}"/>
-          </ac:spMkLst>
-        </pc:spChg>
-        <pc:spChg chg="mod">
-          <ac:chgData name="Xin Luo" userId="82312ee5779919a4" providerId="LiveId" clId="{79234F48-1BB4-064A-81D5-23BC2373ADDA}" dt="2023-11-12T10:45:23.169" v="503" actId="14100"/>
-          <ac:spMkLst>
-            <pc:docMk/>
-            <pc:sldMk cId="3782770681" sldId="2736"/>
-            <ac:spMk id="17" creationId="{9E05FFCA-3371-AF5C-381D-71D984055F5A}"/>
-          </ac:spMkLst>
-        </pc:spChg>
-      </pc:sldChg>
-      <pc:sldChg chg="add del">
-        <pc:chgData name="Xin Luo" userId="82312ee5779919a4" providerId="LiveId" clId="{79234F48-1BB4-064A-81D5-23BC2373ADDA}" dt="2023-11-12T10:14:48.939" v="82"/>
-        <pc:sldMkLst>
-          <pc:docMk/>
-          <pc:sldMk cId="3003986440" sldId="2737"/>
-        </pc:sldMkLst>
-      </pc:sldChg>
-    </pc:docChg>
-  </pc:docChgLst>
-  <pc:docChgLst>
     <pc:chgData name="Xin Luo" userId="82312ee5779919a4" providerId="LiveId" clId="{F9D543B9-EE8F-F947-98CD-0A5B9B077609}"/>
     <pc:docChg chg="undo custSel modSld">
       <pc:chgData name="Xin Luo" userId="82312ee5779919a4" providerId="LiveId" clId="{F9D543B9-EE8F-F947-98CD-0A5B9B077609}" dt="2023-05-28T07:33:19.199" v="786" actId="1035"/>
@@ -3796,6 +1129,2673 @@
           </ac:spMkLst>
         </pc:spChg>
       </pc:sldChg>
+    </pc:docChg>
+  </pc:docChgLst>
+  <pc:docChgLst>
+    <pc:chgData name="Xin Luo" userId="82312ee5779919a4" providerId="LiveId" clId="{B10D17D3-3A51-854C-A635-1C39A202C200}"/>
+    <pc:docChg chg="undo custSel addSld delSld modSld sldOrd">
+      <pc:chgData name="Xin Luo" userId="82312ee5779919a4" providerId="LiveId" clId="{B10D17D3-3A51-854C-A635-1C39A202C200}" dt="2023-03-04T03:51:10.104" v="4946" actId="20577"/>
+      <pc:docMkLst>
+        <pc:docMk/>
+      </pc:docMkLst>
+      <pc:sldChg chg="addSp delSp modSp mod">
+        <pc:chgData name="Xin Luo" userId="82312ee5779919a4" providerId="LiveId" clId="{B10D17D3-3A51-854C-A635-1C39A202C200}" dt="2023-03-01T03:11:45.906" v="247"/>
+        <pc:sldMkLst>
+          <pc:docMk/>
+          <pc:sldMk cId="1153920038" sldId="2206"/>
+        </pc:sldMkLst>
+        <pc:spChg chg="add del mod">
+          <ac:chgData name="Xin Luo" userId="82312ee5779919a4" providerId="LiveId" clId="{B10D17D3-3A51-854C-A635-1C39A202C200}" dt="2023-03-01T03:11:45.906" v="247"/>
+          <ac:spMkLst>
+            <pc:docMk/>
+            <pc:sldMk cId="1153920038" sldId="2206"/>
+            <ac:spMk id="3" creationId="{CDA1AA74-21D7-AC4F-F87E-BA10B85B4942}"/>
+          </ac:spMkLst>
+        </pc:spChg>
+        <pc:spChg chg="mod">
+          <ac:chgData name="Xin Luo" userId="82312ee5779919a4" providerId="LiveId" clId="{B10D17D3-3A51-854C-A635-1C39A202C200}" dt="2023-03-01T03:11:44.178" v="244" actId="20577"/>
+          <ac:spMkLst>
+            <pc:docMk/>
+            <pc:sldMk cId="1153920038" sldId="2206"/>
+            <ac:spMk id="24" creationId="{00000000-0000-0000-0000-000000000000}"/>
+          </ac:spMkLst>
+        </pc:spChg>
+      </pc:sldChg>
+      <pc:sldChg chg="addSp delSp modSp mod">
+        <pc:chgData name="Xin Luo" userId="82312ee5779919a4" providerId="LiveId" clId="{B10D17D3-3A51-854C-A635-1C39A202C200}" dt="2023-03-01T03:11:54.462" v="258"/>
+        <pc:sldMkLst>
+          <pc:docMk/>
+          <pc:sldMk cId="1576120367" sldId="2387"/>
+        </pc:sldMkLst>
+        <pc:spChg chg="mod">
+          <ac:chgData name="Xin Luo" userId="82312ee5779919a4" providerId="LiveId" clId="{B10D17D3-3A51-854C-A635-1C39A202C200}" dt="2023-03-01T03:09:00.203" v="190"/>
+          <ac:spMkLst>
+            <pc:docMk/>
+            <pc:sldMk cId="1576120367" sldId="2387"/>
+            <ac:spMk id="4" creationId="{F68D6DC1-DB3F-EF57-57A3-A2B92CF0615B}"/>
+          </ac:spMkLst>
+        </pc:spChg>
+        <pc:spChg chg="mod">
+          <ac:chgData name="Xin Luo" userId="82312ee5779919a4" providerId="LiveId" clId="{B10D17D3-3A51-854C-A635-1C39A202C200}" dt="2023-03-01T03:11:52.198" v="254" actId="20577"/>
+          <ac:spMkLst>
+            <pc:docMk/>
+            <pc:sldMk cId="1576120367" sldId="2387"/>
+            <ac:spMk id="5" creationId="{5B42861C-BD96-F755-A471-270F194FDB31}"/>
+          </ac:spMkLst>
+        </pc:spChg>
+        <pc:spChg chg="mod">
+          <ac:chgData name="Xin Luo" userId="82312ee5779919a4" providerId="LiveId" clId="{B10D17D3-3A51-854C-A635-1C39A202C200}" dt="2023-03-01T03:08:52.221" v="189" actId="1076"/>
+          <ac:spMkLst>
+            <pc:docMk/>
+            <pc:sldMk cId="1576120367" sldId="2387"/>
+            <ac:spMk id="6" creationId="{00000000-0000-0000-0000-000000000000}"/>
+          </ac:spMkLst>
+        </pc:spChg>
+        <pc:grpChg chg="add del mod">
+          <ac:chgData name="Xin Luo" userId="82312ee5779919a4" providerId="LiveId" clId="{B10D17D3-3A51-854C-A635-1C39A202C200}" dt="2023-03-01T03:11:54.462" v="258"/>
+          <ac:grpSpMkLst>
+            <pc:docMk/>
+            <pc:sldMk cId="1576120367" sldId="2387"/>
+            <ac:grpSpMk id="2" creationId="{D75D16A1-CA22-97BE-7AC3-94ACAAC9786D}"/>
+          </ac:grpSpMkLst>
+        </pc:grpChg>
+        <pc:grpChg chg="mod">
+          <ac:chgData name="Xin Luo" userId="82312ee5779919a4" providerId="LiveId" clId="{B10D17D3-3A51-854C-A635-1C39A202C200}" dt="2023-03-01T03:11:53.530" v="256" actId="1076"/>
+          <ac:grpSpMkLst>
+            <pc:docMk/>
+            <pc:sldMk cId="1576120367" sldId="2387"/>
+            <ac:grpSpMk id="3" creationId="{12ED16A1-79B8-7DB1-1CC1-250B051BAD58}"/>
+          </ac:grpSpMkLst>
+        </pc:grpChg>
+        <pc:grpChg chg="mod">
+          <ac:chgData name="Xin Luo" userId="82312ee5779919a4" providerId="LiveId" clId="{B10D17D3-3A51-854C-A635-1C39A202C200}" dt="2023-03-01T03:11:52.612" v="255" actId="1076"/>
+          <ac:grpSpMkLst>
+            <pc:docMk/>
+            <pc:sldMk cId="1576120367" sldId="2387"/>
+            <ac:grpSpMk id="9" creationId="{84B9B8D5-4BCC-CDFF-1E13-B005060A8BDF}"/>
+          </ac:grpSpMkLst>
+        </pc:grpChg>
+      </pc:sldChg>
+      <pc:sldChg chg="addSp delSp modSp del mod">
+        <pc:chgData name="Xin Luo" userId="82312ee5779919a4" providerId="LiveId" clId="{B10D17D3-3A51-854C-A635-1C39A202C200}" dt="2023-03-01T08:16:09.042" v="2803" actId="2696"/>
+        <pc:sldMkLst>
+          <pc:docMk/>
+          <pc:sldMk cId="2688334957" sldId="2705"/>
+        </pc:sldMkLst>
+        <pc:spChg chg="del">
+          <ac:chgData name="Xin Luo" userId="82312ee5779919a4" providerId="LiveId" clId="{B10D17D3-3A51-854C-A635-1C39A202C200}" dt="2023-03-01T03:12:41.405" v="315" actId="478"/>
+          <ac:spMkLst>
+            <pc:docMk/>
+            <pc:sldMk cId="2688334957" sldId="2705"/>
+            <ac:spMk id="2" creationId="{631AADB6-C88A-D817-4683-FC087E4E240F}"/>
+          </ac:spMkLst>
+        </pc:spChg>
+        <pc:spChg chg="mod">
+          <ac:chgData name="Xin Luo" userId="82312ee5779919a4" providerId="LiveId" clId="{B10D17D3-3A51-854C-A635-1C39A202C200}" dt="2023-03-01T03:12:46.084" v="319" actId="20577"/>
+          <ac:spMkLst>
+            <pc:docMk/>
+            <pc:sldMk cId="2688334957" sldId="2705"/>
+            <ac:spMk id="3" creationId="{00000000-0000-0000-0000-000000000000}"/>
+          </ac:spMkLst>
+        </pc:spChg>
+        <pc:spChg chg="add mod">
+          <ac:chgData name="Xin Luo" userId="82312ee5779919a4" providerId="LiveId" clId="{B10D17D3-3A51-854C-A635-1C39A202C200}" dt="2023-03-01T07:04:04.047" v="1565" actId="1035"/>
+          <ac:spMkLst>
+            <pc:docMk/>
+            <pc:sldMk cId="2688334957" sldId="2705"/>
+            <ac:spMk id="4" creationId="{DFE91C0B-C9F8-3FEC-3419-2DE0C6E6DCB8}"/>
+          </ac:spMkLst>
+        </pc:spChg>
+        <pc:spChg chg="mod">
+          <ac:chgData name="Xin Luo" userId="82312ee5779919a4" providerId="LiveId" clId="{B10D17D3-3A51-854C-A635-1C39A202C200}" dt="2023-03-01T07:38:05.554" v="2285" actId="20577"/>
+          <ac:spMkLst>
+            <pc:docMk/>
+            <pc:sldMk cId="2688334957" sldId="2705"/>
+            <ac:spMk id="17" creationId="{9E05FFCA-3371-AF5C-381D-71D984055F5A}"/>
+          </ac:spMkLst>
+        </pc:spChg>
+      </pc:sldChg>
+      <pc:sldChg chg="modSp del mod">
+        <pc:chgData name="Xin Luo" userId="82312ee5779919a4" providerId="LiveId" clId="{B10D17D3-3A51-854C-A635-1C39A202C200}" dt="2023-03-04T02:27:05.106" v="4323" actId="2696"/>
+        <pc:sldMkLst>
+          <pc:docMk/>
+          <pc:sldMk cId="2464444856" sldId="2706"/>
+        </pc:sldMkLst>
+        <pc:spChg chg="mod">
+          <ac:chgData name="Xin Luo" userId="82312ee5779919a4" providerId="LiveId" clId="{B10D17D3-3A51-854C-A635-1C39A202C200}" dt="2023-03-04T02:23:09.439" v="4164" actId="20577"/>
+          <ac:spMkLst>
+            <pc:docMk/>
+            <pc:sldMk cId="2464444856" sldId="2706"/>
+            <ac:spMk id="2" creationId="{631AADB6-C88A-D817-4683-FC087E4E240F}"/>
+          </ac:spMkLst>
+        </pc:spChg>
+        <pc:spChg chg="mod">
+          <ac:chgData name="Xin Luo" userId="82312ee5779919a4" providerId="LiveId" clId="{B10D17D3-3A51-854C-A635-1C39A202C200}" dt="2023-03-01T03:13:11.029" v="347" actId="20577"/>
+          <ac:spMkLst>
+            <pc:docMk/>
+            <pc:sldMk cId="2464444856" sldId="2706"/>
+            <ac:spMk id="3" creationId="{00000000-0000-0000-0000-000000000000}"/>
+          </ac:spMkLst>
+        </pc:spChg>
+        <pc:spChg chg="mod">
+          <ac:chgData name="Xin Luo" userId="82312ee5779919a4" providerId="LiveId" clId="{B10D17D3-3A51-854C-A635-1C39A202C200}" dt="2023-03-04T02:21:10.399" v="4124" actId="20577"/>
+          <ac:spMkLst>
+            <pc:docMk/>
+            <pc:sldMk cId="2464444856" sldId="2706"/>
+            <ac:spMk id="17" creationId="{9E05FFCA-3371-AF5C-381D-71D984055F5A}"/>
+          </ac:spMkLst>
+        </pc:spChg>
+      </pc:sldChg>
+      <pc:sldChg chg="addSp delSp modSp mod">
+        <pc:chgData name="Xin Luo" userId="82312ee5779919a4" providerId="LiveId" clId="{B10D17D3-3A51-854C-A635-1C39A202C200}" dt="2023-03-04T02:29:49.946" v="4367" actId="20577"/>
+        <pc:sldMkLst>
+          <pc:docMk/>
+          <pc:sldMk cId="1602808061" sldId="2707"/>
+        </pc:sldMkLst>
+        <pc:spChg chg="mod">
+          <ac:chgData name="Xin Luo" userId="82312ee5779919a4" providerId="LiveId" clId="{B10D17D3-3A51-854C-A635-1C39A202C200}" dt="2023-03-04T02:29:49.946" v="4367" actId="20577"/>
+          <ac:spMkLst>
+            <pc:docMk/>
+            <pc:sldMk cId="1602808061" sldId="2707"/>
+            <ac:spMk id="2" creationId="{631AADB6-C88A-D817-4683-FC087E4E240F}"/>
+          </ac:spMkLst>
+        </pc:spChg>
+        <pc:spChg chg="mod">
+          <ac:chgData name="Xin Luo" userId="82312ee5779919a4" providerId="LiveId" clId="{B10D17D3-3A51-854C-A635-1C39A202C200}" dt="2023-03-01T03:19:53.815" v="779" actId="20577"/>
+          <ac:spMkLst>
+            <pc:docMk/>
+            <pc:sldMk cId="1602808061" sldId="2707"/>
+            <ac:spMk id="3" creationId="{00000000-0000-0000-0000-000000000000}"/>
+          </ac:spMkLst>
+        </pc:spChg>
+        <pc:spChg chg="add del mod">
+          <ac:chgData name="Xin Luo" userId="82312ee5779919a4" providerId="LiveId" clId="{B10D17D3-3A51-854C-A635-1C39A202C200}" dt="2023-03-01T03:14:57.021" v="452" actId="478"/>
+          <ac:spMkLst>
+            <pc:docMk/>
+            <pc:sldMk cId="1602808061" sldId="2707"/>
+            <ac:spMk id="4" creationId="{C75F9EA2-70CA-A73B-2653-99D35FD92005}"/>
+          </ac:spMkLst>
+        </pc:spChg>
+        <pc:spChg chg="del mod">
+          <ac:chgData name="Xin Luo" userId="82312ee5779919a4" providerId="LiveId" clId="{B10D17D3-3A51-854C-A635-1C39A202C200}" dt="2023-03-01T03:20:42.446" v="870" actId="478"/>
+          <ac:spMkLst>
+            <pc:docMk/>
+            <pc:sldMk cId="1602808061" sldId="2707"/>
+            <ac:spMk id="17" creationId="{9E05FFCA-3371-AF5C-381D-71D984055F5A}"/>
+          </ac:spMkLst>
+        </pc:spChg>
+      </pc:sldChg>
+      <pc:sldChg chg="modSp mod">
+        <pc:chgData name="Xin Luo" userId="82312ee5779919a4" providerId="LiveId" clId="{B10D17D3-3A51-854C-A635-1C39A202C200}" dt="2023-03-01T07:00:50.646" v="1533" actId="14100"/>
+        <pc:sldMkLst>
+          <pc:docMk/>
+          <pc:sldMk cId="2744383376" sldId="2711"/>
+        </pc:sldMkLst>
+        <pc:spChg chg="mod">
+          <ac:chgData name="Xin Luo" userId="82312ee5779919a4" providerId="LiveId" clId="{B10D17D3-3A51-854C-A635-1C39A202C200}" dt="2023-03-01T07:00:50.646" v="1533" actId="14100"/>
+          <ac:spMkLst>
+            <pc:docMk/>
+            <pc:sldMk cId="2744383376" sldId="2711"/>
+            <ac:spMk id="18" creationId="{9D310AF3-A081-4032-01C0-C288D4F7AC53}"/>
+          </ac:spMkLst>
+        </pc:spChg>
+      </pc:sldChg>
+      <pc:sldChg chg="addSp delSp modSp mod">
+        <pc:chgData name="Xin Luo" userId="82312ee5779919a4" providerId="LiveId" clId="{B10D17D3-3A51-854C-A635-1C39A202C200}" dt="2023-03-01T07:14:41.232" v="1940" actId="1035"/>
+        <pc:sldMkLst>
+          <pc:docMk/>
+          <pc:sldMk cId="280619949" sldId="2714"/>
+        </pc:sldMkLst>
+        <pc:spChg chg="add del mod">
+          <ac:chgData name="Xin Luo" userId="82312ee5779919a4" providerId="LiveId" clId="{B10D17D3-3A51-854C-A635-1C39A202C200}" dt="2023-03-01T07:06:29.970" v="1634" actId="478"/>
+          <ac:spMkLst>
+            <pc:docMk/>
+            <pc:sldMk cId="280619949" sldId="2714"/>
+            <ac:spMk id="4" creationId="{B2054973-49B5-A6EE-DB29-692209383346}"/>
+          </ac:spMkLst>
+        </pc:spChg>
+        <pc:spChg chg="add del mod">
+          <ac:chgData name="Xin Luo" userId="82312ee5779919a4" providerId="LiveId" clId="{B10D17D3-3A51-854C-A635-1C39A202C200}" dt="2023-03-01T07:06:28.039" v="1633" actId="478"/>
+          <ac:spMkLst>
+            <pc:docMk/>
+            <pc:sldMk cId="280619949" sldId="2714"/>
+            <ac:spMk id="6" creationId="{19C6484B-DCCB-D134-1A1F-AAFC33245462}"/>
+          </ac:spMkLst>
+        </pc:spChg>
+        <pc:spChg chg="add mod">
+          <ac:chgData name="Xin Luo" userId="82312ee5779919a4" providerId="LiveId" clId="{B10D17D3-3A51-854C-A635-1C39A202C200}" dt="2023-03-01T07:14:38.928" v="1938" actId="164"/>
+          <ac:spMkLst>
+            <pc:docMk/>
+            <pc:sldMk cId="280619949" sldId="2714"/>
+            <ac:spMk id="7" creationId="{EC866106-2882-0036-D683-EBAC443E2362}"/>
+          </ac:spMkLst>
+        </pc:spChg>
+        <pc:spChg chg="add mod">
+          <ac:chgData name="Xin Luo" userId="82312ee5779919a4" providerId="LiveId" clId="{B10D17D3-3A51-854C-A635-1C39A202C200}" dt="2023-03-01T07:14:38.928" v="1938" actId="164"/>
+          <ac:spMkLst>
+            <pc:docMk/>
+            <pc:sldMk cId="280619949" sldId="2714"/>
+            <ac:spMk id="8" creationId="{0A6B20F1-473E-9B37-69EF-0AD338B6CE5E}"/>
+          </ac:spMkLst>
+        </pc:spChg>
+        <pc:grpChg chg="add mod">
+          <ac:chgData name="Xin Luo" userId="82312ee5779919a4" providerId="LiveId" clId="{B10D17D3-3A51-854C-A635-1C39A202C200}" dt="2023-03-01T07:14:41.232" v="1940" actId="1035"/>
+          <ac:grpSpMkLst>
+            <pc:docMk/>
+            <pc:sldMk cId="280619949" sldId="2714"/>
+            <ac:grpSpMk id="9" creationId="{7C46DFDE-4B13-99B2-6717-B313A96CDC60}"/>
+          </ac:grpSpMkLst>
+        </pc:grpChg>
+        <pc:picChg chg="mod">
+          <ac:chgData name="Xin Luo" userId="82312ee5779919a4" providerId="LiveId" clId="{B10D17D3-3A51-854C-A635-1C39A202C200}" dt="2023-03-01T07:14:38.928" v="1938" actId="164"/>
+          <ac:picMkLst>
+            <pc:docMk/>
+            <pc:sldMk cId="280619949" sldId="2714"/>
+            <ac:picMk id="5" creationId="{0604E948-208D-161C-F579-7EA72A1F42DC}"/>
+          </ac:picMkLst>
+        </pc:picChg>
+      </pc:sldChg>
+      <pc:sldChg chg="modSp mod">
+        <pc:chgData name="Xin Luo" userId="82312ee5779919a4" providerId="LiveId" clId="{B10D17D3-3A51-854C-A635-1C39A202C200}" dt="2023-03-01T06:46:02.276" v="991" actId="1076"/>
+        <pc:sldMkLst>
+          <pc:docMk/>
+          <pc:sldMk cId="3852391939" sldId="2715"/>
+        </pc:sldMkLst>
+        <pc:spChg chg="mod">
+          <ac:chgData name="Xin Luo" userId="82312ee5779919a4" providerId="LiveId" clId="{B10D17D3-3A51-854C-A635-1C39A202C200}" dt="2023-03-01T06:45:33.026" v="990" actId="113"/>
+          <ac:spMkLst>
+            <pc:docMk/>
+            <pc:sldMk cId="3852391939" sldId="2715"/>
+            <ac:spMk id="5" creationId="{FCD10A89-5E0E-5D73-1D4F-9E11D943B29C}"/>
+          </ac:spMkLst>
+        </pc:spChg>
+        <pc:picChg chg="mod">
+          <ac:chgData name="Xin Luo" userId="82312ee5779919a4" providerId="LiveId" clId="{B10D17D3-3A51-854C-A635-1C39A202C200}" dt="2023-03-01T06:46:02.276" v="991" actId="1076"/>
+          <ac:picMkLst>
+            <pc:docMk/>
+            <pc:sldMk cId="3852391939" sldId="2715"/>
+            <ac:picMk id="2050" creationId="{8F8FBDFD-CF37-F4FE-58FA-9350A0CDABC7}"/>
+          </ac:picMkLst>
+        </pc:picChg>
+      </pc:sldChg>
+      <pc:sldChg chg="addSp delSp modSp mod ord">
+        <pc:chgData name="Xin Luo" userId="82312ee5779919a4" providerId="LiveId" clId="{B10D17D3-3A51-854C-A635-1C39A202C200}" dt="2023-03-01T07:52:13.787" v="2795" actId="113"/>
+        <pc:sldMkLst>
+          <pc:docMk/>
+          <pc:sldMk cId="3026715585" sldId="2716"/>
+        </pc:sldMkLst>
+        <pc:spChg chg="mod">
+          <ac:chgData name="Xin Luo" userId="82312ee5779919a4" providerId="LiveId" clId="{B10D17D3-3A51-854C-A635-1C39A202C200}" dt="2023-03-01T07:52:13.787" v="2795" actId="113"/>
+          <ac:spMkLst>
+            <pc:docMk/>
+            <pc:sldMk cId="3026715585" sldId="2716"/>
+            <ac:spMk id="4" creationId="{B31A8325-31D8-6F06-6D89-E39763C56875}"/>
+          </ac:spMkLst>
+        </pc:spChg>
+        <pc:spChg chg="add">
+          <ac:chgData name="Xin Luo" userId="82312ee5779919a4" providerId="LiveId" clId="{B10D17D3-3A51-854C-A635-1C39A202C200}" dt="2023-03-01T06:39:50.043" v="928"/>
+          <ac:spMkLst>
+            <pc:docMk/>
+            <pc:sldMk cId="3026715585" sldId="2716"/>
+            <ac:spMk id="5" creationId="{9FC3EA85-249E-1417-9BEE-658D18412D50}"/>
+          </ac:spMkLst>
+        </pc:spChg>
+        <pc:spChg chg="add mod">
+          <ac:chgData name="Xin Luo" userId="82312ee5779919a4" providerId="LiveId" clId="{B10D17D3-3A51-854C-A635-1C39A202C200}" dt="2023-03-01T06:50:38.874" v="1125" actId="20577"/>
+          <ac:spMkLst>
+            <pc:docMk/>
+            <pc:sldMk cId="3026715585" sldId="2716"/>
+            <ac:spMk id="6" creationId="{A742F445-FD1E-D792-ED2C-06B36B983C52}"/>
+          </ac:spMkLst>
+        </pc:spChg>
+        <pc:spChg chg="del mod">
+          <ac:chgData name="Xin Luo" userId="82312ee5779919a4" providerId="LiveId" clId="{B10D17D3-3A51-854C-A635-1C39A202C200}" dt="2023-03-01T06:34:22.687" v="924" actId="478"/>
+          <ac:spMkLst>
+            <pc:docMk/>
+            <pc:sldMk cId="3026715585" sldId="2716"/>
+            <ac:spMk id="17" creationId="{9E05FFCA-3371-AF5C-381D-71D984055F5A}"/>
+          </ac:spMkLst>
+        </pc:spChg>
+        <pc:picChg chg="add mod">
+          <ac:chgData name="Xin Luo" userId="82312ee5779919a4" providerId="LiveId" clId="{B10D17D3-3A51-854C-A635-1C39A202C200}" dt="2023-03-01T06:47:24.214" v="997" actId="1076"/>
+          <ac:picMkLst>
+            <pc:docMk/>
+            <pc:sldMk cId="3026715585" sldId="2716"/>
+            <ac:picMk id="1028" creationId="{66985166-168F-6888-A257-804014E303E4}"/>
+          </ac:picMkLst>
+        </pc:picChg>
+      </pc:sldChg>
+      <pc:sldChg chg="modSp mod">
+        <pc:chgData name="Xin Luo" userId="82312ee5779919a4" providerId="LiveId" clId="{B10D17D3-3A51-854C-A635-1C39A202C200}" dt="2023-03-01T06:51:03.850" v="1134" actId="113"/>
+        <pc:sldMkLst>
+          <pc:docMk/>
+          <pc:sldMk cId="4136986794" sldId="2717"/>
+        </pc:sldMkLst>
+        <pc:spChg chg="mod">
+          <ac:chgData name="Xin Luo" userId="82312ee5779919a4" providerId="LiveId" clId="{B10D17D3-3A51-854C-A635-1C39A202C200}" dt="2023-03-01T06:51:03.850" v="1134" actId="113"/>
+          <ac:spMkLst>
+            <pc:docMk/>
+            <pc:sldMk cId="4136986794" sldId="2717"/>
+            <ac:spMk id="5" creationId="{FCD10A89-5E0E-5D73-1D4F-9E11D943B29C}"/>
+          </ac:spMkLst>
+        </pc:spChg>
+        <pc:picChg chg="mod">
+          <ac:chgData name="Xin Luo" userId="82312ee5779919a4" providerId="LiveId" clId="{B10D17D3-3A51-854C-A635-1C39A202C200}" dt="2023-03-01T06:50:48.055" v="1127" actId="1076"/>
+          <ac:picMkLst>
+            <pc:docMk/>
+            <pc:sldMk cId="4136986794" sldId="2717"/>
+            <ac:picMk id="6" creationId="{2260B411-AFF0-1E09-142B-45C9F88562F7}"/>
+          </ac:picMkLst>
+        </pc:picChg>
+      </pc:sldChg>
+      <pc:sldChg chg="modSp mod">
+        <pc:chgData name="Xin Luo" userId="82312ee5779919a4" providerId="LiveId" clId="{B10D17D3-3A51-854C-A635-1C39A202C200}" dt="2023-03-01T07:36:29.598" v="2248" actId="14100"/>
+        <pc:sldMkLst>
+          <pc:docMk/>
+          <pc:sldMk cId="1778017482" sldId="2718"/>
+        </pc:sldMkLst>
+        <pc:spChg chg="mod">
+          <ac:chgData name="Xin Luo" userId="82312ee5779919a4" providerId="LiveId" clId="{B10D17D3-3A51-854C-A635-1C39A202C200}" dt="2023-03-01T06:51:18.514" v="1137" actId="255"/>
+          <ac:spMkLst>
+            <pc:docMk/>
+            <pc:sldMk cId="1778017482" sldId="2718"/>
+            <ac:spMk id="5" creationId="{FCD10A89-5E0E-5D73-1D4F-9E11D943B29C}"/>
+          </ac:spMkLst>
+        </pc:spChg>
+        <pc:picChg chg="mod">
+          <ac:chgData name="Xin Luo" userId="82312ee5779919a4" providerId="LiveId" clId="{B10D17D3-3A51-854C-A635-1C39A202C200}" dt="2023-03-01T07:36:29.598" v="2248" actId="14100"/>
+          <ac:picMkLst>
+            <pc:docMk/>
+            <pc:sldMk cId="1778017482" sldId="2718"/>
+            <ac:picMk id="3074" creationId="{3E8CF22C-6E5D-0AAE-1F79-795E8B77EEF7}"/>
+          </ac:picMkLst>
+        </pc:picChg>
+      </pc:sldChg>
+      <pc:sldChg chg="addSp modSp mod">
+        <pc:chgData name="Xin Luo" userId="82312ee5779919a4" providerId="LiveId" clId="{B10D17D3-3A51-854C-A635-1C39A202C200}" dt="2023-03-04T03:02:31.854" v="4924" actId="20577"/>
+        <pc:sldMkLst>
+          <pc:docMk/>
+          <pc:sldMk cId="1858913004" sldId="2719"/>
+        </pc:sldMkLst>
+        <pc:spChg chg="mod">
+          <ac:chgData name="Xin Luo" userId="82312ee5779919a4" providerId="LiveId" clId="{B10D17D3-3A51-854C-A635-1C39A202C200}" dt="2023-03-04T02:35:39.622" v="4451" actId="1035"/>
+          <ac:spMkLst>
+            <pc:docMk/>
+            <pc:sldMk cId="1858913004" sldId="2719"/>
+            <ac:spMk id="2" creationId="{631AADB6-C88A-D817-4683-FC087E4E240F}"/>
+          </ac:spMkLst>
+        </pc:spChg>
+        <pc:spChg chg="add mod">
+          <ac:chgData name="Xin Luo" userId="82312ee5779919a4" providerId="LiveId" clId="{B10D17D3-3A51-854C-A635-1C39A202C200}" dt="2023-03-01T08:54:50.949" v="3823" actId="404"/>
+          <ac:spMkLst>
+            <pc:docMk/>
+            <pc:sldMk cId="1858913004" sldId="2719"/>
+            <ac:spMk id="4" creationId="{814FF4E1-B17F-D4F8-E834-173BA3B0D059}"/>
+          </ac:spMkLst>
+        </pc:spChg>
+        <pc:spChg chg="mod">
+          <ac:chgData name="Xin Luo" userId="82312ee5779919a4" providerId="LiveId" clId="{B10D17D3-3A51-854C-A635-1C39A202C200}" dt="2023-03-04T02:35:30.997" v="4439" actId="1038"/>
+          <ac:spMkLst>
+            <pc:docMk/>
+            <pc:sldMk cId="1858913004" sldId="2719"/>
+            <ac:spMk id="5" creationId="{FCD10A89-5E0E-5D73-1D4F-9E11D943B29C}"/>
+          </ac:spMkLst>
+        </pc:spChg>
+        <pc:spChg chg="add mod">
+          <ac:chgData name="Xin Luo" userId="82312ee5779919a4" providerId="LiveId" clId="{B10D17D3-3A51-854C-A635-1C39A202C200}" dt="2023-03-04T03:02:31.854" v="4924" actId="20577"/>
+          <ac:spMkLst>
+            <pc:docMk/>
+            <pc:sldMk cId="1858913004" sldId="2719"/>
+            <ac:spMk id="6" creationId="{10943A92-9E22-44EA-2939-C64F8E264329}"/>
+          </ac:spMkLst>
+        </pc:spChg>
+      </pc:sldChg>
+      <pc:sldChg chg="modSp del mod">
+        <pc:chgData name="Xin Luo" userId="82312ee5779919a4" providerId="LiveId" clId="{B10D17D3-3A51-854C-A635-1C39A202C200}" dt="2023-03-01T06:31:51.569" v="913" actId="2696"/>
+        <pc:sldMkLst>
+          <pc:docMk/>
+          <pc:sldMk cId="1410676903" sldId="2721"/>
+        </pc:sldMkLst>
+        <pc:spChg chg="mod">
+          <ac:chgData name="Xin Luo" userId="82312ee5779919a4" providerId="LiveId" clId="{B10D17D3-3A51-854C-A635-1C39A202C200}" dt="2023-03-01T06:31:01.523" v="912" actId="1076"/>
+          <ac:spMkLst>
+            <pc:docMk/>
+            <pc:sldMk cId="1410676903" sldId="2721"/>
+            <ac:spMk id="9" creationId="{D5E43916-6543-2664-EE40-07ABFFB01F26}"/>
+          </ac:spMkLst>
+        </pc:spChg>
+        <pc:picChg chg="mod">
+          <ac:chgData name="Xin Luo" userId="82312ee5779919a4" providerId="LiveId" clId="{B10D17D3-3A51-854C-A635-1C39A202C200}" dt="2023-03-01T06:30:57.904" v="911" actId="1076"/>
+          <ac:picMkLst>
+            <pc:docMk/>
+            <pc:sldMk cId="1410676903" sldId="2721"/>
+            <ac:picMk id="8" creationId="{BA45F6EA-D51F-F9F8-F33E-5E3217612D76}"/>
+          </ac:picMkLst>
+        </pc:picChg>
+      </pc:sldChg>
+      <pc:sldChg chg="addSp delSp modSp add mod">
+        <pc:chgData name="Xin Luo" userId="82312ee5779919a4" providerId="LiveId" clId="{B10D17D3-3A51-854C-A635-1C39A202C200}" dt="2023-03-01T07:37:11.730" v="2251" actId="478"/>
+        <pc:sldMkLst>
+          <pc:docMk/>
+          <pc:sldMk cId="295872025" sldId="2722"/>
+        </pc:sldMkLst>
+        <pc:spChg chg="add del mod">
+          <ac:chgData name="Xin Luo" userId="82312ee5779919a4" providerId="LiveId" clId="{B10D17D3-3A51-854C-A635-1C39A202C200}" dt="2023-03-01T07:37:11.730" v="2251" actId="478"/>
+          <ac:spMkLst>
+            <pc:docMk/>
+            <pc:sldMk cId="295872025" sldId="2722"/>
+            <ac:spMk id="2" creationId="{1B26B48C-9811-89AB-3B65-3E6557BF8546}"/>
+          </ac:spMkLst>
+        </pc:spChg>
+        <pc:spChg chg="mod">
+          <ac:chgData name="Xin Luo" userId="82312ee5779919a4" providerId="LiveId" clId="{B10D17D3-3A51-854C-A635-1C39A202C200}" dt="2023-03-01T03:12:16.184" v="288" actId="20577"/>
+          <ac:spMkLst>
+            <pc:docMk/>
+            <pc:sldMk cId="295872025" sldId="2722"/>
+            <ac:spMk id="12" creationId="{00000000-0000-0000-0000-000000000000}"/>
+          </ac:spMkLst>
+        </pc:spChg>
+        <pc:spChg chg="mod">
+          <ac:chgData name="Xin Luo" userId="82312ee5779919a4" providerId="LiveId" clId="{B10D17D3-3A51-854C-A635-1C39A202C200}" dt="2023-03-01T03:21:17.754" v="890" actId="20577"/>
+          <ac:spMkLst>
+            <pc:docMk/>
+            <pc:sldMk cId="295872025" sldId="2722"/>
+            <ac:spMk id="14" creationId="{00000000-0000-0000-0000-000000000000}"/>
+          </ac:spMkLst>
+        </pc:spChg>
+        <pc:spChg chg="mod">
+          <ac:chgData name="Xin Luo" userId="82312ee5779919a4" providerId="LiveId" clId="{B10D17D3-3A51-854C-A635-1C39A202C200}" dt="2023-03-01T07:37:07.662" v="2249" actId="1076"/>
+          <ac:spMkLst>
+            <pc:docMk/>
+            <pc:sldMk cId="295872025" sldId="2722"/>
+            <ac:spMk id="19" creationId="{00000000-0000-0000-0000-000000000000}"/>
+          </ac:spMkLst>
+        </pc:spChg>
+      </pc:sldChg>
+      <pc:sldChg chg="add del">
+        <pc:chgData name="Xin Luo" userId="82312ee5779919a4" providerId="LiveId" clId="{B10D17D3-3A51-854C-A635-1C39A202C200}" dt="2023-03-01T03:11:46.236" v="248"/>
+        <pc:sldMkLst>
+          <pc:docMk/>
+          <pc:sldMk cId="3482772982" sldId="2722"/>
+        </pc:sldMkLst>
+      </pc:sldChg>
+      <pc:sldChg chg="addSp delSp modSp add mod ord">
+        <pc:chgData name="Xin Luo" userId="82312ee5779919a4" providerId="LiveId" clId="{B10D17D3-3A51-854C-A635-1C39A202C200}" dt="2023-03-01T07:02:34.534" v="1561" actId="1035"/>
+        <pc:sldMkLst>
+          <pc:docMk/>
+          <pc:sldMk cId="769179569" sldId="2723"/>
+        </pc:sldMkLst>
+        <pc:spChg chg="del">
+          <ac:chgData name="Xin Luo" userId="82312ee5779919a4" providerId="LiveId" clId="{B10D17D3-3A51-854C-A635-1C39A202C200}" dt="2023-03-01T06:32:32.946" v="917" actId="478"/>
+          <ac:spMkLst>
+            <pc:docMk/>
+            <pc:sldMk cId="769179569" sldId="2723"/>
+            <ac:spMk id="4" creationId="{B31A8325-31D8-6F06-6D89-E39763C56875}"/>
+          </ac:spMkLst>
+        </pc:spChg>
+        <pc:spChg chg="mod">
+          <ac:chgData name="Xin Luo" userId="82312ee5779919a4" providerId="LiveId" clId="{B10D17D3-3A51-854C-A635-1C39A202C200}" dt="2023-03-01T07:02:34.534" v="1561" actId="1035"/>
+          <ac:spMkLst>
+            <pc:docMk/>
+            <pc:sldMk cId="769179569" sldId="2723"/>
+            <ac:spMk id="17" creationId="{9E05FFCA-3371-AF5C-381D-71D984055F5A}"/>
+          </ac:spMkLst>
+        </pc:spChg>
+        <pc:picChg chg="add mod">
+          <ac:chgData name="Xin Luo" userId="82312ee5779919a4" providerId="LiveId" clId="{B10D17D3-3A51-854C-A635-1C39A202C200}" dt="2023-03-01T06:33:34.384" v="922" actId="1076"/>
+          <ac:picMkLst>
+            <pc:docMk/>
+            <pc:sldMk cId="769179569" sldId="2723"/>
+            <ac:picMk id="6" creationId="{E48B3BDE-9687-B26A-07FC-D08825F4C5C7}"/>
+          </ac:picMkLst>
+        </pc:picChg>
+      </pc:sldChg>
+      <pc:sldChg chg="addSp delSp modSp add del mod">
+        <pc:chgData name="Xin Luo" userId="82312ee5779919a4" providerId="LiveId" clId="{B10D17D3-3A51-854C-A635-1C39A202C200}" dt="2023-03-04T02:00:43.985" v="3977" actId="2696"/>
+        <pc:sldMkLst>
+          <pc:docMk/>
+          <pc:sldMk cId="2179406886" sldId="2724"/>
+        </pc:sldMkLst>
+        <pc:spChg chg="del">
+          <ac:chgData name="Xin Luo" userId="82312ee5779919a4" providerId="LiveId" clId="{B10D17D3-3A51-854C-A635-1C39A202C200}" dt="2023-03-01T06:52:19.045" v="1173" actId="478"/>
+          <ac:spMkLst>
+            <pc:docMk/>
+            <pc:sldMk cId="2179406886" sldId="2724"/>
+            <ac:spMk id="4" creationId="{58EE51E5-8ACA-984C-6E8D-F8AA658223AD}"/>
+          </ac:spMkLst>
+        </pc:spChg>
+        <pc:spChg chg="del mod">
+          <ac:chgData name="Xin Luo" userId="82312ee5779919a4" providerId="LiveId" clId="{B10D17D3-3A51-854C-A635-1C39A202C200}" dt="2023-03-01T06:52:23.892" v="1175" actId="478"/>
+          <ac:spMkLst>
+            <pc:docMk/>
+            <pc:sldMk cId="2179406886" sldId="2724"/>
+            <ac:spMk id="5" creationId="{7F4897FB-F086-F339-A15F-A899143C7919}"/>
+          </ac:spMkLst>
+        </pc:spChg>
+        <pc:spChg chg="del">
+          <ac:chgData name="Xin Luo" userId="82312ee5779919a4" providerId="LiveId" clId="{B10D17D3-3A51-854C-A635-1C39A202C200}" dt="2023-03-01T06:52:17.227" v="1172" actId="478"/>
+          <ac:spMkLst>
+            <pc:docMk/>
+            <pc:sldMk cId="2179406886" sldId="2724"/>
+            <ac:spMk id="6" creationId="{7ED1482E-3610-E252-0E80-41B202D30E30}"/>
+          </ac:spMkLst>
+        </pc:spChg>
+        <pc:spChg chg="add mod">
+          <ac:chgData name="Xin Luo" userId="82312ee5779919a4" providerId="LiveId" clId="{B10D17D3-3A51-854C-A635-1C39A202C200}" dt="2023-03-01T06:59:49.895" v="1509" actId="1035"/>
+          <ac:spMkLst>
+            <pc:docMk/>
+            <pc:sldMk cId="2179406886" sldId="2724"/>
+            <ac:spMk id="7" creationId="{CCA3837E-1D09-5134-A225-250CEF7F9C13}"/>
+          </ac:spMkLst>
+        </pc:spChg>
+        <pc:picChg chg="del">
+          <ac:chgData name="Xin Luo" userId="82312ee5779919a4" providerId="LiveId" clId="{B10D17D3-3A51-854C-A635-1C39A202C200}" dt="2023-03-01T06:52:12.055" v="1170" actId="478"/>
+          <ac:picMkLst>
+            <pc:docMk/>
+            <pc:sldMk cId="2179406886" sldId="2724"/>
+            <ac:picMk id="5124" creationId="{D17BE6F3-1008-2FC6-54D2-736C673B73E8}"/>
+          </ac:picMkLst>
+        </pc:picChg>
+        <pc:picChg chg="mod">
+          <ac:chgData name="Xin Luo" userId="82312ee5779919a4" providerId="LiveId" clId="{B10D17D3-3A51-854C-A635-1C39A202C200}" dt="2023-03-01T06:59:51.894" v="1510" actId="1076"/>
+          <ac:picMkLst>
+            <pc:docMk/>
+            <pc:sldMk cId="2179406886" sldId="2724"/>
+            <ac:picMk id="5126" creationId="{EBB0C876-4E86-C2ED-5EE6-3B2BD26768B9}"/>
+          </ac:picMkLst>
+        </pc:picChg>
+        <pc:picChg chg="del">
+          <ac:chgData name="Xin Luo" userId="82312ee5779919a4" providerId="LiveId" clId="{B10D17D3-3A51-854C-A635-1C39A202C200}" dt="2023-03-01T06:52:15.250" v="1171" actId="478"/>
+          <ac:picMkLst>
+            <pc:docMk/>
+            <pc:sldMk cId="2179406886" sldId="2724"/>
+            <ac:picMk id="5128" creationId="{59C29F54-F731-6EBD-ECA9-847BE3563121}"/>
+          </ac:picMkLst>
+        </pc:picChg>
+      </pc:sldChg>
+      <pc:sldChg chg="addSp delSp modSp add mod">
+        <pc:chgData name="Xin Luo" userId="82312ee5779919a4" providerId="LiveId" clId="{B10D17D3-3A51-854C-A635-1C39A202C200}" dt="2023-03-04T02:34:13.611" v="4393" actId="1035"/>
+        <pc:sldMkLst>
+          <pc:docMk/>
+          <pc:sldMk cId="57442970" sldId="2725"/>
+        </pc:sldMkLst>
+        <pc:spChg chg="mod">
+          <ac:chgData name="Xin Luo" userId="82312ee5779919a4" providerId="LiveId" clId="{B10D17D3-3A51-854C-A635-1C39A202C200}" dt="2023-03-04T02:32:01.973" v="4385" actId="403"/>
+          <ac:spMkLst>
+            <pc:docMk/>
+            <pc:sldMk cId="57442970" sldId="2725"/>
+            <ac:spMk id="2" creationId="{631AADB6-C88A-D817-4683-FC087E4E240F}"/>
+          </ac:spMkLst>
+        </pc:spChg>
+        <pc:spChg chg="add del mod">
+          <ac:chgData name="Xin Luo" userId="82312ee5779919a4" providerId="LiveId" clId="{B10D17D3-3A51-854C-A635-1C39A202C200}" dt="2023-03-01T07:09:00.564" v="1684" actId="478"/>
+          <ac:spMkLst>
+            <pc:docMk/>
+            <pc:sldMk cId="57442970" sldId="2725"/>
+            <ac:spMk id="4" creationId="{6E0E7525-DD48-9BE0-AA55-4AB1B5AB0AF8}"/>
+          </ac:spMkLst>
+        </pc:spChg>
+        <pc:spChg chg="add del mod">
+          <ac:chgData name="Xin Luo" userId="82312ee5779919a4" providerId="LiveId" clId="{B10D17D3-3A51-854C-A635-1C39A202C200}" dt="2023-03-01T07:51:00.839" v="2794" actId="478"/>
+          <ac:spMkLst>
+            <pc:docMk/>
+            <pc:sldMk cId="57442970" sldId="2725"/>
+            <ac:spMk id="4" creationId="{7154FD73-ECDF-6A1F-E3C5-6D6473CC5410}"/>
+          </ac:spMkLst>
+        </pc:spChg>
+        <pc:spChg chg="add mod">
+          <ac:chgData name="Xin Luo" userId="82312ee5779919a4" providerId="LiveId" clId="{B10D17D3-3A51-854C-A635-1C39A202C200}" dt="2023-03-01T07:14:15.793" v="1936" actId="1035"/>
+          <ac:spMkLst>
+            <pc:docMk/>
+            <pc:sldMk cId="57442970" sldId="2725"/>
+            <ac:spMk id="7" creationId="{62959DC6-89B8-A589-6622-E3331C39FC3C}"/>
+          </ac:spMkLst>
+        </pc:spChg>
+        <pc:picChg chg="add mod">
+          <ac:chgData name="Xin Luo" userId="82312ee5779919a4" providerId="LiveId" clId="{B10D17D3-3A51-854C-A635-1C39A202C200}" dt="2023-03-04T02:34:13.611" v="4393" actId="1035"/>
+          <ac:picMkLst>
+            <pc:docMk/>
+            <pc:sldMk cId="57442970" sldId="2725"/>
+            <ac:picMk id="6" creationId="{9183A3DA-EFC1-4E1A-414F-651FFAB091D0}"/>
+          </ac:picMkLst>
+        </pc:picChg>
+      </pc:sldChg>
+      <pc:sldChg chg="add del">
+        <pc:chgData name="Xin Luo" userId="82312ee5779919a4" providerId="LiveId" clId="{B10D17D3-3A51-854C-A635-1C39A202C200}" dt="2023-03-01T07:05:06.405" v="1598"/>
+        <pc:sldMkLst>
+          <pc:docMk/>
+          <pc:sldMk cId="4175269822" sldId="2725"/>
+        </pc:sldMkLst>
+      </pc:sldChg>
+      <pc:sldChg chg="add del">
+        <pc:chgData name="Xin Luo" userId="82312ee5779919a4" providerId="LiveId" clId="{B10D17D3-3A51-854C-A635-1C39A202C200}" dt="2023-03-01T07:33:58.417" v="1999" actId="2696"/>
+        <pc:sldMkLst>
+          <pc:docMk/>
+          <pc:sldMk cId="2037340697" sldId="2726"/>
+        </pc:sldMkLst>
+      </pc:sldChg>
+      <pc:sldChg chg="modSp add del mod">
+        <pc:chgData name="Xin Luo" userId="82312ee5779919a4" providerId="LiveId" clId="{B10D17D3-3A51-854C-A635-1C39A202C200}" dt="2023-03-01T07:37:39.242" v="2283" actId="2696"/>
+        <pc:sldMkLst>
+          <pc:docMk/>
+          <pc:sldMk cId="2258735290" sldId="2726"/>
+        </pc:sldMkLst>
+        <pc:spChg chg="mod">
+          <ac:chgData name="Xin Luo" userId="82312ee5779919a4" providerId="LiveId" clId="{B10D17D3-3A51-854C-A635-1C39A202C200}" dt="2023-03-01T07:37:23.915" v="2262" actId="20577"/>
+          <ac:spMkLst>
+            <pc:docMk/>
+            <pc:sldMk cId="2258735290" sldId="2726"/>
+            <ac:spMk id="12" creationId="{00000000-0000-0000-0000-000000000000}"/>
+          </ac:spMkLst>
+        </pc:spChg>
+        <pc:spChg chg="mod">
+          <ac:chgData name="Xin Luo" userId="82312ee5779919a4" providerId="LiveId" clId="{B10D17D3-3A51-854C-A635-1C39A202C200}" dt="2023-03-01T07:37:34.195" v="2282" actId="20577"/>
+          <ac:spMkLst>
+            <pc:docMk/>
+            <pc:sldMk cId="2258735290" sldId="2726"/>
+            <ac:spMk id="14" creationId="{00000000-0000-0000-0000-000000000000}"/>
+          </ac:spMkLst>
+        </pc:spChg>
+      </pc:sldChg>
+      <pc:sldChg chg="modSp add mod">
+        <pc:chgData name="Xin Luo" userId="82312ee5779919a4" providerId="LiveId" clId="{B10D17D3-3A51-854C-A635-1C39A202C200}" dt="2023-03-04T02:20:01.519" v="4120" actId="113"/>
+        <pc:sldMkLst>
+          <pc:docMk/>
+          <pc:sldMk cId="4114066566" sldId="2726"/>
+        </pc:sldMkLst>
+        <pc:spChg chg="mod">
+          <ac:chgData name="Xin Luo" userId="82312ee5779919a4" providerId="LiveId" clId="{B10D17D3-3A51-854C-A635-1C39A202C200}" dt="2023-03-01T07:41:27.034" v="2495" actId="1035"/>
+          <ac:spMkLst>
+            <pc:docMk/>
+            <pc:sldMk cId="4114066566" sldId="2726"/>
+            <ac:spMk id="4" creationId="{DFE91C0B-C9F8-3FEC-3419-2DE0C6E6DCB8}"/>
+          </ac:spMkLst>
+        </pc:spChg>
+        <pc:spChg chg="mod">
+          <ac:chgData name="Xin Luo" userId="82312ee5779919a4" providerId="LiveId" clId="{B10D17D3-3A51-854C-A635-1C39A202C200}" dt="2023-03-04T02:20:01.519" v="4120" actId="113"/>
+          <ac:spMkLst>
+            <pc:docMk/>
+            <pc:sldMk cId="4114066566" sldId="2726"/>
+            <ac:spMk id="17" creationId="{9E05FFCA-3371-AF5C-381D-71D984055F5A}"/>
+          </ac:spMkLst>
+        </pc:spChg>
+      </pc:sldChg>
+      <pc:sldChg chg="addSp delSp modSp add mod ord">
+        <pc:chgData name="Xin Luo" userId="82312ee5779919a4" providerId="LiveId" clId="{B10D17D3-3A51-854C-A635-1C39A202C200}" dt="2023-03-04T02:22:49.634" v="4156" actId="20577"/>
+        <pc:sldMkLst>
+          <pc:docMk/>
+          <pc:sldMk cId="623131075" sldId="2727"/>
+        </pc:sldMkLst>
+        <pc:spChg chg="add del mod">
+          <ac:chgData name="Xin Luo" userId="82312ee5779919a4" providerId="LiveId" clId="{B10D17D3-3A51-854C-A635-1C39A202C200}" dt="2023-03-04T02:21:43.886" v="4131" actId="478"/>
+          <ac:spMkLst>
+            <pc:docMk/>
+            <pc:sldMk cId="623131075" sldId="2727"/>
+            <ac:spMk id="5" creationId="{913214EF-BBA3-95BD-757D-C451E214DD76}"/>
+          </ac:spMkLst>
+        </pc:spChg>
+        <pc:spChg chg="mod">
+          <ac:chgData name="Xin Luo" userId="82312ee5779919a4" providerId="LiveId" clId="{B10D17D3-3A51-854C-A635-1C39A202C200}" dt="2023-03-04T02:22:49.634" v="4156" actId="20577"/>
+          <ac:spMkLst>
+            <pc:docMk/>
+            <pc:sldMk cId="623131075" sldId="2727"/>
+            <ac:spMk id="17" creationId="{9E05FFCA-3371-AF5C-381D-71D984055F5A}"/>
+          </ac:spMkLst>
+        </pc:spChg>
+      </pc:sldChg>
+      <pc:sldChg chg="addSp delSp modSp add mod">
+        <pc:chgData name="Xin Luo" userId="82312ee5779919a4" providerId="LiveId" clId="{B10D17D3-3A51-854C-A635-1C39A202C200}" dt="2023-03-04T02:25:34.886" v="4245" actId="113"/>
+        <pc:sldMkLst>
+          <pc:docMk/>
+          <pc:sldMk cId="1683372320" sldId="2728"/>
+        </pc:sldMkLst>
+        <pc:spChg chg="mod">
+          <ac:chgData name="Xin Luo" userId="82312ee5779919a4" providerId="LiveId" clId="{B10D17D3-3A51-854C-A635-1C39A202C200}" dt="2023-03-01T08:15:30.267" v="2797" actId="2711"/>
+          <ac:spMkLst>
+            <pc:docMk/>
+            <pc:sldMk cId="1683372320" sldId="2728"/>
+            <ac:spMk id="3" creationId="{00000000-0000-0000-0000-000000000000}"/>
+          </ac:spMkLst>
+        </pc:spChg>
+        <pc:spChg chg="mod">
+          <ac:chgData name="Xin Luo" userId="82312ee5779919a4" providerId="LiveId" clId="{B10D17D3-3A51-854C-A635-1C39A202C200}" dt="2023-03-04T02:15:35.388" v="4029" actId="20577"/>
+          <ac:spMkLst>
+            <pc:docMk/>
+            <pc:sldMk cId="1683372320" sldId="2728"/>
+            <ac:spMk id="4" creationId="{DFE91C0B-C9F8-3FEC-3419-2DE0C6E6DCB8}"/>
+          </ac:spMkLst>
+        </pc:spChg>
+        <pc:spChg chg="add del mod">
+          <ac:chgData name="Xin Luo" userId="82312ee5779919a4" providerId="LiveId" clId="{B10D17D3-3A51-854C-A635-1C39A202C200}" dt="2023-03-04T02:23:31.141" v="4167" actId="478"/>
+          <ac:spMkLst>
+            <pc:docMk/>
+            <pc:sldMk cId="1683372320" sldId="2728"/>
+            <ac:spMk id="5" creationId="{1B0BE935-AC9C-D1EE-AD6A-7C386013DA7C}"/>
+          </ac:spMkLst>
+        </pc:spChg>
+        <pc:spChg chg="add mod">
+          <ac:chgData name="Xin Luo" userId="82312ee5779919a4" providerId="LiveId" clId="{B10D17D3-3A51-854C-A635-1C39A202C200}" dt="2023-03-04T02:25:34.886" v="4245" actId="113"/>
+          <ac:spMkLst>
+            <pc:docMk/>
+            <pc:sldMk cId="1683372320" sldId="2728"/>
+            <ac:spMk id="6" creationId="{2CCD6DA1-1437-AB5B-BCA8-405D548B2FB8}"/>
+          </ac:spMkLst>
+        </pc:spChg>
+        <pc:spChg chg="add del mod">
+          <ac:chgData name="Xin Luo" userId="82312ee5779919a4" providerId="LiveId" clId="{B10D17D3-3A51-854C-A635-1C39A202C200}" dt="2023-03-04T02:23:31.141" v="4167" actId="478"/>
+          <ac:spMkLst>
+            <pc:docMk/>
+            <pc:sldMk cId="1683372320" sldId="2728"/>
+            <ac:spMk id="7" creationId="{8A9C6DE8-75E5-EEB7-75DA-B8E0E87A7508}"/>
+          </ac:spMkLst>
+        </pc:spChg>
+        <pc:spChg chg="del mod">
+          <ac:chgData name="Xin Luo" userId="82312ee5779919a4" providerId="LiveId" clId="{B10D17D3-3A51-854C-A635-1C39A202C200}" dt="2023-03-04T02:15:38.307" v="4030" actId="478"/>
+          <ac:spMkLst>
+            <pc:docMk/>
+            <pc:sldMk cId="1683372320" sldId="2728"/>
+            <ac:spMk id="17" creationId="{9E05FFCA-3371-AF5C-381D-71D984055F5A}"/>
+          </ac:spMkLst>
+        </pc:spChg>
+      </pc:sldChg>
+      <pc:sldChg chg="delSp modSp add mod">
+        <pc:chgData name="Xin Luo" userId="82312ee5779919a4" providerId="LiveId" clId="{B10D17D3-3A51-854C-A635-1C39A202C200}" dt="2023-03-04T02:52:21.019" v="4898" actId="20577"/>
+        <pc:sldMkLst>
+          <pc:docMk/>
+          <pc:sldMk cId="240261692" sldId="2729"/>
+        </pc:sldMkLst>
+        <pc:spChg chg="mod">
+          <ac:chgData name="Xin Luo" userId="82312ee5779919a4" providerId="LiveId" clId="{B10D17D3-3A51-854C-A635-1C39A202C200}" dt="2023-03-01T08:35:17.222" v="2819" actId="20577"/>
+          <ac:spMkLst>
+            <pc:docMk/>
+            <pc:sldMk cId="240261692" sldId="2729"/>
+            <ac:spMk id="2" creationId="{631AADB6-C88A-D817-4683-FC087E4E240F}"/>
+          </ac:spMkLst>
+        </pc:spChg>
+        <pc:spChg chg="mod">
+          <ac:chgData name="Xin Luo" userId="82312ee5779919a4" providerId="LiveId" clId="{B10D17D3-3A51-854C-A635-1C39A202C200}" dt="2023-03-04T02:52:21.019" v="4898" actId="20577"/>
+          <ac:spMkLst>
+            <pc:docMk/>
+            <pc:sldMk cId="240261692" sldId="2729"/>
+            <ac:spMk id="5" creationId="{FCD10A89-5E0E-5D73-1D4F-9E11D943B29C}"/>
+          </ac:spMkLst>
+        </pc:spChg>
+        <pc:picChg chg="del">
+          <ac:chgData name="Xin Luo" userId="82312ee5779919a4" providerId="LiveId" clId="{B10D17D3-3A51-854C-A635-1C39A202C200}" dt="2023-03-01T08:35:20.583" v="2820" actId="478"/>
+          <ac:picMkLst>
+            <pc:docMk/>
+            <pc:sldMk cId="240261692" sldId="2729"/>
+            <ac:picMk id="3074" creationId="{3E8CF22C-6E5D-0AAE-1F79-795E8B77EEF7}"/>
+          </ac:picMkLst>
+        </pc:picChg>
+      </pc:sldChg>
+      <pc:sldChg chg="delSp add mod">
+        <pc:chgData name="Xin Luo" userId="82312ee5779919a4" providerId="LiveId" clId="{B10D17D3-3A51-854C-A635-1C39A202C200}" dt="2023-03-04T02:21:28.084" v="4127" actId="478"/>
+        <pc:sldMkLst>
+          <pc:docMk/>
+          <pc:sldMk cId="736914780" sldId="2730"/>
+        </pc:sldMkLst>
+        <pc:spChg chg="del">
+          <ac:chgData name="Xin Luo" userId="82312ee5779919a4" providerId="LiveId" clId="{B10D17D3-3A51-854C-A635-1C39A202C200}" dt="2023-03-04T02:21:28.084" v="4127" actId="478"/>
+          <ac:spMkLst>
+            <pc:docMk/>
+            <pc:sldMk cId="736914780" sldId="2730"/>
+            <ac:spMk id="5" creationId="{913214EF-BBA3-95BD-757D-C451E214DD76}"/>
+          </ac:spMkLst>
+        </pc:spChg>
+      </pc:sldChg>
+      <pc:sldChg chg="addSp delSp modSp add mod">
+        <pc:chgData name="Xin Luo" userId="82312ee5779919a4" providerId="LiveId" clId="{B10D17D3-3A51-854C-A635-1C39A202C200}" dt="2023-03-04T03:51:10.104" v="4946" actId="20577"/>
+        <pc:sldMkLst>
+          <pc:docMk/>
+          <pc:sldMk cId="3309691984" sldId="2731"/>
+        </pc:sldMkLst>
+        <pc:spChg chg="add del mod">
+          <ac:chgData name="Xin Luo" userId="82312ee5779919a4" providerId="LiveId" clId="{B10D17D3-3A51-854C-A635-1C39A202C200}" dt="2023-03-04T02:30:44.123" v="4384"/>
+          <ac:spMkLst>
+            <pc:docMk/>
+            <pc:sldMk cId="3309691984" sldId="2731"/>
+            <ac:spMk id="2" creationId="{089F4E60-62E0-2B9F-D522-F40E6CF74A6E}"/>
+          </ac:spMkLst>
+        </pc:spChg>
+        <pc:spChg chg="mod">
+          <ac:chgData name="Xin Luo" userId="82312ee5779919a4" providerId="LiveId" clId="{B10D17D3-3A51-854C-A635-1C39A202C200}" dt="2023-03-04T02:26:05.734" v="4271" actId="20577"/>
+          <ac:spMkLst>
+            <pc:docMk/>
+            <pc:sldMk cId="3309691984" sldId="2731"/>
+            <ac:spMk id="4" creationId="{DFE91C0B-C9F8-3FEC-3419-2DE0C6E6DCB8}"/>
+          </ac:spMkLst>
+        </pc:spChg>
+        <pc:spChg chg="mod">
+          <ac:chgData name="Xin Luo" userId="82312ee5779919a4" providerId="LiveId" clId="{B10D17D3-3A51-854C-A635-1C39A202C200}" dt="2023-03-04T03:51:10.104" v="4946" actId="20577"/>
+          <ac:spMkLst>
+            <pc:docMk/>
+            <pc:sldMk cId="3309691984" sldId="2731"/>
+            <ac:spMk id="5" creationId="{1B0BE935-AC9C-D1EE-AD6A-7C386013DA7C}"/>
+          </ac:spMkLst>
+        </pc:spChg>
+        <pc:spChg chg="del">
+          <ac:chgData name="Xin Luo" userId="82312ee5779919a4" providerId="LiveId" clId="{B10D17D3-3A51-854C-A635-1C39A202C200}" dt="2023-03-04T02:23:28.089" v="4166" actId="478"/>
+          <ac:spMkLst>
+            <pc:docMk/>
+            <pc:sldMk cId="3309691984" sldId="2731"/>
+            <ac:spMk id="6" creationId="{2CCD6DA1-1437-AB5B-BCA8-405D548B2FB8}"/>
+          </ac:spMkLst>
+        </pc:spChg>
+        <pc:spChg chg="del">
+          <ac:chgData name="Xin Luo" userId="82312ee5779919a4" providerId="LiveId" clId="{B10D17D3-3A51-854C-A635-1C39A202C200}" dt="2023-03-04T02:25:55.810" v="4256" actId="478"/>
+          <ac:spMkLst>
+            <pc:docMk/>
+            <pc:sldMk cId="3309691984" sldId="2731"/>
+            <ac:spMk id="7" creationId="{8A9C6DE8-75E5-EEB7-75DA-B8E0E87A7508}"/>
+          </ac:spMkLst>
+        </pc:spChg>
+      </pc:sldChg>
+      <pc:sldChg chg="add del">
+        <pc:chgData name="Xin Luo" userId="82312ee5779919a4" providerId="LiveId" clId="{B10D17D3-3A51-854C-A635-1C39A202C200}" dt="2023-03-04T02:23:57.461" v="4178"/>
+        <pc:sldMkLst>
+          <pc:docMk/>
+          <pc:sldMk cId="636882973" sldId="2732"/>
+        </pc:sldMkLst>
+      </pc:sldChg>
+      <pc:sldChg chg="addSp modSp add mod">
+        <pc:chgData name="Xin Luo" userId="82312ee5779919a4" providerId="LiveId" clId="{B10D17D3-3A51-854C-A635-1C39A202C200}" dt="2023-03-04T02:45:16.670" v="4844" actId="1035"/>
+        <pc:sldMkLst>
+          <pc:docMk/>
+          <pc:sldMk cId="1199790559" sldId="2732"/>
+        </pc:sldMkLst>
+        <pc:spChg chg="mod">
+          <ac:chgData name="Xin Luo" userId="82312ee5779919a4" providerId="LiveId" clId="{B10D17D3-3A51-854C-A635-1C39A202C200}" dt="2023-03-04T02:36:32.822" v="4507" actId="20577"/>
+          <ac:spMkLst>
+            <pc:docMk/>
+            <pc:sldMk cId="1199790559" sldId="2732"/>
+            <ac:spMk id="5" creationId="{FCD10A89-5E0E-5D73-1D4F-9E11D943B29C}"/>
+          </ac:spMkLst>
+        </pc:spChg>
+        <pc:spChg chg="add mod">
+          <ac:chgData name="Xin Luo" userId="82312ee5779919a4" providerId="LiveId" clId="{B10D17D3-3A51-854C-A635-1C39A202C200}" dt="2023-03-04T02:45:16.670" v="4844" actId="1035"/>
+          <ac:spMkLst>
+            <pc:docMk/>
+            <pc:sldMk cId="1199790559" sldId="2732"/>
+            <ac:spMk id="9" creationId="{D0806663-124A-FC93-799D-3E9155542C92}"/>
+          </ac:spMkLst>
+        </pc:spChg>
+        <pc:picChg chg="add mod">
+          <ac:chgData name="Xin Luo" userId="82312ee5779919a4" providerId="LiveId" clId="{B10D17D3-3A51-854C-A635-1C39A202C200}" dt="2023-03-04T02:45:16.670" v="4844" actId="1035"/>
+          <ac:picMkLst>
+            <pc:docMk/>
+            <pc:sldMk cId="1199790559" sldId="2732"/>
+            <ac:picMk id="6" creationId="{2DBA9CB4-7F2C-2F79-C8F7-B159ED2F97ED}"/>
+          </ac:picMkLst>
+        </pc:picChg>
+        <pc:picChg chg="add mod">
+          <ac:chgData name="Xin Luo" userId="82312ee5779919a4" providerId="LiveId" clId="{B10D17D3-3A51-854C-A635-1C39A202C200}" dt="2023-03-04T02:45:16.670" v="4844" actId="1035"/>
+          <ac:picMkLst>
+            <pc:docMk/>
+            <pc:sldMk cId="1199790559" sldId="2732"/>
+            <ac:picMk id="8" creationId="{03B7A21D-1E22-BD59-B187-8F6FC3C70FAD}"/>
+          </ac:picMkLst>
+        </pc:picChg>
+      </pc:sldChg>
+      <pc:sldChg chg="add del">
+        <pc:chgData name="Xin Luo" userId="82312ee5779919a4" providerId="LiveId" clId="{B10D17D3-3A51-854C-A635-1C39A202C200}" dt="2023-03-04T02:23:46.363" v="4174"/>
+        <pc:sldMkLst>
+          <pc:docMk/>
+          <pc:sldMk cId="1709681614" sldId="2732"/>
+        </pc:sldMkLst>
+      </pc:sldChg>
+      <pc:sldChg chg="add del">
+        <pc:chgData name="Xin Luo" userId="82312ee5779919a4" providerId="LiveId" clId="{B10D17D3-3A51-854C-A635-1C39A202C200}" dt="2023-03-04T02:23:42.217" v="4171"/>
+        <pc:sldMkLst>
+          <pc:docMk/>
+          <pc:sldMk cId="1869539113" sldId="2732"/>
+        </pc:sldMkLst>
+      </pc:sldChg>
+      <pc:sldChg chg="add del">
+        <pc:chgData name="Xin Luo" userId="82312ee5779919a4" providerId="LiveId" clId="{B10D17D3-3A51-854C-A635-1C39A202C200}" dt="2023-03-04T02:24:00.681" v="4180"/>
+        <pc:sldMkLst>
+          <pc:docMk/>
+          <pc:sldMk cId="2562253795" sldId="2732"/>
+        </pc:sldMkLst>
+      </pc:sldChg>
+      <pc:sldChg chg="add del">
+        <pc:chgData name="Xin Luo" userId="82312ee5779919a4" providerId="LiveId" clId="{B10D17D3-3A51-854C-A635-1C39A202C200}" dt="2023-03-04T02:24:05.543" v="4182"/>
+        <pc:sldMkLst>
+          <pc:docMk/>
+          <pc:sldMk cId="4062346908" sldId="2732"/>
+        </pc:sldMkLst>
+      </pc:sldChg>
+      <pc:sldChg chg="addSp delSp modSp add mod">
+        <pc:chgData name="Xin Luo" userId="82312ee5779919a4" providerId="LiveId" clId="{B10D17D3-3A51-854C-A635-1C39A202C200}" dt="2023-03-04T02:54:53.881" v="4905" actId="1076"/>
+        <pc:sldMkLst>
+          <pc:docMk/>
+          <pc:sldMk cId="3625541778" sldId="2733"/>
+        </pc:sldMkLst>
+        <pc:spChg chg="mod">
+          <ac:chgData name="Xin Luo" userId="82312ee5779919a4" providerId="LiveId" clId="{B10D17D3-3A51-854C-A635-1C39A202C200}" dt="2023-03-04T02:53:09.195" v="4899"/>
+          <ac:spMkLst>
+            <pc:docMk/>
+            <pc:sldMk cId="3625541778" sldId="2733"/>
+            <ac:spMk id="5" creationId="{FCD10A89-5E0E-5D73-1D4F-9E11D943B29C}"/>
+          </ac:spMkLst>
+        </pc:spChg>
+        <pc:spChg chg="del">
+          <ac:chgData name="Xin Luo" userId="82312ee5779919a4" providerId="LiveId" clId="{B10D17D3-3A51-854C-A635-1C39A202C200}" dt="2023-03-04T02:46:11.998" v="4878" actId="478"/>
+          <ac:spMkLst>
+            <pc:docMk/>
+            <pc:sldMk cId="3625541778" sldId="2733"/>
+            <ac:spMk id="9" creationId="{D0806663-124A-FC93-799D-3E9155542C92}"/>
+          </ac:spMkLst>
+        </pc:spChg>
+        <pc:picChg chg="del">
+          <ac:chgData name="Xin Luo" userId="82312ee5779919a4" providerId="LiveId" clId="{B10D17D3-3A51-854C-A635-1C39A202C200}" dt="2023-03-04T02:45:31.328" v="4868" actId="478"/>
+          <ac:picMkLst>
+            <pc:docMk/>
+            <pc:sldMk cId="3625541778" sldId="2733"/>
+            <ac:picMk id="6" creationId="{2DBA9CB4-7F2C-2F79-C8F7-B159ED2F97ED}"/>
+          </ac:picMkLst>
+        </pc:picChg>
+        <pc:picChg chg="add mod">
+          <ac:chgData name="Xin Luo" userId="82312ee5779919a4" providerId="LiveId" clId="{B10D17D3-3A51-854C-A635-1C39A202C200}" dt="2023-03-04T02:54:53.881" v="4905" actId="1076"/>
+          <ac:picMkLst>
+            <pc:docMk/>
+            <pc:sldMk cId="3625541778" sldId="2733"/>
+            <ac:picMk id="7" creationId="{D7FD8593-2387-9EBB-B64C-4F79275A1E99}"/>
+          </ac:picMkLst>
+        </pc:picChg>
+        <pc:picChg chg="del">
+          <ac:chgData name="Xin Luo" userId="82312ee5779919a4" providerId="LiveId" clId="{B10D17D3-3A51-854C-A635-1C39A202C200}" dt="2023-03-04T02:45:32.347" v="4869" actId="478"/>
+          <ac:picMkLst>
+            <pc:docMk/>
+            <pc:sldMk cId="3625541778" sldId="2733"/>
+            <ac:picMk id="8" creationId="{03B7A21D-1E22-BD59-B187-8F6FC3C70FAD}"/>
+          </ac:picMkLst>
+        </pc:picChg>
+      </pc:sldChg>
+      <pc:sldChg chg="add del">
+        <pc:chgData name="Xin Luo" userId="82312ee5779919a4" providerId="LiveId" clId="{B10D17D3-3A51-854C-A635-1C39A202C200}" dt="2023-03-04T02:45:51.767" v="4871"/>
+        <pc:sldMkLst>
+          <pc:docMk/>
+          <pc:sldMk cId="3578463388" sldId="2734"/>
+        </pc:sldMkLst>
+      </pc:sldChg>
+    </pc:docChg>
+  </pc:docChgLst>
+  <pc:docChgLst>
+    <pc:chgData name="Xin Luo" userId="82312ee5779919a4" providerId="LiveId" clId="{CF65213B-FDED-4E4E-A9AA-40904858F740}"/>
+    <pc:docChg chg="undo custSel addSld modSld">
+      <pc:chgData name="Xin Luo" userId="82312ee5779919a4" providerId="LiveId" clId="{CF65213B-FDED-4E4E-A9AA-40904858F740}" dt="2023-11-12T15:29:23.089" v="1384" actId="20577"/>
+      <pc:docMkLst>
+        <pc:docMk/>
+      </pc:docMkLst>
+      <pc:sldChg chg="modSp mod">
+        <pc:chgData name="Xin Luo" userId="82312ee5779919a4" providerId="LiveId" clId="{CF65213B-FDED-4E4E-A9AA-40904858F740}" dt="2023-11-12T15:29:10.248" v="1379" actId="108"/>
+        <pc:sldMkLst>
+          <pc:docMk/>
+          <pc:sldMk cId="623131075" sldId="2727"/>
+        </pc:sldMkLst>
+        <pc:spChg chg="mod">
+          <ac:chgData name="Xin Luo" userId="82312ee5779919a4" providerId="LiveId" clId="{CF65213B-FDED-4E4E-A9AA-40904858F740}" dt="2023-11-12T15:28:19.618" v="1355" actId="20577"/>
+          <ac:spMkLst>
+            <pc:docMk/>
+            <pc:sldMk cId="623131075" sldId="2727"/>
+            <ac:spMk id="4" creationId="{DFE91C0B-C9F8-3FEC-3419-2DE0C6E6DCB8}"/>
+          </ac:spMkLst>
+        </pc:spChg>
+        <pc:spChg chg="mod">
+          <ac:chgData name="Xin Luo" userId="82312ee5779919a4" providerId="LiveId" clId="{CF65213B-FDED-4E4E-A9AA-40904858F740}" dt="2023-11-12T15:29:10.248" v="1379" actId="108"/>
+          <ac:spMkLst>
+            <pc:docMk/>
+            <pc:sldMk cId="623131075" sldId="2727"/>
+            <ac:spMk id="17" creationId="{9E05FFCA-3371-AF5C-381D-71D984055F5A}"/>
+          </ac:spMkLst>
+        </pc:spChg>
+      </pc:sldChg>
+      <pc:sldChg chg="modSp mod">
+        <pc:chgData name="Xin Luo" userId="82312ee5779919a4" providerId="LiveId" clId="{CF65213B-FDED-4E4E-A9AA-40904858F740}" dt="2023-11-12T03:09:31.898" v="28" actId="20577"/>
+        <pc:sldMkLst>
+          <pc:docMk/>
+          <pc:sldMk cId="2241021106" sldId="2734"/>
+        </pc:sldMkLst>
+        <pc:spChg chg="mod">
+          <ac:chgData name="Xin Luo" userId="82312ee5779919a4" providerId="LiveId" clId="{CF65213B-FDED-4E4E-A9AA-40904858F740}" dt="2023-11-12T03:09:31.898" v="28" actId="20577"/>
+          <ac:spMkLst>
+            <pc:docMk/>
+            <pc:sldMk cId="2241021106" sldId="2734"/>
+            <ac:spMk id="24" creationId="{00000000-0000-0000-0000-000000000000}"/>
+          </ac:spMkLst>
+        </pc:spChg>
+      </pc:sldChg>
+      <pc:sldChg chg="addSp delSp modSp add mod">
+        <pc:chgData name="Xin Luo" userId="82312ee5779919a4" providerId="LiveId" clId="{CF65213B-FDED-4E4E-A9AA-40904858F740}" dt="2023-11-12T15:29:23.089" v="1384" actId="20577"/>
+        <pc:sldMkLst>
+          <pc:docMk/>
+          <pc:sldMk cId="1382737206" sldId="2735"/>
+        </pc:sldMkLst>
+        <pc:spChg chg="add mod">
+          <ac:chgData name="Xin Luo" userId="82312ee5779919a4" providerId="LiveId" clId="{CF65213B-FDED-4E4E-A9AA-40904858F740}" dt="2023-11-12T09:06:40.208" v="1321" actId="2711"/>
+          <ac:spMkLst>
+            <pc:docMk/>
+            <pc:sldMk cId="1382737206" sldId="2735"/>
+            <ac:spMk id="9" creationId="{23348476-2F76-84CF-7B2D-DA8641D9A0F5}"/>
+          </ac:spMkLst>
+        </pc:spChg>
+        <pc:spChg chg="del">
+          <ac:chgData name="Xin Luo" userId="82312ee5779919a4" providerId="LiveId" clId="{CF65213B-FDED-4E4E-A9AA-40904858F740}" dt="2023-11-12T08:33:38.874" v="1061" actId="478"/>
+          <ac:spMkLst>
+            <pc:docMk/>
+            <pc:sldMk cId="1382737206" sldId="2735"/>
+            <ac:spMk id="17" creationId="{9E05FFCA-3371-AF5C-381D-71D984055F5A}"/>
+          </ac:spMkLst>
+        </pc:spChg>
+        <pc:spChg chg="add mod">
+          <ac:chgData name="Xin Luo" userId="82312ee5779919a4" providerId="LiveId" clId="{CF65213B-FDED-4E4E-A9AA-40904858F740}" dt="2023-11-12T15:29:23.089" v="1384" actId="20577"/>
+          <ac:spMkLst>
+            <pc:docMk/>
+            <pc:sldMk cId="1382737206" sldId="2735"/>
+            <ac:spMk id="19" creationId="{FC6D8AB4-24DC-D592-A4CA-7C755A830AD6}"/>
+          </ac:spMkLst>
+        </pc:spChg>
+        <pc:spChg chg="add mod">
+          <ac:chgData name="Xin Luo" userId="82312ee5779919a4" providerId="LiveId" clId="{CF65213B-FDED-4E4E-A9AA-40904858F740}" dt="2023-11-12T09:06:40.208" v="1321" actId="2711"/>
+          <ac:spMkLst>
+            <pc:docMk/>
+            <pc:sldMk cId="1382737206" sldId="2735"/>
+            <ac:spMk id="26" creationId="{40CC3330-8E6E-1398-8B34-EF8ED568C0CB}"/>
+          </ac:spMkLst>
+        </pc:spChg>
+        <pc:spChg chg="add mod">
+          <ac:chgData name="Xin Luo" userId="82312ee5779919a4" providerId="LiveId" clId="{CF65213B-FDED-4E4E-A9AA-40904858F740}" dt="2023-11-12T09:07:08.259" v="1322" actId="1076"/>
+          <ac:spMkLst>
+            <pc:docMk/>
+            <pc:sldMk cId="1382737206" sldId="2735"/>
+            <ac:spMk id="27" creationId="{2116198B-4E87-5169-92B0-E91DFDBC1D19}"/>
+          </ac:spMkLst>
+        </pc:spChg>
+        <pc:spChg chg="add mod">
+          <ac:chgData name="Xin Luo" userId="82312ee5779919a4" providerId="LiveId" clId="{CF65213B-FDED-4E4E-A9AA-40904858F740}" dt="2023-11-12T09:06:40.208" v="1321" actId="2711"/>
+          <ac:spMkLst>
+            <pc:docMk/>
+            <pc:sldMk cId="1382737206" sldId="2735"/>
+            <ac:spMk id="37" creationId="{3AF78166-75AC-74B5-C0D9-CAC71F413EF4}"/>
+          </ac:spMkLst>
+        </pc:spChg>
+        <pc:spChg chg="add mod">
+          <ac:chgData name="Xin Luo" userId="82312ee5779919a4" providerId="LiveId" clId="{CF65213B-FDED-4E4E-A9AA-40904858F740}" dt="2023-11-12T09:10:20.424" v="1339" actId="164"/>
+          <ac:spMkLst>
+            <pc:docMk/>
+            <pc:sldMk cId="1382737206" sldId="2735"/>
+            <ac:spMk id="41" creationId="{2D07906B-FAF1-117B-E6A7-6D191EC4E883}"/>
+          </ac:spMkLst>
+        </pc:spChg>
+        <pc:grpChg chg="add del mod">
+          <ac:chgData name="Xin Luo" userId="82312ee5779919a4" providerId="LiveId" clId="{CF65213B-FDED-4E4E-A9AA-40904858F740}" dt="2023-11-12T09:10:20.424" v="1339" actId="164"/>
+          <ac:grpSpMkLst>
+            <pc:docMk/>
+            <pc:sldMk cId="1382737206" sldId="2735"/>
+            <ac:grpSpMk id="38" creationId="{1706D5B6-D65B-D942-309B-39F7DCB1E0D8}"/>
+          </ac:grpSpMkLst>
+        </pc:grpChg>
+        <pc:grpChg chg="add mod">
+          <ac:chgData name="Xin Luo" userId="82312ee5779919a4" providerId="LiveId" clId="{CF65213B-FDED-4E4E-A9AA-40904858F740}" dt="2023-11-12T09:10:20.424" v="1339" actId="164"/>
+          <ac:grpSpMkLst>
+            <pc:docMk/>
+            <pc:sldMk cId="1382737206" sldId="2735"/>
+            <ac:grpSpMk id="42" creationId="{3451DAC0-9E36-89C4-18C1-A0826EEC42B1}"/>
+          </ac:grpSpMkLst>
+        </pc:grpChg>
+        <pc:picChg chg="add del mod">
+          <ac:chgData name="Xin Luo" userId="82312ee5779919a4" providerId="LiveId" clId="{CF65213B-FDED-4E4E-A9AA-40904858F740}" dt="2023-11-12T08:56:46.929" v="1130" actId="478"/>
+          <ac:picMkLst>
+            <pc:docMk/>
+            <pc:sldMk cId="1382737206" sldId="2735"/>
+            <ac:picMk id="5" creationId="{82A0A6B2-93CB-9EC3-E175-36A518382239}"/>
+          </ac:picMkLst>
+        </pc:picChg>
+        <pc:picChg chg="add del mod">
+          <ac:chgData name="Xin Luo" userId="82312ee5779919a4" providerId="LiveId" clId="{CF65213B-FDED-4E4E-A9AA-40904858F740}" dt="2023-11-12T09:08:13.465" v="1328" actId="478"/>
+          <ac:picMkLst>
+            <pc:docMk/>
+            <pc:sldMk cId="1382737206" sldId="2735"/>
+            <ac:picMk id="18" creationId="{7ED3E6AB-991C-08F8-D149-0A53F455182F}"/>
+          </ac:picMkLst>
+        </pc:picChg>
+        <pc:picChg chg="add mod">
+          <ac:chgData name="Xin Luo" userId="82312ee5779919a4" providerId="LiveId" clId="{CF65213B-FDED-4E4E-A9AA-40904858F740}" dt="2023-11-12T09:10:20.424" v="1339" actId="164"/>
+          <ac:picMkLst>
+            <pc:docMk/>
+            <pc:sldMk cId="1382737206" sldId="2735"/>
+            <ac:picMk id="40" creationId="{7BAE91F7-A638-70DC-226F-AF9FF51A81EA}"/>
+          </ac:picMkLst>
+        </pc:picChg>
+        <pc:cxnChg chg="add del mod">
+          <ac:chgData name="Xin Luo" userId="82312ee5779919a4" providerId="LiveId" clId="{CF65213B-FDED-4E4E-A9AA-40904858F740}" dt="2023-11-12T08:54:29.957" v="1105" actId="478"/>
+          <ac:cxnSpMkLst>
+            <pc:docMk/>
+            <pc:sldMk cId="1382737206" sldId="2735"/>
+            <ac:cxnSpMk id="7" creationId="{6DD9195A-1F4A-51A7-C529-B19BEDE96059}"/>
+          </ac:cxnSpMkLst>
+        </pc:cxnChg>
+        <pc:cxnChg chg="add mod">
+          <ac:chgData name="Xin Luo" userId="82312ee5779919a4" providerId="LiveId" clId="{CF65213B-FDED-4E4E-A9AA-40904858F740}" dt="2023-11-12T09:03:48.219" v="1309" actId="164"/>
+          <ac:cxnSpMkLst>
+            <pc:docMk/>
+            <pc:sldMk cId="1382737206" sldId="2735"/>
+            <ac:cxnSpMk id="11" creationId="{1815630D-440A-BA7A-DAF5-ED03080637E3}"/>
+          </ac:cxnSpMkLst>
+        </pc:cxnChg>
+        <pc:cxnChg chg="add mod">
+          <ac:chgData name="Xin Luo" userId="82312ee5779919a4" providerId="LiveId" clId="{CF65213B-FDED-4E4E-A9AA-40904858F740}" dt="2023-11-12T15:29:23.089" v="1384" actId="20577"/>
+          <ac:cxnSpMkLst>
+            <pc:docMk/>
+            <pc:sldMk cId="1382737206" sldId="2735"/>
+            <ac:cxnSpMk id="13" creationId="{CA1C9F51-02CC-D5A8-BD93-1AB882784387}"/>
+          </ac:cxnSpMkLst>
+        </pc:cxnChg>
+        <pc:cxnChg chg="add mod">
+          <ac:chgData name="Xin Luo" userId="82312ee5779919a4" providerId="LiveId" clId="{CF65213B-FDED-4E4E-A9AA-40904858F740}" dt="2023-11-12T09:08:08.795" v="1327" actId="478"/>
+          <ac:cxnSpMkLst>
+            <pc:docMk/>
+            <pc:sldMk cId="1382737206" sldId="2735"/>
+            <ac:cxnSpMk id="28" creationId="{2997F4DD-0922-B363-F763-27CB25268159}"/>
+          </ac:cxnSpMkLst>
+        </pc:cxnChg>
+        <pc:cxnChg chg="add mod">
+          <ac:chgData name="Xin Luo" userId="82312ee5779919a4" providerId="LiveId" clId="{CF65213B-FDED-4E4E-A9AA-40904858F740}" dt="2023-11-12T09:08:08.795" v="1327" actId="478"/>
+          <ac:cxnSpMkLst>
+            <pc:docMk/>
+            <pc:sldMk cId="1382737206" sldId="2735"/>
+            <ac:cxnSpMk id="31" creationId="{33B5FB2A-A85B-6A0E-263A-F26DFC374696}"/>
+          </ac:cxnSpMkLst>
+        </pc:cxnChg>
+      </pc:sldChg>
+      <pc:sldChg chg="modSp mod">
+        <pc:chgData name="Xin Luo" userId="82312ee5779919a4" providerId="LiveId" clId="{CF65213B-FDED-4E4E-A9AA-40904858F740}" dt="2023-11-12T13:45:31.697" v="1344" actId="20577"/>
+        <pc:sldMkLst>
+          <pc:docMk/>
+          <pc:sldMk cId="3782770681" sldId="2736"/>
+        </pc:sldMkLst>
+        <pc:spChg chg="mod">
+          <ac:chgData name="Xin Luo" userId="82312ee5779919a4" providerId="LiveId" clId="{CF65213B-FDED-4E4E-A9AA-40904858F740}" dt="2023-11-12T13:45:31.697" v="1344" actId="20577"/>
+          <ac:spMkLst>
+            <pc:docMk/>
+            <pc:sldMk cId="3782770681" sldId="2736"/>
+            <ac:spMk id="17" creationId="{9E05FFCA-3371-AF5C-381D-71D984055F5A}"/>
+          </ac:spMkLst>
+        </pc:spChg>
+      </pc:sldChg>
+    </pc:docChg>
+  </pc:docChgLst>
+  <pc:docChgLst>
+    <pc:chgData name="Xin Luo" userId="82312ee5779919a4" providerId="LiveId" clId="{79234F48-1BB4-064A-81D5-23BC2373ADDA}"/>
+    <pc:docChg chg="undo custSel addSld delSld modSld sldOrd">
+      <pc:chgData name="Xin Luo" userId="82312ee5779919a4" providerId="LiveId" clId="{79234F48-1BB4-064A-81D5-23BC2373ADDA}" dt="2023-11-12T11:04:38.280" v="1009" actId="1035"/>
+      <pc:docMkLst>
+        <pc:docMk/>
+      </pc:docMkLst>
+      <pc:sldChg chg="delSp modSp mod">
+        <pc:chgData name="Xin Luo" userId="82312ee5779919a4" providerId="LiveId" clId="{79234F48-1BB4-064A-81D5-23BC2373ADDA}" dt="2023-11-12T10:57:52.252" v="773" actId="14100"/>
+        <pc:sldMkLst>
+          <pc:docMk/>
+          <pc:sldMk cId="1858913004" sldId="2719"/>
+        </pc:sldMkLst>
+        <pc:spChg chg="del">
+          <ac:chgData name="Xin Luo" userId="82312ee5779919a4" providerId="LiveId" clId="{79234F48-1BB4-064A-81D5-23BC2373ADDA}" dt="2023-11-12T10:56:15.125" v="602" actId="478"/>
+          <ac:spMkLst>
+            <pc:docMk/>
+            <pc:sldMk cId="1858913004" sldId="2719"/>
+            <ac:spMk id="2" creationId="{631AADB6-C88A-D817-4683-FC087E4E240F}"/>
+          </ac:spMkLst>
+        </pc:spChg>
+        <pc:spChg chg="mod">
+          <ac:chgData name="Xin Luo" userId="82312ee5779919a4" providerId="LiveId" clId="{79234F48-1BB4-064A-81D5-23BC2373ADDA}" dt="2023-11-12T10:56:12.362" v="601" actId="20577"/>
+          <ac:spMkLst>
+            <pc:docMk/>
+            <pc:sldMk cId="1858913004" sldId="2719"/>
+            <ac:spMk id="4" creationId="{814FF4E1-B17F-D4F8-E834-173BA3B0D059}"/>
+          </ac:spMkLst>
+        </pc:spChg>
+        <pc:spChg chg="del">
+          <ac:chgData name="Xin Luo" userId="82312ee5779919a4" providerId="LiveId" clId="{79234F48-1BB4-064A-81D5-23BC2373ADDA}" dt="2023-11-12T10:56:15.125" v="602" actId="478"/>
+          <ac:spMkLst>
+            <pc:docMk/>
+            <pc:sldMk cId="1858913004" sldId="2719"/>
+            <ac:spMk id="5" creationId="{FCD10A89-5E0E-5D73-1D4F-9E11D943B29C}"/>
+          </ac:spMkLst>
+        </pc:spChg>
+        <pc:spChg chg="mod">
+          <ac:chgData name="Xin Luo" userId="82312ee5779919a4" providerId="LiveId" clId="{79234F48-1BB4-064A-81D5-23BC2373ADDA}" dt="2023-11-12T10:57:52.252" v="773" actId="14100"/>
+          <ac:spMkLst>
+            <pc:docMk/>
+            <pc:sldMk cId="1858913004" sldId="2719"/>
+            <ac:spMk id="6" creationId="{10943A92-9E22-44EA-2939-C64F8E264329}"/>
+          </ac:spMkLst>
+        </pc:spChg>
+      </pc:sldChg>
+      <pc:sldChg chg="modSp del mod">
+        <pc:chgData name="Xin Luo" userId="82312ee5779919a4" providerId="LiveId" clId="{79234F48-1BB4-064A-81D5-23BC2373ADDA}" dt="2023-11-12T10:13:36.173" v="18" actId="2696"/>
+        <pc:sldMkLst>
+          <pc:docMk/>
+          <pc:sldMk cId="295872025" sldId="2722"/>
+        </pc:sldMkLst>
+        <pc:spChg chg="mod">
+          <ac:chgData name="Xin Luo" userId="82312ee5779919a4" providerId="LiveId" clId="{79234F48-1BB4-064A-81D5-23BC2373ADDA}" dt="2023-11-12T10:13:32.597" v="17" actId="20577"/>
+          <ac:spMkLst>
+            <pc:docMk/>
+            <pc:sldMk cId="295872025" sldId="2722"/>
+            <ac:spMk id="12" creationId="{00000000-0000-0000-0000-000000000000}"/>
+          </ac:spMkLst>
+        </pc:spChg>
+      </pc:sldChg>
+      <pc:sldChg chg="modSp mod">
+        <pc:chgData name="Xin Luo" userId="82312ee5779919a4" providerId="LiveId" clId="{79234F48-1BB4-064A-81D5-23BC2373ADDA}" dt="2023-11-12T10:47:06.270" v="528" actId="20577"/>
+        <pc:sldMkLst>
+          <pc:docMk/>
+          <pc:sldMk cId="623131075" sldId="2727"/>
+        </pc:sldMkLst>
+        <pc:spChg chg="mod">
+          <ac:chgData name="Xin Luo" userId="82312ee5779919a4" providerId="LiveId" clId="{79234F48-1BB4-064A-81D5-23BC2373ADDA}" dt="2023-11-12T10:47:06.270" v="528" actId="20577"/>
+          <ac:spMkLst>
+            <pc:docMk/>
+            <pc:sldMk cId="623131075" sldId="2727"/>
+            <ac:spMk id="4" creationId="{DFE91C0B-C9F8-3FEC-3419-2DE0C6E6DCB8}"/>
+          </ac:spMkLst>
+        </pc:spChg>
+        <pc:spChg chg="mod">
+          <ac:chgData name="Xin Luo" userId="82312ee5779919a4" providerId="LiveId" clId="{79234F48-1BB4-064A-81D5-23BC2373ADDA}" dt="2023-11-12T10:45:05.908" v="501" actId="20577"/>
+          <ac:spMkLst>
+            <pc:docMk/>
+            <pc:sldMk cId="623131075" sldId="2727"/>
+            <ac:spMk id="17" creationId="{9E05FFCA-3371-AF5C-381D-71D984055F5A}"/>
+          </ac:spMkLst>
+        </pc:spChg>
+      </pc:sldChg>
+      <pc:sldChg chg="addSp delSp modSp mod">
+        <pc:chgData name="Xin Luo" userId="82312ee5779919a4" providerId="LiveId" clId="{79234F48-1BB4-064A-81D5-23BC2373ADDA}" dt="2023-11-12T11:04:38.280" v="1009" actId="1035"/>
+        <pc:sldMkLst>
+          <pc:docMk/>
+          <pc:sldMk cId="1382737206" sldId="2735"/>
+        </pc:sldMkLst>
+        <pc:spChg chg="add mod">
+          <ac:chgData name="Xin Luo" userId="82312ee5779919a4" providerId="LiveId" clId="{79234F48-1BB4-064A-81D5-23BC2373ADDA}" dt="2023-11-12T10:47:42.911" v="537" actId="207"/>
+          <ac:spMkLst>
+            <pc:docMk/>
+            <pc:sldMk cId="1382737206" sldId="2735"/>
+            <ac:spMk id="2" creationId="{36A94F0A-9BCF-0783-70D7-65A53B9C0CC3}"/>
+          </ac:spMkLst>
+        </pc:spChg>
+        <pc:spChg chg="mod">
+          <ac:chgData name="Xin Luo" userId="82312ee5779919a4" providerId="LiveId" clId="{79234F48-1BB4-064A-81D5-23BC2373ADDA}" dt="2023-11-12T10:47:11.148" v="529"/>
+          <ac:spMkLst>
+            <pc:docMk/>
+            <pc:sldMk cId="1382737206" sldId="2735"/>
+            <ac:spMk id="4" creationId="{DFE91C0B-C9F8-3FEC-3419-2DE0C6E6DCB8}"/>
+          </ac:spMkLst>
+        </pc:spChg>
+        <pc:spChg chg="add mod">
+          <ac:chgData name="Xin Luo" userId="82312ee5779919a4" providerId="LiveId" clId="{79234F48-1BB4-064A-81D5-23BC2373ADDA}" dt="2023-11-12T10:49:13.024" v="582" actId="1036"/>
+          <ac:spMkLst>
+            <pc:docMk/>
+            <pc:sldMk cId="1382737206" sldId="2735"/>
+            <ac:spMk id="8" creationId="{B922BC94-544E-9C03-7774-A6A5C31A858E}"/>
+          </ac:spMkLst>
+        </pc:spChg>
+        <pc:spChg chg="add mod">
+          <ac:chgData name="Xin Luo" userId="82312ee5779919a4" providerId="LiveId" clId="{79234F48-1BB4-064A-81D5-23BC2373ADDA}" dt="2023-11-12T11:04:38.280" v="1009" actId="1035"/>
+          <ac:spMkLst>
+            <pc:docMk/>
+            <pc:sldMk cId="1382737206" sldId="2735"/>
+            <ac:spMk id="10" creationId="{A617D2EC-E886-F05D-06BB-4F44EC4E8448}"/>
+          </ac:spMkLst>
+        </pc:spChg>
+        <pc:spChg chg="mod">
+          <ac:chgData name="Xin Luo" userId="82312ee5779919a4" providerId="LiveId" clId="{79234F48-1BB4-064A-81D5-23BC2373ADDA}" dt="2023-11-12T10:13:09.041" v="4" actId="20577"/>
+          <ac:spMkLst>
+            <pc:docMk/>
+            <pc:sldMk cId="1382737206" sldId="2735"/>
+            <ac:spMk id="37" creationId="{3AF78166-75AC-74B5-C0D9-CAC71F413EF4}"/>
+          </ac:spMkLst>
+        </pc:spChg>
+        <pc:spChg chg="topLvl">
+          <ac:chgData name="Xin Luo" userId="82312ee5779919a4" providerId="LiveId" clId="{79234F48-1BB4-064A-81D5-23BC2373ADDA}" dt="2023-11-12T10:47:25.889" v="530" actId="165"/>
+          <ac:spMkLst>
+            <pc:docMk/>
+            <pc:sldMk cId="1382737206" sldId="2735"/>
+            <ac:spMk id="41" creationId="{2D07906B-FAF1-117B-E6A7-6D191EC4E883}"/>
+          </ac:spMkLst>
+        </pc:spChg>
+        <pc:grpChg chg="add mod">
+          <ac:chgData name="Xin Luo" userId="82312ee5779919a4" providerId="LiveId" clId="{79234F48-1BB4-064A-81D5-23BC2373ADDA}" dt="2023-11-12T11:04:22.418" v="997" actId="1035"/>
+          <ac:grpSpMkLst>
+            <pc:docMk/>
+            <pc:sldMk cId="1382737206" sldId="2735"/>
+            <ac:grpSpMk id="12" creationId="{1CD3369D-14E8-EFF9-8B4C-1BB6590169C3}"/>
+          </ac:grpSpMkLst>
+        </pc:grpChg>
+        <pc:grpChg chg="topLvl">
+          <ac:chgData name="Xin Luo" userId="82312ee5779919a4" providerId="LiveId" clId="{79234F48-1BB4-064A-81D5-23BC2373ADDA}" dt="2023-11-12T10:47:25.889" v="530" actId="165"/>
+          <ac:grpSpMkLst>
+            <pc:docMk/>
+            <pc:sldMk cId="1382737206" sldId="2735"/>
+            <ac:grpSpMk id="38" creationId="{1706D5B6-D65B-D942-309B-39F7DCB1E0D8}"/>
+          </ac:grpSpMkLst>
+        </pc:grpChg>
+        <pc:grpChg chg="del">
+          <ac:chgData name="Xin Luo" userId="82312ee5779919a4" providerId="LiveId" clId="{79234F48-1BB4-064A-81D5-23BC2373ADDA}" dt="2023-11-12T10:47:25.889" v="530" actId="165"/>
+          <ac:grpSpMkLst>
+            <pc:docMk/>
+            <pc:sldMk cId="1382737206" sldId="2735"/>
+            <ac:grpSpMk id="42" creationId="{3451DAC0-9E36-89C4-18C1-A0826EEC42B1}"/>
+          </ac:grpSpMkLst>
+        </pc:grpChg>
+        <pc:picChg chg="topLvl">
+          <ac:chgData name="Xin Luo" userId="82312ee5779919a4" providerId="LiveId" clId="{79234F48-1BB4-064A-81D5-23BC2373ADDA}" dt="2023-11-12T10:47:25.889" v="530" actId="165"/>
+          <ac:picMkLst>
+            <pc:docMk/>
+            <pc:sldMk cId="1382737206" sldId="2735"/>
+            <ac:picMk id="40" creationId="{7BAE91F7-A638-70DC-226F-AF9FF51A81EA}"/>
+          </ac:picMkLst>
+        </pc:picChg>
+        <pc:cxnChg chg="add mod">
+          <ac:chgData name="Xin Luo" userId="82312ee5779919a4" providerId="LiveId" clId="{79234F48-1BB4-064A-81D5-23BC2373ADDA}" dt="2023-11-12T10:55:49.883" v="584" actId="208"/>
+          <ac:cxnSpMkLst>
+            <pc:docMk/>
+            <pc:sldMk cId="1382737206" sldId="2735"/>
+            <ac:cxnSpMk id="6" creationId="{C73A7FF0-C417-B2B7-6C67-466B0FB66050}"/>
+          </ac:cxnSpMkLst>
+        </pc:cxnChg>
+      </pc:sldChg>
+      <pc:sldChg chg="modSp add mod ord">
+        <pc:chgData name="Xin Luo" userId="82312ee5779919a4" providerId="LiveId" clId="{79234F48-1BB4-064A-81D5-23BC2373ADDA}" dt="2023-11-12T10:45:23.169" v="503" actId="14100"/>
+        <pc:sldMkLst>
+          <pc:docMk/>
+          <pc:sldMk cId="3782770681" sldId="2736"/>
+        </pc:sldMkLst>
+        <pc:spChg chg="mod">
+          <ac:chgData name="Xin Luo" userId="82312ee5779919a4" providerId="LiveId" clId="{79234F48-1BB4-064A-81D5-23BC2373ADDA}" dt="2023-11-12T10:14:33.890" v="79" actId="20577"/>
+          <ac:spMkLst>
+            <pc:docMk/>
+            <pc:sldMk cId="3782770681" sldId="2736"/>
+            <ac:spMk id="4" creationId="{DFE91C0B-C9F8-3FEC-3419-2DE0C6E6DCB8}"/>
+          </ac:spMkLst>
+        </pc:spChg>
+        <pc:spChg chg="mod">
+          <ac:chgData name="Xin Luo" userId="82312ee5779919a4" providerId="LiveId" clId="{79234F48-1BB4-064A-81D5-23BC2373ADDA}" dt="2023-11-12T10:45:23.169" v="503" actId="14100"/>
+          <ac:spMkLst>
+            <pc:docMk/>
+            <pc:sldMk cId="3782770681" sldId="2736"/>
+            <ac:spMk id="17" creationId="{9E05FFCA-3371-AF5C-381D-71D984055F5A}"/>
+          </ac:spMkLst>
+        </pc:spChg>
+      </pc:sldChg>
+      <pc:sldChg chg="add del">
+        <pc:chgData name="Xin Luo" userId="82312ee5779919a4" providerId="LiveId" clId="{79234F48-1BB4-064A-81D5-23BC2373ADDA}" dt="2023-11-12T10:14:48.939" v="82"/>
+        <pc:sldMkLst>
+          <pc:docMk/>
+          <pc:sldMk cId="3003986440" sldId="2737"/>
+        </pc:sldMkLst>
+      </pc:sldChg>
+    </pc:docChg>
+  </pc:docChgLst>
+  <pc:docChgLst>
+    <pc:chgData name="Xin Luo" userId="82312ee5779919a4" providerId="LiveId" clId="{248C0A6C-0CC4-8B4C-A15B-18A7AE49A707}"/>
+    <pc:docChg chg="undo custSel addSld delSld modSld">
+      <pc:chgData name="Xin Luo" userId="82312ee5779919a4" providerId="LiveId" clId="{248C0A6C-0CC4-8B4C-A15B-18A7AE49A707}" dt="2023-07-02T13:59:45.690" v="74" actId="20577"/>
+      <pc:docMkLst>
+        <pc:docMk/>
+      </pc:docMkLst>
+      <pc:sldChg chg="addSp delSp del mod">
+        <pc:chgData name="Xin Luo" userId="82312ee5779919a4" providerId="LiveId" clId="{248C0A6C-0CC4-8B4C-A15B-18A7AE49A707}" dt="2023-07-02T13:12:20.593" v="29" actId="2696"/>
+        <pc:sldMkLst>
+          <pc:docMk/>
+          <pc:sldMk cId="1153920038" sldId="2206"/>
+        </pc:sldMkLst>
+        <pc:spChg chg="add del">
+          <ac:chgData name="Xin Luo" userId="82312ee5779919a4" providerId="LiveId" clId="{248C0A6C-0CC4-8B4C-A15B-18A7AE49A707}" dt="2023-07-02T13:11:56.127" v="1" actId="22"/>
+          <ac:spMkLst>
+            <pc:docMk/>
+            <pc:sldMk cId="1153920038" sldId="2206"/>
+            <ac:spMk id="5" creationId="{DF97D6A6-2165-26FA-3166-1D01AFA58A7A}"/>
+          </ac:spMkLst>
+        </pc:spChg>
+      </pc:sldChg>
+      <pc:sldChg chg="del">
+        <pc:chgData name="Xin Luo" userId="82312ee5779919a4" providerId="LiveId" clId="{248C0A6C-0CC4-8B4C-A15B-18A7AE49A707}" dt="2023-07-02T13:12:28.335" v="46" actId="2696"/>
+        <pc:sldMkLst>
+          <pc:docMk/>
+          <pc:sldMk cId="1576120367" sldId="2387"/>
+        </pc:sldMkLst>
+      </pc:sldChg>
+      <pc:sldChg chg="del">
+        <pc:chgData name="Xin Luo" userId="82312ee5779919a4" providerId="LiveId" clId="{248C0A6C-0CC4-8B4C-A15B-18A7AE49A707}" dt="2023-07-02T13:12:28.309" v="36" actId="2696"/>
+        <pc:sldMkLst>
+          <pc:docMk/>
+          <pc:sldMk cId="2415901206" sldId="2447"/>
+        </pc:sldMkLst>
+      </pc:sldChg>
+      <pc:sldChg chg="del">
+        <pc:chgData name="Xin Luo" userId="82312ee5779919a4" providerId="LiveId" clId="{248C0A6C-0CC4-8B4C-A15B-18A7AE49A707}" dt="2023-07-02T13:12:28.304" v="34" actId="2696"/>
+        <pc:sldMkLst>
+          <pc:docMk/>
+          <pc:sldMk cId="4067577602" sldId="2605"/>
+        </pc:sldMkLst>
+      </pc:sldChg>
+      <pc:sldChg chg="del">
+        <pc:chgData name="Xin Luo" userId="82312ee5779919a4" providerId="LiveId" clId="{248C0A6C-0CC4-8B4C-A15B-18A7AE49A707}" dt="2023-07-02T13:12:28.311" v="37" actId="2696"/>
+        <pc:sldMkLst>
+          <pc:docMk/>
+          <pc:sldMk cId="1602808061" sldId="2707"/>
+        </pc:sldMkLst>
+      </pc:sldChg>
+      <pc:sldChg chg="del">
+        <pc:chgData name="Xin Luo" userId="82312ee5779919a4" providerId="LiveId" clId="{248C0A6C-0CC4-8B4C-A15B-18A7AE49A707}" dt="2023-07-02T13:12:28.317" v="39" actId="2696"/>
+        <pc:sldMkLst>
+          <pc:docMk/>
+          <pc:sldMk cId="1658607177" sldId="2708"/>
+        </pc:sldMkLst>
+      </pc:sldChg>
+      <pc:sldChg chg="del">
+        <pc:chgData name="Xin Luo" userId="82312ee5779919a4" providerId="LiveId" clId="{248C0A6C-0CC4-8B4C-A15B-18A7AE49A707}" dt="2023-07-02T13:12:28.356" v="49" actId="2696"/>
+        <pc:sldMkLst>
+          <pc:docMk/>
+          <pc:sldMk cId="1257969106" sldId="2709"/>
+        </pc:sldMkLst>
+      </pc:sldChg>
+      <pc:sldChg chg="del">
+        <pc:chgData name="Xin Luo" userId="82312ee5779919a4" providerId="LiveId" clId="{248C0A6C-0CC4-8B4C-A15B-18A7AE49A707}" dt="2023-07-02T13:12:28.299" v="32" actId="2696"/>
+        <pc:sldMkLst>
+          <pc:docMk/>
+          <pc:sldMk cId="2744383376" sldId="2711"/>
+        </pc:sldMkLst>
+      </pc:sldChg>
+      <pc:sldChg chg="del">
+        <pc:chgData name="Xin Luo" userId="82312ee5779919a4" providerId="LiveId" clId="{248C0A6C-0CC4-8B4C-A15B-18A7AE49A707}" dt="2023-07-02T13:12:28.337" v="47" actId="2696"/>
+        <pc:sldMkLst>
+          <pc:docMk/>
+          <pc:sldMk cId="280619949" sldId="2714"/>
+        </pc:sldMkLst>
+      </pc:sldChg>
+      <pc:sldChg chg="del">
+        <pc:chgData name="Xin Luo" userId="82312ee5779919a4" providerId="LiveId" clId="{248C0A6C-0CC4-8B4C-A15B-18A7AE49A707}" dt="2023-07-02T13:12:28.325" v="42" actId="2696"/>
+        <pc:sldMkLst>
+          <pc:docMk/>
+          <pc:sldMk cId="3852391939" sldId="2715"/>
+        </pc:sldMkLst>
+      </pc:sldChg>
+      <pc:sldChg chg="del">
+        <pc:chgData name="Xin Luo" userId="82312ee5779919a4" providerId="LiveId" clId="{248C0A6C-0CC4-8B4C-A15B-18A7AE49A707}" dt="2023-07-02T13:12:28.330" v="44" actId="2696"/>
+        <pc:sldMkLst>
+          <pc:docMk/>
+          <pc:sldMk cId="3026715585" sldId="2716"/>
+        </pc:sldMkLst>
+      </pc:sldChg>
+      <pc:sldChg chg="del">
+        <pc:chgData name="Xin Luo" userId="82312ee5779919a4" providerId="LiveId" clId="{248C0A6C-0CC4-8B4C-A15B-18A7AE49A707}" dt="2023-07-02T13:12:28.333" v="45" actId="2696"/>
+        <pc:sldMkLst>
+          <pc:docMk/>
+          <pc:sldMk cId="4136986794" sldId="2717"/>
+        </pc:sldMkLst>
+      </pc:sldChg>
+      <pc:sldChg chg="del">
+        <pc:chgData name="Xin Luo" userId="82312ee5779919a4" providerId="LiveId" clId="{248C0A6C-0CC4-8B4C-A15B-18A7AE49A707}" dt="2023-07-02T13:12:28.358" v="50" actId="2696"/>
+        <pc:sldMkLst>
+          <pc:docMk/>
+          <pc:sldMk cId="1778017482" sldId="2718"/>
+        </pc:sldMkLst>
+      </pc:sldChg>
+      <pc:sldChg chg="del">
+        <pc:chgData name="Xin Luo" userId="82312ee5779919a4" providerId="LiveId" clId="{248C0A6C-0CC4-8B4C-A15B-18A7AE49A707}" dt="2023-07-02T13:12:28.307" v="35" actId="2696"/>
+        <pc:sldMkLst>
+          <pc:docMk/>
+          <pc:sldMk cId="3480831675" sldId="2720"/>
+        </pc:sldMkLst>
+      </pc:sldChg>
+      <pc:sldChg chg="del">
+        <pc:chgData name="Xin Luo" userId="82312ee5779919a4" providerId="LiveId" clId="{248C0A6C-0CC4-8B4C-A15B-18A7AE49A707}" dt="2023-07-02T13:12:28.385" v="51" actId="2696"/>
+        <pc:sldMkLst>
+          <pc:docMk/>
+          <pc:sldMk cId="769179569" sldId="2723"/>
+        </pc:sldMkLst>
+      </pc:sldChg>
+      <pc:sldChg chg="del">
+        <pc:chgData name="Xin Luo" userId="82312ee5779919a4" providerId="LiveId" clId="{248C0A6C-0CC4-8B4C-A15B-18A7AE49A707}" dt="2023-07-02T13:12:28.314" v="38" actId="2696"/>
+        <pc:sldMkLst>
+          <pc:docMk/>
+          <pc:sldMk cId="57442970" sldId="2725"/>
+        </pc:sldMkLst>
+      </pc:sldChg>
+      <pc:sldChg chg="del">
+        <pc:chgData name="Xin Luo" userId="82312ee5779919a4" providerId="LiveId" clId="{248C0A6C-0CC4-8B4C-A15B-18A7AE49A707}" dt="2023-07-02T13:12:28.344" v="48" actId="2696"/>
+        <pc:sldMkLst>
+          <pc:docMk/>
+          <pc:sldMk cId="4114066566" sldId="2726"/>
+        </pc:sldMkLst>
+      </pc:sldChg>
+      <pc:sldChg chg="del">
+        <pc:chgData name="Xin Luo" userId="82312ee5779919a4" providerId="LiveId" clId="{248C0A6C-0CC4-8B4C-A15B-18A7AE49A707}" dt="2023-07-02T13:12:28.327" v="43" actId="2696"/>
+        <pc:sldMkLst>
+          <pc:docMk/>
+          <pc:sldMk cId="1683372320" sldId="2728"/>
+        </pc:sldMkLst>
+      </pc:sldChg>
+      <pc:sldChg chg="del">
+        <pc:chgData name="Xin Luo" userId="82312ee5779919a4" providerId="LiveId" clId="{248C0A6C-0CC4-8B4C-A15B-18A7AE49A707}" dt="2023-07-02T13:12:28.297" v="31" actId="2696"/>
+        <pc:sldMkLst>
+          <pc:docMk/>
+          <pc:sldMk cId="240261692" sldId="2729"/>
+        </pc:sldMkLst>
+      </pc:sldChg>
+      <pc:sldChg chg="del">
+        <pc:chgData name="Xin Luo" userId="82312ee5779919a4" providerId="LiveId" clId="{248C0A6C-0CC4-8B4C-A15B-18A7AE49A707}" dt="2023-07-02T13:12:28.294" v="30" actId="2696"/>
+        <pc:sldMkLst>
+          <pc:docMk/>
+          <pc:sldMk cId="736914780" sldId="2730"/>
+        </pc:sldMkLst>
+      </pc:sldChg>
+      <pc:sldChg chg="del">
+        <pc:chgData name="Xin Luo" userId="82312ee5779919a4" providerId="LiveId" clId="{248C0A6C-0CC4-8B4C-A15B-18A7AE49A707}" dt="2023-07-02T13:12:28.320" v="40" actId="2696"/>
+        <pc:sldMkLst>
+          <pc:docMk/>
+          <pc:sldMk cId="3309691984" sldId="2731"/>
+        </pc:sldMkLst>
+      </pc:sldChg>
+      <pc:sldChg chg="del">
+        <pc:chgData name="Xin Luo" userId="82312ee5779919a4" providerId="LiveId" clId="{248C0A6C-0CC4-8B4C-A15B-18A7AE49A707}" dt="2023-07-02T13:12:28.322" v="41" actId="2696"/>
+        <pc:sldMkLst>
+          <pc:docMk/>
+          <pc:sldMk cId="1199790559" sldId="2732"/>
+        </pc:sldMkLst>
+      </pc:sldChg>
+      <pc:sldChg chg="del">
+        <pc:chgData name="Xin Luo" userId="82312ee5779919a4" providerId="LiveId" clId="{248C0A6C-0CC4-8B4C-A15B-18A7AE49A707}" dt="2023-07-02T13:12:28.302" v="33" actId="2696"/>
+        <pc:sldMkLst>
+          <pc:docMk/>
+          <pc:sldMk cId="3625541778" sldId="2733"/>
+        </pc:sldMkLst>
+      </pc:sldChg>
+      <pc:sldChg chg="modSp add del mod setBg">
+        <pc:chgData name="Xin Luo" userId="82312ee5779919a4" providerId="LiveId" clId="{248C0A6C-0CC4-8B4C-A15B-18A7AE49A707}" dt="2023-07-02T13:59:45.690" v="74" actId="20577"/>
+        <pc:sldMkLst>
+          <pc:docMk/>
+          <pc:sldMk cId="2241021106" sldId="2734"/>
+        </pc:sldMkLst>
+        <pc:spChg chg="mod">
+          <ac:chgData name="Xin Luo" userId="82312ee5779919a4" providerId="LiveId" clId="{248C0A6C-0CC4-8B4C-A15B-18A7AE49A707}" dt="2023-07-02T13:59:45.690" v="74" actId="20577"/>
+          <ac:spMkLst>
+            <pc:docMk/>
+            <pc:sldMk cId="2241021106" sldId="2734"/>
+            <ac:spMk id="24" creationId="{00000000-0000-0000-0000-000000000000}"/>
+          </ac:spMkLst>
+        </pc:spChg>
+      </pc:sldChg>
+    </pc:docChg>
+  </pc:docChgLst>
+  <pc:docChgLst>
+    <pc:chgData name="Xin Luo" userId="82312ee5779919a4" providerId="LiveId" clId="{4DB6C473-8E57-A543-81F7-48BE109E8C13}"/>
+    <pc:docChg chg="undo custSel addSld delSld modSld sldOrd delMainMaster">
+      <pc:chgData name="Xin Luo" userId="82312ee5779919a4" providerId="LiveId" clId="{4DB6C473-8E57-A543-81F7-48BE109E8C13}" dt="2023-02-21T15:10:04.498" v="5724" actId="108"/>
+      <pc:docMkLst>
+        <pc:docMk/>
+      </pc:docMkLst>
+      <pc:sldChg chg="addSp delSp modSp mod">
+        <pc:chgData name="Xin Luo" userId="82312ee5779919a4" providerId="LiveId" clId="{4DB6C473-8E57-A543-81F7-48BE109E8C13}" dt="2023-02-21T08:54:32.554" v="3595" actId="1076"/>
+        <pc:sldMkLst>
+          <pc:docMk/>
+          <pc:sldMk cId="1576120367" sldId="2387"/>
+        </pc:sldMkLst>
+        <pc:spChg chg="add del mod">
+          <ac:chgData name="Xin Luo" userId="82312ee5779919a4" providerId="LiveId" clId="{4DB6C473-8E57-A543-81F7-48BE109E8C13}" dt="2023-02-21T05:44:22.831" v="2010"/>
+          <ac:spMkLst>
+            <pc:docMk/>
+            <pc:sldMk cId="1576120367" sldId="2387"/>
+            <ac:spMk id="4" creationId="{14071939-13A8-68AD-CF24-E66618C9CB95}"/>
+          </ac:spMkLst>
+        </pc:spChg>
+        <pc:spChg chg="add del">
+          <ac:chgData name="Xin Luo" userId="82312ee5779919a4" providerId="LiveId" clId="{4DB6C473-8E57-A543-81F7-48BE109E8C13}" dt="2023-02-21T05:42:59.400" v="1996" actId="478"/>
+          <ac:spMkLst>
+            <pc:docMk/>
+            <pc:sldMk cId="1576120367" sldId="2387"/>
+            <ac:spMk id="6" creationId="{00000000-0000-0000-0000-000000000000}"/>
+          </ac:spMkLst>
+        </pc:spChg>
+        <pc:spChg chg="del">
+          <ac:chgData name="Xin Luo" userId="82312ee5779919a4" providerId="LiveId" clId="{4DB6C473-8E57-A543-81F7-48BE109E8C13}" dt="2023-02-21T05:42:53.918" v="1994" actId="478"/>
+          <ac:spMkLst>
+            <pc:docMk/>
+            <pc:sldMk cId="1576120367" sldId="2387"/>
+            <ac:spMk id="7" creationId="{00000000-0000-0000-0000-000000000000}"/>
+          </ac:spMkLst>
+        </pc:spChg>
+        <pc:spChg chg="add del mod">
+          <ac:chgData name="Xin Luo" userId="82312ee5779919a4" providerId="LiveId" clId="{4DB6C473-8E57-A543-81F7-48BE109E8C13}" dt="2023-02-21T05:46:39.935" v="2038" actId="478"/>
+          <ac:spMkLst>
+            <pc:docMk/>
+            <pc:sldMk cId="1576120367" sldId="2387"/>
+            <ac:spMk id="8" creationId="{5795B555-5780-95D6-6939-E2A2F840CEDB}"/>
+          </ac:spMkLst>
+        </pc:spChg>
+        <pc:spChg chg="add del mod topLvl">
+          <ac:chgData name="Xin Luo" userId="82312ee5779919a4" providerId="LiveId" clId="{4DB6C473-8E57-A543-81F7-48BE109E8C13}" dt="2023-02-21T05:47:15.440" v="2044" actId="164"/>
+          <ac:spMkLst>
+            <pc:docMk/>
+            <pc:sldMk cId="1576120367" sldId="2387"/>
+            <ac:spMk id="10" creationId="{00000000-0000-0000-0000-000000000000}"/>
+          </ac:spMkLst>
+        </pc:spChg>
+        <pc:spChg chg="mod topLvl">
+          <ac:chgData name="Xin Luo" userId="82312ee5779919a4" providerId="LiveId" clId="{4DB6C473-8E57-A543-81F7-48BE109E8C13}" dt="2023-02-21T05:47:15.440" v="2044" actId="164"/>
+          <ac:spMkLst>
+            <pc:docMk/>
+            <pc:sldMk cId="1576120367" sldId="2387"/>
+            <ac:spMk id="12" creationId="{00000000-0000-0000-0000-000000000000}"/>
+          </ac:spMkLst>
+        </pc:spChg>
+        <pc:spChg chg="mod">
+          <ac:chgData name="Xin Luo" userId="82312ee5779919a4" providerId="LiveId" clId="{4DB6C473-8E57-A543-81F7-48BE109E8C13}" dt="2023-02-21T05:45:26.754" v="2016" actId="207"/>
+          <ac:spMkLst>
+            <pc:docMk/>
+            <pc:sldMk cId="1576120367" sldId="2387"/>
+            <ac:spMk id="13" creationId="{00000000-0000-0000-0000-000000000000}"/>
+          </ac:spMkLst>
+        </pc:spChg>
+        <pc:spChg chg="mod">
+          <ac:chgData name="Xin Luo" userId="82312ee5779919a4" providerId="LiveId" clId="{4DB6C473-8E57-A543-81F7-48BE109E8C13}" dt="2023-02-21T05:45:26.754" v="2016" actId="207"/>
+          <ac:spMkLst>
+            <pc:docMk/>
+            <pc:sldMk cId="1576120367" sldId="2387"/>
+            <ac:spMk id="14" creationId="{00000000-0000-0000-0000-000000000000}"/>
+          </ac:spMkLst>
+        </pc:spChg>
+        <pc:spChg chg="mod">
+          <ac:chgData name="Xin Luo" userId="82312ee5779919a4" providerId="LiveId" clId="{4DB6C473-8E57-A543-81F7-48BE109E8C13}" dt="2023-02-21T05:45:26.754" v="2016" actId="207"/>
+          <ac:spMkLst>
+            <pc:docMk/>
+            <pc:sldMk cId="1576120367" sldId="2387"/>
+            <ac:spMk id="15" creationId="{00000000-0000-0000-0000-000000000000}"/>
+          </ac:spMkLst>
+        </pc:spChg>
+        <pc:spChg chg="mod">
+          <ac:chgData name="Xin Luo" userId="82312ee5779919a4" providerId="LiveId" clId="{4DB6C473-8E57-A543-81F7-48BE109E8C13}" dt="2023-02-21T05:45:26.754" v="2016" actId="207"/>
+          <ac:spMkLst>
+            <pc:docMk/>
+            <pc:sldMk cId="1576120367" sldId="2387"/>
+            <ac:spMk id="16" creationId="{00000000-0000-0000-0000-000000000000}"/>
+          </ac:spMkLst>
+        </pc:spChg>
+        <pc:grpChg chg="add del mod">
+          <ac:chgData name="Xin Luo" userId="82312ee5779919a4" providerId="LiveId" clId="{4DB6C473-8E57-A543-81F7-48BE109E8C13}" dt="2023-02-21T08:54:26.670" v="3594" actId="478"/>
+          <ac:grpSpMkLst>
+            <pc:docMk/>
+            <pc:sldMk cId="1576120367" sldId="2387"/>
+            <ac:grpSpMk id="2" creationId="{390AEDC4-AC8C-713C-F926-259F989CB162}"/>
+          </ac:grpSpMkLst>
+        </pc:grpChg>
+        <pc:grpChg chg="add mod">
+          <ac:chgData name="Xin Luo" userId="82312ee5779919a4" providerId="LiveId" clId="{4DB6C473-8E57-A543-81F7-48BE109E8C13}" dt="2023-02-21T08:54:32.554" v="3595" actId="1076"/>
+          <ac:grpSpMkLst>
+            <pc:docMk/>
+            <pc:sldMk cId="1576120367" sldId="2387"/>
+            <ac:grpSpMk id="3" creationId="{12ED16A1-79B8-7DB1-1CC1-250B051BAD58}"/>
+          </ac:grpSpMkLst>
+        </pc:grpChg>
+        <pc:grpChg chg="add del mod">
+          <ac:chgData name="Xin Luo" userId="82312ee5779919a4" providerId="LiveId" clId="{4DB6C473-8E57-A543-81F7-48BE109E8C13}" dt="2023-02-21T05:45:51.755" v="2019" actId="165"/>
+          <ac:grpSpMkLst>
+            <pc:docMk/>
+            <pc:sldMk cId="1576120367" sldId="2387"/>
+            <ac:grpSpMk id="5" creationId="{8F30E2E3-F8BB-EDF1-8726-1256D1547BF7}"/>
+          </ac:grpSpMkLst>
+        </pc:grpChg>
+        <pc:grpChg chg="add mod">
+          <ac:chgData name="Xin Luo" userId="82312ee5779919a4" providerId="LiveId" clId="{4DB6C473-8E57-A543-81F7-48BE109E8C13}" dt="2023-02-21T08:54:32.554" v="3595" actId="1076"/>
+          <ac:grpSpMkLst>
+            <pc:docMk/>
+            <pc:sldMk cId="1576120367" sldId="2387"/>
+            <ac:grpSpMk id="9" creationId="{84B9B8D5-4BCC-CDFF-1E13-B005060A8BDF}"/>
+          </ac:grpSpMkLst>
+        </pc:grpChg>
+      </pc:sldChg>
+      <pc:sldChg chg="del">
+        <pc:chgData name="Xin Luo" userId="82312ee5779919a4" providerId="LiveId" clId="{4DB6C473-8E57-A543-81F7-48BE109E8C13}" dt="2023-02-21T08:54:15.767" v="3575" actId="2696"/>
+        <pc:sldMkLst>
+          <pc:docMk/>
+          <pc:sldMk cId="0" sldId="2446"/>
+        </pc:sldMkLst>
+      </pc:sldChg>
+      <pc:sldChg chg="modSp mod ord">
+        <pc:chgData name="Xin Luo" userId="82312ee5779919a4" providerId="LiveId" clId="{4DB6C473-8E57-A543-81F7-48BE109E8C13}" dt="2023-02-21T06:59:18.091" v="3225" actId="20578"/>
+        <pc:sldMkLst>
+          <pc:docMk/>
+          <pc:sldMk cId="2415901206" sldId="2447"/>
+        </pc:sldMkLst>
+        <pc:spChg chg="mod">
+          <ac:chgData name="Xin Luo" userId="82312ee5779919a4" providerId="LiveId" clId="{4DB6C473-8E57-A543-81F7-48BE109E8C13}" dt="2023-02-21T03:26:36.249" v="1977" actId="20577"/>
+          <ac:spMkLst>
+            <pc:docMk/>
+            <pc:sldMk cId="2415901206" sldId="2447"/>
+            <ac:spMk id="7" creationId="{00000000-0000-0000-0000-000000000000}"/>
+          </ac:spMkLst>
+        </pc:spChg>
+      </pc:sldChg>
+      <pc:sldChg chg="addSp delSp modSp mod ord">
+        <pc:chgData name="Xin Luo" userId="82312ee5779919a4" providerId="LiveId" clId="{4DB6C473-8E57-A543-81F7-48BE109E8C13}" dt="2023-02-21T07:23:56.843" v="3356" actId="20577"/>
+        <pc:sldMkLst>
+          <pc:docMk/>
+          <pc:sldMk cId="4067577602" sldId="2605"/>
+        </pc:sldMkLst>
+        <pc:spChg chg="mod">
+          <ac:chgData name="Xin Luo" userId="82312ee5779919a4" providerId="LiveId" clId="{4DB6C473-8E57-A543-81F7-48BE109E8C13}" dt="2023-02-21T07:23:56.843" v="3356" actId="20577"/>
+          <ac:spMkLst>
+            <pc:docMk/>
+            <pc:sldMk cId="4067577602" sldId="2605"/>
+            <ac:spMk id="2" creationId="{631AADB6-C88A-D817-4683-FC087E4E240F}"/>
+          </ac:spMkLst>
+        </pc:spChg>
+        <pc:spChg chg="mod">
+          <ac:chgData name="Xin Luo" userId="82312ee5779919a4" providerId="LiveId" clId="{4DB6C473-8E57-A543-81F7-48BE109E8C13}" dt="2023-02-21T03:26:50.232" v="1984" actId="20577"/>
+          <ac:spMkLst>
+            <pc:docMk/>
+            <pc:sldMk cId="4067577602" sldId="2605"/>
+            <ac:spMk id="3" creationId="{00000000-0000-0000-0000-000000000000}"/>
+          </ac:spMkLst>
+        </pc:spChg>
+        <pc:spChg chg="add del mod">
+          <ac:chgData name="Xin Luo" userId="82312ee5779919a4" providerId="LiveId" clId="{4DB6C473-8E57-A543-81F7-48BE109E8C13}" dt="2023-02-21T07:21:29.220" v="3297"/>
+          <ac:spMkLst>
+            <pc:docMk/>
+            <pc:sldMk cId="4067577602" sldId="2605"/>
+            <ac:spMk id="4" creationId="{6043EA4A-1AB3-028D-434C-C16CE58B3A2A}"/>
+          </ac:spMkLst>
+        </pc:spChg>
+        <pc:spChg chg="add mod">
+          <ac:chgData name="Xin Luo" userId="82312ee5779919a4" providerId="LiveId" clId="{4DB6C473-8E57-A543-81F7-48BE109E8C13}" dt="2023-02-21T07:23:29.335" v="3346" actId="1076"/>
+          <ac:spMkLst>
+            <pc:docMk/>
+            <pc:sldMk cId="4067577602" sldId="2605"/>
+            <ac:spMk id="5" creationId="{8CB3051E-1455-F2D6-027A-C359D1264B18}"/>
+          </ac:spMkLst>
+        </pc:spChg>
+        <pc:spChg chg="del">
+          <ac:chgData name="Xin Luo" userId="82312ee5779919a4" providerId="LiveId" clId="{4DB6C473-8E57-A543-81F7-48BE109E8C13}" dt="2023-02-21T05:48:10.681" v="2114" actId="478"/>
+          <ac:spMkLst>
+            <pc:docMk/>
+            <pc:sldMk cId="4067577602" sldId="2605"/>
+            <ac:spMk id="15" creationId="{32C45697-89D7-5F4B-C2BC-3A7FBC2C544B}"/>
+          </ac:spMkLst>
+        </pc:spChg>
+        <pc:spChg chg="mod">
+          <ac:chgData name="Xin Luo" userId="82312ee5779919a4" providerId="LiveId" clId="{4DB6C473-8E57-A543-81F7-48BE109E8C13}" dt="2023-02-21T07:11:29.463" v="3277" actId="2710"/>
+          <ac:spMkLst>
+            <pc:docMk/>
+            <pc:sldMk cId="4067577602" sldId="2605"/>
+            <ac:spMk id="17" creationId="{9E05FFCA-3371-AF5C-381D-71D984055F5A}"/>
+          </ac:spMkLst>
+        </pc:spChg>
+        <pc:picChg chg="del">
+          <ac:chgData name="Xin Luo" userId="82312ee5779919a4" providerId="LiveId" clId="{4DB6C473-8E57-A543-81F7-48BE109E8C13}" dt="2023-02-21T05:48:06.479" v="2112" actId="478"/>
+          <ac:picMkLst>
+            <pc:docMk/>
+            <pc:sldMk cId="4067577602" sldId="2605"/>
+            <ac:picMk id="10" creationId="{492CAE81-3897-13BB-6E5A-74F2AC5F581A}"/>
+          </ac:picMkLst>
+        </pc:picChg>
+        <pc:picChg chg="del">
+          <ac:chgData name="Xin Luo" userId="82312ee5779919a4" providerId="LiveId" clId="{4DB6C473-8E57-A543-81F7-48BE109E8C13}" dt="2023-02-21T05:48:08.245" v="2113" actId="478"/>
+          <ac:picMkLst>
+            <pc:docMk/>
+            <pc:sldMk cId="4067577602" sldId="2605"/>
+            <ac:picMk id="14" creationId="{0637D38F-D0BE-5E7D-7891-2D7FAA4B4ED9}"/>
+          </ac:picMkLst>
+        </pc:picChg>
+        <pc:picChg chg="add mod">
+          <ac:chgData name="Xin Luo" userId="82312ee5779919a4" providerId="LiveId" clId="{4DB6C473-8E57-A543-81F7-48BE109E8C13}" dt="2023-02-21T07:23:29.335" v="3346" actId="1076"/>
+          <ac:picMkLst>
+            <pc:docMk/>
+            <pc:sldMk cId="4067577602" sldId="2605"/>
+            <ac:picMk id="1026" creationId="{9270A6EE-B03E-77C5-630F-E811251395A0}"/>
+          </ac:picMkLst>
+        </pc:picChg>
+      </pc:sldChg>
+      <pc:sldChg chg="del">
+        <pc:chgData name="Xin Luo" userId="82312ee5779919a4" providerId="LiveId" clId="{4DB6C473-8E57-A543-81F7-48BE109E8C13}" dt="2023-02-21T14:49:50.253" v="5372" actId="2696"/>
+        <pc:sldMkLst>
+          <pc:docMk/>
+          <pc:sldMk cId="963926578" sldId="2613"/>
+        </pc:sldMkLst>
+      </pc:sldChg>
+      <pc:sldChg chg="del">
+        <pc:chgData name="Xin Luo" userId="82312ee5779919a4" providerId="LiveId" clId="{4DB6C473-8E57-A543-81F7-48BE109E8C13}" dt="2023-02-21T14:49:50.286" v="5373" actId="2696"/>
+        <pc:sldMkLst>
+          <pc:docMk/>
+          <pc:sldMk cId="1377829391" sldId="2689"/>
+        </pc:sldMkLst>
+      </pc:sldChg>
+      <pc:sldChg chg="del">
+        <pc:chgData name="Xin Luo" userId="82312ee5779919a4" providerId="LiveId" clId="{4DB6C473-8E57-A543-81F7-48BE109E8C13}" dt="2023-02-21T14:49:50.299" v="5374" actId="2696"/>
+        <pc:sldMkLst>
+          <pc:docMk/>
+          <pc:sldMk cId="2843640805" sldId="2704"/>
+        </pc:sldMkLst>
+      </pc:sldChg>
+      <pc:sldChg chg="delSp modSp add mod ord">
+        <pc:chgData name="Xin Luo" userId="82312ee5779919a4" providerId="LiveId" clId="{4DB6C473-8E57-A543-81F7-48BE109E8C13}" dt="2023-02-21T05:54:53.172" v="2328" actId="113"/>
+        <pc:sldMkLst>
+          <pc:docMk/>
+          <pc:sldMk cId="2688334957" sldId="2705"/>
+        </pc:sldMkLst>
+        <pc:spChg chg="mod">
+          <ac:chgData name="Xin Luo" userId="82312ee5779919a4" providerId="LiveId" clId="{4DB6C473-8E57-A543-81F7-48BE109E8C13}" dt="2023-02-21T03:04:15.029" v="17" actId="20577"/>
+          <ac:spMkLst>
+            <pc:docMk/>
+            <pc:sldMk cId="2688334957" sldId="2705"/>
+            <ac:spMk id="2" creationId="{631AADB6-C88A-D817-4683-FC087E4E240F}"/>
+          </ac:spMkLst>
+        </pc:spChg>
+        <pc:spChg chg="del">
+          <ac:chgData name="Xin Luo" userId="82312ee5779919a4" providerId="LiveId" clId="{4DB6C473-8E57-A543-81F7-48BE109E8C13}" dt="2023-02-21T03:04:17.351" v="18" actId="478"/>
+          <ac:spMkLst>
+            <pc:docMk/>
+            <pc:sldMk cId="2688334957" sldId="2705"/>
+            <ac:spMk id="15" creationId="{32C45697-89D7-5F4B-C2BC-3A7FBC2C544B}"/>
+          </ac:spMkLst>
+        </pc:spChg>
+        <pc:spChg chg="mod">
+          <ac:chgData name="Xin Luo" userId="82312ee5779919a4" providerId="LiveId" clId="{4DB6C473-8E57-A543-81F7-48BE109E8C13}" dt="2023-02-21T05:54:53.172" v="2328" actId="113"/>
+          <ac:spMkLst>
+            <pc:docMk/>
+            <pc:sldMk cId="2688334957" sldId="2705"/>
+            <ac:spMk id="17" creationId="{9E05FFCA-3371-AF5C-381D-71D984055F5A}"/>
+          </ac:spMkLst>
+        </pc:spChg>
+        <pc:picChg chg="del">
+          <ac:chgData name="Xin Luo" userId="82312ee5779919a4" providerId="LiveId" clId="{4DB6C473-8E57-A543-81F7-48BE109E8C13}" dt="2023-02-21T03:04:18.544" v="20" actId="478"/>
+          <ac:picMkLst>
+            <pc:docMk/>
+            <pc:sldMk cId="2688334957" sldId="2705"/>
+            <ac:picMk id="10" creationId="{492CAE81-3897-13BB-6E5A-74F2AC5F581A}"/>
+          </ac:picMkLst>
+        </pc:picChg>
+        <pc:picChg chg="del">
+          <ac:chgData name="Xin Luo" userId="82312ee5779919a4" providerId="LiveId" clId="{4DB6C473-8E57-A543-81F7-48BE109E8C13}" dt="2023-02-21T03:04:17.947" v="19" actId="478"/>
+          <ac:picMkLst>
+            <pc:docMk/>
+            <pc:sldMk cId="2688334957" sldId="2705"/>
+            <ac:picMk id="14" creationId="{0637D38F-D0BE-5E7D-7891-2D7FAA4B4ED9}"/>
+          </ac:picMkLst>
+        </pc:picChg>
+      </pc:sldChg>
+      <pc:sldChg chg="modSp add mod">
+        <pc:chgData name="Xin Luo" userId="82312ee5779919a4" providerId="LiveId" clId="{4DB6C473-8E57-A543-81F7-48BE109E8C13}" dt="2023-02-21T05:59:45.306" v="2357" actId="2711"/>
+        <pc:sldMkLst>
+          <pc:docMk/>
+          <pc:sldMk cId="2464444856" sldId="2706"/>
+        </pc:sldMkLst>
+        <pc:spChg chg="mod">
+          <ac:chgData name="Xin Luo" userId="82312ee5779919a4" providerId="LiveId" clId="{4DB6C473-8E57-A543-81F7-48BE109E8C13}" dt="2023-02-21T05:59:45.306" v="2357" actId="2711"/>
+          <ac:spMkLst>
+            <pc:docMk/>
+            <pc:sldMk cId="2464444856" sldId="2706"/>
+            <ac:spMk id="2" creationId="{631AADB6-C88A-D817-4683-FC087E4E240F}"/>
+          </ac:spMkLst>
+        </pc:spChg>
+        <pc:spChg chg="mod">
+          <ac:chgData name="Xin Luo" userId="82312ee5779919a4" providerId="LiveId" clId="{4DB6C473-8E57-A543-81F7-48BE109E8C13}" dt="2023-02-21T05:59:45.306" v="2357" actId="2711"/>
+          <ac:spMkLst>
+            <pc:docMk/>
+            <pc:sldMk cId="2464444856" sldId="2706"/>
+            <ac:spMk id="3" creationId="{00000000-0000-0000-0000-000000000000}"/>
+          </ac:spMkLst>
+        </pc:spChg>
+        <pc:spChg chg="mod">
+          <ac:chgData name="Xin Luo" userId="82312ee5779919a4" providerId="LiveId" clId="{4DB6C473-8E57-A543-81F7-48BE109E8C13}" dt="2023-02-21T05:59:45.306" v="2357" actId="2711"/>
+          <ac:spMkLst>
+            <pc:docMk/>
+            <pc:sldMk cId="2464444856" sldId="2706"/>
+            <ac:spMk id="17" creationId="{9E05FFCA-3371-AF5C-381D-71D984055F5A}"/>
+          </ac:spMkLst>
+        </pc:spChg>
+      </pc:sldChg>
+      <pc:sldChg chg="modSp add mod">
+        <pc:chgData name="Xin Luo" userId="82312ee5779919a4" providerId="LiveId" clId="{4DB6C473-8E57-A543-81F7-48BE109E8C13}" dt="2023-02-21T06:00:27.005" v="2362" actId="113"/>
+        <pc:sldMkLst>
+          <pc:docMk/>
+          <pc:sldMk cId="1602808061" sldId="2707"/>
+        </pc:sldMkLst>
+        <pc:spChg chg="mod">
+          <ac:chgData name="Xin Luo" userId="82312ee5779919a4" providerId="LiveId" clId="{4DB6C473-8E57-A543-81F7-48BE109E8C13}" dt="2023-02-21T03:16:48.798" v="1289" actId="20577"/>
+          <ac:spMkLst>
+            <pc:docMk/>
+            <pc:sldMk cId="1602808061" sldId="2707"/>
+            <ac:spMk id="2" creationId="{631AADB6-C88A-D817-4683-FC087E4E240F}"/>
+          </ac:spMkLst>
+        </pc:spChg>
+        <pc:spChg chg="mod">
+          <ac:chgData name="Xin Luo" userId="82312ee5779919a4" providerId="LiveId" clId="{4DB6C473-8E57-A543-81F7-48BE109E8C13}" dt="2023-02-21T06:00:27.005" v="2362" actId="113"/>
+          <ac:spMkLst>
+            <pc:docMk/>
+            <pc:sldMk cId="1602808061" sldId="2707"/>
+            <ac:spMk id="17" creationId="{9E05FFCA-3371-AF5C-381D-71D984055F5A}"/>
+          </ac:spMkLst>
+        </pc:spChg>
+      </pc:sldChg>
+      <pc:sldChg chg="addSp modSp add mod">
+        <pc:chgData name="Xin Luo" userId="82312ee5779919a4" providerId="LiveId" clId="{4DB6C473-8E57-A543-81F7-48BE109E8C13}" dt="2023-02-21T03:24:12.660" v="1798" actId="207"/>
+        <pc:sldMkLst>
+          <pc:docMk/>
+          <pc:sldMk cId="1658607177" sldId="2708"/>
+        </pc:sldMkLst>
+        <pc:spChg chg="add mod">
+          <ac:chgData name="Xin Luo" userId="82312ee5779919a4" providerId="LiveId" clId="{4DB6C473-8E57-A543-81F7-48BE109E8C13}" dt="2023-02-21T03:24:12.660" v="1798" actId="207"/>
+          <ac:spMkLst>
+            <pc:docMk/>
+            <pc:sldMk cId="1658607177" sldId="2708"/>
+            <ac:spMk id="3" creationId="{E375549C-74EF-2C8F-6432-2C52B803FB1B}"/>
+          </ac:spMkLst>
+        </pc:spChg>
+        <pc:spChg chg="mod">
+          <ac:chgData name="Xin Luo" userId="82312ee5779919a4" providerId="LiveId" clId="{4DB6C473-8E57-A543-81F7-48BE109E8C13}" dt="2023-02-21T03:22:03.139" v="1731" actId="20577"/>
+          <ac:spMkLst>
+            <pc:docMk/>
+            <pc:sldMk cId="1658607177" sldId="2708"/>
+            <ac:spMk id="24" creationId="{00000000-0000-0000-0000-000000000000}"/>
+          </ac:spMkLst>
+        </pc:spChg>
+        <pc:picChg chg="mod">
+          <ac:chgData name="Xin Luo" userId="82312ee5779919a4" providerId="LiveId" clId="{4DB6C473-8E57-A543-81F7-48BE109E8C13}" dt="2023-02-21T03:23:29.344" v="1786" actId="1076"/>
+          <ac:picMkLst>
+            <pc:docMk/>
+            <pc:sldMk cId="1658607177" sldId="2708"/>
+            <ac:picMk id="4" creationId="{C5A20417-E7CA-C285-EB98-9BD26873E83E}"/>
+          </ac:picMkLst>
+        </pc:picChg>
+      </pc:sldChg>
+      <pc:sldChg chg="add del setBg">
+        <pc:chgData name="Xin Luo" userId="82312ee5779919a4" providerId="LiveId" clId="{4DB6C473-8E57-A543-81F7-48BE109E8C13}" dt="2023-02-21T03:21:36.224" v="1707"/>
+        <pc:sldMkLst>
+          <pc:docMk/>
+          <pc:sldMk cId="3430641667" sldId="2708"/>
+        </pc:sldMkLst>
+      </pc:sldChg>
+      <pc:sldChg chg="modSp add mod ord">
+        <pc:chgData name="Xin Luo" userId="82312ee5779919a4" providerId="LiveId" clId="{4DB6C473-8E57-A543-81F7-48BE109E8C13}" dt="2023-02-21T07:27:15.123" v="3399" actId="20578"/>
+        <pc:sldMkLst>
+          <pc:docMk/>
+          <pc:sldMk cId="1257969106" sldId="2709"/>
+        </pc:sldMkLst>
+        <pc:spChg chg="mod">
+          <ac:chgData name="Xin Luo" userId="82312ee5779919a4" providerId="LiveId" clId="{4DB6C473-8E57-A543-81F7-48BE109E8C13}" dt="2023-02-21T05:47:38.868" v="2080" actId="20577"/>
+          <ac:spMkLst>
+            <pc:docMk/>
+            <pc:sldMk cId="1257969106" sldId="2709"/>
+            <ac:spMk id="7" creationId="{00000000-0000-0000-0000-000000000000}"/>
+          </ac:spMkLst>
+        </pc:spChg>
+      </pc:sldChg>
+      <pc:sldChg chg="add del setBg">
+        <pc:chgData name="Xin Luo" userId="82312ee5779919a4" providerId="LiveId" clId="{4DB6C473-8E57-A543-81F7-48BE109E8C13}" dt="2023-02-21T03:22:38.148" v="1735"/>
+        <pc:sldMkLst>
+          <pc:docMk/>
+          <pc:sldMk cId="2068292362" sldId="2709"/>
+        </pc:sldMkLst>
+      </pc:sldChg>
+      <pc:sldChg chg="add del setBg">
+        <pc:chgData name="Xin Luo" userId="82312ee5779919a4" providerId="LiveId" clId="{4DB6C473-8E57-A543-81F7-48BE109E8C13}" dt="2023-02-21T03:22:29.206" v="1733"/>
+        <pc:sldMkLst>
+          <pc:docMk/>
+          <pc:sldMk cId="4244071672" sldId="2709"/>
+        </pc:sldMkLst>
+      </pc:sldChg>
+      <pc:sldChg chg="modSp add del mod">
+        <pc:chgData name="Xin Luo" userId="82312ee5779919a4" providerId="LiveId" clId="{4DB6C473-8E57-A543-81F7-48BE109E8C13}" dt="2023-02-21T12:49:10.754" v="4207" actId="2696"/>
+        <pc:sldMkLst>
+          <pc:docMk/>
+          <pc:sldMk cId="4096743637" sldId="2710"/>
+        </pc:sldMkLst>
+        <pc:spChg chg="mod">
+          <ac:chgData name="Xin Luo" userId="82312ee5779919a4" providerId="LiveId" clId="{4DB6C473-8E57-A543-81F7-48BE109E8C13}" dt="2023-02-21T05:47:46.587" v="2093" actId="20577"/>
+          <ac:spMkLst>
+            <pc:docMk/>
+            <pc:sldMk cId="4096743637" sldId="2710"/>
+            <ac:spMk id="7" creationId="{00000000-0000-0000-0000-000000000000}"/>
+          </ac:spMkLst>
+        </pc:spChg>
+      </pc:sldChg>
+      <pc:sldChg chg="addSp delSp modSp add mod">
+        <pc:chgData name="Xin Luo" userId="82312ee5779919a4" providerId="LiveId" clId="{4DB6C473-8E57-A543-81F7-48BE109E8C13}" dt="2023-02-21T15:08:47.651" v="5619" actId="113"/>
+        <pc:sldMkLst>
+          <pc:docMk/>
+          <pc:sldMk cId="2744383376" sldId="2711"/>
+        </pc:sldMkLst>
+        <pc:spChg chg="mod">
+          <ac:chgData name="Xin Luo" userId="82312ee5779919a4" providerId="LiveId" clId="{4DB6C473-8E57-A543-81F7-48BE109E8C13}" dt="2023-02-21T07:01:42.969" v="3272" actId="20577"/>
+          <ac:spMkLst>
+            <pc:docMk/>
+            <pc:sldMk cId="2744383376" sldId="2711"/>
+            <ac:spMk id="2" creationId="{631AADB6-C88A-D817-4683-FC087E4E240F}"/>
+          </ac:spMkLst>
+        </pc:spChg>
+        <pc:spChg chg="add del">
+          <ac:chgData name="Xin Luo" userId="82312ee5779919a4" providerId="LiveId" clId="{4DB6C473-8E57-A543-81F7-48BE109E8C13}" dt="2023-02-21T06:08:19.635" v="2522" actId="22"/>
+          <ac:spMkLst>
+            <pc:docMk/>
+            <pc:sldMk cId="2744383376" sldId="2711"/>
+            <ac:spMk id="5" creationId="{9005BDE5-6349-121C-B95F-5D695486765F}"/>
+          </ac:spMkLst>
+        </pc:spChg>
+        <pc:spChg chg="add del mod">
+          <ac:chgData name="Xin Luo" userId="82312ee5779919a4" providerId="LiveId" clId="{4DB6C473-8E57-A543-81F7-48BE109E8C13}" dt="2023-02-21T06:36:09.199" v="3158" actId="478"/>
+          <ac:spMkLst>
+            <pc:docMk/>
+            <pc:sldMk cId="2744383376" sldId="2711"/>
+            <ac:spMk id="7" creationId="{508CFB8D-1428-2D03-7C0B-F181DD0AC3B0}"/>
+          </ac:spMkLst>
+        </pc:spChg>
+        <pc:spChg chg="add del mod">
+          <ac:chgData name="Xin Luo" userId="82312ee5779919a4" providerId="LiveId" clId="{4DB6C473-8E57-A543-81F7-48BE109E8C13}" dt="2023-02-21T06:35:09.270" v="3110" actId="478"/>
+          <ac:spMkLst>
+            <pc:docMk/>
+            <pc:sldMk cId="2744383376" sldId="2711"/>
+            <ac:spMk id="8" creationId="{FE049113-DA9A-B499-A9F7-CE696334739C}"/>
+          </ac:spMkLst>
+        </pc:spChg>
+        <pc:spChg chg="add del">
+          <ac:chgData name="Xin Luo" userId="82312ee5779919a4" providerId="LiveId" clId="{4DB6C473-8E57-A543-81F7-48BE109E8C13}" dt="2023-02-21T06:24:41.792" v="2925" actId="22"/>
+          <ac:spMkLst>
+            <pc:docMk/>
+            <pc:sldMk cId="2744383376" sldId="2711"/>
+            <ac:spMk id="10" creationId="{2A70B923-8B0E-BFB6-100F-07B5471C1335}"/>
+          </ac:spMkLst>
+        </pc:spChg>
+        <pc:spChg chg="add del mod">
+          <ac:chgData name="Xin Luo" userId="82312ee5779919a4" providerId="LiveId" clId="{4DB6C473-8E57-A543-81F7-48BE109E8C13}" dt="2023-02-21T06:36:24.547" v="3163" actId="478"/>
+          <ac:spMkLst>
+            <pc:docMk/>
+            <pc:sldMk cId="2744383376" sldId="2711"/>
+            <ac:spMk id="12" creationId="{7AC7943F-2EEF-E2BC-7188-7457E9CCE47B}"/>
+          </ac:spMkLst>
+        </pc:spChg>
+        <pc:spChg chg="add del mod">
+          <ac:chgData name="Xin Luo" userId="82312ee5779919a4" providerId="LiveId" clId="{4DB6C473-8E57-A543-81F7-48BE109E8C13}" dt="2023-02-21T06:36:21.741" v="3162" actId="478"/>
+          <ac:spMkLst>
+            <pc:docMk/>
+            <pc:sldMk cId="2744383376" sldId="2711"/>
+            <ac:spMk id="13" creationId="{4D3246D5-B603-994F-3AE4-6B8ADC01AFBD}"/>
+          </ac:spMkLst>
+        </pc:spChg>
+        <pc:spChg chg="add del mod">
+          <ac:chgData name="Xin Luo" userId="82312ee5779919a4" providerId="LiveId" clId="{4DB6C473-8E57-A543-81F7-48BE109E8C13}" dt="2023-02-21T06:34:25.015" v="3081" actId="478"/>
+          <ac:spMkLst>
+            <pc:docMk/>
+            <pc:sldMk cId="2744383376" sldId="2711"/>
+            <ac:spMk id="15" creationId="{E4EF7755-FC04-518B-64D9-6CC2D64CFD40}"/>
+          </ac:spMkLst>
+        </pc:spChg>
+        <pc:spChg chg="mod">
+          <ac:chgData name="Xin Luo" userId="82312ee5779919a4" providerId="LiveId" clId="{4DB6C473-8E57-A543-81F7-48BE109E8C13}" dt="2023-02-21T15:07:43.844" v="5615" actId="1038"/>
+          <ac:spMkLst>
+            <pc:docMk/>
+            <pc:sldMk cId="2744383376" sldId="2711"/>
+            <ac:spMk id="17" creationId="{9E05FFCA-3371-AF5C-381D-71D984055F5A}"/>
+          </ac:spMkLst>
+        </pc:spChg>
+        <pc:spChg chg="add mod">
+          <ac:chgData name="Xin Luo" userId="82312ee5779919a4" providerId="LiveId" clId="{4DB6C473-8E57-A543-81F7-48BE109E8C13}" dt="2023-02-21T15:08:47.651" v="5619" actId="113"/>
+          <ac:spMkLst>
+            <pc:docMk/>
+            <pc:sldMk cId="2744383376" sldId="2711"/>
+            <ac:spMk id="18" creationId="{9D310AF3-A081-4032-01C0-C288D4F7AC53}"/>
+          </ac:spMkLst>
+        </pc:spChg>
+      </pc:sldChg>
+      <pc:sldChg chg="delSp modSp add del mod">
+        <pc:chgData name="Xin Luo" userId="82312ee5779919a4" providerId="LiveId" clId="{4DB6C473-8E57-A543-81F7-48BE109E8C13}" dt="2023-02-21T07:27:24.620" v="3402" actId="2696"/>
+        <pc:sldMkLst>
+          <pc:docMk/>
+          <pc:sldMk cId="1581220802" sldId="2712"/>
+        </pc:sldMkLst>
+        <pc:spChg chg="mod">
+          <ac:chgData name="Xin Luo" userId="82312ee5779919a4" providerId="LiveId" clId="{4DB6C473-8E57-A543-81F7-48BE109E8C13}" dt="2023-02-21T07:01:48.402" v="3274" actId="20577"/>
+          <ac:spMkLst>
+            <pc:docMk/>
+            <pc:sldMk cId="1581220802" sldId="2712"/>
+            <ac:spMk id="2" creationId="{631AADB6-C88A-D817-4683-FC087E4E240F}"/>
+          </ac:spMkLst>
+        </pc:spChg>
+        <pc:spChg chg="mod">
+          <ac:chgData name="Xin Luo" userId="82312ee5779919a4" providerId="LiveId" clId="{4DB6C473-8E57-A543-81F7-48BE109E8C13}" dt="2023-02-21T06:58:28.109" v="3222" actId="20577"/>
+          <ac:spMkLst>
+            <pc:docMk/>
+            <pc:sldMk cId="1581220802" sldId="2712"/>
+            <ac:spMk id="3" creationId="{00000000-0000-0000-0000-000000000000}"/>
+          </ac:spMkLst>
+        </pc:spChg>
+        <pc:spChg chg="del mod">
+          <ac:chgData name="Xin Luo" userId="82312ee5779919a4" providerId="LiveId" clId="{4DB6C473-8E57-A543-81F7-48BE109E8C13}" dt="2023-02-21T07:24:25.709" v="3365"/>
+          <ac:spMkLst>
+            <pc:docMk/>
+            <pc:sldMk cId="1581220802" sldId="2712"/>
+            <ac:spMk id="17" creationId="{9E05FFCA-3371-AF5C-381D-71D984055F5A}"/>
+          </ac:spMkLst>
+        </pc:spChg>
+      </pc:sldChg>
+      <pc:sldChg chg="modSp add del mod">
+        <pc:chgData name="Xin Luo" userId="82312ee5779919a4" providerId="LiveId" clId="{4DB6C473-8E57-A543-81F7-48BE109E8C13}" dt="2023-02-21T07:24:13.066" v="3357" actId="2696"/>
+        <pc:sldMkLst>
+          <pc:docMk/>
+          <pc:sldMk cId="2395170792" sldId="2713"/>
+        </pc:sldMkLst>
+        <pc:spChg chg="mod">
+          <ac:chgData name="Xin Luo" userId="82312ee5779919a4" providerId="LiveId" clId="{4DB6C473-8E57-A543-81F7-48BE109E8C13}" dt="2023-02-21T06:15:05.106" v="2898" actId="20577"/>
+          <ac:spMkLst>
+            <pc:docMk/>
+            <pc:sldMk cId="2395170792" sldId="2713"/>
+            <ac:spMk id="17" creationId="{9E05FFCA-3371-AF5C-381D-71D984055F5A}"/>
+          </ac:spMkLst>
+        </pc:spChg>
+      </pc:sldChg>
+      <pc:sldChg chg="addSp modSp add mod">
+        <pc:chgData name="Xin Luo" userId="82312ee5779919a4" providerId="LiveId" clId="{4DB6C473-8E57-A543-81F7-48BE109E8C13}" dt="2023-02-21T07:23:52.393" v="3353" actId="20577"/>
+        <pc:sldMkLst>
+          <pc:docMk/>
+          <pc:sldMk cId="280619949" sldId="2714"/>
+        </pc:sldMkLst>
+        <pc:spChg chg="mod">
+          <ac:chgData name="Xin Luo" userId="82312ee5779919a4" providerId="LiveId" clId="{4DB6C473-8E57-A543-81F7-48BE109E8C13}" dt="2023-02-21T07:23:52.393" v="3353" actId="20577"/>
+          <ac:spMkLst>
+            <pc:docMk/>
+            <pc:sldMk cId="280619949" sldId="2714"/>
+            <ac:spMk id="2" creationId="{631AADB6-C88A-D817-4683-FC087E4E240F}"/>
+          </ac:spMkLst>
+        </pc:spChg>
+        <pc:spChg chg="mod">
+          <ac:chgData name="Xin Luo" userId="82312ee5779919a4" providerId="LiveId" clId="{4DB6C473-8E57-A543-81F7-48BE109E8C13}" dt="2023-02-21T07:13:49.998" v="3283" actId="404"/>
+          <ac:spMkLst>
+            <pc:docMk/>
+            <pc:sldMk cId="280619949" sldId="2714"/>
+            <ac:spMk id="17" creationId="{9E05FFCA-3371-AF5C-381D-71D984055F5A}"/>
+          </ac:spMkLst>
+        </pc:spChg>
+        <pc:picChg chg="add mod">
+          <ac:chgData name="Xin Luo" userId="82312ee5779919a4" providerId="LiveId" clId="{4DB6C473-8E57-A543-81F7-48BE109E8C13}" dt="2023-02-21T07:23:39.455" v="3348" actId="14100"/>
+          <ac:picMkLst>
+            <pc:docMk/>
+            <pc:sldMk cId="280619949" sldId="2714"/>
+            <ac:picMk id="5" creationId="{0604E948-208D-161C-F579-7EA72A1F42DC}"/>
+          </ac:picMkLst>
+        </pc:picChg>
+      </pc:sldChg>
+      <pc:sldChg chg="addSp modSp add mod">
+        <pc:chgData name="Xin Luo" userId="82312ee5779919a4" providerId="LiveId" clId="{4DB6C473-8E57-A543-81F7-48BE109E8C13}" dt="2023-02-21T13:47:35.461" v="4912" actId="1076"/>
+        <pc:sldMkLst>
+          <pc:docMk/>
+          <pc:sldMk cId="3852391939" sldId="2715"/>
+        </pc:sldMkLst>
+        <pc:spChg chg="mod">
+          <ac:chgData name="Xin Luo" userId="82312ee5779919a4" providerId="LiveId" clId="{4DB6C473-8E57-A543-81F7-48BE109E8C13}" dt="2023-02-21T13:06:48.362" v="4245" actId="20577"/>
+          <ac:spMkLst>
+            <pc:docMk/>
+            <pc:sldMk cId="3852391939" sldId="2715"/>
+            <ac:spMk id="2" creationId="{631AADB6-C88A-D817-4683-FC087E4E240F}"/>
+          </ac:spMkLst>
+        </pc:spChg>
+        <pc:spChg chg="mod">
+          <ac:chgData name="Xin Luo" userId="82312ee5779919a4" providerId="LiveId" clId="{4DB6C473-8E57-A543-81F7-48BE109E8C13}" dt="2023-02-21T07:43:23.802" v="3522" actId="20577"/>
+          <ac:spMkLst>
+            <pc:docMk/>
+            <pc:sldMk cId="3852391939" sldId="2715"/>
+            <ac:spMk id="3" creationId="{00000000-0000-0000-0000-000000000000}"/>
+          </ac:spMkLst>
+        </pc:spChg>
+        <pc:spChg chg="add mod">
+          <ac:chgData name="Xin Luo" userId="82312ee5779919a4" providerId="LiveId" clId="{4DB6C473-8E57-A543-81F7-48BE109E8C13}" dt="2023-02-21T13:41:38.670" v="4903" actId="20577"/>
+          <ac:spMkLst>
+            <pc:docMk/>
+            <pc:sldMk cId="3852391939" sldId="2715"/>
+            <ac:spMk id="5" creationId="{FCD10A89-5E0E-5D73-1D4F-9E11D943B29C}"/>
+          </ac:spMkLst>
+        </pc:spChg>
+        <pc:picChg chg="add mod">
+          <ac:chgData name="Xin Luo" userId="82312ee5779919a4" providerId="LiveId" clId="{4DB6C473-8E57-A543-81F7-48BE109E8C13}" dt="2023-02-21T13:47:35.461" v="4912" actId="1076"/>
+          <ac:picMkLst>
+            <pc:docMk/>
+            <pc:sldMk cId="3852391939" sldId="2715"/>
+            <ac:picMk id="2050" creationId="{8F8FBDFD-CF37-F4FE-58FA-9350A0CDABC7}"/>
+          </ac:picMkLst>
+        </pc:picChg>
+      </pc:sldChg>
+      <pc:sldChg chg="addSp modSp add mod ord">
+        <pc:chgData name="Xin Luo" userId="82312ee5779919a4" providerId="LiveId" clId="{4DB6C473-8E57-A543-81F7-48BE109E8C13}" dt="2023-02-21T13:15:30.678" v="4562" actId="1035"/>
+        <pc:sldMkLst>
+          <pc:docMk/>
+          <pc:sldMk cId="3026715585" sldId="2716"/>
+        </pc:sldMkLst>
+        <pc:spChg chg="mod">
+          <ac:chgData name="Xin Luo" userId="82312ee5779919a4" providerId="LiveId" clId="{4DB6C473-8E57-A543-81F7-48BE109E8C13}" dt="2023-02-21T07:27:17.840" v="3401" actId="20577"/>
+          <ac:spMkLst>
+            <pc:docMk/>
+            <pc:sldMk cId="3026715585" sldId="2716"/>
+            <ac:spMk id="2" creationId="{631AADB6-C88A-D817-4683-FC087E4E240F}"/>
+          </ac:spMkLst>
+        </pc:spChg>
+        <pc:spChg chg="add mod">
+          <ac:chgData name="Xin Luo" userId="82312ee5779919a4" providerId="LiveId" clId="{4DB6C473-8E57-A543-81F7-48BE109E8C13}" dt="2023-02-21T13:15:30.678" v="4562" actId="1035"/>
+          <ac:spMkLst>
+            <pc:docMk/>
+            <pc:sldMk cId="3026715585" sldId="2716"/>
+            <ac:spMk id="4" creationId="{B31A8325-31D8-6F06-6D89-E39763C56875}"/>
+          </ac:spMkLst>
+        </pc:spChg>
+        <pc:spChg chg="mod">
+          <ac:chgData name="Xin Luo" userId="82312ee5779919a4" providerId="LiveId" clId="{4DB6C473-8E57-A543-81F7-48BE109E8C13}" dt="2023-02-21T12:48:49.893" v="4206" actId="1076"/>
+          <ac:spMkLst>
+            <pc:docMk/>
+            <pc:sldMk cId="3026715585" sldId="2716"/>
+            <ac:spMk id="17" creationId="{9E05FFCA-3371-AF5C-381D-71D984055F5A}"/>
+          </ac:spMkLst>
+        </pc:spChg>
+      </pc:sldChg>
+      <pc:sldChg chg="addSp modSp add mod">
+        <pc:chgData name="Xin Luo" userId="82312ee5779919a4" providerId="LiveId" clId="{4DB6C473-8E57-A543-81F7-48BE109E8C13}" dt="2023-02-21T13:48:38.001" v="4936" actId="1076"/>
+        <pc:sldMkLst>
+          <pc:docMk/>
+          <pc:sldMk cId="4136986794" sldId="2717"/>
+        </pc:sldMkLst>
+        <pc:spChg chg="mod">
+          <ac:chgData name="Xin Luo" userId="82312ee5779919a4" providerId="LiveId" clId="{4DB6C473-8E57-A543-81F7-48BE109E8C13}" dt="2023-02-21T13:48:32.535" v="4933" actId="1035"/>
+          <ac:spMkLst>
+            <pc:docMk/>
+            <pc:sldMk cId="4136986794" sldId="2717"/>
+            <ac:spMk id="5" creationId="{FCD10A89-5E0E-5D73-1D4F-9E11D943B29C}"/>
+          </ac:spMkLst>
+        </pc:spChg>
+        <pc:picChg chg="add mod">
+          <ac:chgData name="Xin Luo" userId="82312ee5779919a4" providerId="LiveId" clId="{4DB6C473-8E57-A543-81F7-48BE109E8C13}" dt="2023-02-21T13:48:38.001" v="4936" actId="1076"/>
+          <ac:picMkLst>
+            <pc:docMk/>
+            <pc:sldMk cId="4136986794" sldId="2717"/>
+            <ac:picMk id="6" creationId="{2260B411-AFF0-1E09-142B-45C9F88562F7}"/>
+          </ac:picMkLst>
+        </pc:picChg>
+      </pc:sldChg>
+      <pc:sldChg chg="addSp delSp modSp add mod">
+        <pc:chgData name="Xin Luo" userId="82312ee5779919a4" providerId="LiveId" clId="{4DB6C473-8E57-A543-81F7-48BE109E8C13}" dt="2023-02-21T14:08:09.514" v="5152" actId="1035"/>
+        <pc:sldMkLst>
+          <pc:docMk/>
+          <pc:sldMk cId="1778017482" sldId="2718"/>
+        </pc:sldMkLst>
+        <pc:spChg chg="mod">
+          <ac:chgData name="Xin Luo" userId="82312ee5779919a4" providerId="LiveId" clId="{4DB6C473-8E57-A543-81F7-48BE109E8C13}" dt="2023-02-21T14:08:07.366" v="5145" actId="1035"/>
+          <ac:spMkLst>
+            <pc:docMk/>
+            <pc:sldMk cId="1778017482" sldId="2718"/>
+            <ac:spMk id="5" creationId="{FCD10A89-5E0E-5D73-1D4F-9E11D943B29C}"/>
+          </ac:spMkLst>
+        </pc:spChg>
+        <pc:picChg chg="del">
+          <ac:chgData name="Xin Luo" userId="82312ee5779919a4" providerId="LiveId" clId="{4DB6C473-8E57-A543-81F7-48BE109E8C13}" dt="2023-02-21T13:48:49.937" v="4938" actId="478"/>
+          <ac:picMkLst>
+            <pc:docMk/>
+            <pc:sldMk cId="1778017482" sldId="2718"/>
+            <ac:picMk id="6" creationId="{2260B411-AFF0-1E09-142B-45C9F88562F7}"/>
+          </ac:picMkLst>
+        </pc:picChg>
+        <pc:picChg chg="add mod">
+          <ac:chgData name="Xin Luo" userId="82312ee5779919a4" providerId="LiveId" clId="{4DB6C473-8E57-A543-81F7-48BE109E8C13}" dt="2023-02-21T14:08:09.514" v="5152" actId="1035"/>
+          <ac:picMkLst>
+            <pc:docMk/>
+            <pc:sldMk cId="1778017482" sldId="2718"/>
+            <ac:picMk id="3074" creationId="{3E8CF22C-6E5D-0AAE-1F79-795E8B77EEF7}"/>
+          </ac:picMkLst>
+        </pc:picChg>
+      </pc:sldChg>
+      <pc:sldChg chg="delSp modSp add mod">
+        <pc:chgData name="Xin Luo" userId="82312ee5779919a4" providerId="LiveId" clId="{4DB6C473-8E57-A543-81F7-48BE109E8C13}" dt="2023-02-21T15:10:04.498" v="5724" actId="108"/>
+        <pc:sldMkLst>
+          <pc:docMk/>
+          <pc:sldMk cId="1858913004" sldId="2719"/>
+        </pc:sldMkLst>
+        <pc:spChg chg="mod">
+          <ac:chgData name="Xin Luo" userId="82312ee5779919a4" providerId="LiveId" clId="{4DB6C473-8E57-A543-81F7-48BE109E8C13}" dt="2023-02-21T14:49:05.255" v="5311" actId="1076"/>
+          <ac:spMkLst>
+            <pc:docMk/>
+            <pc:sldMk cId="1858913004" sldId="2719"/>
+            <ac:spMk id="2" creationId="{631AADB6-C88A-D817-4683-FC087E4E240F}"/>
+          </ac:spMkLst>
+        </pc:spChg>
+        <pc:spChg chg="mod">
+          <ac:chgData name="Xin Luo" userId="82312ee5779919a4" providerId="LiveId" clId="{4DB6C473-8E57-A543-81F7-48BE109E8C13}" dt="2023-02-21T15:10:04.498" v="5724" actId="108"/>
+          <ac:spMkLst>
+            <pc:docMk/>
+            <pc:sldMk cId="1858913004" sldId="2719"/>
+            <ac:spMk id="5" creationId="{FCD10A89-5E0E-5D73-1D4F-9E11D943B29C}"/>
+          </ac:spMkLst>
+        </pc:spChg>
+        <pc:spChg chg="del">
+          <ac:chgData name="Xin Luo" userId="82312ee5779919a4" providerId="LiveId" clId="{4DB6C473-8E57-A543-81F7-48BE109E8C13}" dt="2023-02-21T14:48:56.090" v="5307" actId="478"/>
+          <ac:spMkLst>
+            <pc:docMk/>
+            <pc:sldMk cId="1858913004" sldId="2719"/>
+            <ac:spMk id="17" creationId="{9E05FFCA-3371-AF5C-381D-71D984055F5A}"/>
+          </ac:spMkLst>
+        </pc:spChg>
+        <pc:picChg chg="del">
+          <ac:chgData name="Xin Luo" userId="82312ee5779919a4" providerId="LiveId" clId="{4DB6C473-8E57-A543-81F7-48BE109E8C13}" dt="2023-02-21T14:47:16.549" v="5154" actId="478"/>
+          <ac:picMkLst>
+            <pc:docMk/>
+            <pc:sldMk cId="1858913004" sldId="2719"/>
+            <ac:picMk id="3074" creationId="{3E8CF22C-6E5D-0AAE-1F79-795E8B77EEF7}"/>
+          </ac:picMkLst>
+        </pc:picChg>
+      </pc:sldChg>
+      <pc:sldChg chg="addSp delSp modSp add mod ord">
+        <pc:chgData name="Xin Luo" userId="82312ee5779919a4" providerId="LiveId" clId="{4DB6C473-8E57-A543-81F7-48BE109E8C13}" dt="2023-02-21T15:06:45.211" v="5600" actId="20578"/>
+        <pc:sldMkLst>
+          <pc:docMk/>
+          <pc:sldMk cId="3480831675" sldId="2720"/>
+        </pc:sldMkLst>
+        <pc:spChg chg="mod">
+          <ac:chgData name="Xin Luo" userId="82312ee5779919a4" providerId="LiveId" clId="{4DB6C473-8E57-A543-81F7-48BE109E8C13}" dt="2023-02-21T14:58:21.259" v="5529" actId="1035"/>
+          <ac:spMkLst>
+            <pc:docMk/>
+            <pc:sldMk cId="3480831675" sldId="2720"/>
+            <ac:spMk id="2" creationId="{631AADB6-C88A-D817-4683-FC087E4E240F}"/>
+          </ac:spMkLst>
+        </pc:spChg>
+        <pc:spChg chg="add mod">
+          <ac:chgData name="Xin Luo" userId="82312ee5779919a4" providerId="LiveId" clId="{4DB6C473-8E57-A543-81F7-48BE109E8C13}" dt="2023-02-21T14:58:48.813" v="5569" actId="404"/>
+          <ac:spMkLst>
+            <pc:docMk/>
+            <pc:sldMk cId="3480831675" sldId="2720"/>
+            <ac:spMk id="4" creationId="{58EE51E5-8ACA-984C-6E8D-F8AA658223AD}"/>
+          </ac:spMkLst>
+        </pc:spChg>
+        <pc:spChg chg="add mod">
+          <ac:chgData name="Xin Luo" userId="82312ee5779919a4" providerId="LiveId" clId="{4DB6C473-8E57-A543-81F7-48BE109E8C13}" dt="2023-02-21T14:58:48.813" v="5569" actId="404"/>
+          <ac:spMkLst>
+            <pc:docMk/>
+            <pc:sldMk cId="3480831675" sldId="2720"/>
+            <ac:spMk id="5" creationId="{7F4897FB-F086-F339-A15F-A899143C7919}"/>
+          </ac:spMkLst>
+        </pc:spChg>
+        <pc:spChg chg="add mod">
+          <ac:chgData name="Xin Luo" userId="82312ee5779919a4" providerId="LiveId" clId="{4DB6C473-8E57-A543-81F7-48BE109E8C13}" dt="2023-02-21T15:06:20.559" v="5576" actId="962"/>
+          <ac:spMkLst>
+            <pc:docMk/>
+            <pc:sldMk cId="3480831675" sldId="2720"/>
+            <ac:spMk id="6" creationId="{7ED1482E-3610-E252-0E80-41B202D30E30}"/>
+          </ac:spMkLst>
+        </pc:spChg>
+        <pc:spChg chg="del">
+          <ac:chgData name="Xin Luo" userId="82312ee5779919a4" providerId="LiveId" clId="{4DB6C473-8E57-A543-81F7-48BE109E8C13}" dt="2023-02-21T14:51:13.253" v="5388" actId="478"/>
+          <ac:spMkLst>
+            <pc:docMk/>
+            <pc:sldMk cId="3480831675" sldId="2720"/>
+            <ac:spMk id="17" creationId="{9E05FFCA-3371-AF5C-381D-71D984055F5A}"/>
+          </ac:spMkLst>
+        </pc:spChg>
+        <pc:spChg chg="del">
+          <ac:chgData name="Xin Luo" userId="82312ee5779919a4" providerId="LiveId" clId="{4DB6C473-8E57-A543-81F7-48BE109E8C13}" dt="2023-02-21T14:51:18.075" v="5389" actId="478"/>
+          <ac:spMkLst>
+            <pc:docMk/>
+            <pc:sldMk cId="3480831675" sldId="2720"/>
+            <ac:spMk id="18" creationId="{9D310AF3-A081-4032-01C0-C288D4F7AC53}"/>
+          </ac:spMkLst>
+        </pc:spChg>
+        <pc:picChg chg="add del mod">
+          <ac:chgData name="Xin Luo" userId="82312ee5779919a4" providerId="LiveId" clId="{4DB6C473-8E57-A543-81F7-48BE109E8C13}" dt="2023-02-21T14:53:26.825" v="5442" actId="478"/>
+          <ac:picMkLst>
+            <pc:docMk/>
+            <pc:sldMk cId="3480831675" sldId="2720"/>
+            <ac:picMk id="5122" creationId="{379580DC-45F0-D6EF-6EA0-1FB906F02465}"/>
+          </ac:picMkLst>
+        </pc:picChg>
+        <pc:picChg chg="add mod">
+          <ac:chgData name="Xin Luo" userId="82312ee5779919a4" providerId="LiveId" clId="{4DB6C473-8E57-A543-81F7-48BE109E8C13}" dt="2023-02-21T14:58:17.635" v="5525" actId="1035"/>
+          <ac:picMkLst>
+            <pc:docMk/>
+            <pc:sldMk cId="3480831675" sldId="2720"/>
+            <ac:picMk id="5124" creationId="{D17BE6F3-1008-2FC6-54D2-736C673B73E8}"/>
+          </ac:picMkLst>
+        </pc:picChg>
+        <pc:picChg chg="add mod">
+          <ac:chgData name="Xin Luo" userId="82312ee5779919a4" providerId="LiveId" clId="{4DB6C473-8E57-A543-81F7-48BE109E8C13}" dt="2023-02-21T14:58:17.635" v="5525" actId="1035"/>
+          <ac:picMkLst>
+            <pc:docMk/>
+            <pc:sldMk cId="3480831675" sldId="2720"/>
+            <ac:picMk id="5126" creationId="{EBB0C876-4E86-C2ED-5EE6-3B2BD26768B9}"/>
+          </ac:picMkLst>
+        </pc:picChg>
+        <pc:picChg chg="add mod">
+          <ac:chgData name="Xin Luo" userId="82312ee5779919a4" providerId="LiveId" clId="{4DB6C473-8E57-A543-81F7-48BE109E8C13}" dt="2023-02-21T14:58:48.813" v="5569" actId="404"/>
+          <ac:picMkLst>
+            <pc:docMk/>
+            <pc:sldMk cId="3480831675" sldId="2720"/>
+            <ac:picMk id="5128" creationId="{59C29F54-F731-6EBD-ECA9-847BE3563121}"/>
+          </ac:picMkLst>
+        </pc:picChg>
+      </pc:sldChg>
+      <pc:sldChg chg="add del">
+        <pc:chgData name="Xin Luo" userId="82312ee5779919a4" providerId="LiveId" clId="{4DB6C473-8E57-A543-81F7-48BE109E8C13}" dt="2023-02-21T14:55:30.326" v="5468" actId="2696"/>
+        <pc:sldMkLst>
+          <pc:docMk/>
+          <pc:sldMk cId="120373349" sldId="2721"/>
+        </pc:sldMkLst>
+      </pc:sldChg>
+      <pc:sldChg chg="addSp delSp modSp add mod ord">
+        <pc:chgData name="Xin Luo" userId="82312ee5779919a4" providerId="LiveId" clId="{4DB6C473-8E57-A543-81F7-48BE109E8C13}" dt="2023-02-21T15:06:40.684" v="5599" actId="20578"/>
+        <pc:sldMkLst>
+          <pc:docMk/>
+          <pc:sldMk cId="1410676903" sldId="2721"/>
+        </pc:sldMkLst>
+        <pc:spChg chg="del">
+          <ac:chgData name="Xin Luo" userId="82312ee5779919a4" providerId="LiveId" clId="{4DB6C473-8E57-A543-81F7-48BE109E8C13}" dt="2023-02-21T14:59:05.282" v="5571" actId="478"/>
+          <ac:spMkLst>
+            <pc:docMk/>
+            <pc:sldMk cId="1410676903" sldId="2721"/>
+            <ac:spMk id="4" creationId="{58EE51E5-8ACA-984C-6E8D-F8AA658223AD}"/>
+          </ac:spMkLst>
+        </pc:spChg>
+        <pc:spChg chg="del">
+          <ac:chgData name="Xin Luo" userId="82312ee5779919a4" providerId="LiveId" clId="{4DB6C473-8E57-A543-81F7-48BE109E8C13}" dt="2023-02-21T14:59:05.282" v="5571" actId="478"/>
+          <ac:spMkLst>
+            <pc:docMk/>
+            <pc:sldMk cId="1410676903" sldId="2721"/>
+            <ac:spMk id="5" creationId="{7F4897FB-F086-F339-A15F-A899143C7919}"/>
+          </ac:spMkLst>
+        </pc:spChg>
+        <pc:spChg chg="del">
+          <ac:chgData name="Xin Luo" userId="82312ee5779919a4" providerId="LiveId" clId="{4DB6C473-8E57-A543-81F7-48BE109E8C13}" dt="2023-02-21T14:59:05.282" v="5571" actId="478"/>
+          <ac:spMkLst>
+            <pc:docMk/>
+            <pc:sldMk cId="1410676903" sldId="2721"/>
+            <ac:spMk id="6" creationId="{7ED1482E-3610-E252-0E80-41B202D30E30}"/>
+          </ac:spMkLst>
+        </pc:spChg>
+        <pc:spChg chg="add mod">
+          <ac:chgData name="Xin Luo" userId="82312ee5779919a4" providerId="LiveId" clId="{4DB6C473-8E57-A543-81F7-48BE109E8C13}" dt="2023-02-21T15:06:36.607" v="5598" actId="1076"/>
+          <ac:spMkLst>
+            <pc:docMk/>
+            <pc:sldMk cId="1410676903" sldId="2721"/>
+            <ac:spMk id="9" creationId="{D5E43916-6543-2664-EE40-07ABFFB01F26}"/>
+          </ac:spMkLst>
+        </pc:spChg>
+        <pc:picChg chg="add mod">
+          <ac:chgData name="Xin Luo" userId="82312ee5779919a4" providerId="LiveId" clId="{4DB6C473-8E57-A543-81F7-48BE109E8C13}" dt="2023-02-21T15:06:20.558" v="5575" actId="27614"/>
+          <ac:picMkLst>
+            <pc:docMk/>
+            <pc:sldMk cId="1410676903" sldId="2721"/>
+            <ac:picMk id="8" creationId="{BA45F6EA-D51F-F9F8-F33E-5E3217612D76}"/>
+          </ac:picMkLst>
+        </pc:picChg>
+        <pc:picChg chg="del">
+          <ac:chgData name="Xin Luo" userId="82312ee5779919a4" providerId="LiveId" clId="{4DB6C473-8E57-A543-81F7-48BE109E8C13}" dt="2023-02-21T14:59:05.282" v="5571" actId="478"/>
+          <ac:picMkLst>
+            <pc:docMk/>
+            <pc:sldMk cId="1410676903" sldId="2721"/>
+            <ac:picMk id="5124" creationId="{D17BE6F3-1008-2FC6-54D2-736C673B73E8}"/>
+          </ac:picMkLst>
+        </pc:picChg>
+        <pc:picChg chg="del">
+          <ac:chgData name="Xin Luo" userId="82312ee5779919a4" providerId="LiveId" clId="{4DB6C473-8E57-A543-81F7-48BE109E8C13}" dt="2023-02-21T14:59:05.282" v="5571" actId="478"/>
+          <ac:picMkLst>
+            <pc:docMk/>
+            <pc:sldMk cId="1410676903" sldId="2721"/>
+            <ac:picMk id="5126" creationId="{EBB0C876-4E86-C2ED-5EE6-3B2BD26768B9}"/>
+          </ac:picMkLst>
+        </pc:picChg>
+        <pc:picChg chg="del">
+          <ac:chgData name="Xin Luo" userId="82312ee5779919a4" providerId="LiveId" clId="{4DB6C473-8E57-A543-81F7-48BE109E8C13}" dt="2023-02-21T14:59:05.282" v="5571" actId="478"/>
+          <ac:picMkLst>
+            <pc:docMk/>
+            <pc:sldMk cId="1410676903" sldId="2721"/>
+            <ac:picMk id="5128" creationId="{59C29F54-F731-6EBD-ECA9-847BE3563121}"/>
+          </ac:picMkLst>
+        </pc:picChg>
+      </pc:sldChg>
+      <pc:sldMasterChg chg="del delSldLayout">
+        <pc:chgData name="Xin Luo" userId="82312ee5779919a4" providerId="LiveId" clId="{4DB6C473-8E57-A543-81F7-48BE109E8C13}" dt="2023-02-21T08:54:15.791" v="3593" actId="2696"/>
+        <pc:sldMasterMkLst>
+          <pc:docMk/>
+          <pc:sldMasterMk cId="1248561168" sldId="2147484998"/>
+        </pc:sldMasterMkLst>
+        <pc:sldLayoutChg chg="del">
+          <pc:chgData name="Xin Luo" userId="82312ee5779919a4" providerId="LiveId" clId="{4DB6C473-8E57-A543-81F7-48BE109E8C13}" dt="2023-02-21T08:54:15.772" v="3576" actId="2696"/>
+          <pc:sldLayoutMkLst>
+            <pc:docMk/>
+            <pc:sldMasterMk cId="1248561168" sldId="2147484998"/>
+            <pc:sldLayoutMk cId="2755518727" sldId="2147484999"/>
+          </pc:sldLayoutMkLst>
+        </pc:sldLayoutChg>
+        <pc:sldLayoutChg chg="del">
+          <pc:chgData name="Xin Luo" userId="82312ee5779919a4" providerId="LiveId" clId="{4DB6C473-8E57-A543-81F7-48BE109E8C13}" dt="2023-02-21T08:54:15.773" v="3577" actId="2696"/>
+          <pc:sldLayoutMkLst>
+            <pc:docMk/>
+            <pc:sldMasterMk cId="1248561168" sldId="2147484998"/>
+            <pc:sldLayoutMk cId="784447712" sldId="2147485000"/>
+          </pc:sldLayoutMkLst>
+        </pc:sldLayoutChg>
+        <pc:sldLayoutChg chg="del">
+          <pc:chgData name="Xin Luo" userId="82312ee5779919a4" providerId="LiveId" clId="{4DB6C473-8E57-A543-81F7-48BE109E8C13}" dt="2023-02-21T08:54:15.774" v="3578" actId="2696"/>
+          <pc:sldLayoutMkLst>
+            <pc:docMk/>
+            <pc:sldMasterMk cId="1248561168" sldId="2147484998"/>
+            <pc:sldLayoutMk cId="36404751" sldId="2147485001"/>
+          </pc:sldLayoutMkLst>
+        </pc:sldLayoutChg>
+        <pc:sldLayoutChg chg="del">
+          <pc:chgData name="Xin Luo" userId="82312ee5779919a4" providerId="LiveId" clId="{4DB6C473-8E57-A543-81F7-48BE109E8C13}" dt="2023-02-21T08:54:15.775" v="3579" actId="2696"/>
+          <pc:sldLayoutMkLst>
+            <pc:docMk/>
+            <pc:sldMasterMk cId="1248561168" sldId="2147484998"/>
+            <pc:sldLayoutMk cId="2142531553" sldId="2147485002"/>
+          </pc:sldLayoutMkLst>
+        </pc:sldLayoutChg>
+        <pc:sldLayoutChg chg="del">
+          <pc:chgData name="Xin Luo" userId="82312ee5779919a4" providerId="LiveId" clId="{4DB6C473-8E57-A543-81F7-48BE109E8C13}" dt="2023-02-21T08:54:15.776" v="3580" actId="2696"/>
+          <pc:sldLayoutMkLst>
+            <pc:docMk/>
+            <pc:sldMasterMk cId="1248561168" sldId="2147484998"/>
+            <pc:sldLayoutMk cId="646270699" sldId="2147485003"/>
+          </pc:sldLayoutMkLst>
+        </pc:sldLayoutChg>
+        <pc:sldLayoutChg chg="del">
+          <pc:chgData name="Xin Luo" userId="82312ee5779919a4" providerId="LiveId" clId="{4DB6C473-8E57-A543-81F7-48BE109E8C13}" dt="2023-02-21T08:54:15.777" v="3581" actId="2696"/>
+          <pc:sldLayoutMkLst>
+            <pc:docMk/>
+            <pc:sldMasterMk cId="1248561168" sldId="2147484998"/>
+            <pc:sldLayoutMk cId="1316154404" sldId="2147485004"/>
+          </pc:sldLayoutMkLst>
+        </pc:sldLayoutChg>
+        <pc:sldLayoutChg chg="del">
+          <pc:chgData name="Xin Luo" userId="82312ee5779919a4" providerId="LiveId" clId="{4DB6C473-8E57-A543-81F7-48BE109E8C13}" dt="2023-02-21T08:54:15.778" v="3582" actId="2696"/>
+          <pc:sldLayoutMkLst>
+            <pc:docMk/>
+            <pc:sldMasterMk cId="1248561168" sldId="2147484998"/>
+            <pc:sldLayoutMk cId="275448905" sldId="2147485005"/>
+          </pc:sldLayoutMkLst>
+        </pc:sldLayoutChg>
+        <pc:sldLayoutChg chg="del">
+          <pc:chgData name="Xin Luo" userId="82312ee5779919a4" providerId="LiveId" clId="{4DB6C473-8E57-A543-81F7-48BE109E8C13}" dt="2023-02-21T08:54:15.779" v="3583" actId="2696"/>
+          <pc:sldLayoutMkLst>
+            <pc:docMk/>
+            <pc:sldMasterMk cId="1248561168" sldId="2147484998"/>
+            <pc:sldLayoutMk cId="3173493555" sldId="2147485006"/>
+          </pc:sldLayoutMkLst>
+        </pc:sldLayoutChg>
+        <pc:sldLayoutChg chg="del">
+          <pc:chgData name="Xin Luo" userId="82312ee5779919a4" providerId="LiveId" clId="{4DB6C473-8E57-A543-81F7-48BE109E8C13}" dt="2023-02-21T08:54:15.780" v="3584" actId="2696"/>
+          <pc:sldLayoutMkLst>
+            <pc:docMk/>
+            <pc:sldMasterMk cId="1248561168" sldId="2147484998"/>
+            <pc:sldLayoutMk cId="2494408642" sldId="2147485007"/>
+          </pc:sldLayoutMkLst>
+        </pc:sldLayoutChg>
+        <pc:sldLayoutChg chg="del">
+          <pc:chgData name="Xin Luo" userId="82312ee5779919a4" providerId="LiveId" clId="{4DB6C473-8E57-A543-81F7-48BE109E8C13}" dt="2023-02-21T08:54:15.781" v="3585" actId="2696"/>
+          <pc:sldLayoutMkLst>
+            <pc:docMk/>
+            <pc:sldMasterMk cId="1248561168" sldId="2147484998"/>
+            <pc:sldLayoutMk cId="2144339703" sldId="2147485008"/>
+          </pc:sldLayoutMkLst>
+        </pc:sldLayoutChg>
+        <pc:sldLayoutChg chg="del">
+          <pc:chgData name="Xin Luo" userId="82312ee5779919a4" providerId="LiveId" clId="{4DB6C473-8E57-A543-81F7-48BE109E8C13}" dt="2023-02-21T08:54:15.781" v="3586" actId="2696"/>
+          <pc:sldLayoutMkLst>
+            <pc:docMk/>
+            <pc:sldMasterMk cId="1248561168" sldId="2147484998"/>
+            <pc:sldLayoutMk cId="3933479768" sldId="2147485009"/>
+          </pc:sldLayoutMkLst>
+        </pc:sldLayoutChg>
+        <pc:sldLayoutChg chg="del">
+          <pc:chgData name="Xin Luo" userId="82312ee5779919a4" providerId="LiveId" clId="{4DB6C473-8E57-A543-81F7-48BE109E8C13}" dt="2023-02-21T08:54:15.782" v="3587" actId="2696"/>
+          <pc:sldLayoutMkLst>
+            <pc:docMk/>
+            <pc:sldMasterMk cId="1248561168" sldId="2147484998"/>
+            <pc:sldLayoutMk cId="2569911404" sldId="2147485010"/>
+          </pc:sldLayoutMkLst>
+        </pc:sldLayoutChg>
+        <pc:sldLayoutChg chg="del">
+          <pc:chgData name="Xin Luo" userId="82312ee5779919a4" providerId="LiveId" clId="{4DB6C473-8E57-A543-81F7-48BE109E8C13}" dt="2023-02-21T08:54:15.783" v="3588" actId="2696"/>
+          <pc:sldLayoutMkLst>
+            <pc:docMk/>
+            <pc:sldMasterMk cId="1248561168" sldId="2147484998"/>
+            <pc:sldLayoutMk cId="487309151" sldId="2147485011"/>
+          </pc:sldLayoutMkLst>
+        </pc:sldLayoutChg>
+        <pc:sldLayoutChg chg="del">
+          <pc:chgData name="Xin Luo" userId="82312ee5779919a4" providerId="LiveId" clId="{4DB6C473-8E57-A543-81F7-48BE109E8C13}" dt="2023-02-21T08:54:15.784" v="3589" actId="2696"/>
+          <pc:sldLayoutMkLst>
+            <pc:docMk/>
+            <pc:sldMasterMk cId="1248561168" sldId="2147484998"/>
+            <pc:sldLayoutMk cId="940838525" sldId="2147485012"/>
+          </pc:sldLayoutMkLst>
+        </pc:sldLayoutChg>
+        <pc:sldLayoutChg chg="del">
+          <pc:chgData name="Xin Luo" userId="82312ee5779919a4" providerId="LiveId" clId="{4DB6C473-8E57-A543-81F7-48BE109E8C13}" dt="2023-02-21T08:54:15.785" v="3590" actId="2696"/>
+          <pc:sldLayoutMkLst>
+            <pc:docMk/>
+            <pc:sldMasterMk cId="1248561168" sldId="2147484998"/>
+            <pc:sldLayoutMk cId="858249230" sldId="2147485013"/>
+          </pc:sldLayoutMkLst>
+        </pc:sldLayoutChg>
+        <pc:sldLayoutChg chg="del">
+          <pc:chgData name="Xin Luo" userId="82312ee5779919a4" providerId="LiveId" clId="{4DB6C473-8E57-A543-81F7-48BE109E8C13}" dt="2023-02-21T08:54:15.786" v="3591" actId="2696"/>
+          <pc:sldLayoutMkLst>
+            <pc:docMk/>
+            <pc:sldMasterMk cId="1248561168" sldId="2147484998"/>
+            <pc:sldLayoutMk cId="1094809115" sldId="2147485014"/>
+          </pc:sldLayoutMkLst>
+        </pc:sldLayoutChg>
+        <pc:sldLayoutChg chg="del">
+          <pc:chgData name="Xin Luo" userId="82312ee5779919a4" providerId="LiveId" clId="{4DB6C473-8E57-A543-81F7-48BE109E8C13}" dt="2023-02-21T08:54:15.787" v="3592" actId="2696"/>
+          <pc:sldLayoutMkLst>
+            <pc:docMk/>
+            <pc:sldMasterMk cId="1248561168" sldId="2147484998"/>
+            <pc:sldLayoutMk cId="2452001345" sldId="2147485015"/>
+          </pc:sldLayoutMkLst>
+        </pc:sldLayoutChg>
+      </pc:sldMasterChg>
     </pc:docChg>
   </pc:docChgLst>
 </pc:chgInfo>
@@ -12651,8 +12651,8 @@
             </p:nvSpPr>
             <p:spPr>
               <a:xfrm>
-                <a:off x="457200" y="1745741"/>
-                <a:ext cx="8214852" cy="4063741"/>
+                <a:off x="201376" y="1949692"/>
+                <a:ext cx="5042419" cy="4354975"/>
               </a:xfrm>
               <a:prstGeom prst="rect">
                 <a:avLst/>
@@ -12665,13 +12665,54 @@
               </a:bodyPr>
               <a:lstStyle/>
               <a:p>
-                <a:pPr indent="266700" algn="just">
+                <a:pPr algn="l">
                   <a:lnSpc>
                     <a:spcPct val="200000"/>
                   </a:lnSpc>
-                  <a:spcBef>
-                    <a:spcPts val="1200"/>
-                  </a:spcBef>
+                </a:pPr>
+                <a:r>
+                  <a:rPr lang="zh-CN" altLang="en-US" sz="1800" kern="0" dirty="0">
+                    <a:solidFill>
+                      <a:srgbClr val="000000"/>
+                    </a:solidFill>
+                    <a:latin typeface="Cambria Math" panose="02040503050406030204" pitchFamily="18" charset="0"/>
+                    <a:ea typeface="+mn-ea"/>
+                  </a:rPr>
+                  <a:t>      </a:t>
+                </a:r>
+                <a:r>
+                  <a:rPr lang="en-CN" sz="1800" kern="0" dirty="0">
+                    <a:solidFill>
+                      <a:srgbClr val="000000"/>
+                    </a:solidFill>
+                    <a:latin typeface="Cambria Math" panose="02040503050406030204" pitchFamily="18" charset="0"/>
+                    <a:ea typeface="+mn-ea"/>
+                  </a:rPr>
+                  <a:t>地面高计算公式</a:t>
+                </a:r>
+                <a:r>
+                  <a:rPr lang="zh-CN" altLang="en-US" sz="1800" kern="0" dirty="0">
+                    <a:solidFill>
+                      <a:srgbClr val="000000"/>
+                    </a:solidFill>
+                    <a:latin typeface="Cambria Math" panose="02040503050406030204" pitchFamily="18" charset="0"/>
+                    <a:ea typeface="+mn-ea"/>
+                  </a:rPr>
+                  <a:t>：</a:t>
+                </a:r>
+                <a:endParaRPr lang="en-CN" sz="1800" kern="0" dirty="0">
+                  <a:solidFill>
+                    <a:srgbClr val="000000"/>
+                  </a:solidFill>
+                  <a:latin typeface="Cambria Math" panose="02040503050406030204" pitchFamily="18" charset="0"/>
+                  <a:ea typeface="+mn-ea"/>
+                </a:endParaRPr>
+              </a:p>
+              <a:p>
+                <a:pPr>
+                  <a:lnSpc>
+                    <a:spcPct val="200000"/>
+                  </a:lnSpc>
                 </a:pPr>
                 <a14:m>
                   <m:oMathPara xmlns:m="http://schemas.openxmlformats.org/officeDocument/2006/math">
@@ -12679,160 +12720,168 @@
                       <m:jc m:val="centerGroup"/>
                     </m:oMathParaPr>
                     <m:oMath xmlns:m="http://schemas.openxmlformats.org/officeDocument/2006/math">
+                      <m:sSub>
+                        <m:sSubPr>
+                          <m:ctrlPr>
+                            <a:rPr lang="en-CN" sz="1800" kern="0">
+                              <a:solidFill>
+                                <a:srgbClr val="000000"/>
+                              </a:solidFill>
+                              <a:latin typeface="Cambria Math" panose="02040503050406030204" pitchFamily="18" charset="0"/>
+                              <a:ea typeface="+mn-ea"/>
+                            </a:rPr>
+                          </m:ctrlPr>
+                        </m:sSubPr>
+                        <m:e>
+                          <m:r>
+                            <a:rPr lang="en-US" sz="1800" kern="0">
+                              <a:solidFill>
+                                <a:srgbClr val="000000"/>
+                              </a:solidFill>
+                              <a:latin typeface="Cambria Math" panose="02040503050406030204" pitchFamily="18" charset="0"/>
+                              <a:ea typeface="+mn-ea"/>
+                            </a:rPr>
+                            <m:t>𝐻</m:t>
+                          </m:r>
+                        </m:e>
+                        <m:sub>
+                          <m:r>
+                            <a:rPr lang="en-US" sz="1800" kern="0">
+                              <a:solidFill>
+                                <a:srgbClr val="000000"/>
+                              </a:solidFill>
+                              <a:latin typeface="Cambria Math" panose="02040503050406030204" pitchFamily="18" charset="0"/>
+                              <a:ea typeface="+mn-ea"/>
+                            </a:rPr>
+                            <m:t>𝑙𝑎𝑛𝑑</m:t>
+                          </m:r>
+                        </m:sub>
+                      </m:sSub>
                       <m:r>
-                        <a:rPr lang="en-US" altLang="zh-CN" sz="2000" b="1" i="0" kern="0" smtClean="0">
+                        <a:rPr lang="en-US" sz="1800" kern="0">
                           <a:solidFill>
                             <a:srgbClr val="000000"/>
                           </a:solidFill>
                           <a:latin typeface="Cambria Math" panose="02040503050406030204" pitchFamily="18" charset="0"/>
                           <a:ea typeface="+mn-ea"/>
                         </a:rPr>
-                        <m:t>𝐄𝐥𝐞𝐯𝐚𝐭𝐢𝐨𝐧</m:t>
+                        <m:t>=</m:t>
                       </m:r>
+                      <m:sSub>
+                        <m:sSubPr>
+                          <m:ctrlPr>
+                            <a:rPr lang="en-US" sz="1800" kern="0">
+                              <a:solidFill>
+                                <a:srgbClr val="000000"/>
+                              </a:solidFill>
+                              <a:latin typeface="Cambria Math" panose="02040503050406030204" pitchFamily="18" charset="0"/>
+                              <a:ea typeface="+mn-ea"/>
+                            </a:rPr>
+                          </m:ctrlPr>
+                        </m:sSubPr>
+                        <m:e>
+                          <m:r>
+                            <m:rPr>
+                              <m:sty m:val="p"/>
+                            </m:rPr>
+                            <a:rPr lang="en-US" sz="1800" kern="0">
+                              <a:solidFill>
+                                <a:srgbClr val="000000"/>
+                              </a:solidFill>
+                              <a:latin typeface="Cambria Math" panose="02040503050406030204" pitchFamily="18" charset="0"/>
+                              <a:ea typeface="+mn-ea"/>
+                            </a:rPr>
+                            <m:t>H</m:t>
+                          </m:r>
+                        </m:e>
+                        <m:sub>
+                          <m:r>
+                            <a:rPr lang="en-US" sz="1800" kern="0">
+                              <a:solidFill>
+                                <a:srgbClr val="000000"/>
+                              </a:solidFill>
+                              <a:latin typeface="Cambria Math" panose="02040503050406030204" pitchFamily="18" charset="0"/>
+                              <a:ea typeface="+mn-ea"/>
+                            </a:rPr>
+                            <m:t>𝑠𝑎𝑡</m:t>
+                          </m:r>
+                        </m:sub>
+                      </m:sSub>
                       <m:r>
-                        <a:rPr lang="en-US" altLang="zh-CN" sz="2000" b="1" i="0" kern="0" smtClean="0">
+                        <a:rPr lang="en-US" sz="1800" kern="0">
                           <a:solidFill>
                             <a:srgbClr val="000000"/>
                           </a:solidFill>
                           <a:latin typeface="Cambria Math" panose="02040503050406030204" pitchFamily="18" charset="0"/>
                           <a:ea typeface="+mn-ea"/>
                         </a:rPr>
-                        <m:t> =</m:t>
+                        <m:t>−</m:t>
                       </m:r>
                       <m:r>
-                        <a:rPr lang="en-US" altLang="zh-CN" sz="2000" b="1" i="0" kern="0" smtClean="0">
+                        <a:rPr lang="en-US" sz="1800" kern="0">
                           <a:solidFill>
                             <a:srgbClr val="000000"/>
                           </a:solidFill>
                           <a:latin typeface="Cambria Math" panose="02040503050406030204" pitchFamily="18" charset="0"/>
                           <a:ea typeface="+mn-ea"/>
                         </a:rPr>
-                        <m:t>𝐒𝐚𝐭𝐞𝐥𝐥𝐢𝐭𝐞</m:t>
+                        <m:t>𝐷</m:t>
                       </m:r>
                       <m:r>
-                        <a:rPr lang="en-US" altLang="zh-CN" sz="2000" b="1" i="0" kern="0" smtClean="0">
+                        <a:rPr lang="en-US" altLang="zh-CN" sz="1800" kern="0">
                           <a:solidFill>
                             <a:srgbClr val="000000"/>
                           </a:solidFill>
                           <a:latin typeface="Cambria Math" panose="02040503050406030204" pitchFamily="18" charset="0"/>
                           <a:ea typeface="+mn-ea"/>
                         </a:rPr>
-                        <m:t> </m:t>
+                        <m:t>+</m:t>
                       </m:r>
-                      <m:r>
-                        <a:rPr lang="en-US" altLang="zh-CN" sz="2000" b="1" i="0" kern="0" smtClean="0">
-                          <a:solidFill>
-                            <a:srgbClr val="000000"/>
-                          </a:solidFill>
-                          <a:latin typeface="Cambria Math" panose="02040503050406030204" pitchFamily="18" charset="0"/>
-                          <a:ea typeface="+mn-ea"/>
-                        </a:rPr>
-                        <m:t>𝐀𝐥𝐭𝐢𝐭𝐮𝐝𝐞</m:t>
-                      </m:r>
-                      <m:r>
-                        <a:rPr lang="en-US" altLang="zh-CN" sz="2000" b="1" i="0" kern="0" smtClean="0">
-                          <a:solidFill>
-                            <a:srgbClr val="000000"/>
-                          </a:solidFill>
-                          <a:latin typeface="Cambria Math" panose="02040503050406030204" pitchFamily="18" charset="0"/>
-                          <a:ea typeface="+mn-ea"/>
-                        </a:rPr>
-                        <m:t> −</m:t>
-                      </m:r>
-                      <m:d>
-                        <m:dPr>
+                      <m:sSub>
+                        <m:sSubPr>
                           <m:ctrlPr>
-                            <a:rPr lang="en-US" altLang="zh-CN" sz="2000" b="1" i="1" kern="0">
+                            <a:rPr lang="en-US" altLang="zh-CN" sz="1800" kern="0">
                               <a:solidFill>
                                 <a:srgbClr val="000000"/>
                               </a:solidFill>
                               <a:latin typeface="Cambria Math" panose="02040503050406030204" pitchFamily="18" charset="0"/>
+                              <a:ea typeface="+mn-ea"/>
                             </a:rPr>
                           </m:ctrlPr>
-                        </m:dPr>
+                        </m:sSubPr>
                         <m:e>
                           <m:r>
-                            <a:rPr lang="en-US" altLang="zh-CN" sz="2000" b="1" i="1" kern="0">
+                            <a:rPr lang="en-US" altLang="zh-CN" sz="1800" kern="0">
                               <a:solidFill>
                                 <a:srgbClr val="000000"/>
                               </a:solidFill>
                               <a:latin typeface="Cambria Math" panose="02040503050406030204" pitchFamily="18" charset="0"/>
+                              <a:ea typeface="+mn-ea"/>
                             </a:rPr>
-                            <m:t>𝐀𝐥𝐭𝐢𝐦𝐞𝐭𝐞𝐫</m:t>
+                            <m:t>𝐷</m:t>
                           </m:r>
+                        </m:e>
+                        <m:sub>
                           <m:r>
-                            <a:rPr lang="en-US" altLang="zh-CN" sz="2000" b="1" kern="0">
+                            <a:rPr lang="en-US" altLang="zh-CN" sz="1800" kern="0">
                               <a:solidFill>
                                 <a:srgbClr val="000000"/>
                               </a:solidFill>
                               <a:latin typeface="Cambria Math" panose="02040503050406030204" pitchFamily="18" charset="0"/>
+                              <a:ea typeface="+mn-ea"/>
                             </a:rPr>
-                            <m:t> </m:t>
+                            <m:t>𝑐𝑜𝑟</m:t>
                           </m:r>
-                          <m:r>
-                            <a:rPr lang="en-US" altLang="zh-CN" sz="2000" b="1" i="1" kern="0">
-                              <a:solidFill>
-                                <a:srgbClr val="000000"/>
-                              </a:solidFill>
-                              <a:latin typeface="Cambria Math" panose="02040503050406030204" pitchFamily="18" charset="0"/>
-                            </a:rPr>
-                            <m:t>𝐫𝐚𝐧𝐠𝐞</m:t>
-                          </m:r>
-                          <m:r>
-                            <a:rPr lang="en-US" altLang="zh-CN" sz="2000" b="1" kern="0">
-                              <a:solidFill>
-                                <a:srgbClr val="000000"/>
-                              </a:solidFill>
-                              <a:latin typeface="Cambria Math" panose="02040503050406030204" pitchFamily="18" charset="0"/>
-                            </a:rPr>
-                            <m:t>+</m:t>
-                          </m:r>
-                          <m:r>
-                            <a:rPr lang="en-US" altLang="zh-CN" sz="2000" b="1" i="1" kern="0">
-                              <a:solidFill>
-                                <a:srgbClr val="000000"/>
-                              </a:solidFill>
-                              <a:latin typeface="Cambria Math" panose="02040503050406030204" pitchFamily="18" charset="0"/>
-                            </a:rPr>
-                            <m:t>𝑮</m:t>
-                          </m:r>
-                          <m:r>
-                            <a:rPr lang="en-US" altLang="zh-CN" sz="2000" b="1" i="1" kern="0">
-                              <a:solidFill>
-                                <a:srgbClr val="000000"/>
-                              </a:solidFill>
-                              <a:latin typeface="Cambria Math" panose="02040503050406030204" pitchFamily="18" charset="0"/>
-                            </a:rPr>
-                            <m:t>𝐞𝐨𝐩𝐡𝐲𝐬𝐢𝐜𝐚𝐥</m:t>
-                          </m:r>
-                          <m:r>
-                            <a:rPr lang="en-US" altLang="zh-CN" sz="2000" b="1" kern="0">
-                              <a:solidFill>
-                                <a:srgbClr val="000000"/>
-                              </a:solidFill>
-                              <a:latin typeface="Cambria Math" panose="02040503050406030204" pitchFamily="18" charset="0"/>
-                            </a:rPr>
-                            <m:t> </m:t>
-                          </m:r>
-                          <m:r>
-                            <a:rPr lang="en-US" altLang="zh-CN" sz="2000" b="1" i="1" kern="0">
-                              <a:solidFill>
-                                <a:srgbClr val="000000"/>
-                              </a:solidFill>
-                              <a:latin typeface="Cambria Math" panose="02040503050406030204" pitchFamily="18" charset="0"/>
-                            </a:rPr>
-                            <m:t>𝒄𝒐𝒓𝒓𝒆𝒄𝒕𝒊𝒐𝒏</m:t>
-                          </m:r>
-                        </m:e>
-                      </m:d>
+                        </m:sub>
+                      </m:sSub>
                     </m:oMath>
                   </m:oMathPara>
                 </a14:m>
-                <a:endParaRPr lang="en-US" altLang="zh-CN" sz="1800" b="1" kern="0" dirty="0">
+                <a:endParaRPr lang="en-CN" sz="1800" kern="0" dirty="0">
                   <a:solidFill>
                     <a:srgbClr val="000000"/>
                   </a:solidFill>
-                  <a:latin typeface="+mn-ea"/>
+                  <a:latin typeface="Cambria Math" panose="02040503050406030204" pitchFamily="18" charset="0"/>
                   <a:ea typeface="+mn-ea"/>
                 </a:endParaRPr>
               </a:p>
@@ -12857,21 +12906,48 @@
                 </a:r>
                 <a14:m>
                   <m:oMath xmlns:m="http://schemas.openxmlformats.org/officeDocument/2006/math">
+                    <m:sSub>
+                      <m:sSubPr>
+                        <m:ctrlPr>
+                          <a:rPr lang="en-US" sz="1800" kern="0">
+                            <a:solidFill>
+                              <a:srgbClr val="000000"/>
+                            </a:solidFill>
+                            <a:latin typeface="Cambria Math" panose="02040503050406030204" pitchFamily="18" charset="0"/>
+                            <a:ea typeface="+mn-ea"/>
+                          </a:rPr>
+                        </m:ctrlPr>
+                      </m:sSubPr>
+                      <m:e>
+                        <m:r>
+                          <m:rPr>
+                            <m:sty m:val="p"/>
+                          </m:rPr>
+                          <a:rPr lang="en-US" sz="1800" kern="0">
+                            <a:solidFill>
+                              <a:srgbClr val="000000"/>
+                            </a:solidFill>
+                            <a:latin typeface="Cambria Math" panose="02040503050406030204" pitchFamily="18" charset="0"/>
+                            <a:ea typeface="+mn-ea"/>
+                          </a:rPr>
+                          <m:t>H</m:t>
+                        </m:r>
+                      </m:e>
+                      <m:sub>
+                        <m:r>
+                          <a:rPr lang="en-US" sz="1800" kern="0">
+                            <a:solidFill>
+                              <a:srgbClr val="000000"/>
+                            </a:solidFill>
+                            <a:latin typeface="Cambria Math" panose="02040503050406030204" pitchFamily="18" charset="0"/>
+                            <a:ea typeface="+mn-ea"/>
+                          </a:rPr>
+                          <m:t>𝑠𝑎𝑡</m:t>
+                        </m:r>
+                      </m:sub>
+                    </m:sSub>
                     <m:r>
-                      <m:rPr>
-                        <m:sty m:val="p"/>
-                      </m:rPr>
-                      <a:rPr lang="en-US" altLang="zh-CN" sz="1800" b="0" i="0" kern="0" smtClean="0">
-                        <a:solidFill>
-                          <a:srgbClr val="000000"/>
-                        </a:solidFill>
-                        <a:latin typeface="Cambria Math" panose="02040503050406030204" pitchFamily="18" charset="0"/>
-                        <a:ea typeface="+mn-ea"/>
-                      </a:rPr>
-                      <m:t>Satellite</m:t>
-                    </m:r>
-                    <m:r>
-                      <a:rPr lang="en-US" altLang="zh-CN" sz="1800" b="0" i="0" kern="0" smtClean="0">
+                      <a:rPr lang="en-US" sz="1800" kern="0">
                         <a:solidFill>
                           <a:srgbClr val="000000"/>
                         </a:solidFill>
@@ -12879,19 +12955,6 @@
                         <a:ea typeface="+mn-ea"/>
                       </a:rPr>
                       <m:t> </m:t>
-                    </m:r>
-                    <m:r>
-                      <m:rPr>
-                        <m:sty m:val="p"/>
-                      </m:rPr>
-                      <a:rPr lang="en-US" altLang="zh-CN" sz="1800" b="0" i="0" kern="0" smtClean="0">
-                        <a:solidFill>
-                          <a:srgbClr val="000000"/>
-                        </a:solidFill>
-                        <a:latin typeface="Cambria Math" panose="02040503050406030204" pitchFamily="18" charset="0"/>
-                        <a:ea typeface="+mn-ea"/>
-                      </a:rPr>
-                      <m:t>Altitude</m:t>
                     </m:r>
                   </m:oMath>
                 </a14:m>
@@ -12908,37 +12971,14 @@
                 <a14:m>
                   <m:oMath xmlns:m="http://schemas.openxmlformats.org/officeDocument/2006/math">
                     <m:r>
-                      <m:rPr>
-                        <m:sty m:val="p"/>
-                      </m:rPr>
-                      <a:rPr lang="en-US" altLang="zh-CN" sz="1800" kern="0">
+                      <a:rPr lang="en-US" sz="1800" i="1">
                         <a:solidFill>
-                          <a:srgbClr val="000000"/>
+                          <a:schemeClr val="bg2"/>
                         </a:solidFill>
                         <a:latin typeface="Cambria Math" panose="02040503050406030204" pitchFamily="18" charset="0"/>
+                        <a:ea typeface="Cambria Math" panose="02040503050406030204" pitchFamily="18" charset="0"/>
                       </a:rPr>
-                      <m:t>Altimeter</m:t>
-                    </m:r>
-                    <m:r>
-                      <a:rPr lang="en-US" altLang="zh-CN" sz="1800" kern="0">
-                        <a:solidFill>
-                          <a:srgbClr val="000000"/>
-                        </a:solidFill>
-                        <a:latin typeface="Cambria Math" panose="02040503050406030204" pitchFamily="18" charset="0"/>
-                      </a:rPr>
-                      <m:t> </m:t>
-                    </m:r>
-                    <m:r>
-                      <m:rPr>
-                        <m:sty m:val="p"/>
-                      </m:rPr>
-                      <a:rPr lang="en-US" altLang="zh-CN" sz="1800" kern="0">
-                        <a:solidFill>
-                          <a:srgbClr val="000000"/>
-                        </a:solidFill>
-                        <a:latin typeface="Cambria Math" panose="02040503050406030204" pitchFamily="18" charset="0"/>
-                      </a:rPr>
-                      <m:t>range</m:t>
+                      <m:t>𝐷</m:t>
                     </m:r>
                   </m:oMath>
                 </a14:m>
@@ -12950,25 +12990,68 @@
                     <a:latin typeface="Cambria Math" panose="02040503050406030204" pitchFamily="18" charset="0"/>
                     <a:ea typeface="+mn-ea"/>
                   </a:rPr>
-                  <a:t>为卫星高度所测得。</a:t>
+                  <a:t>为卫星高度计所测距离，</a:t>
                 </a:r>
-                <a:endParaRPr lang="en-US" altLang="zh-CN" sz="1800" kern="0" dirty="0">
-                  <a:solidFill>
-                    <a:srgbClr val="000000"/>
-                  </a:solidFill>
-                  <a:latin typeface="Cambria Math" panose="02040503050406030204" pitchFamily="18" charset="0"/>
-                  <a:ea typeface="+mn-ea"/>
-                </a:endParaRPr>
-              </a:p>
-              <a:p>
-                <a:pPr indent="266700" algn="just">
-                  <a:lnSpc>
-                    <a:spcPct val="200000"/>
-                  </a:lnSpc>
-                  <a:spcBef>
-                    <a:spcPts val="1200"/>
-                  </a:spcBef>
-                </a:pPr>
+                <a:r>
+                  <a:rPr lang="en-US" altLang="zh-CN" sz="1800" dirty="0">
+                    <a:solidFill>
+                      <a:schemeClr val="bg2"/>
+                    </a:solidFill>
+                    <a:ea typeface="Cambria Math" panose="02040503050406030204" pitchFamily="18" charset="0"/>
+                  </a:rPr>
+                  <a:t> </a:t>
+                </a:r>
+                <a14:m>
+                  <m:oMath xmlns:m="http://schemas.openxmlformats.org/officeDocument/2006/math">
+                    <m:sSub>
+                      <m:sSubPr>
+                        <m:ctrlPr>
+                          <a:rPr lang="en-US" altLang="zh-CN" sz="1800" i="1">
+                            <a:solidFill>
+                              <a:schemeClr val="bg2"/>
+                            </a:solidFill>
+                            <a:latin typeface="Cambria Math" panose="02040503050406030204" pitchFamily="18" charset="0"/>
+                            <a:ea typeface="Cambria Math" panose="02040503050406030204" pitchFamily="18" charset="0"/>
+                          </a:rPr>
+                        </m:ctrlPr>
+                      </m:sSubPr>
+                      <m:e>
+                        <m:r>
+                          <a:rPr lang="en-US" altLang="zh-CN" sz="1800" i="1">
+                            <a:solidFill>
+                              <a:schemeClr val="bg2"/>
+                            </a:solidFill>
+                            <a:latin typeface="Cambria Math" panose="02040503050406030204" pitchFamily="18" charset="0"/>
+                            <a:ea typeface="Cambria Math" panose="02040503050406030204" pitchFamily="18" charset="0"/>
+                          </a:rPr>
+                          <m:t>𝐷</m:t>
+                        </m:r>
+                      </m:e>
+                      <m:sub>
+                        <m:r>
+                          <a:rPr lang="en-US" altLang="zh-CN" sz="1800" i="1">
+                            <a:solidFill>
+                              <a:schemeClr val="bg2"/>
+                            </a:solidFill>
+                            <a:latin typeface="Cambria Math" panose="02040503050406030204" pitchFamily="18" charset="0"/>
+                            <a:ea typeface="Cambria Math" panose="02040503050406030204" pitchFamily="18" charset="0"/>
+                          </a:rPr>
+                          <m:t>𝑐𝑜𝑟</m:t>
+                        </m:r>
+                      </m:sub>
+                    </m:sSub>
+                    <m:r>
+                      <a:rPr lang="en-US" altLang="zh-CN" sz="1800" i="1">
+                        <a:solidFill>
+                          <a:schemeClr val="bg2"/>
+                        </a:solidFill>
+                        <a:latin typeface="Cambria Math" panose="02040503050406030204" pitchFamily="18" charset="0"/>
+                        <a:ea typeface="Cambria Math" panose="02040503050406030204" pitchFamily="18" charset="0"/>
+                      </a:rPr>
+                      <m:t> </m:t>
+                    </m:r>
+                  </m:oMath>
+                </a14:m>
                 <a:r>
                   <a:rPr lang="zh-CN" altLang="en-US" sz="1800" kern="0" dirty="0">
                     <a:solidFill>
@@ -12977,7 +13060,7 @@
                     <a:latin typeface="Cambria Math" panose="02040503050406030204" pitchFamily="18" charset="0"/>
                     <a:ea typeface="+mn-ea"/>
                   </a:rPr>
-                  <a:t>地球物理改正包括：</a:t>
+                  <a:t>为地球物理改正项，具体包括：</a:t>
                 </a:r>
                 <a:endParaRPr lang="en-US" altLang="zh-CN" sz="1800" kern="0" dirty="0">
                   <a:solidFill>
@@ -13121,8 +13204,8 @@
             </p:nvSpPr>
             <p:spPr>
               <a:xfrm>
-                <a:off x="457200" y="1745741"/>
-                <a:ext cx="8214852" cy="4063741"/>
+                <a:off x="201376" y="1949692"/>
+                <a:ext cx="5042419" cy="4354975"/>
               </a:xfrm>
               <a:prstGeom prst="rect">
                 <a:avLst/>
@@ -13130,7 +13213,7 @@
               <a:blipFill>
                 <a:blip r:embed="rId3"/>
                 <a:stretch>
-                  <a:fillRect/>
+                  <a:fillRect l="-754" r="-1256"/>
                 </a:stretch>
               </a:blipFill>
             </p:spPr>
@@ -13202,6 +13285,859 @@
           </a:p>
         </p:txBody>
       </p:sp>
+      <p:grpSp>
+        <p:nvGrpSpPr>
+          <p:cNvPr id="2" name="Group 1">
+            <a:extLst>
+              <a:ext uri="{FF2B5EF4-FFF2-40B4-BE49-F238E27FC236}">
+                <a16:creationId xmlns:a16="http://schemas.microsoft.com/office/drawing/2014/main" id="{03F19248-C0BD-5C7A-F620-A377294A68A2}"/>
+              </a:ext>
+            </a:extLst>
+          </p:cNvPr>
+          <p:cNvGrpSpPr/>
+          <p:nvPr/>
+        </p:nvGrpSpPr>
+        <p:grpSpPr>
+          <a:xfrm>
+            <a:off x="4768925" y="1604459"/>
+            <a:ext cx="6308403" cy="8010141"/>
+            <a:chOff x="5085697" y="1365033"/>
+            <a:chExt cx="4675123" cy="6614423"/>
+          </a:xfrm>
+        </p:grpSpPr>
+        <p:pic>
+          <p:nvPicPr>
+            <p:cNvPr id="5" name="Picture 4" descr="A picture containing dark&#10;&#10;Description automatically generated">
+              <a:extLst>
+                <a:ext uri="{FF2B5EF4-FFF2-40B4-BE49-F238E27FC236}">
+                  <a16:creationId xmlns:a16="http://schemas.microsoft.com/office/drawing/2014/main" id="{5267B9D7-BE9F-E220-4290-8009574DCA5C}"/>
+                </a:ext>
+              </a:extLst>
+            </p:cNvPr>
+            <p:cNvPicPr>
+              <a:picLocks noChangeAspect="1"/>
+            </p:cNvPicPr>
+            <p:nvPr/>
+          </p:nvPicPr>
+          <p:blipFill>
+            <a:blip r:embed="rId4"/>
+            <a:stretch>
+              <a:fillRect/>
+            </a:stretch>
+          </p:blipFill>
+          <p:spPr>
+            <a:xfrm>
+              <a:off x="6455835" y="1365033"/>
+              <a:ext cx="780524" cy="486252"/>
+            </a:xfrm>
+            <a:prstGeom prst="rect">
+              <a:avLst/>
+            </a:prstGeom>
+          </p:spPr>
+        </p:pic>
+        <p:sp>
+          <p:nvSpPr>
+            <p:cNvPr id="6" name="Arc 5">
+              <a:extLst>
+                <a:ext uri="{FF2B5EF4-FFF2-40B4-BE49-F238E27FC236}">
+                  <a16:creationId xmlns:a16="http://schemas.microsoft.com/office/drawing/2014/main" id="{6F9D83A5-86E9-9D0B-81C4-72F0858FFF29}"/>
+                </a:ext>
+              </a:extLst>
+            </p:cNvPr>
+            <p:cNvSpPr/>
+            <p:nvPr/>
+          </p:nvSpPr>
+          <p:spPr bwMode="auto">
+            <a:xfrm rot="17781206">
+              <a:off x="5768037" y="3986672"/>
+              <a:ext cx="3310444" cy="4675123"/>
+            </a:xfrm>
+            <a:prstGeom prst="arc">
+              <a:avLst>
+                <a:gd name="adj1" fmla="val 16778340"/>
+                <a:gd name="adj2" fmla="val 0"/>
+              </a:avLst>
+            </a:prstGeom>
+            <a:ln>
+              <a:headEnd type="none" w="med" len="med"/>
+              <a:tailEnd type="none" w="med" len="med"/>
+            </a:ln>
+          </p:spPr>
+          <p:style>
+            <a:lnRef idx="1">
+              <a:schemeClr val="dk1"/>
+            </a:lnRef>
+            <a:fillRef idx="0">
+              <a:schemeClr val="dk1"/>
+            </a:fillRef>
+            <a:effectRef idx="0">
+              <a:schemeClr val="dk1"/>
+            </a:effectRef>
+            <a:fontRef idx="minor">
+              <a:schemeClr val="tx1"/>
+            </a:fontRef>
+          </p:style>
+          <p:txBody>
+            <a:bodyPr vert="horz" wrap="square" lIns="0" tIns="0" rIns="0" bIns="0" numCol="1" rtlCol="0" anchor="t" anchorCtr="0" compatLnSpc="1">
+              <a:prstTxWarp prst="textNoShape">
+                <a:avLst/>
+              </a:prstTxWarp>
+              <a:spAutoFit/>
+            </a:bodyPr>
+            <a:lstStyle/>
+            <a:p>
+              <a:pPr marL="0" marR="0" indent="0" algn="ctr" defTabSz="914400" rtl="0" eaLnBrk="1" fontAlgn="base" latinLnBrk="0" hangingPunct="1">
+                <a:lnSpc>
+                  <a:spcPct val="100000"/>
+                </a:lnSpc>
+                <a:spcBef>
+                  <a:spcPct val="50000"/>
+                </a:spcBef>
+                <a:spcAft>
+                  <a:spcPct val="0"/>
+                </a:spcAft>
+                <a:buClrTx/>
+                <a:buSzTx/>
+                <a:buFontTx/>
+                <a:buNone/>
+                <a:tabLst/>
+              </a:pPr>
+              <a:endParaRPr kumimoji="0" lang="en-CN" sz="3600" b="0" i="0" u="none" strike="noStrike" cap="none" normalizeH="0" baseline="0">
+                <a:ln>
+                  <a:noFill/>
+                </a:ln>
+                <a:solidFill>
+                  <a:schemeClr val="tx1"/>
+                </a:solidFill>
+                <a:effectLst/>
+                <a:latin typeface="Times New Roman" pitchFamily="18" charset="0"/>
+                <a:ea typeface="宋体" pitchFamily="2" charset="-122"/>
+              </a:endParaRPr>
+            </a:p>
+          </p:txBody>
+        </p:sp>
+        <p:sp>
+          <p:nvSpPr>
+            <p:cNvPr id="7" name="Freeform 6">
+              <a:extLst>
+                <a:ext uri="{FF2B5EF4-FFF2-40B4-BE49-F238E27FC236}">
+                  <a16:creationId xmlns:a16="http://schemas.microsoft.com/office/drawing/2014/main" id="{E26C1438-5EF5-78D7-053A-CCFB4B1A28FF}"/>
+                </a:ext>
+              </a:extLst>
+            </p:cNvPr>
+            <p:cNvSpPr/>
+            <p:nvPr/>
+          </p:nvSpPr>
+          <p:spPr>
+            <a:xfrm>
+              <a:off x="5407616" y="3945576"/>
+              <a:ext cx="2722880" cy="457467"/>
+            </a:xfrm>
+            <a:custGeom>
+              <a:avLst/>
+              <a:gdLst>
+                <a:gd name="connsiteX0" fmla="*/ 0 w 2722880"/>
+                <a:gd name="connsiteY0" fmla="*/ 516259 h 567059"/>
+                <a:gd name="connsiteX1" fmla="*/ 274320 w 2722880"/>
+                <a:gd name="connsiteY1" fmla="*/ 414659 h 567059"/>
+                <a:gd name="connsiteX2" fmla="*/ 538480 w 2722880"/>
+                <a:gd name="connsiteY2" fmla="*/ 414659 h 567059"/>
+                <a:gd name="connsiteX3" fmla="*/ 721360 w 2722880"/>
+                <a:gd name="connsiteY3" fmla="*/ 333379 h 567059"/>
+                <a:gd name="connsiteX4" fmla="*/ 955040 w 2722880"/>
+                <a:gd name="connsiteY4" fmla="*/ 262259 h 567059"/>
+                <a:gd name="connsiteX5" fmla="*/ 1300480 w 2722880"/>
+                <a:gd name="connsiteY5" fmla="*/ 28579 h 567059"/>
+                <a:gd name="connsiteX6" fmla="*/ 1656080 w 2722880"/>
+                <a:gd name="connsiteY6" fmla="*/ 18419 h 567059"/>
+                <a:gd name="connsiteX7" fmla="*/ 2052320 w 2722880"/>
+                <a:gd name="connsiteY7" fmla="*/ 160659 h 567059"/>
+                <a:gd name="connsiteX8" fmla="*/ 2255520 w 2722880"/>
+                <a:gd name="connsiteY8" fmla="*/ 353699 h 567059"/>
+                <a:gd name="connsiteX9" fmla="*/ 2641600 w 2722880"/>
+                <a:gd name="connsiteY9" fmla="*/ 465459 h 567059"/>
+                <a:gd name="connsiteX10" fmla="*/ 2722880 w 2722880"/>
+                <a:gd name="connsiteY10" fmla="*/ 567059 h 567059"/>
+              </a:gdLst>
+              <a:ahLst/>
+              <a:cxnLst>
+                <a:cxn ang="0">
+                  <a:pos x="connsiteX0" y="connsiteY0"/>
+                </a:cxn>
+                <a:cxn ang="0">
+                  <a:pos x="connsiteX1" y="connsiteY1"/>
+                </a:cxn>
+                <a:cxn ang="0">
+                  <a:pos x="connsiteX2" y="connsiteY2"/>
+                </a:cxn>
+                <a:cxn ang="0">
+                  <a:pos x="connsiteX3" y="connsiteY3"/>
+                </a:cxn>
+                <a:cxn ang="0">
+                  <a:pos x="connsiteX4" y="connsiteY4"/>
+                </a:cxn>
+                <a:cxn ang="0">
+                  <a:pos x="connsiteX5" y="connsiteY5"/>
+                </a:cxn>
+                <a:cxn ang="0">
+                  <a:pos x="connsiteX6" y="connsiteY6"/>
+                </a:cxn>
+                <a:cxn ang="0">
+                  <a:pos x="connsiteX7" y="connsiteY7"/>
+                </a:cxn>
+                <a:cxn ang="0">
+                  <a:pos x="connsiteX8" y="connsiteY8"/>
+                </a:cxn>
+                <a:cxn ang="0">
+                  <a:pos x="connsiteX9" y="connsiteY9"/>
+                </a:cxn>
+                <a:cxn ang="0">
+                  <a:pos x="connsiteX10" y="connsiteY10"/>
+                </a:cxn>
+              </a:cxnLst>
+              <a:rect l="l" t="t" r="r" b="b"/>
+              <a:pathLst>
+                <a:path w="2722880" h="567059">
+                  <a:moveTo>
+                    <a:pt x="0" y="516259"/>
+                  </a:moveTo>
+                  <a:cubicBezTo>
+                    <a:pt x="92286" y="473925"/>
+                    <a:pt x="184573" y="431592"/>
+                    <a:pt x="274320" y="414659"/>
+                  </a:cubicBezTo>
+                  <a:cubicBezTo>
+                    <a:pt x="364067" y="397726"/>
+                    <a:pt x="463973" y="428206"/>
+                    <a:pt x="538480" y="414659"/>
+                  </a:cubicBezTo>
+                  <a:cubicBezTo>
+                    <a:pt x="612987" y="401112"/>
+                    <a:pt x="651933" y="358779"/>
+                    <a:pt x="721360" y="333379"/>
+                  </a:cubicBezTo>
+                  <a:cubicBezTo>
+                    <a:pt x="790787" y="307979"/>
+                    <a:pt x="858520" y="313059"/>
+                    <a:pt x="955040" y="262259"/>
+                  </a:cubicBezTo>
+                  <a:cubicBezTo>
+                    <a:pt x="1051560" y="211459"/>
+                    <a:pt x="1183640" y="69219"/>
+                    <a:pt x="1300480" y="28579"/>
+                  </a:cubicBezTo>
+                  <a:cubicBezTo>
+                    <a:pt x="1417320" y="-12061"/>
+                    <a:pt x="1530773" y="-3594"/>
+                    <a:pt x="1656080" y="18419"/>
+                  </a:cubicBezTo>
+                  <a:cubicBezTo>
+                    <a:pt x="1781387" y="40432"/>
+                    <a:pt x="1952413" y="104779"/>
+                    <a:pt x="2052320" y="160659"/>
+                  </a:cubicBezTo>
+                  <a:cubicBezTo>
+                    <a:pt x="2152227" y="216539"/>
+                    <a:pt x="2157307" y="302899"/>
+                    <a:pt x="2255520" y="353699"/>
+                  </a:cubicBezTo>
+                  <a:cubicBezTo>
+                    <a:pt x="2353733" y="404499"/>
+                    <a:pt x="2563707" y="429899"/>
+                    <a:pt x="2641600" y="465459"/>
+                  </a:cubicBezTo>
+                  <a:cubicBezTo>
+                    <a:pt x="2719493" y="501019"/>
+                    <a:pt x="2721186" y="534039"/>
+                    <a:pt x="2722880" y="567059"/>
+                  </a:cubicBezTo>
+                </a:path>
+              </a:pathLst>
+            </a:custGeom>
+          </p:spPr>
+          <p:style>
+            <a:lnRef idx="1">
+              <a:schemeClr val="accent1"/>
+            </a:lnRef>
+            <a:fillRef idx="0">
+              <a:schemeClr val="accent1"/>
+            </a:fillRef>
+            <a:effectRef idx="0">
+              <a:schemeClr val="accent1"/>
+            </a:effectRef>
+            <a:fontRef idx="minor">
+              <a:schemeClr val="tx1"/>
+            </a:fontRef>
+          </p:style>
+          <p:txBody>
+            <a:bodyPr vert="horz" wrap="square" lIns="0" tIns="0" rIns="0" bIns="0" numCol="1" rtlCol="0" anchor="t" anchorCtr="0" compatLnSpc="1">
+              <a:prstTxWarp prst="textNoShape">
+                <a:avLst/>
+              </a:prstTxWarp>
+              <a:spAutoFit/>
+            </a:bodyPr>
+            <a:lstStyle/>
+            <a:p>
+              <a:pPr marL="0" marR="0" indent="0" algn="ctr" defTabSz="914400" rtl="0" eaLnBrk="1" fontAlgn="base" latinLnBrk="0" hangingPunct="1">
+                <a:lnSpc>
+                  <a:spcPct val="100000"/>
+                </a:lnSpc>
+                <a:spcBef>
+                  <a:spcPct val="50000"/>
+                </a:spcBef>
+                <a:spcAft>
+                  <a:spcPct val="0"/>
+                </a:spcAft>
+                <a:buClrTx/>
+                <a:buSzTx/>
+                <a:buFontTx/>
+                <a:buNone/>
+                <a:tabLst/>
+              </a:pPr>
+              <a:endParaRPr kumimoji="0" lang="en-CN" sz="3600" b="0" i="0" u="none" strike="noStrike" cap="none" normalizeH="0" baseline="0">
+                <a:ln>
+                  <a:noFill/>
+                </a:ln>
+                <a:solidFill>
+                  <a:schemeClr val="tx1"/>
+                </a:solidFill>
+                <a:effectLst/>
+                <a:latin typeface="Times New Roman" pitchFamily="18" charset="0"/>
+                <a:ea typeface="宋体" pitchFamily="2" charset="-122"/>
+              </a:endParaRPr>
+            </a:p>
+          </p:txBody>
+        </p:sp>
+        <p:sp>
+          <p:nvSpPr>
+            <p:cNvPr id="8" name="Oval 7">
+              <a:extLst>
+                <a:ext uri="{FF2B5EF4-FFF2-40B4-BE49-F238E27FC236}">
+                  <a16:creationId xmlns:a16="http://schemas.microsoft.com/office/drawing/2014/main" id="{4EBB4894-1FFC-EEC3-D6C8-A7285CFE57EA}"/>
+                </a:ext>
+              </a:extLst>
+            </p:cNvPr>
+            <p:cNvSpPr/>
+            <p:nvPr/>
+          </p:nvSpPr>
+          <p:spPr>
+            <a:xfrm flipV="1">
+              <a:off x="6785098" y="3911825"/>
+              <a:ext cx="77041" cy="73021"/>
+            </a:xfrm>
+            <a:prstGeom prst="ellipse">
+              <a:avLst/>
+            </a:prstGeom>
+            <a:solidFill>
+              <a:schemeClr val="accent3"/>
+            </a:solidFill>
+          </p:spPr>
+          <p:txBody>
+            <a:bodyPr wrap="square" lIns="0" rtlCol="0" anchor="ctr">
+              <a:noAutofit/>
+            </a:bodyPr>
+            <a:lstStyle/>
+            <a:p>
+              <a:pPr algn="l"/>
+              <a:endParaRPr lang="en-CN" sz="3600" b="1">
+                <a:solidFill>
+                  <a:srgbClr val="FF0000"/>
+                </a:solidFill>
+                <a:latin typeface="微软雅黑" pitchFamily="34" charset="-122"/>
+                <a:ea typeface="微软雅黑" pitchFamily="34" charset="-122"/>
+              </a:endParaRPr>
+            </a:p>
+          </p:txBody>
+        </p:sp>
+        <p:cxnSp>
+          <p:nvCxnSpPr>
+            <p:cNvPr id="9" name="Straight Arrow Connector 8">
+              <a:extLst>
+                <a:ext uri="{FF2B5EF4-FFF2-40B4-BE49-F238E27FC236}">
+                  <a16:creationId xmlns:a16="http://schemas.microsoft.com/office/drawing/2014/main" id="{CF43FEB6-5EDA-E969-9D4E-DC82E5AE0CBF}"/>
+                </a:ext>
+              </a:extLst>
+            </p:cNvPr>
+            <p:cNvCxnSpPr>
+              <a:cxnSpLocks/>
+            </p:cNvCxnSpPr>
+            <p:nvPr/>
+          </p:nvCxnSpPr>
+          <p:spPr bwMode="auto">
+            <a:xfrm>
+              <a:off x="6807576" y="1717014"/>
+              <a:ext cx="5610" cy="2193015"/>
+            </a:xfrm>
+            <a:prstGeom prst="straightConnector1">
+              <a:avLst/>
+            </a:prstGeom>
+            <a:ln>
+              <a:headEnd type="triangle"/>
+              <a:tailEnd type="triangle"/>
+            </a:ln>
+          </p:spPr>
+          <p:style>
+            <a:lnRef idx="1">
+              <a:schemeClr val="dk1"/>
+            </a:lnRef>
+            <a:fillRef idx="0">
+              <a:schemeClr val="dk1"/>
+            </a:fillRef>
+            <a:effectRef idx="0">
+              <a:schemeClr val="dk1"/>
+            </a:effectRef>
+            <a:fontRef idx="minor">
+              <a:schemeClr val="tx1"/>
+            </a:fontRef>
+          </p:style>
+        </p:cxnSp>
+        <p:cxnSp>
+          <p:nvCxnSpPr>
+            <p:cNvPr id="10" name="Straight Arrow Connector 9">
+              <a:extLst>
+                <a:ext uri="{FF2B5EF4-FFF2-40B4-BE49-F238E27FC236}">
+                  <a16:creationId xmlns:a16="http://schemas.microsoft.com/office/drawing/2014/main" id="{87CE3431-AF44-B691-729A-18A8FB538D82}"/>
+                </a:ext>
+              </a:extLst>
+            </p:cNvPr>
+            <p:cNvCxnSpPr>
+              <a:cxnSpLocks/>
+            </p:cNvCxnSpPr>
+            <p:nvPr/>
+          </p:nvCxnSpPr>
+          <p:spPr bwMode="auto">
+            <a:xfrm>
+              <a:off x="6815598" y="3984846"/>
+              <a:ext cx="5609" cy="477742"/>
+            </a:xfrm>
+            <a:prstGeom prst="straightConnector1">
+              <a:avLst/>
+            </a:prstGeom>
+            <a:ln>
+              <a:headEnd type="triangle"/>
+              <a:tailEnd type="triangle"/>
+            </a:ln>
+          </p:spPr>
+          <p:style>
+            <a:lnRef idx="1">
+              <a:schemeClr val="dk1"/>
+            </a:lnRef>
+            <a:fillRef idx="0">
+              <a:schemeClr val="dk1"/>
+            </a:fillRef>
+            <a:effectRef idx="0">
+              <a:schemeClr val="dk1"/>
+            </a:effectRef>
+            <a:fontRef idx="minor">
+              <a:schemeClr val="tx1"/>
+            </a:fontRef>
+          </p:style>
+        </p:cxnSp>
+        <p:sp>
+          <p:nvSpPr>
+            <p:cNvPr id="11" name="TextBox 10">
+              <a:extLst>
+                <a:ext uri="{FF2B5EF4-FFF2-40B4-BE49-F238E27FC236}">
+                  <a16:creationId xmlns:a16="http://schemas.microsoft.com/office/drawing/2014/main" id="{166FCF21-FA62-5B9A-5FFC-7FAD9B6A2E4D}"/>
+                </a:ext>
+              </a:extLst>
+            </p:cNvPr>
+            <p:cNvSpPr txBox="1"/>
+            <p:nvPr/>
+          </p:nvSpPr>
+          <p:spPr>
+            <a:xfrm>
+              <a:off x="6821207" y="2716994"/>
+              <a:ext cx="1114828" cy="482882"/>
+            </a:xfrm>
+            <a:prstGeom prst="rect">
+              <a:avLst/>
+            </a:prstGeom>
+            <a:noFill/>
+          </p:spPr>
+          <p:txBody>
+            <a:bodyPr wrap="square" rtlCol="0">
+              <a:spAutoFit/>
+            </a:bodyPr>
+            <a:lstStyle/>
+            <a:p>
+              <a:r>
+                <a:rPr lang="en-CN" sz="1600">
+                  <a:solidFill>
+                    <a:schemeClr val="bg2"/>
+                  </a:solidFill>
+                  <a:latin typeface="+mn-ea"/>
+                  <a:ea typeface="+mn-ea"/>
+                </a:rPr>
+                <a:t>卫星到星下点距离D</a:t>
+              </a:r>
+            </a:p>
+          </p:txBody>
+        </p:sp>
+        <mc:AlternateContent xmlns:mc="http://schemas.openxmlformats.org/markup-compatibility/2006">
+          <mc:Choice xmlns:a14="http://schemas.microsoft.com/office/drawing/2010/main" Requires="a14">
+            <p:sp>
+              <p:nvSpPr>
+                <p:cNvPr id="12" name="TextBox 11">
+                  <a:extLst>
+                    <a:ext uri="{FF2B5EF4-FFF2-40B4-BE49-F238E27FC236}">
+                      <a16:creationId xmlns:a16="http://schemas.microsoft.com/office/drawing/2014/main" id="{1CC85B7E-CE54-A6CE-E7C5-024B7B4E3714}"/>
+                    </a:ext>
+                  </a:extLst>
+                </p:cNvPr>
+                <p:cNvSpPr txBox="1"/>
+                <p:nvPr/>
+              </p:nvSpPr>
+              <p:spPr>
+                <a:xfrm>
+                  <a:off x="6805643" y="4056724"/>
+                  <a:ext cx="1491119" cy="482881"/>
+                </a:xfrm>
+                <a:prstGeom prst="rect">
+                  <a:avLst/>
+                </a:prstGeom>
+                <a:noFill/>
+              </p:spPr>
+              <p:txBody>
+                <a:bodyPr wrap="square" rtlCol="0">
+                  <a:spAutoFit/>
+                </a:bodyPr>
+                <a:lstStyle/>
+                <a:p>
+                  <a:r>
+                    <a:rPr lang="en-CN" sz="1600" dirty="0">
+                      <a:solidFill>
+                        <a:schemeClr val="bg2"/>
+                      </a:solidFill>
+                      <a:latin typeface="+mn-ea"/>
+                      <a:ea typeface="+mn-ea"/>
+                    </a:rPr>
+                    <a:t>星下点地面椭球高</a:t>
+                  </a:r>
+                  <a14:m>
+                    <m:oMath xmlns:m="http://schemas.openxmlformats.org/officeDocument/2006/math">
+                      <m:sSub>
+                        <m:sSubPr>
+                          <m:ctrlPr>
+                            <a:rPr lang="en-CN" sz="1600" i="1" dirty="0" smtClean="0">
+                              <a:solidFill>
+                                <a:schemeClr val="bg2"/>
+                              </a:solidFill>
+                              <a:latin typeface="Cambria Math" panose="02040503050406030204" pitchFamily="18" charset="0"/>
+                              <a:ea typeface="+mn-ea"/>
+                            </a:rPr>
+                          </m:ctrlPr>
+                        </m:sSubPr>
+                        <m:e>
+                          <m:r>
+                            <m:rPr>
+                              <m:sty m:val="p"/>
+                            </m:rPr>
+                            <a:rPr lang="en-CN" sz="1600" i="1" dirty="0">
+                              <a:solidFill>
+                                <a:schemeClr val="bg2"/>
+                              </a:solidFill>
+                              <a:latin typeface="Cambria Math" panose="02040503050406030204" pitchFamily="18" charset="0"/>
+                              <a:ea typeface="+mn-ea"/>
+                            </a:rPr>
+                            <m:t>H</m:t>
+                          </m:r>
+                        </m:e>
+                        <m:sub>
+                          <m:r>
+                            <a:rPr lang="en-US" sz="1600" b="0" i="1" dirty="0" smtClean="0">
+                              <a:solidFill>
+                                <a:schemeClr val="bg2"/>
+                              </a:solidFill>
+                              <a:latin typeface="Cambria Math" panose="02040503050406030204" pitchFamily="18" charset="0"/>
+                              <a:ea typeface="+mn-ea"/>
+                            </a:rPr>
+                            <m:t>𝑙𝑎𝑛𝑑</m:t>
+                          </m:r>
+                        </m:sub>
+                      </m:sSub>
+                    </m:oMath>
+                  </a14:m>
+                  <a:endParaRPr lang="en-CN" sz="1600" dirty="0">
+                    <a:solidFill>
+                      <a:schemeClr val="bg2"/>
+                    </a:solidFill>
+                    <a:latin typeface="+mn-ea"/>
+                    <a:ea typeface="+mn-ea"/>
+                  </a:endParaRPr>
+                </a:p>
+              </p:txBody>
+            </p:sp>
+          </mc:Choice>
+          <mc:Fallback>
+            <p:sp>
+              <p:nvSpPr>
+                <p:cNvPr id="12" name="TextBox 11">
+                  <a:extLst>
+                    <a:ext uri="{FF2B5EF4-FFF2-40B4-BE49-F238E27FC236}">
+                      <a16:creationId xmlns:a16="http://schemas.microsoft.com/office/drawing/2014/main" id="{1CC85B7E-CE54-A6CE-E7C5-024B7B4E3714}"/>
+                    </a:ext>
+                  </a:extLst>
+                </p:cNvPr>
+                <p:cNvSpPr txBox="1">
+                  <a:spLocks noRot="1" noChangeAspect="1" noMove="1" noResize="1" noEditPoints="1" noAdjustHandles="1" noChangeArrowheads="1" noChangeShapeType="1" noTextEdit="1"/>
+                </p:cNvSpPr>
+                <p:nvPr/>
+              </p:nvSpPr>
+              <p:spPr>
+                <a:xfrm>
+                  <a:off x="6805643" y="4056724"/>
+                  <a:ext cx="1491119" cy="482881"/>
+                </a:xfrm>
+                <a:prstGeom prst="rect">
+                  <a:avLst/>
+                </a:prstGeom>
+                <a:blipFill>
+                  <a:blip r:embed="rId5"/>
+                  <a:stretch>
+                    <a:fillRect t="-4255"/>
+                  </a:stretch>
+                </a:blipFill>
+              </p:spPr>
+              <p:txBody>
+                <a:bodyPr/>
+                <a:lstStyle/>
+                <a:p>
+                  <a:r>
+                    <a:rPr lang="en-CN">
+                      <a:noFill/>
+                    </a:rPr>
+                    <a:t> </a:t>
+                  </a:r>
+                </a:p>
+              </p:txBody>
+            </p:sp>
+          </mc:Fallback>
+        </mc:AlternateContent>
+        <p:sp>
+          <p:nvSpPr>
+            <p:cNvPr id="13" name="TextBox 12">
+              <a:extLst>
+                <a:ext uri="{FF2B5EF4-FFF2-40B4-BE49-F238E27FC236}">
+                  <a16:creationId xmlns:a16="http://schemas.microsoft.com/office/drawing/2014/main" id="{FF4E96D3-F6C5-7390-2035-B5CFB60E2398}"/>
+                </a:ext>
+              </a:extLst>
+            </p:cNvPr>
+            <p:cNvSpPr txBox="1"/>
+            <p:nvPr/>
+          </p:nvSpPr>
+          <p:spPr>
+            <a:xfrm>
+              <a:off x="5688720" y="4631600"/>
+              <a:ext cx="831645" cy="304978"/>
+            </a:xfrm>
+            <a:prstGeom prst="rect">
+              <a:avLst/>
+            </a:prstGeom>
+            <a:noFill/>
+          </p:spPr>
+          <p:txBody>
+            <a:bodyPr wrap="square" rtlCol="0">
+              <a:spAutoFit/>
+            </a:bodyPr>
+            <a:lstStyle/>
+            <a:p>
+              <a:r>
+                <a:rPr lang="en-CN" sz="1800">
+                  <a:solidFill>
+                    <a:schemeClr val="bg2"/>
+                  </a:solidFill>
+                  <a:latin typeface="+mn-ea"/>
+                  <a:ea typeface="+mn-ea"/>
+                </a:rPr>
+                <a:t>参考椭球</a:t>
+              </a:r>
+            </a:p>
+          </p:txBody>
+        </p:sp>
+        <p:cxnSp>
+          <p:nvCxnSpPr>
+            <p:cNvPr id="14" name="Straight Arrow Connector 13">
+              <a:extLst>
+                <a:ext uri="{FF2B5EF4-FFF2-40B4-BE49-F238E27FC236}">
+                  <a16:creationId xmlns:a16="http://schemas.microsoft.com/office/drawing/2014/main" id="{90DA7F95-A293-8409-E383-AC248EEB33F0}"/>
+                </a:ext>
+              </a:extLst>
+            </p:cNvPr>
+            <p:cNvCxnSpPr>
+              <a:cxnSpLocks/>
+            </p:cNvCxnSpPr>
+            <p:nvPr/>
+          </p:nvCxnSpPr>
+          <p:spPr bwMode="auto">
+            <a:xfrm flipH="1">
+              <a:off x="6626968" y="1709667"/>
+              <a:ext cx="18696" cy="2751095"/>
+            </a:xfrm>
+            <a:prstGeom prst="straightConnector1">
+              <a:avLst/>
+            </a:prstGeom>
+            <a:ln>
+              <a:headEnd type="triangle"/>
+              <a:tailEnd type="triangle"/>
+            </a:ln>
+          </p:spPr>
+          <p:style>
+            <a:lnRef idx="1">
+              <a:schemeClr val="dk1"/>
+            </a:lnRef>
+            <a:fillRef idx="0">
+              <a:schemeClr val="dk1"/>
+            </a:fillRef>
+            <a:effectRef idx="0">
+              <a:schemeClr val="dk1"/>
+            </a:effectRef>
+            <a:fontRef idx="minor">
+              <a:schemeClr val="tx1"/>
+            </a:fontRef>
+          </p:style>
+        </p:cxnSp>
+        <mc:AlternateContent xmlns:mc="http://schemas.openxmlformats.org/markup-compatibility/2006">
+          <mc:Choice xmlns:a14="http://schemas.microsoft.com/office/drawing/2010/main" Requires="a14">
+            <p:sp>
+              <p:nvSpPr>
+                <p:cNvPr id="15" name="TextBox 14">
+                  <a:extLst>
+                    <a:ext uri="{FF2B5EF4-FFF2-40B4-BE49-F238E27FC236}">
+                      <a16:creationId xmlns:a16="http://schemas.microsoft.com/office/drawing/2014/main" id="{AE955BF3-F3DF-1379-CA4E-66022D34DC2E}"/>
+                    </a:ext>
+                  </a:extLst>
+                </p:cNvPr>
+                <p:cNvSpPr txBox="1"/>
+                <p:nvPr/>
+              </p:nvSpPr>
+              <p:spPr>
+                <a:xfrm>
+                  <a:off x="5489949" y="2818095"/>
+                  <a:ext cx="1088067" cy="533712"/>
+                </a:xfrm>
+                <a:prstGeom prst="rect">
+                  <a:avLst/>
+                </a:prstGeom>
+                <a:noFill/>
+              </p:spPr>
+              <p:txBody>
+                <a:bodyPr wrap="square" rtlCol="0">
+                  <a:spAutoFit/>
+                </a:bodyPr>
+                <a:lstStyle/>
+                <a:p>
+                  <a:r>
+                    <a:rPr lang="en-CN" sz="1800">
+                      <a:solidFill>
+                        <a:schemeClr val="bg2"/>
+                      </a:solidFill>
+                      <a:latin typeface="+mn-ea"/>
+                      <a:ea typeface="+mn-ea"/>
+                    </a:rPr>
+                    <a:t>卫星的椭球高</a:t>
+                  </a:r>
+                  <a14:m>
+                    <m:oMath xmlns:m="http://schemas.openxmlformats.org/officeDocument/2006/math">
+                      <m:sSub>
+                        <m:sSubPr>
+                          <m:ctrlPr>
+                            <a:rPr lang="en-CN" sz="1800" i="1" smtClean="0">
+                              <a:solidFill>
+                                <a:schemeClr val="bg2"/>
+                              </a:solidFill>
+                              <a:latin typeface="Cambria Math" panose="02040503050406030204" pitchFamily="18" charset="0"/>
+                              <a:ea typeface="+mn-ea"/>
+                            </a:rPr>
+                          </m:ctrlPr>
+                        </m:sSubPr>
+                        <m:e>
+                          <m:r>
+                            <a:rPr lang="en-US" sz="1800" b="0" i="1" smtClean="0">
+                              <a:solidFill>
+                                <a:schemeClr val="bg2"/>
+                              </a:solidFill>
+                              <a:latin typeface="Cambria Math" panose="02040503050406030204" pitchFamily="18" charset="0"/>
+                              <a:ea typeface="+mn-ea"/>
+                            </a:rPr>
+                            <m:t>𝐻</m:t>
+                          </m:r>
+                        </m:e>
+                        <m:sub>
+                          <m:r>
+                            <m:rPr>
+                              <m:sty m:val="p"/>
+                            </m:rPr>
+                            <a:rPr lang="en-CN" sz="1800" i="1">
+                              <a:solidFill>
+                                <a:schemeClr val="bg2"/>
+                              </a:solidFill>
+                              <a:latin typeface="Cambria Math" panose="02040503050406030204" pitchFamily="18" charset="0"/>
+                              <a:ea typeface="+mn-ea"/>
+                            </a:rPr>
+                            <m:t>sat</m:t>
+                          </m:r>
+                        </m:sub>
+                      </m:sSub>
+                    </m:oMath>
+                  </a14:m>
+                  <a:endParaRPr lang="en-CN" sz="1800">
+                    <a:solidFill>
+                      <a:schemeClr val="bg2"/>
+                    </a:solidFill>
+                    <a:latin typeface="+mn-ea"/>
+                    <a:ea typeface="+mn-ea"/>
+                  </a:endParaRPr>
+                </a:p>
+              </p:txBody>
+            </p:sp>
+          </mc:Choice>
+          <mc:Fallback>
+            <p:sp>
+              <p:nvSpPr>
+                <p:cNvPr id="15" name="TextBox 14">
+                  <a:extLst>
+                    <a:ext uri="{FF2B5EF4-FFF2-40B4-BE49-F238E27FC236}">
+                      <a16:creationId xmlns:a16="http://schemas.microsoft.com/office/drawing/2014/main" id="{AE955BF3-F3DF-1379-CA4E-66022D34DC2E}"/>
+                    </a:ext>
+                  </a:extLst>
+                </p:cNvPr>
+                <p:cNvSpPr txBox="1">
+                  <a:spLocks noRot="1" noChangeAspect="1" noMove="1" noResize="1" noEditPoints="1" noAdjustHandles="1" noChangeArrowheads="1" noChangeShapeType="1" noTextEdit="1"/>
+                </p:cNvSpPr>
+                <p:nvPr/>
+              </p:nvSpPr>
+              <p:spPr>
+                <a:xfrm>
+                  <a:off x="5489949" y="2818095"/>
+                  <a:ext cx="1088067" cy="533712"/>
+                </a:xfrm>
+                <a:prstGeom prst="rect">
+                  <a:avLst/>
+                </a:prstGeom>
+                <a:blipFill>
+                  <a:blip r:embed="rId6"/>
+                  <a:stretch>
+                    <a:fillRect t="-3846" b="-13462"/>
+                  </a:stretch>
+                </a:blipFill>
+              </p:spPr>
+              <p:txBody>
+                <a:bodyPr/>
+                <a:lstStyle/>
+                <a:p>
+                  <a:r>
+                    <a:rPr lang="en-CN">
+                      <a:noFill/>
+                    </a:rPr>
+                    <a:t> </a:t>
+                  </a:r>
+                </a:p>
+              </p:txBody>
+            </p:sp>
+          </mc:Fallback>
+        </mc:AlternateContent>
+      </p:grpSp>
     </p:spTree>
     <p:extLst>
       <p:ext uri="{BB962C8B-B14F-4D97-AF65-F5344CB8AC3E}">
@@ -13281,8 +14217,8 @@
             </p:nvSpPr>
             <p:spPr>
               <a:xfrm>
-                <a:off x="516194" y="1745741"/>
-                <a:ext cx="8045915" cy="4616072"/>
+                <a:off x="393365" y="1652224"/>
+                <a:ext cx="8432970" cy="4616072"/>
               </a:xfrm>
               <a:prstGeom prst="rect">
                 <a:avLst/>
@@ -13338,7 +14274,7 @@
                     <m:sSub>
                       <m:sSubPr>
                         <m:ctrlPr>
-                          <a:rPr lang="en-US" altLang="zh-CN" sz="2000" kern="0" dirty="0">
+                          <a:rPr lang="en-US" altLang="zh-CN" sz="2000" i="1" kern="0" dirty="0">
                             <a:solidFill>
                               <a:srgbClr val="000000"/>
                             </a:solidFill>
@@ -13374,7 +14310,33 @@
                             <a:latin typeface="Cambria Math" panose="02040503050406030204" pitchFamily="18" charset="0"/>
                             <a:ea typeface="+mn-ea"/>
                           </a:rPr>
-                          <m:t>nomial</m:t>
+                          <m:t>nomi</m:t>
+                        </m:r>
+                        <m:r>
+                          <m:rPr>
+                            <m:sty m:val="p"/>
+                          </m:rPr>
+                          <a:rPr lang="en-US" altLang="zh-CN" sz="2000" i="1" kern="0" dirty="0">
+                            <a:solidFill>
+                              <a:srgbClr val="000000"/>
+                            </a:solidFill>
+                            <a:latin typeface="Cambria Math" panose="02040503050406030204" pitchFamily="18" charset="0"/>
+                            <a:ea typeface="+mn-ea"/>
+                          </a:rPr>
+                          <m:t>n</m:t>
+                        </m:r>
+                        <m:r>
+                          <m:rPr>
+                            <m:sty m:val="p"/>
+                          </m:rPr>
+                          <a:rPr lang="en-US" altLang="zh-CN" sz="2000" kern="0" dirty="0">
+                            <a:solidFill>
+                              <a:srgbClr val="000000"/>
+                            </a:solidFill>
+                            <a:latin typeface="Cambria Math" panose="02040503050406030204" pitchFamily="18" charset="0"/>
+                            <a:ea typeface="+mn-ea"/>
+                          </a:rPr>
+                          <m:t>al</m:t>
                         </m:r>
                       </m:sub>
                     </m:sSub>
@@ -13395,7 +14357,7 @@
                     <m:sSub>
                       <m:sSubPr>
                         <m:ctrlPr>
-                          <a:rPr lang="en-US" altLang="zh-CN" sz="2000" kern="0" dirty="0">
+                          <a:rPr lang="en-US" altLang="zh-CN" sz="2000" i="1" kern="0" dirty="0">
                             <a:solidFill>
                               <a:srgbClr val="000000"/>
                             </a:solidFill>
@@ -13518,20 +14480,17 @@
                     </m:oMathParaPr>
                     <m:oMath xmlns:m="http://schemas.openxmlformats.org/officeDocument/2006/math">
                       <m:r>
-                        <m:rPr>
-                          <m:sty m:val="p"/>
-                        </m:rPr>
-                        <a:rPr lang="en-US" altLang="zh-CN" sz="2000" b="0" i="0" kern="0" smtClean="0">
+                        <a:rPr lang="en-US" altLang="zh-CN" sz="2000" b="1" i="0" kern="0" smtClean="0">
                           <a:solidFill>
                             <a:srgbClr val="000000"/>
                           </a:solidFill>
                           <a:latin typeface="Cambria Math" panose="02040503050406030204" pitchFamily="18" charset="0"/>
                           <a:ea typeface="+mn-ea"/>
                         </a:rPr>
-                        <m:t>Altimeter</m:t>
+                        <m:t>𝐀𝐥𝐭𝐢𝐦𝐞𝐭𝐞𝐫</m:t>
                       </m:r>
                       <m:r>
-                        <a:rPr lang="en-US" altLang="zh-CN" sz="2000" b="0" i="0" kern="0" smtClean="0">
+                        <a:rPr lang="en-US" altLang="zh-CN" sz="2000" b="1" i="0" kern="0" smtClean="0">
                           <a:solidFill>
                             <a:srgbClr val="000000"/>
                           </a:solidFill>
@@ -13541,20 +14500,17 @@
                         <m:t> </m:t>
                       </m:r>
                       <m:r>
-                        <m:rPr>
-                          <m:sty m:val="p"/>
-                        </m:rPr>
-                        <a:rPr lang="en-US" altLang="zh-CN" sz="2000" b="0" i="0" kern="0" smtClean="0">
+                        <a:rPr lang="en-US" altLang="zh-CN" sz="2000" b="1" i="0" kern="0" smtClean="0">
                           <a:solidFill>
                             <a:srgbClr val="000000"/>
                           </a:solidFill>
                           <a:latin typeface="Cambria Math" panose="02040503050406030204" pitchFamily="18" charset="0"/>
                           <a:ea typeface="+mn-ea"/>
                         </a:rPr>
-                        <m:t>range</m:t>
+                        <m:t>𝐫𝐚𝐧𝐠𝐞</m:t>
                       </m:r>
                       <m:r>
-                        <a:rPr lang="en-US" altLang="zh-CN" sz="2000" b="0" i="0" kern="0" smtClean="0">
+                        <a:rPr lang="en-US" altLang="zh-CN" sz="2000" b="1" i="0" kern="0" smtClean="0">
                           <a:solidFill>
                             <a:srgbClr val="000000"/>
                           </a:solidFill>
@@ -13564,20 +14520,17 @@
                         <m:t>=</m:t>
                       </m:r>
                       <m:r>
-                        <m:rPr>
-                          <m:sty m:val="p"/>
-                        </m:rPr>
-                        <a:rPr lang="en-US" altLang="zh-CN" sz="2000" b="0" i="0" kern="0" smtClean="0">
+                        <a:rPr lang="en-US" altLang="zh-CN" sz="2000" b="1" i="0" kern="0" smtClean="0">
                           <a:solidFill>
                             <a:srgbClr val="000000"/>
                           </a:solidFill>
                           <a:latin typeface="Cambria Math" panose="02040503050406030204" pitchFamily="18" charset="0"/>
                           <a:ea typeface="+mn-ea"/>
                         </a:rPr>
-                        <m:t>tracker</m:t>
+                        <m:t>𝐭𝐫𝐚𝐜𝐤𝐞𝐫</m:t>
                       </m:r>
                       <m:r>
-                        <a:rPr lang="en-US" altLang="zh-CN" sz="2000" b="0" i="0" kern="0" smtClean="0">
+                        <a:rPr lang="en-US" altLang="zh-CN" sz="2000" b="1" i="0" kern="0" smtClean="0">
                           <a:solidFill>
                             <a:srgbClr val="000000"/>
                           </a:solidFill>
@@ -13587,20 +14540,17 @@
                         <m:t> </m:t>
                       </m:r>
                       <m:r>
-                        <m:rPr>
-                          <m:sty m:val="p"/>
-                        </m:rPr>
-                        <a:rPr lang="en-US" altLang="zh-CN" sz="2000" b="0" i="0" kern="0" smtClean="0">
+                        <a:rPr lang="en-US" altLang="zh-CN" sz="2000" b="1" i="0" kern="0" smtClean="0">
                           <a:solidFill>
                             <a:srgbClr val="000000"/>
                           </a:solidFill>
                           <a:latin typeface="Cambria Math" panose="02040503050406030204" pitchFamily="18" charset="0"/>
                           <a:ea typeface="+mn-ea"/>
                         </a:rPr>
-                        <m:t>range</m:t>
+                        <m:t>𝐫𝐚𝐧𝐠𝐞</m:t>
                       </m:r>
                       <m:r>
-                        <a:rPr lang="en-US" altLang="zh-CN" sz="2000" b="0" i="0" kern="0" smtClean="0">
+                        <a:rPr lang="en-US" altLang="zh-CN" sz="2000" b="1" i="0" kern="0" smtClean="0">
                           <a:solidFill>
                             <a:srgbClr val="000000"/>
                           </a:solidFill>
@@ -13610,20 +14560,17 @@
                         <m:t>+ ∆</m:t>
                       </m:r>
                       <m:r>
-                        <m:rPr>
-                          <m:sty m:val="p"/>
-                        </m:rPr>
-                        <a:rPr lang="en-US" altLang="zh-CN" sz="2000" b="0" i="0" kern="0" smtClean="0">
+                        <a:rPr lang="en-US" altLang="zh-CN" sz="2000" b="1" i="0" kern="0" smtClean="0">
                           <a:solidFill>
                             <a:srgbClr val="000000"/>
                           </a:solidFill>
                           <a:latin typeface="Cambria Math" panose="02040503050406030204" pitchFamily="18" charset="0"/>
                           <a:ea typeface="Cambria Math" panose="02040503050406030204" pitchFamily="18" charset="0"/>
                         </a:rPr>
-                        <m:t>R</m:t>
+                        <m:t>𝐑</m:t>
                       </m:r>
                       <m:r>
-                        <a:rPr lang="zh-CN" altLang="en-US" sz="2000" b="0" i="0" kern="0" smtClean="0">
+                        <a:rPr lang="zh-CN" altLang="en-US" sz="2000" b="1" i="0" kern="0" smtClean="0">
                           <a:solidFill>
                             <a:srgbClr val="000000"/>
                           </a:solidFill>
@@ -13635,7 +14582,7 @@
                     </m:oMath>
                   </m:oMathPara>
                 </a14:m>
-                <a:endParaRPr lang="en-US" altLang="zh-CN" sz="2000" b="0" kern="0" dirty="0">
+                <a:endParaRPr lang="en-US" altLang="zh-CN" sz="2000" b="1" kern="0" dirty="0">
                   <a:solidFill>
                     <a:srgbClr val="000000"/>
                   </a:solidFill>
@@ -13813,7 +14760,7 @@
                     </m:oMathParaPr>
                     <m:oMath xmlns:m="http://schemas.openxmlformats.org/officeDocument/2006/math">
                       <m:r>
-                        <a:rPr lang="en-US" altLang="zh-CN" sz="2000" b="0" i="0" kern="0" smtClean="0">
+                        <a:rPr lang="en-US" altLang="zh-CN" sz="2000" b="1" i="0" kern="0" smtClean="0">
                           <a:solidFill>
                             <a:srgbClr val="000000"/>
                           </a:solidFill>
@@ -13823,20 +14770,17 @@
                         <m:t>∆</m:t>
                       </m:r>
                       <m:r>
-                        <m:rPr>
-                          <m:sty m:val="p"/>
-                        </m:rPr>
-                        <a:rPr lang="en-US" altLang="zh-CN" sz="2000" b="0" i="0" kern="0" smtClean="0">
+                        <a:rPr lang="en-US" altLang="zh-CN" sz="2000" b="1" i="0" kern="0" smtClean="0">
                           <a:solidFill>
                             <a:srgbClr val="000000"/>
                           </a:solidFill>
                           <a:latin typeface="Cambria Math" panose="02040503050406030204" pitchFamily="18" charset="0"/>
                           <a:ea typeface="Cambria Math" panose="02040503050406030204" pitchFamily="18" charset="0"/>
                         </a:rPr>
-                        <m:t>R</m:t>
+                        <m:t>𝐑</m:t>
                       </m:r>
                       <m:r>
-                        <a:rPr lang="en-US" altLang="zh-CN" sz="2000" b="0" i="0" kern="0" smtClean="0">
+                        <a:rPr lang="en-US" altLang="zh-CN" sz="2000" b="1" i="0" kern="0" smtClean="0">
                           <a:solidFill>
                             <a:srgbClr val="000000"/>
                           </a:solidFill>
@@ -13848,7 +14792,7 @@
                       <m:sSub>
                         <m:sSubPr>
                           <m:ctrlPr>
-                            <a:rPr lang="en-US" altLang="zh-CN" sz="2000" i="1" kern="0" dirty="0">
+                            <a:rPr lang="en-US" altLang="zh-CN" sz="2000" b="1" i="1" kern="0" dirty="0">
                               <a:solidFill>
                                 <a:srgbClr val="000000"/>
                               </a:solidFill>
@@ -13860,7 +14804,7 @@
                           <m:sSub>
                             <m:sSubPr>
                               <m:ctrlPr>
-                                <a:rPr lang="en-US" altLang="zh-CN" sz="2000" i="1" kern="0" dirty="0">
+                                <a:rPr lang="en-US" altLang="zh-CN" sz="2000" b="1" i="1" kern="0" dirty="0">
                                   <a:solidFill>
                                     <a:srgbClr val="000000"/>
                                   </a:solidFill>
@@ -13870,35 +14814,29 @@
                             </m:sSubPr>
                             <m:e>
                               <m:r>
-                                <m:rPr>
-                                  <m:sty m:val="p"/>
-                                </m:rPr>
-                                <a:rPr lang="en-US" altLang="zh-CN" sz="2000" i="0" kern="0" dirty="0">
+                                <a:rPr lang="en-US" altLang="zh-CN" sz="2000" b="1" i="0" kern="0" dirty="0">
                                   <a:solidFill>
                                     <a:srgbClr val="000000"/>
                                   </a:solidFill>
                                   <a:latin typeface="Cambria Math" panose="02040503050406030204" pitchFamily="18" charset="0"/>
                                 </a:rPr>
-                                <m:t>G</m:t>
+                                <m:t>𝐆</m:t>
                               </m:r>
                             </m:e>
                             <m:sub>
                               <m:r>
-                                <m:rPr>
-                                  <m:sty m:val="p"/>
-                                </m:rPr>
-                                <a:rPr lang="en-US" altLang="zh-CN" sz="2000" b="0" i="0" kern="0" dirty="0" smtClean="0">
+                                <a:rPr lang="en-US" altLang="zh-CN" sz="2000" b="1" i="0" kern="0" dirty="0" smtClean="0">
                                   <a:solidFill>
                                     <a:srgbClr val="000000"/>
                                   </a:solidFill>
                                   <a:latin typeface="Cambria Math" panose="02040503050406030204" pitchFamily="18" charset="0"/>
                                 </a:rPr>
-                                <m:t>retracker</m:t>
+                                <m:t>𝐫𝐞𝐭𝐫𝐚𝐜𝐤𝐞𝐫</m:t>
                               </m:r>
                             </m:sub>
                           </m:sSub>
                           <m:r>
-                            <a:rPr lang="en-US" altLang="zh-CN" sz="2000" b="0" i="0" kern="0" dirty="0" smtClean="0">
+                            <a:rPr lang="en-US" altLang="zh-CN" sz="2000" b="1" i="0" kern="0" dirty="0" smtClean="0">
                               <a:solidFill>
                                 <a:srgbClr val="000000"/>
                               </a:solidFill>
@@ -13907,35 +14845,29 @@
                             <m:t>−</m:t>
                           </m:r>
                           <m:r>
-                            <m:rPr>
-                              <m:sty m:val="p"/>
-                            </m:rPr>
-                            <a:rPr lang="en-US" altLang="zh-CN" sz="2000" i="0" kern="0" dirty="0">
+                            <a:rPr lang="en-US" altLang="zh-CN" sz="2000" b="1" i="0" kern="0" dirty="0">
                               <a:solidFill>
                                 <a:srgbClr val="000000"/>
                               </a:solidFill>
                               <a:latin typeface="Cambria Math" panose="02040503050406030204" pitchFamily="18" charset="0"/>
                             </a:rPr>
-                            <m:t>G</m:t>
+                            <m:t>𝐆</m:t>
                           </m:r>
                         </m:e>
                         <m:sub>
                           <m:r>
-                            <m:rPr>
-                              <m:sty m:val="p"/>
-                            </m:rPr>
-                            <a:rPr lang="en-US" altLang="zh-CN" sz="2000" i="0" kern="0" dirty="0">
+                            <a:rPr lang="en-US" altLang="zh-CN" sz="2000" b="1" i="0" kern="0" dirty="0">
                               <a:solidFill>
                                 <a:srgbClr val="000000"/>
                               </a:solidFill>
                               <a:latin typeface="Cambria Math" panose="02040503050406030204" pitchFamily="18" charset="0"/>
                             </a:rPr>
-                            <m:t>nomial</m:t>
+                            <m:t>𝐧𝐨𝐦𝐢𝐚𝐥</m:t>
                           </m:r>
                         </m:sub>
                       </m:sSub>
                       <m:r>
-                        <a:rPr lang="en-US" altLang="zh-CN" sz="2000" b="0" i="0" kern="0" smtClean="0">
+                        <a:rPr lang="en-US" altLang="zh-CN" sz="2000" b="1" i="0" kern="0" smtClean="0">
                           <a:solidFill>
                             <a:srgbClr val="000000"/>
                           </a:solidFill>
@@ -13945,7 +14877,7 @@
                         <m:t>)</m:t>
                       </m:r>
                       <m:r>
-                        <a:rPr lang="en-US" altLang="zh-CN" sz="2000" i="1" kern="0">
+                        <a:rPr lang="en-US" altLang="zh-CN" sz="2000" b="1" i="1" kern="0">
                           <a:solidFill>
                             <a:srgbClr val="000000"/>
                           </a:solidFill>
@@ -13955,17 +14887,17 @@
                         <m:t>∙</m:t>
                       </m:r>
                       <m:r>
-                        <a:rPr lang="en-US" altLang="zh-CN" sz="2000" b="0" i="1" kern="0" smtClean="0">
+                        <a:rPr lang="en-US" altLang="zh-CN" sz="2000" b="1" i="1" kern="0" smtClean="0">
                           <a:solidFill>
                             <a:srgbClr val="000000"/>
                           </a:solidFill>
                           <a:latin typeface="Cambria Math" panose="02040503050406030204" pitchFamily="18" charset="0"/>
                           <a:ea typeface="Cambria Math" panose="02040503050406030204" pitchFamily="18" charset="0"/>
                         </a:rPr>
-                        <m:t>𝑐</m:t>
+                        <m:t>𝒄</m:t>
                       </m:r>
                       <m:r>
-                        <a:rPr lang="en-US" altLang="zh-CN" sz="2000" i="1" kern="0">
+                        <a:rPr lang="en-US" altLang="zh-CN" sz="2000" b="1" i="1" kern="0">
                           <a:solidFill>
                             <a:srgbClr val="000000"/>
                           </a:solidFill>
@@ -13975,35 +14907,40 @@
                         <m:t>∙</m:t>
                       </m:r>
                       <m:r>
-                        <m:rPr>
-                          <m:sty m:val="p"/>
-                        </m:rPr>
-                        <a:rPr lang="en-US" altLang="zh-CN" sz="2000" kern="0">
+                        <a:rPr lang="en-US" altLang="zh-CN" sz="2000" b="1" i="1" kern="0">
                           <a:solidFill>
                             <a:srgbClr val="000000"/>
                           </a:solidFill>
                           <a:latin typeface="Cambria Math" panose="02040503050406030204" pitchFamily="18" charset="0"/>
                         </a:rPr>
-                        <m:t>t</m:t>
+                        <m:t>𝐭</m:t>
                       </m:r>
                       <m:r>
-                        <a:rPr lang="en-US" altLang="zh-CN" sz="2000" b="0" i="0" kern="0" smtClean="0">
+                        <a:rPr lang="en-US" altLang="zh-CN" sz="2000" b="1" i="0" kern="0" smtClean="0">
                           <a:solidFill>
                             <a:srgbClr val="000000"/>
                           </a:solidFill>
                           <a:latin typeface="Cambria Math" panose="02040503050406030204" pitchFamily="18" charset="0"/>
                         </a:rPr>
-                        <m:t>/2</m:t>
+                        <m:t>/</m:t>
+                      </m:r>
+                      <m:r>
+                        <a:rPr lang="en-US" altLang="zh-CN" sz="2000" b="1" i="0" kern="0" smtClean="0">
+                          <a:solidFill>
+                            <a:srgbClr val="000000"/>
+                          </a:solidFill>
+                          <a:latin typeface="Cambria Math" panose="02040503050406030204" pitchFamily="18" charset="0"/>
+                        </a:rPr>
+                        <m:t>𝟐</m:t>
                       </m:r>
                     </m:oMath>
                   </m:oMathPara>
                 </a14:m>
-                <a:endParaRPr lang="en-US" altLang="zh-CN" sz="2000" kern="0" dirty="0">
+                <a:endParaRPr lang="en-US" altLang="zh-CN" sz="2000" b="1" kern="0" dirty="0">
                   <a:solidFill>
                     <a:srgbClr val="000000"/>
                   </a:solidFill>
                   <a:latin typeface="+mn-ea"/>
-                  <a:ea typeface="+mn-ea"/>
                 </a:endParaRPr>
               </a:p>
               <a:p>
@@ -14015,7 +14952,97 @@
                     <a:spcPts val="1200"/>
                   </a:spcBef>
                 </a:pPr>
-                <a:endParaRPr lang="en-US" altLang="zh-CN" sz="2000" kern="0" dirty="0">
+                <a:r>
+                  <a:rPr lang="zh-CN" altLang="en-US" sz="1600" b="1" u="sng" kern="0" dirty="0">
+                    <a:solidFill>
+                      <a:srgbClr val="000000"/>
+                    </a:solidFill>
+                    <a:latin typeface="+mn-ea"/>
+                    <a:ea typeface="+mn-ea"/>
+                  </a:rPr>
+                  <a:t>备注：</a:t>
+                </a:r>
+                <a:r>
+                  <a:rPr lang="en-US" altLang="zh-CN" sz="1600" b="1" u="sng" kern="0" dirty="0">
+                    <a:solidFill>
+                      <a:srgbClr val="000000"/>
+                    </a:solidFill>
+                    <a:latin typeface="+mn-ea"/>
+                    <a:ea typeface="+mn-ea"/>
+                  </a:rPr>
+                  <a:t>Sentinel-3</a:t>
+                </a:r>
+                <a:r>
+                  <a:rPr lang="zh-CN" altLang="en-US" sz="1600" b="1" u="sng" kern="0" dirty="0">
+                    <a:solidFill>
+                      <a:srgbClr val="000000"/>
+                    </a:solidFill>
+                    <a:latin typeface="+mn-ea"/>
+                    <a:ea typeface="+mn-ea"/>
+                  </a:rPr>
+                  <a:t>默认跟踪点位为</a:t>
+                </a:r>
+                <a:r>
+                  <a:rPr lang="en-US" altLang="zh-CN" sz="1600" b="1" u="sng" kern="0" dirty="0">
+                    <a:solidFill>
+                      <a:srgbClr val="000000"/>
+                    </a:solidFill>
+                    <a:latin typeface="+mn-ea"/>
+                    <a:ea typeface="+mn-ea"/>
+                  </a:rPr>
+                  <a:t>43</a:t>
+                </a:r>
+                <a:r>
+                  <a:rPr lang="zh-CN" altLang="en-US" sz="1600" b="1" u="sng" kern="0" dirty="0">
+                    <a:solidFill>
+                      <a:srgbClr val="000000"/>
+                    </a:solidFill>
+                    <a:latin typeface="+mn-ea"/>
+                    <a:ea typeface="+mn-ea"/>
+                  </a:rPr>
+                  <a:t>，其相邻点位间时间差为</a:t>
+                </a:r>
+                <a:r>
+                  <a:rPr lang="en-US" altLang="zh-CN" sz="1600" b="1" u="sng" kern="0" dirty="0">
+                    <a:solidFill>
+                      <a:srgbClr val="000000"/>
+                    </a:solidFill>
+                    <a:latin typeface="+mn-ea"/>
+                    <a:ea typeface="+mn-ea"/>
+                  </a:rPr>
+                  <a:t>3.125</a:t>
+                </a:r>
+                <a:r>
+                  <a:rPr lang="zh-CN" altLang="en-US" sz="1600" b="1" u="sng" kern="0" dirty="0">
+                    <a:solidFill>
+                      <a:srgbClr val="000000"/>
+                    </a:solidFill>
+                    <a:latin typeface="+mn-ea"/>
+                    <a:ea typeface="+mn-ea"/>
+                  </a:rPr>
+                  <a:t> </a:t>
+                </a:r>
+                <a:r>
+                  <a:rPr lang="en-US" altLang="zh-CN" sz="1600" b="1" u="sng" kern="0" dirty="0">
+                    <a:solidFill>
+                      <a:srgbClr val="000000"/>
+                    </a:solidFill>
+                    <a:latin typeface="+mn-ea"/>
+                    <a:ea typeface="+mn-ea"/>
+                  </a:rPr>
+                  <a:t>ns</a:t>
+                </a:r>
+                <a:r>
+                  <a:rPr lang="zh-CN" altLang="en-US" sz="1600" b="1" u="sng" kern="0" dirty="0">
+                    <a:solidFill>
+                      <a:srgbClr val="000000"/>
+                    </a:solidFill>
+                    <a:latin typeface="+mn-ea"/>
+                    <a:ea typeface="+mn-ea"/>
+                  </a:rPr>
+                  <a:t>。</a:t>
+                </a:r>
+                <a:endParaRPr lang="en-US" altLang="zh-CN" sz="1600" b="1" u="sng" kern="0" dirty="0">
                   <a:solidFill>
                     <a:srgbClr val="000000"/>
                   </a:solidFill>
@@ -14043,8 +15070,8 @@
             </p:nvSpPr>
             <p:spPr>
               <a:xfrm>
-                <a:off x="516194" y="1745741"/>
-                <a:ext cx="8045915" cy="4616072"/>
+                <a:off x="393365" y="1652224"/>
+                <a:ext cx="8432970" cy="4616072"/>
               </a:xfrm>
               <a:prstGeom prst="rect">
                 <a:avLst/>
@@ -14052,7 +15079,7 @@
               <a:blipFill>
                 <a:blip r:embed="rId3"/>
                 <a:stretch>
-                  <a:fillRect l="-787" r="-3937"/>
+                  <a:fillRect l="-902" r="-602"/>
                 </a:stretch>
               </a:blipFill>
             </p:spPr>
@@ -14412,13 +15439,12 @@
               </p:cNvPr>
               <p:cNvCxnSpPr>
                 <a:cxnSpLocks/>
-                <a:stCxn id="19" idx="2"/>
               </p:cNvCxnSpPr>
               <p:nvPr/>
             </p:nvCxnSpPr>
             <p:spPr bwMode="auto">
               <a:xfrm flipH="1">
-                <a:off x="4275573" y="3852525"/>
+                <a:off x="4257643" y="3852525"/>
                 <a:ext cx="1" cy="1945161"/>
               </a:xfrm>
               <a:prstGeom prst="straightConnector1">
@@ -14828,7 +15854,7 @@
           </p:nvCxnSpPr>
           <p:spPr bwMode="auto">
             <a:xfrm>
-              <a:off x="3683541" y="4262164"/>
+              <a:off x="3674576" y="4262164"/>
               <a:ext cx="630942" cy="0"/>
             </a:xfrm>
             <a:prstGeom prst="straightConnector1">
@@ -14934,7 +15960,7 @@
               </a:lnSpc>
             </a:pPr>
             <a:r>
-              <a:rPr lang="en-CN" sz="2000">
+              <a:rPr lang="en-CN" sz="2000" dirty="0">
                 <a:solidFill>
                   <a:schemeClr val="bg2"/>
                 </a:solidFill>
@@ -14944,7 +15970,7 @@
               <a:t>Sentinel-3</a:t>
             </a:r>
             <a:r>
-              <a:rPr lang="zh-CN" altLang="en-US" sz="2000">
+              <a:rPr lang="zh-CN" altLang="en-US" sz="2000" dirty="0">
                 <a:solidFill>
                   <a:schemeClr val="bg2"/>
                 </a:solidFill>
@@ -14954,7 +15980,7 @@
               <a:t> </a:t>
             </a:r>
             <a:r>
-              <a:rPr lang="en-US" altLang="zh-CN" sz="2000">
+              <a:rPr lang="en-US" altLang="zh-CN" sz="2000" dirty="0">
                 <a:solidFill>
                   <a:schemeClr val="bg2"/>
                 </a:solidFill>
@@ -14964,7 +15990,7 @@
               <a:t>SAR</a:t>
             </a:r>
             <a:r>
-              <a:rPr lang="zh-CN" altLang="en-US" sz="2000">
+              <a:rPr lang="zh-CN" altLang="en-US" sz="2000" dirty="0">
                 <a:solidFill>
                   <a:schemeClr val="bg2"/>
                 </a:solidFill>
@@ -14974,7 +16000,7 @@
               <a:t>模式高度计波形的默认距离门为</a:t>
             </a:r>
             <a:r>
-              <a:rPr lang="en-US" altLang="zh-CN" sz="2000">
+              <a:rPr lang="en-US" altLang="zh-CN" sz="2000" dirty="0">
                 <a:solidFill>
                   <a:schemeClr val="bg2"/>
                 </a:solidFill>
@@ -14984,7 +16010,7 @@
               <a:t>43</a:t>
             </a:r>
             <a:r>
-              <a:rPr lang="zh-CN" altLang="en-US" sz="2000">
+              <a:rPr lang="zh-CN" altLang="en-US" sz="2000" dirty="0">
                 <a:solidFill>
                   <a:schemeClr val="bg2"/>
                 </a:solidFill>
@@ -14994,7 +16020,7 @@
               <a:t>。相邻距离门时间间隔为</a:t>
             </a:r>
             <a:r>
-              <a:rPr lang="en-US" altLang="zh-CN" sz="2000">
+              <a:rPr lang="en-US" altLang="zh-CN" sz="2000" dirty="0">
                 <a:solidFill>
                   <a:schemeClr val="bg2"/>
                 </a:solidFill>
@@ -15003,7 +16029,7 @@
               </a:rPr>
               <a:t>3.125 ns</a:t>
             </a:r>
-            <a:endParaRPr lang="en-CN" sz="2000">
+            <a:endParaRPr lang="en-CN" sz="2000" dirty="0">
               <a:solidFill>
                 <a:schemeClr val="bg2"/>
               </a:solidFill>
@@ -15137,14 +16163,14 @@
               </a:lnSpc>
             </a:pPr>
             <a:r>
-              <a:rPr lang="zh-CN" altLang="en-US" sz="2800" b="1">
+              <a:rPr lang="zh-CN" altLang="en-US" sz="2800" b="1" dirty="0">
                 <a:solidFill>
                   <a:srgbClr val="333333"/>
                 </a:solidFill>
                 <a:latin typeface="+mn-ea"/>
                 <a:ea typeface="+mn-ea"/>
               </a:rPr>
-              <a:t>课后作业</a:t>
+              <a:t>课后练习及章节作业</a:t>
             </a:r>
             <a:endParaRPr lang="en-US" altLang="zh-CN" sz="2800" b="1" dirty="0">
               <a:solidFill>
@@ -15171,7 +16197,7 @@
         <p:spPr>
           <a:xfrm>
             <a:off x="502919" y="1763498"/>
-            <a:ext cx="8126731" cy="2961773"/>
+            <a:ext cx="8126731" cy="3423438"/>
           </a:xfrm>
           <a:prstGeom prst="rect">
             <a:avLst/>
@@ -15190,7 +16216,51 @@
               </a:lnSpc>
             </a:pPr>
             <a:r>
-              <a:rPr lang="zh-CN" altLang="en-US" sz="2000">
+              <a:rPr lang="en-US" altLang="zh-CN" sz="2000" dirty="0">
+                <a:solidFill>
+                  <a:srgbClr val="333333"/>
+                </a:solidFill>
+                <a:latin typeface="+mn-ea"/>
+                <a:ea typeface="+mn-ea"/>
+              </a:rPr>
+              <a:t>1. </a:t>
+            </a:r>
+            <a:r>
+              <a:rPr lang="zh-CN" altLang="en-US" sz="2000" dirty="0">
+                <a:solidFill>
+                  <a:srgbClr val="333333"/>
+                </a:solidFill>
+                <a:latin typeface="+mn-ea"/>
+                <a:ea typeface="+mn-ea"/>
+              </a:rPr>
+              <a:t>练习课堂程序；</a:t>
+            </a:r>
+            <a:endParaRPr lang="en-US" altLang="zh-CN" sz="2000" dirty="0">
+              <a:solidFill>
+                <a:srgbClr val="333333"/>
+              </a:solidFill>
+              <a:latin typeface="+mn-ea"/>
+              <a:ea typeface="+mn-ea"/>
+            </a:endParaRPr>
+          </a:p>
+          <a:p>
+            <a:pPr algn="just">
+              <a:lnSpc>
+                <a:spcPct val="150000"/>
+              </a:lnSpc>
+            </a:pPr>
+            <a:r>
+              <a:rPr lang="en-US" altLang="zh-CN" sz="2000" dirty="0">
+                <a:solidFill>
+                  <a:srgbClr val="333333"/>
+                </a:solidFill>
+                <a:latin typeface="+mn-ea"/>
+                <a:ea typeface="+mn-ea"/>
+              </a:rPr>
+              <a:t>2. </a:t>
+            </a:r>
+            <a:r>
+              <a:rPr lang="zh-CN" altLang="en-US" sz="2000" dirty="0">
                 <a:solidFill>
                   <a:srgbClr val="333333"/>
                 </a:solidFill>
@@ -15200,26 +16270,46 @@
               <a:t>利用</a:t>
             </a:r>
             <a:r>
-              <a:rPr lang="en-US" altLang="zh-CN" sz="2000">
+              <a:rPr lang="en-US" altLang="zh-CN" sz="2000" dirty="0">
                 <a:solidFill>
                   <a:srgbClr val="333333"/>
                 </a:solidFill>
                 <a:latin typeface="+mn-ea"/>
                 <a:ea typeface="+mn-ea"/>
               </a:rPr>
-              <a:t>sentinel-3</a:t>
-            </a:r>
-            <a:r>
-              <a:rPr lang="zh-CN" altLang="en-US" sz="2000">
+              <a:t>Sentinel-3</a:t>
+            </a:r>
+            <a:r>
+              <a:rPr lang="zh-CN" altLang="en-US" sz="2000" dirty="0">
                 <a:solidFill>
                   <a:srgbClr val="333333"/>
                 </a:solidFill>
                 <a:latin typeface="+mn-ea"/>
                 <a:ea typeface="+mn-ea"/>
               </a:rPr>
-              <a:t>高度计数据对湖泊（任选）水位信息进行动态监测。</a:t>
-            </a:r>
-            <a:endParaRPr lang="en-US" altLang="zh-CN" sz="2000">
+              <a:t>高度计数据对中国湖泊（任选）水位信息进行年度</a:t>
+            </a:r>
+            <a:r>
+              <a:rPr lang="en-US" altLang="zh-CN" sz="2000" dirty="0">
+                <a:solidFill>
+                  <a:srgbClr val="333333"/>
+                </a:solidFill>
+                <a:latin typeface="+mn-ea"/>
+                <a:ea typeface="+mn-ea"/>
+              </a:rPr>
+              <a:t>/</a:t>
+            </a:r>
+            <a:r>
+              <a:rPr lang="zh-CN" altLang="en-US" sz="2000" dirty="0">
+                <a:solidFill>
+                  <a:srgbClr val="333333"/>
+                </a:solidFill>
+                <a:latin typeface="+mn-ea"/>
+                <a:ea typeface="+mn-ea"/>
+              </a:rPr>
+              <a:t>季节性变化监测。</a:t>
+            </a:r>
+            <a:endParaRPr lang="en-US" altLang="zh-CN" sz="2000" dirty="0">
               <a:solidFill>
                 <a:srgbClr val="333333"/>
               </a:solidFill>
@@ -15233,7 +16323,7 @@
                 <a:spcPct val="150000"/>
               </a:lnSpc>
             </a:pPr>
-            <a:endParaRPr lang="en-US" altLang="zh-CN" sz="2000">
+            <a:endParaRPr lang="en-US" altLang="zh-CN" sz="2000" dirty="0">
               <a:solidFill>
                 <a:srgbClr val="333333"/>
               </a:solidFill>
@@ -15247,7 +16337,7 @@
                 <a:spcPct val="150000"/>
               </a:lnSpc>
             </a:pPr>
-            <a:endParaRPr lang="en-US" altLang="zh-CN" sz="2000">
+            <a:endParaRPr lang="en-US" altLang="zh-CN" sz="2000" dirty="0">
               <a:solidFill>
                 <a:srgbClr val="333333"/>
               </a:solidFill>
@@ -15261,21 +16351,7 @@
                 <a:spcPct val="150000"/>
               </a:lnSpc>
             </a:pPr>
-            <a:endParaRPr lang="en-US" altLang="zh-CN" sz="2000">
-              <a:solidFill>
-                <a:srgbClr val="333333"/>
-              </a:solidFill>
-              <a:latin typeface="+mn-ea"/>
-              <a:ea typeface="+mn-ea"/>
-            </a:endParaRPr>
-          </a:p>
-          <a:p>
-            <a:pPr algn="just">
-              <a:lnSpc>
-                <a:spcPct val="150000"/>
-              </a:lnSpc>
-            </a:pPr>
-            <a:endParaRPr lang="en-US" altLang="zh-CN" sz="2000">
+            <a:endParaRPr lang="en-US" altLang="zh-CN" sz="2000" dirty="0">
               <a:solidFill>
                 <a:srgbClr val="333333"/>
               </a:solidFill>
